--- a/statistics_05_hypothesis_testing_p_val.pptx
+++ b/statistics_05_hypothesis_testing_p_val.pptx
@@ -14558,8 +14558,8 @@
         </p:nvSpPr>
         <p:spPr>
           <a:xfrm>
-            <a:off x="0" y="523220"/>
-            <a:ext cx="5791201" cy="4185761"/>
+            <a:off x="177421" y="850765"/>
+            <a:ext cx="5791201" cy="5262979"/>
           </a:xfrm>
           <a:prstGeom prst="rect">
             <a:avLst/>
@@ -14598,7 +14598,7 @@
           <a:p>
             <a:r>
               <a:rPr lang="en-US" dirty="0"/>
-              <a:t>Step1: Formulate hypotheses – usually at least two - the main one (usually called "Null Hypothesis") and an alternative. </a:t>
+              <a:t>Four steps:</a:t>
             </a:r>
           </a:p>
           <a:p>
@@ -14607,7 +14607,30 @@
           <a:p>
             <a:r>
               <a:rPr lang="en-US" dirty="0"/>
-              <a:t>Step2: Decide which level of significance we need. It is usually denoted as </a:t>
+              <a:t>Step1: </a:t>
+            </a:r>
+            <a:br>
+              <a:rPr lang="en-US" dirty="0"/>
+            </a:br>
+            <a:r>
+              <a:rPr lang="en-US" dirty="0"/>
+              <a:t>Formulate hypotheses – usually at least two - the main one (usually called "Null Hypothesis") and an alternative. </a:t>
+            </a:r>
+          </a:p>
+          <a:p>
+            <a:endParaRPr lang="en-US" dirty="0"/>
+          </a:p>
+          <a:p>
+            <a:r>
+              <a:rPr lang="en-US" dirty="0"/>
+              <a:t>Step2: </a:t>
+            </a:r>
+            <a:br>
+              <a:rPr lang="en-US" dirty="0"/>
+            </a:br>
+            <a:r>
+              <a:rPr lang="en-US" dirty="0"/>
+              <a:t>Decide which level of significance we need. It is usually denoted as </a:t>
             </a:r>
             <a:r>
               <a:rPr lang="en-US" b="1" dirty="0">
@@ -14644,7 +14667,14 @@
           <a:p>
             <a:r>
               <a:rPr lang="en-US" dirty="0"/>
-              <a:t>Step3: Select the test type and compute the test statistic. There are many different types of tests in statistics like t-</a:t>
+              <a:t>Step3: </a:t>
+            </a:r>
+            <a:br>
+              <a:rPr lang="en-US" dirty="0"/>
+            </a:br>
+            <a:r>
+              <a:rPr lang="en-US" dirty="0"/>
+              <a:t>Select the test type and compute the test statistic. There are many different types of tests in statistics like t-</a:t>
             </a:r>
             <a:r>
               <a:rPr lang="en-US" dirty="0" err="1"/>
@@ -14677,8 +14707,152 @@
           <a:p>
             <a:r>
               <a:rPr lang="en-US" dirty="0"/>
-              <a:t>Step 4: Make a decision.</a:t>
-            </a:r>
+              <a:t>Step 4: </a:t>
+            </a:r>
+            <a:br>
+              <a:rPr lang="en-US" dirty="0"/>
+            </a:br>
+            <a:r>
+              <a:rPr lang="en-US" dirty="0"/>
+              <a:t>Make a decision.</a:t>
+            </a:r>
+          </a:p>
+        </p:txBody>
+      </p:sp>
+      <p:pic>
+        <p:nvPicPr>
+          <p:cNvPr id="2" name="Picture 1">
+            <a:extLst>
+              <a:ext uri="{FF2B5EF4-FFF2-40B4-BE49-F238E27FC236}">
+                <a16:creationId xmlns:a16="http://schemas.microsoft.com/office/drawing/2014/main" id="{B0831C98-2BFB-4940-A61B-D8BB77BC209C}"/>
+              </a:ext>
+            </a:extLst>
+          </p:cNvPr>
+          <p:cNvPicPr>
+            <a:picLocks noChangeAspect="1"/>
+          </p:cNvPicPr>
+          <p:nvPr/>
+        </p:nvPicPr>
+        <p:blipFill rotWithShape="1">
+          <a:blip r:embed="rId3" cstate="email">
+            <a:extLst>
+              <a:ext uri="{28A0092B-C50C-407E-A947-70E740481C1C}">
+                <a14:useLocalDpi xmlns:a14="http://schemas.microsoft.com/office/drawing/2010/main"/>
+              </a:ext>
+            </a:extLst>
+          </a:blip>
+          <a:srcRect/>
+          <a:stretch/>
+        </p:blipFill>
+        <p:spPr>
+          <a:xfrm>
+            <a:off x="6591869" y="1064526"/>
+            <a:ext cx="5199797" cy="3425588"/>
+          </a:xfrm>
+          <a:prstGeom prst="rect">
+            <a:avLst/>
+          </a:prstGeom>
+        </p:spPr>
+      </p:pic>
+      <p:sp>
+        <p:nvSpPr>
+          <p:cNvPr id="6" name="Google Shape;108;p15">
+            <a:extLst>
+              <a:ext uri="{FF2B5EF4-FFF2-40B4-BE49-F238E27FC236}">
+                <a16:creationId xmlns:a16="http://schemas.microsoft.com/office/drawing/2014/main" id="{76B7BDFB-13D9-7047-B830-394DFFB32328}"/>
+              </a:ext>
+            </a:extLst>
+          </p:cNvPr>
+          <p:cNvSpPr txBox="1"/>
+          <p:nvPr/>
+        </p:nvSpPr>
+        <p:spPr>
+          <a:xfrm>
+            <a:off x="7008565" y="4692162"/>
+            <a:ext cx="4582062" cy="742415"/>
+          </a:xfrm>
+          <a:prstGeom prst="rect">
+            <a:avLst/>
+          </a:prstGeom>
+          <a:noFill/>
+          <a:ln>
+            <a:noFill/>
+          </a:ln>
+        </p:spPr>
+        <p:txBody>
+          <a:bodyPr spcFirstLastPara="1" wrap="square" lIns="91425" tIns="91425" rIns="91425" bIns="91425" anchor="t" anchorCtr="0">
+            <a:noAutofit/>
+          </a:bodyPr>
+          <a:lstStyle/>
+          <a:p>
+            <a:pPr marL="0" marR="0" lvl="0" indent="0" algn="l" rtl="0">
+              <a:lnSpc>
+                <a:spcPct val="100000"/>
+              </a:lnSpc>
+              <a:spcBef>
+                <a:spcPts val="0"/>
+              </a:spcBef>
+              <a:spcAft>
+                <a:spcPts val="0"/>
+              </a:spcAft>
+              <a:buNone/>
+            </a:pPr>
+            <a:r>
+              <a:rPr lang="en-US" sz="1600" dirty="0">
+                <a:solidFill>
+                  <a:schemeClr val="dk1"/>
+                </a:solidFill>
+                <a:latin typeface="Calibri"/>
+                <a:ea typeface="Calibri"/>
+                <a:cs typeface="Calibri"/>
+                <a:sym typeface="Calibri"/>
+              </a:rPr>
+              <a:t>Type I error - false rejection of the null hypothesis</a:t>
+            </a:r>
+            <a:endParaRPr sz="1600" dirty="0">
+              <a:solidFill>
+                <a:schemeClr val="dk1"/>
+              </a:solidFill>
+              <a:latin typeface="Calibri"/>
+              <a:ea typeface="Calibri"/>
+              <a:cs typeface="Calibri"/>
+              <a:sym typeface="Calibri"/>
+            </a:endParaRPr>
+          </a:p>
+          <a:p>
+            <a:pPr marL="0" marR="0" lvl="0" indent="0" algn="l" rtl="0">
+              <a:lnSpc>
+                <a:spcPct val="100000"/>
+              </a:lnSpc>
+              <a:spcBef>
+                <a:spcPts val="0"/>
+              </a:spcBef>
+              <a:spcAft>
+                <a:spcPts val="0"/>
+              </a:spcAft>
+              <a:buNone/>
+            </a:pPr>
+            <a:r>
+              <a:rPr lang="en-US" sz="1600" dirty="0">
+                <a:solidFill>
+                  <a:schemeClr val="dk1"/>
+                </a:solidFill>
+                <a:latin typeface="Calibri"/>
+                <a:ea typeface="Calibri"/>
+                <a:cs typeface="Calibri"/>
+                <a:sym typeface="Calibri"/>
+              </a:rPr>
+              <a:t>Type II error - false acceptance of the null hypothesis</a:t>
+            </a:r>
+            <a:endParaRPr sz="1600" dirty="0">
+              <a:solidFill>
+                <a:schemeClr val="dk1"/>
+              </a:solidFill>
+              <a:latin typeface="Calibri"/>
+              <a:ea typeface="Calibri"/>
+              <a:cs typeface="Calibri"/>
+              <a:sym typeface="Calibri"/>
+            </a:endParaRPr>
           </a:p>
         </p:txBody>
       </p:sp>
@@ -18478,10 +18652,10 @@
                 <a:cs typeface="Calibri"/>
                 <a:sym typeface="Calibri"/>
               </a:rPr>
-              <a:t>????    compare with </a:t>
-            </a:r>
-            <a:r>
-              <a:rPr lang="en-US" b="1" i="1" dirty="0">
+              <a:t>????    t-test is not applicable for this problem    </a:t>
+            </a:r>
+            <a:r>
+              <a:rPr lang="en-US" b="1" dirty="0">
                 <a:solidFill>
                   <a:srgbClr val="FF0000"/>
                 </a:solidFill>
@@ -18493,37 +18667,7 @@
                 <a:cs typeface="Times New Roman"/>
                 <a:sym typeface="Times New Roman"/>
               </a:rPr>
-              <a:t>χ</a:t>
-            </a:r>
-            <a:r>
-              <a:rPr lang="en-US" b="1" baseline="30000" dirty="0">
-                <a:solidFill>
-                  <a:srgbClr val="FF0000"/>
-                </a:solidFill>
-                <a:highlight>
-                  <a:srgbClr val="FFFFFF"/>
-                </a:highlight>
-                <a:latin typeface="Times New Roman"/>
-                <a:ea typeface="Times New Roman"/>
-                <a:cs typeface="Times New Roman"/>
-                <a:sym typeface="Times New Roman"/>
-              </a:rPr>
-              <a:t>2  </a:t>
-            </a:r>
-            <a:r>
-              <a:rPr lang="en-US" b="1" dirty="0">
-                <a:solidFill>
-                  <a:srgbClr val="FF0000"/>
-                </a:solidFill>
-                <a:highlight>
-                  <a:srgbClr val="FFFFFF"/>
-                </a:highlight>
-                <a:latin typeface="Times New Roman"/>
-                <a:ea typeface="Times New Roman"/>
-                <a:cs typeface="Times New Roman"/>
-                <a:sym typeface="Times New Roman"/>
-              </a:rPr>
-              <a:t>and with binomial approaches ???</a:t>
+              <a:t>???</a:t>
             </a:r>
             <a:endParaRPr lang="en-US" sz="1300" b="1" dirty="0">
               <a:solidFill>

--- a/statistics_05_hypothesis_testing_p_val.pptx
+++ b/statistics_05_hypothesis_testing_p_val.pptx
@@ -5,16 +5,17 @@
     <p:sldMasterId id="2147483659" r:id="rId1"/>
   </p:sldMasterIdLst>
   <p:notesMasterIdLst>
-    <p:notesMasterId r:id="rId9"/>
+    <p:notesMasterId r:id="rId10"/>
   </p:notesMasterIdLst>
   <p:sldIdLst>
     <p:sldId id="316" r:id="rId2"/>
     <p:sldId id="258" r:id="rId3"/>
     <p:sldId id="259" r:id="rId4"/>
-    <p:sldId id="314" r:id="rId5"/>
-    <p:sldId id="315" r:id="rId6"/>
-    <p:sldId id="313" r:id="rId7"/>
-    <p:sldId id="294" r:id="rId8"/>
+    <p:sldId id="317" r:id="rId5"/>
+    <p:sldId id="314" r:id="rId6"/>
+    <p:sldId id="315" r:id="rId7"/>
+    <p:sldId id="313" r:id="rId8"/>
+    <p:sldId id="294" r:id="rId9"/>
   </p:sldIdLst>
   <p:sldSz cx="12192000" cy="6858000"/>
   <p:notesSz cx="6858000" cy="9144000"/>
@@ -17275,7 +17276,7 @@
         <p:spPr>
           <a:xfrm>
             <a:off x="6685722" y="5516224"/>
-            <a:ext cx="5082208" cy="738664"/>
+            <a:ext cx="5082208" cy="954107"/>
           </a:xfrm>
           <a:prstGeom prst="rect">
             <a:avLst/>
@@ -17294,6 +17295,19 @@
                 <a:cs typeface="Calibri"/>
               </a:rPr>
               <a:t>For example, if we want confidence 95% (Z=1.9599), then </a:t>
+            </a:r>
+          </a:p>
+          <a:p>
+            <a:pPr marL="285750" indent="-285750">
+              <a:buFont typeface="Arial" panose="020B0604020202020204" pitchFamily="34" charset="0"/>
+              <a:buChar char="•"/>
+            </a:pPr>
+            <a:r>
+              <a:rPr lang="en-US" dirty="0">
+                <a:latin typeface="Calibri"/>
+                <a:cs typeface="Calibri"/>
+              </a:rPr>
+              <a:t>for E=0.5   we need n = (1.9599)**2 / (4*0.5**2)   = 4 flips  </a:t>
             </a:r>
           </a:p>
           <a:p>
@@ -17386,6 +17400,1124 @@
       </p:grpSpPr>
       <p:sp>
         <p:nvSpPr>
+          <p:cNvPr id="4" name="TextBox 3">
+            <a:extLst>
+              <a:ext uri="{FF2B5EF4-FFF2-40B4-BE49-F238E27FC236}">
+                <a16:creationId xmlns:a16="http://schemas.microsoft.com/office/drawing/2014/main" id="{C88C8BE5-9D37-DF42-81EF-135B3A27BAE7}"/>
+              </a:ext>
+            </a:extLst>
+          </p:cNvPr>
+          <p:cNvSpPr txBox="1"/>
+          <p:nvPr/>
+        </p:nvSpPr>
+        <p:spPr>
+          <a:xfrm>
+            <a:off x="6076666" y="1704583"/>
+            <a:ext cx="5827594" cy="5047536"/>
+          </a:xfrm>
+          <a:prstGeom prst="rect">
+            <a:avLst/>
+          </a:prstGeom>
+          <a:noFill/>
+        </p:spPr>
+        <p:txBody>
+          <a:bodyPr wrap="square" rtlCol="0">
+            <a:spAutoFit/>
+          </a:bodyPr>
+          <a:lstStyle/>
+          <a:p>
+            <a:r>
+              <a:rPr lang="en-US" b="1" dirty="0">
+                <a:solidFill>
+                  <a:srgbClr val="0070C0"/>
+                </a:solidFill>
+                <a:latin typeface="Consolas" panose="020B0609020204030204" pitchFamily="49" charset="0"/>
+                <a:cs typeface="Consolas" panose="020B0609020204030204" pitchFamily="49" charset="0"/>
+              </a:rPr>
+              <a:t># </a:t>
+            </a:r>
+            <a:r>
+              <a:rPr lang="en-US" b="1" dirty="0" err="1">
+                <a:solidFill>
+                  <a:srgbClr val="FF0000"/>
+                </a:solidFill>
+                <a:latin typeface="Consolas" panose="020B0609020204030204" pitchFamily="49" charset="0"/>
+                <a:cs typeface="Consolas" panose="020B0609020204030204" pitchFamily="49" charset="0"/>
+              </a:rPr>
+              <a:t>scipy.stats.binom_test</a:t>
+            </a:r>
+            <a:r>
+              <a:rPr lang="en-US" b="1" dirty="0">
+                <a:solidFill>
+                  <a:srgbClr val="FF0000"/>
+                </a:solidFill>
+                <a:latin typeface="Consolas" panose="020B0609020204030204" pitchFamily="49" charset="0"/>
+                <a:cs typeface="Consolas" panose="020B0609020204030204" pitchFamily="49" charset="0"/>
+              </a:rPr>
+              <a:t>()</a:t>
+            </a:r>
+          </a:p>
+          <a:p>
+            <a:r>
+              <a:rPr lang="en-US" b="1" dirty="0">
+                <a:solidFill>
+                  <a:srgbClr val="00B050"/>
+                </a:solidFill>
+                <a:latin typeface="Consolas" panose="020B0609020204030204" pitchFamily="49" charset="0"/>
+                <a:cs typeface="Consolas" panose="020B0609020204030204" pitchFamily="49" charset="0"/>
+              </a:rPr>
+              <a:t># Perform a test that the probability of success is p.</a:t>
+            </a:r>
+          </a:p>
+          <a:p>
+            <a:r>
+              <a:rPr lang="en-US" b="1" dirty="0">
+                <a:solidFill>
+                  <a:srgbClr val="00B050"/>
+                </a:solidFill>
+                <a:latin typeface="Consolas" panose="020B0609020204030204" pitchFamily="49" charset="0"/>
+                <a:cs typeface="Consolas" panose="020B0609020204030204" pitchFamily="49" charset="0"/>
+              </a:rPr>
+              <a:t># Returns the p-value of the hypothesis test</a:t>
+            </a:r>
+          </a:p>
+          <a:p>
+            <a:endParaRPr lang="en-US" b="1" dirty="0">
+              <a:solidFill>
+                <a:srgbClr val="0070C0"/>
+              </a:solidFill>
+              <a:latin typeface="Consolas" panose="020B0609020204030204" pitchFamily="49" charset="0"/>
+              <a:cs typeface="Consolas" panose="020B0609020204030204" pitchFamily="49" charset="0"/>
+            </a:endParaRPr>
+          </a:p>
+          <a:p>
+            <a:r>
+              <a:rPr lang="en-US" b="1" dirty="0">
+                <a:solidFill>
+                  <a:srgbClr val="0070C0"/>
+                </a:solidFill>
+                <a:latin typeface="Consolas" panose="020B0609020204030204" pitchFamily="49" charset="0"/>
+                <a:cs typeface="Consolas" panose="020B0609020204030204" pitchFamily="49" charset="0"/>
+              </a:rPr>
+              <a:t>from </a:t>
+            </a:r>
+            <a:r>
+              <a:rPr lang="en-US" b="1" dirty="0" err="1">
+                <a:solidFill>
+                  <a:srgbClr val="0070C0"/>
+                </a:solidFill>
+                <a:latin typeface="Consolas" panose="020B0609020204030204" pitchFamily="49" charset="0"/>
+                <a:cs typeface="Consolas" panose="020B0609020204030204" pitchFamily="49" charset="0"/>
+              </a:rPr>
+              <a:t>scipy.stats</a:t>
+            </a:r>
+            <a:r>
+              <a:rPr lang="en-US" b="1" dirty="0">
+                <a:solidFill>
+                  <a:srgbClr val="0070C0"/>
+                </a:solidFill>
+                <a:latin typeface="Consolas" panose="020B0609020204030204" pitchFamily="49" charset="0"/>
+                <a:cs typeface="Consolas" panose="020B0609020204030204" pitchFamily="49" charset="0"/>
+              </a:rPr>
+              <a:t> import </a:t>
+            </a:r>
+            <a:r>
+              <a:rPr lang="en-US" b="1" dirty="0" err="1">
+                <a:solidFill>
+                  <a:srgbClr val="0070C0"/>
+                </a:solidFill>
+                <a:latin typeface="Consolas" panose="020B0609020204030204" pitchFamily="49" charset="0"/>
+                <a:cs typeface="Consolas" panose="020B0609020204030204" pitchFamily="49" charset="0"/>
+              </a:rPr>
+              <a:t>binom_test</a:t>
+            </a:r>
+            <a:endParaRPr lang="en-US" b="1" dirty="0">
+              <a:solidFill>
+                <a:srgbClr val="0070C0"/>
+              </a:solidFill>
+              <a:latin typeface="Consolas" panose="020B0609020204030204" pitchFamily="49" charset="0"/>
+              <a:cs typeface="Consolas" panose="020B0609020204030204" pitchFamily="49" charset="0"/>
+            </a:endParaRPr>
+          </a:p>
+          <a:p>
+            <a:endParaRPr lang="en-US" b="1" dirty="0">
+              <a:solidFill>
+                <a:srgbClr val="0070C0"/>
+              </a:solidFill>
+              <a:latin typeface="Consolas" panose="020B0609020204030204" pitchFamily="49" charset="0"/>
+              <a:cs typeface="Consolas" panose="020B0609020204030204" pitchFamily="49" charset="0"/>
+            </a:endParaRPr>
+          </a:p>
+          <a:p>
+            <a:r>
+              <a:rPr lang="en-US" b="1" dirty="0">
+                <a:solidFill>
+                  <a:srgbClr val="00B050"/>
+                </a:solidFill>
+                <a:latin typeface="Consolas" panose="020B0609020204030204" pitchFamily="49" charset="0"/>
+                <a:cs typeface="Consolas" panose="020B0609020204030204" pitchFamily="49" charset="0"/>
+              </a:rPr>
+              <a:t># Example: </a:t>
+            </a:r>
+          </a:p>
+          <a:p>
+            <a:r>
+              <a:rPr lang="en-US" b="1" dirty="0">
+                <a:solidFill>
+                  <a:srgbClr val="00B050"/>
+                </a:solidFill>
+                <a:latin typeface="Consolas" panose="020B0609020204030204" pitchFamily="49" charset="0"/>
+                <a:cs typeface="Consolas" panose="020B0609020204030204" pitchFamily="49" charset="0"/>
+              </a:rPr>
+              <a:t># We flip a coin 10 times and it lands on heads 8 times. </a:t>
+            </a:r>
+          </a:p>
+          <a:p>
+            <a:r>
+              <a:rPr lang="en-US" b="1" dirty="0">
+                <a:solidFill>
+                  <a:srgbClr val="00B050"/>
+                </a:solidFill>
+                <a:latin typeface="Consolas" panose="020B0609020204030204" pitchFamily="49" charset="0"/>
+                <a:cs typeface="Consolas" panose="020B0609020204030204" pitchFamily="49" charset="0"/>
+              </a:rPr>
+              <a:t># Perform a binomial test to determine if the coin is </a:t>
+            </a:r>
+          </a:p>
+          <a:p>
+            <a:r>
+              <a:rPr lang="en-US" b="1" dirty="0">
+                <a:solidFill>
+                  <a:srgbClr val="00B050"/>
+                </a:solidFill>
+                <a:latin typeface="Consolas" panose="020B0609020204030204" pitchFamily="49" charset="0"/>
+                <a:cs typeface="Consolas" panose="020B0609020204030204" pitchFamily="49" charset="0"/>
+              </a:rPr>
+              <a:t># biased towards heads.</a:t>
+            </a:r>
+          </a:p>
+          <a:p>
+            <a:r>
+              <a:rPr lang="en-US" b="1" dirty="0">
+                <a:solidFill>
+                  <a:srgbClr val="00B050"/>
+                </a:solidFill>
+                <a:latin typeface="Consolas" panose="020B0609020204030204" pitchFamily="49" charset="0"/>
+                <a:cs typeface="Consolas" panose="020B0609020204030204" pitchFamily="49" charset="0"/>
+              </a:rPr>
+              <a:t># </a:t>
+            </a:r>
+          </a:p>
+          <a:p>
+            <a:r>
+              <a:rPr lang="en-US" b="1" dirty="0">
+                <a:solidFill>
+                  <a:srgbClr val="00B050"/>
+                </a:solidFill>
+                <a:latin typeface="Consolas" panose="020B0609020204030204" pitchFamily="49" charset="0"/>
+                <a:cs typeface="Consolas" panose="020B0609020204030204" pitchFamily="49" charset="0"/>
+              </a:rPr>
+              <a:t># The null and alternative hypotheses:</a:t>
+            </a:r>
+          </a:p>
+          <a:p>
+            <a:r>
+              <a:rPr lang="en-US" b="1" dirty="0">
+                <a:solidFill>
+                  <a:srgbClr val="00B050"/>
+                </a:solidFill>
+                <a:latin typeface="Consolas" panose="020B0609020204030204" pitchFamily="49" charset="0"/>
+                <a:cs typeface="Consolas" panose="020B0609020204030204" pitchFamily="49" charset="0"/>
+              </a:rPr>
+              <a:t>#   H0: </a:t>
+            </a:r>
+            <a:r>
+              <a:rPr lang="el-GR" b="1" dirty="0">
+                <a:solidFill>
+                  <a:srgbClr val="00B050"/>
+                </a:solidFill>
+                <a:latin typeface="Consolas" panose="020B0609020204030204" pitchFamily="49" charset="0"/>
+                <a:cs typeface="Consolas" panose="020B0609020204030204" pitchFamily="49" charset="0"/>
+              </a:rPr>
+              <a:t>π ≤ 1/2 (</a:t>
+            </a:r>
+            <a:r>
+              <a:rPr lang="en-US" b="1" dirty="0">
+                <a:solidFill>
+                  <a:srgbClr val="00B050"/>
+                </a:solidFill>
+                <a:latin typeface="Consolas" panose="020B0609020204030204" pitchFamily="49" charset="0"/>
+                <a:cs typeface="Consolas" panose="020B0609020204030204" pitchFamily="49" charset="0"/>
+              </a:rPr>
+              <a:t>the coin is not biased towards heads)</a:t>
+            </a:r>
+          </a:p>
+          <a:p>
+            <a:r>
+              <a:rPr lang="en-US" b="1" dirty="0">
+                <a:solidFill>
+                  <a:srgbClr val="00B050"/>
+                </a:solidFill>
+                <a:latin typeface="Consolas" panose="020B0609020204030204" pitchFamily="49" charset="0"/>
+                <a:cs typeface="Consolas" panose="020B0609020204030204" pitchFamily="49" charset="0"/>
+              </a:rPr>
+              <a:t>#   HA: </a:t>
+            </a:r>
+            <a:r>
+              <a:rPr lang="el-GR" b="1" dirty="0">
+                <a:solidFill>
+                  <a:srgbClr val="00B050"/>
+                </a:solidFill>
+                <a:latin typeface="Consolas" panose="020B0609020204030204" pitchFamily="49" charset="0"/>
+                <a:cs typeface="Consolas" panose="020B0609020204030204" pitchFamily="49" charset="0"/>
+              </a:rPr>
+              <a:t>π &gt; 1/2</a:t>
+            </a:r>
+          </a:p>
+          <a:p>
+            <a:endParaRPr lang="el-GR" b="1" dirty="0">
+              <a:solidFill>
+                <a:srgbClr val="00B050"/>
+              </a:solidFill>
+              <a:latin typeface="Consolas" panose="020B0609020204030204" pitchFamily="49" charset="0"/>
+              <a:cs typeface="Consolas" panose="020B0609020204030204" pitchFamily="49" charset="0"/>
+            </a:endParaRPr>
+          </a:p>
+          <a:p>
+            <a:r>
+              <a:rPr lang="en-US" b="1" dirty="0" err="1">
+                <a:solidFill>
+                  <a:srgbClr val="0070C0"/>
+                </a:solidFill>
+                <a:latin typeface="Consolas" panose="020B0609020204030204" pitchFamily="49" charset="0"/>
+                <a:cs typeface="Consolas" panose="020B0609020204030204" pitchFamily="49" charset="0"/>
+              </a:rPr>
+              <a:t>binom_test</a:t>
+            </a:r>
+            <a:r>
+              <a:rPr lang="en-US" b="1" dirty="0">
+                <a:solidFill>
+                  <a:srgbClr val="0070C0"/>
+                </a:solidFill>
+                <a:latin typeface="Consolas" panose="020B0609020204030204" pitchFamily="49" charset="0"/>
+                <a:cs typeface="Consolas" panose="020B0609020204030204" pitchFamily="49" charset="0"/>
+              </a:rPr>
+              <a:t>(x=8, n=10, p=1/2, alternative='greater')</a:t>
+            </a:r>
+          </a:p>
+          <a:p>
+            <a:endParaRPr lang="en-US" b="1" dirty="0">
+              <a:solidFill>
+                <a:srgbClr val="00B050"/>
+              </a:solidFill>
+              <a:latin typeface="Consolas" panose="020B0609020204030204" pitchFamily="49" charset="0"/>
+              <a:cs typeface="Consolas" panose="020B0609020204030204" pitchFamily="49" charset="0"/>
+            </a:endParaRPr>
+          </a:p>
+          <a:p>
+            <a:r>
+              <a:rPr lang="en-US" b="1" dirty="0">
+                <a:solidFill>
+                  <a:srgbClr val="00B050"/>
+                </a:solidFill>
+                <a:latin typeface="Consolas" panose="020B0609020204030204" pitchFamily="49" charset="0"/>
+                <a:cs typeface="Consolas" panose="020B0609020204030204" pitchFamily="49" charset="0"/>
+              </a:rPr>
+              <a:t># P = 0.0546875</a:t>
+            </a:r>
+          </a:p>
+          <a:p>
+            <a:endParaRPr lang="en-US" b="1" dirty="0">
+              <a:solidFill>
+                <a:srgbClr val="00B050"/>
+              </a:solidFill>
+              <a:latin typeface="Consolas" panose="020B0609020204030204" pitchFamily="49" charset="0"/>
+              <a:cs typeface="Consolas" panose="020B0609020204030204" pitchFamily="49" charset="0"/>
+            </a:endParaRPr>
+          </a:p>
+          <a:p>
+            <a:r>
+              <a:rPr lang="en-US" b="1" dirty="0">
+                <a:solidFill>
+                  <a:srgbClr val="00B050"/>
+                </a:solidFill>
+                <a:latin typeface="Consolas" panose="020B0609020204030204" pitchFamily="49" charset="0"/>
+                <a:cs typeface="Consolas" panose="020B0609020204030204" pitchFamily="49" charset="0"/>
+              </a:rPr>
+              <a:t># Because this p-value (0.0546875) is not less than 0.05, </a:t>
+            </a:r>
+          </a:p>
+          <a:p>
+            <a:r>
+              <a:rPr lang="en-US" b="1" dirty="0">
+                <a:solidFill>
+                  <a:srgbClr val="00B050"/>
+                </a:solidFill>
+                <a:latin typeface="Consolas" panose="020B0609020204030204" pitchFamily="49" charset="0"/>
+                <a:cs typeface="Consolas" panose="020B0609020204030204" pitchFamily="49" charset="0"/>
+              </a:rPr>
+              <a:t># we fail to reject the null hypothesis. </a:t>
+            </a:r>
+          </a:p>
+          <a:p>
+            <a:r>
+              <a:rPr lang="en-US" b="1" dirty="0">
+                <a:solidFill>
+                  <a:srgbClr val="00B050"/>
+                </a:solidFill>
+                <a:latin typeface="Consolas" panose="020B0609020204030204" pitchFamily="49" charset="0"/>
+                <a:cs typeface="Consolas" panose="020B0609020204030204" pitchFamily="49" charset="0"/>
+              </a:rPr>
+              <a:t># We do not have sufficient evidence to say </a:t>
+            </a:r>
+          </a:p>
+          <a:p>
+            <a:r>
+              <a:rPr lang="en-US" b="1" dirty="0">
+                <a:solidFill>
+                  <a:srgbClr val="00B050"/>
+                </a:solidFill>
+                <a:latin typeface="Consolas" panose="020B0609020204030204" pitchFamily="49" charset="0"/>
+                <a:cs typeface="Consolas" panose="020B0609020204030204" pitchFamily="49" charset="0"/>
+              </a:rPr>
+              <a:t># that the coin is biased towards heads.</a:t>
+            </a:r>
+          </a:p>
+        </p:txBody>
+      </p:sp>
+      <p:sp>
+        <p:nvSpPr>
+          <p:cNvPr id="5" name="TextBox 4">
+            <a:extLst>
+              <a:ext uri="{FF2B5EF4-FFF2-40B4-BE49-F238E27FC236}">
+                <a16:creationId xmlns:a16="http://schemas.microsoft.com/office/drawing/2014/main" id="{AEC7EE05-91A5-E543-BE7D-332DF5260DF7}"/>
+              </a:ext>
+            </a:extLst>
+          </p:cNvPr>
+          <p:cNvSpPr txBox="1"/>
+          <p:nvPr/>
+        </p:nvSpPr>
+        <p:spPr>
+          <a:xfrm>
+            <a:off x="0" y="0"/>
+            <a:ext cx="3357349" cy="400110"/>
+          </a:xfrm>
+          <a:prstGeom prst="rect">
+            <a:avLst/>
+          </a:prstGeom>
+          <a:noFill/>
+        </p:spPr>
+        <p:txBody>
+          <a:bodyPr wrap="square" rtlCol="0">
+            <a:spAutoFit/>
+          </a:bodyPr>
+          <a:lstStyle/>
+          <a:p>
+            <a:r>
+              <a:rPr lang="en-US" sz="2000" b="1" dirty="0"/>
+              <a:t>Binomial Test in Python</a:t>
+            </a:r>
+          </a:p>
+        </p:txBody>
+      </p:sp>
+      <p:sp>
+        <p:nvSpPr>
+          <p:cNvPr id="8" name="TextBox 7">
+            <a:extLst>
+              <a:ext uri="{FF2B5EF4-FFF2-40B4-BE49-F238E27FC236}">
+                <a16:creationId xmlns:a16="http://schemas.microsoft.com/office/drawing/2014/main" id="{67E0F2BD-74F5-4345-BD31-1FBC2B73E1BA}"/>
+              </a:ext>
+            </a:extLst>
+          </p:cNvPr>
+          <p:cNvSpPr txBox="1"/>
+          <p:nvPr/>
+        </p:nvSpPr>
+        <p:spPr>
+          <a:xfrm>
+            <a:off x="136478" y="870276"/>
+            <a:ext cx="4148919" cy="3970318"/>
+          </a:xfrm>
+          <a:prstGeom prst="rect">
+            <a:avLst/>
+          </a:prstGeom>
+          <a:noFill/>
+        </p:spPr>
+        <p:txBody>
+          <a:bodyPr wrap="square" rtlCol="0">
+            <a:spAutoFit/>
+          </a:bodyPr>
+          <a:lstStyle/>
+          <a:p>
+            <a:r>
+              <a:rPr lang="en-US" b="1" dirty="0">
+                <a:solidFill>
+                  <a:srgbClr val="00B050"/>
+                </a:solidFill>
+                <a:latin typeface="Consolas" panose="020B0609020204030204" pitchFamily="49" charset="0"/>
+                <a:cs typeface="Consolas" panose="020B0609020204030204" pitchFamily="49" charset="0"/>
+              </a:rPr>
+              <a:t># binomial distribution</a:t>
+            </a:r>
+            <a:endParaRPr lang="en-US" dirty="0">
+              <a:solidFill>
+                <a:srgbClr val="0070C0"/>
+              </a:solidFill>
+              <a:latin typeface="Consolas" panose="020B0609020204030204" pitchFamily="49" charset="0"/>
+              <a:cs typeface="Consolas" panose="020B0609020204030204" pitchFamily="49" charset="0"/>
+            </a:endParaRPr>
+          </a:p>
+          <a:p>
+            <a:r>
+              <a:rPr lang="en-US" dirty="0">
+                <a:solidFill>
+                  <a:srgbClr val="0070C0"/>
+                </a:solidFill>
+                <a:latin typeface="Consolas" panose="020B0609020204030204" pitchFamily="49" charset="0"/>
+                <a:cs typeface="Consolas" panose="020B0609020204030204" pitchFamily="49" charset="0"/>
+              </a:rPr>
+              <a:t>from </a:t>
+            </a:r>
+            <a:r>
+              <a:rPr lang="en-US" dirty="0" err="1">
+                <a:solidFill>
+                  <a:srgbClr val="0070C0"/>
+                </a:solidFill>
+                <a:latin typeface="Consolas" panose="020B0609020204030204" pitchFamily="49" charset="0"/>
+                <a:cs typeface="Consolas" panose="020B0609020204030204" pitchFamily="49" charset="0"/>
+              </a:rPr>
+              <a:t>scipy.stats</a:t>
+            </a:r>
+            <a:r>
+              <a:rPr lang="en-US" dirty="0">
+                <a:solidFill>
+                  <a:srgbClr val="0070C0"/>
+                </a:solidFill>
+                <a:latin typeface="Consolas" panose="020B0609020204030204" pitchFamily="49" charset="0"/>
+                <a:cs typeface="Consolas" panose="020B0609020204030204" pitchFamily="49" charset="0"/>
+              </a:rPr>
+              <a:t> import </a:t>
+            </a:r>
+            <a:r>
+              <a:rPr lang="en-US" dirty="0" err="1">
+                <a:solidFill>
+                  <a:srgbClr val="0070C0"/>
+                </a:solidFill>
+                <a:latin typeface="Consolas" panose="020B0609020204030204" pitchFamily="49" charset="0"/>
+                <a:cs typeface="Consolas" panose="020B0609020204030204" pitchFamily="49" charset="0"/>
+              </a:rPr>
+              <a:t>binom</a:t>
+            </a:r>
+            <a:r>
+              <a:rPr lang="en-US" dirty="0">
+                <a:solidFill>
+                  <a:srgbClr val="0070C0"/>
+                </a:solidFill>
+                <a:latin typeface="Consolas" panose="020B0609020204030204" pitchFamily="49" charset="0"/>
+                <a:cs typeface="Consolas" panose="020B0609020204030204" pitchFamily="49" charset="0"/>
+              </a:rPr>
+              <a:t> </a:t>
+            </a:r>
+          </a:p>
+          <a:p>
+            <a:endParaRPr lang="en-US" b="1" dirty="0">
+              <a:solidFill>
+                <a:srgbClr val="00B050"/>
+              </a:solidFill>
+              <a:latin typeface="Consolas" panose="020B0609020204030204" pitchFamily="49" charset="0"/>
+              <a:cs typeface="Consolas" panose="020B0609020204030204" pitchFamily="49" charset="0"/>
+            </a:endParaRPr>
+          </a:p>
+          <a:p>
+            <a:r>
+              <a:rPr lang="en-US" dirty="0" err="1">
+                <a:solidFill>
+                  <a:srgbClr val="0070C0"/>
+                </a:solidFill>
+                <a:latin typeface="Consolas" panose="020B0609020204030204" pitchFamily="49" charset="0"/>
+                <a:cs typeface="Consolas" panose="020B0609020204030204" pitchFamily="49" charset="0"/>
+              </a:rPr>
+              <a:t>binom.pmf</a:t>
+            </a:r>
+            <a:r>
+              <a:rPr lang="en-US" dirty="0">
+                <a:solidFill>
+                  <a:srgbClr val="0070C0"/>
+                </a:solidFill>
+                <a:latin typeface="Consolas" panose="020B0609020204030204" pitchFamily="49" charset="0"/>
+                <a:cs typeface="Consolas" panose="020B0609020204030204" pitchFamily="49" charset="0"/>
+              </a:rPr>
+              <a:t>(0,2,0.5) </a:t>
+            </a:r>
+            <a:r>
+              <a:rPr lang="en-US" b="1" dirty="0">
+                <a:solidFill>
+                  <a:srgbClr val="00B050"/>
+                </a:solidFill>
+                <a:latin typeface="Consolas" panose="020B0609020204030204" pitchFamily="49" charset="0"/>
+                <a:cs typeface="Consolas" panose="020B0609020204030204" pitchFamily="49" charset="0"/>
+              </a:rPr>
+              <a:t># 0.25</a:t>
+            </a:r>
+          </a:p>
+          <a:p>
+            <a:r>
+              <a:rPr lang="en-US" dirty="0" err="1">
+                <a:solidFill>
+                  <a:srgbClr val="0070C0"/>
+                </a:solidFill>
+                <a:latin typeface="Consolas" panose="020B0609020204030204" pitchFamily="49" charset="0"/>
+                <a:cs typeface="Consolas" panose="020B0609020204030204" pitchFamily="49" charset="0"/>
+              </a:rPr>
+              <a:t>binom.pmf</a:t>
+            </a:r>
+            <a:r>
+              <a:rPr lang="en-US" dirty="0">
+                <a:solidFill>
+                  <a:srgbClr val="0070C0"/>
+                </a:solidFill>
+                <a:latin typeface="Consolas" panose="020B0609020204030204" pitchFamily="49" charset="0"/>
+                <a:cs typeface="Consolas" panose="020B0609020204030204" pitchFamily="49" charset="0"/>
+              </a:rPr>
+              <a:t>(1,2,0.5) </a:t>
+            </a:r>
+            <a:r>
+              <a:rPr lang="en-US" b="1" dirty="0">
+                <a:solidFill>
+                  <a:srgbClr val="00B050"/>
+                </a:solidFill>
+                <a:latin typeface="Consolas" panose="020B0609020204030204" pitchFamily="49" charset="0"/>
+                <a:cs typeface="Consolas" panose="020B0609020204030204" pitchFamily="49" charset="0"/>
+              </a:rPr>
+              <a:t># 0.5</a:t>
+            </a:r>
+          </a:p>
+          <a:p>
+            <a:r>
+              <a:rPr lang="en-US" dirty="0" err="1">
+                <a:solidFill>
+                  <a:srgbClr val="0070C0"/>
+                </a:solidFill>
+                <a:latin typeface="Consolas" panose="020B0609020204030204" pitchFamily="49" charset="0"/>
+                <a:cs typeface="Consolas" panose="020B0609020204030204" pitchFamily="49" charset="0"/>
+              </a:rPr>
+              <a:t>binom.pmf</a:t>
+            </a:r>
+            <a:r>
+              <a:rPr lang="en-US" dirty="0">
+                <a:solidFill>
+                  <a:srgbClr val="0070C0"/>
+                </a:solidFill>
+                <a:latin typeface="Consolas" panose="020B0609020204030204" pitchFamily="49" charset="0"/>
+                <a:cs typeface="Consolas" panose="020B0609020204030204" pitchFamily="49" charset="0"/>
+              </a:rPr>
+              <a:t>(2,2,0.5) </a:t>
+            </a:r>
+            <a:r>
+              <a:rPr lang="en-US" b="1" dirty="0">
+                <a:solidFill>
+                  <a:srgbClr val="00B050"/>
+                </a:solidFill>
+                <a:latin typeface="Consolas" panose="020B0609020204030204" pitchFamily="49" charset="0"/>
+                <a:cs typeface="Consolas" panose="020B0609020204030204" pitchFamily="49" charset="0"/>
+              </a:rPr>
+              <a:t># 0.25</a:t>
+            </a:r>
+          </a:p>
+          <a:p>
+            <a:endParaRPr lang="en-US" b="1" dirty="0">
+              <a:solidFill>
+                <a:srgbClr val="00B050"/>
+              </a:solidFill>
+              <a:latin typeface="Consolas" panose="020B0609020204030204" pitchFamily="49" charset="0"/>
+              <a:cs typeface="Consolas" panose="020B0609020204030204" pitchFamily="49" charset="0"/>
+            </a:endParaRPr>
+          </a:p>
+          <a:p>
+            <a:r>
+              <a:rPr lang="en-US" dirty="0">
+                <a:solidFill>
+                  <a:srgbClr val="0070C0"/>
+                </a:solidFill>
+                <a:latin typeface="Consolas" panose="020B0609020204030204" pitchFamily="49" charset="0"/>
+                <a:cs typeface="Consolas" panose="020B0609020204030204" pitchFamily="49" charset="0"/>
+              </a:rPr>
+              <a:t>n=10</a:t>
+            </a:r>
+          </a:p>
+          <a:p>
+            <a:r>
+              <a:rPr lang="en-US" dirty="0" err="1">
+                <a:solidFill>
+                  <a:srgbClr val="0070C0"/>
+                </a:solidFill>
+                <a:latin typeface="Consolas" panose="020B0609020204030204" pitchFamily="49" charset="0"/>
+                <a:cs typeface="Consolas" panose="020B0609020204030204" pitchFamily="49" charset="0"/>
+              </a:rPr>
+              <a:t>arr</a:t>
+            </a:r>
+            <a:r>
+              <a:rPr lang="en-US" dirty="0">
+                <a:solidFill>
+                  <a:srgbClr val="0070C0"/>
+                </a:solidFill>
+                <a:latin typeface="Consolas" panose="020B0609020204030204" pitchFamily="49" charset="0"/>
+                <a:cs typeface="Consolas" panose="020B0609020204030204" pitchFamily="49" charset="0"/>
+              </a:rPr>
+              <a:t> = []</a:t>
+            </a:r>
+          </a:p>
+          <a:p>
+            <a:r>
+              <a:rPr lang="en-US" dirty="0">
+                <a:solidFill>
+                  <a:srgbClr val="0070C0"/>
+                </a:solidFill>
+                <a:latin typeface="Consolas" panose="020B0609020204030204" pitchFamily="49" charset="0"/>
+                <a:cs typeface="Consolas" panose="020B0609020204030204" pitchFamily="49" charset="0"/>
+              </a:rPr>
+              <a:t>for ii in range(n+1):</a:t>
+            </a:r>
+          </a:p>
+          <a:p>
+            <a:r>
+              <a:rPr lang="en-US" dirty="0">
+                <a:solidFill>
+                  <a:srgbClr val="0070C0"/>
+                </a:solidFill>
+                <a:latin typeface="Consolas" panose="020B0609020204030204" pitchFamily="49" charset="0"/>
+                <a:cs typeface="Consolas" panose="020B0609020204030204" pitchFamily="49" charset="0"/>
+              </a:rPr>
+              <a:t>    </a:t>
+            </a:r>
+            <a:r>
+              <a:rPr lang="en-US" dirty="0" err="1">
+                <a:solidFill>
+                  <a:srgbClr val="0070C0"/>
+                </a:solidFill>
+                <a:latin typeface="Consolas" panose="020B0609020204030204" pitchFamily="49" charset="0"/>
+                <a:cs typeface="Consolas" panose="020B0609020204030204" pitchFamily="49" charset="0"/>
+              </a:rPr>
+              <a:t>arr.append</a:t>
+            </a:r>
+            <a:r>
+              <a:rPr lang="en-US" dirty="0">
+                <a:solidFill>
+                  <a:srgbClr val="0070C0"/>
+                </a:solidFill>
+                <a:latin typeface="Consolas" panose="020B0609020204030204" pitchFamily="49" charset="0"/>
+                <a:cs typeface="Consolas" panose="020B0609020204030204" pitchFamily="49" charset="0"/>
+              </a:rPr>
+              <a:t>(</a:t>
+            </a:r>
+            <a:r>
+              <a:rPr lang="en-US" dirty="0" err="1">
+                <a:solidFill>
+                  <a:srgbClr val="0070C0"/>
+                </a:solidFill>
+                <a:latin typeface="Consolas" panose="020B0609020204030204" pitchFamily="49" charset="0"/>
+                <a:cs typeface="Consolas" panose="020B0609020204030204" pitchFamily="49" charset="0"/>
+              </a:rPr>
+              <a:t>binom.pmf</a:t>
+            </a:r>
+            <a:r>
+              <a:rPr lang="en-US" dirty="0">
+                <a:solidFill>
+                  <a:srgbClr val="0070C0"/>
+                </a:solidFill>
+                <a:latin typeface="Consolas" panose="020B0609020204030204" pitchFamily="49" charset="0"/>
+                <a:cs typeface="Consolas" panose="020B0609020204030204" pitchFamily="49" charset="0"/>
+              </a:rPr>
+              <a:t>(ii, n, 0.5))</a:t>
+            </a:r>
+          </a:p>
+          <a:p>
+            <a:r>
+              <a:rPr lang="en-US" dirty="0">
+                <a:solidFill>
+                  <a:srgbClr val="0070C0"/>
+                </a:solidFill>
+                <a:latin typeface="Consolas" panose="020B0609020204030204" pitchFamily="49" charset="0"/>
+                <a:cs typeface="Consolas" panose="020B0609020204030204" pitchFamily="49" charset="0"/>
+              </a:rPr>
+              <a:t>print(sum(</a:t>
+            </a:r>
+            <a:r>
+              <a:rPr lang="en-US" dirty="0" err="1">
+                <a:solidFill>
+                  <a:srgbClr val="0070C0"/>
+                </a:solidFill>
+                <a:latin typeface="Consolas" panose="020B0609020204030204" pitchFamily="49" charset="0"/>
+                <a:cs typeface="Consolas" panose="020B0609020204030204" pitchFamily="49" charset="0"/>
+              </a:rPr>
+              <a:t>arr</a:t>
+            </a:r>
+            <a:r>
+              <a:rPr lang="en-US" dirty="0">
+                <a:solidFill>
+                  <a:srgbClr val="0070C0"/>
+                </a:solidFill>
+                <a:latin typeface="Consolas" panose="020B0609020204030204" pitchFamily="49" charset="0"/>
+                <a:cs typeface="Consolas" panose="020B0609020204030204" pitchFamily="49" charset="0"/>
+              </a:rPr>
+              <a:t>))</a:t>
+            </a:r>
+            <a:r>
+              <a:rPr lang="en-US" b="1" dirty="0">
+                <a:solidFill>
+                  <a:srgbClr val="00B050"/>
+                </a:solidFill>
+                <a:latin typeface="Consolas" panose="020B0609020204030204" pitchFamily="49" charset="0"/>
+                <a:cs typeface="Consolas" panose="020B0609020204030204" pitchFamily="49" charset="0"/>
+              </a:rPr>
+              <a:t>  # 1</a:t>
+            </a:r>
+          </a:p>
+          <a:p>
+            <a:r>
+              <a:rPr lang="en-US" dirty="0">
+                <a:solidFill>
+                  <a:srgbClr val="0070C0"/>
+                </a:solidFill>
+                <a:latin typeface="Consolas" panose="020B0609020204030204" pitchFamily="49" charset="0"/>
+                <a:cs typeface="Consolas" panose="020B0609020204030204" pitchFamily="49" charset="0"/>
+              </a:rPr>
+              <a:t>print(</a:t>
+            </a:r>
+            <a:r>
+              <a:rPr lang="en-US" dirty="0" err="1">
+                <a:solidFill>
+                  <a:srgbClr val="0070C0"/>
+                </a:solidFill>
+                <a:latin typeface="Consolas" panose="020B0609020204030204" pitchFamily="49" charset="0"/>
+                <a:cs typeface="Consolas" panose="020B0609020204030204" pitchFamily="49" charset="0"/>
+              </a:rPr>
+              <a:t>arr</a:t>
+            </a:r>
+            <a:r>
+              <a:rPr lang="en-US" dirty="0">
+                <a:solidFill>
+                  <a:srgbClr val="0070C0"/>
+                </a:solidFill>
+                <a:latin typeface="Consolas" panose="020B0609020204030204" pitchFamily="49" charset="0"/>
+                <a:cs typeface="Consolas" panose="020B0609020204030204" pitchFamily="49" charset="0"/>
+              </a:rPr>
+              <a:t>)</a:t>
+            </a:r>
+          </a:p>
+          <a:p>
+            <a:endParaRPr lang="en-US" b="1" dirty="0">
+              <a:solidFill>
+                <a:srgbClr val="00B050"/>
+              </a:solidFill>
+              <a:latin typeface="Consolas" panose="020B0609020204030204" pitchFamily="49" charset="0"/>
+              <a:cs typeface="Consolas" panose="020B0609020204030204" pitchFamily="49" charset="0"/>
+            </a:endParaRPr>
+          </a:p>
+          <a:p>
+            <a:r>
+              <a:rPr lang="en-US" b="1" dirty="0">
+                <a:solidFill>
+                  <a:srgbClr val="00B050"/>
+                </a:solidFill>
+                <a:latin typeface="Consolas" panose="020B0609020204030204" pitchFamily="49" charset="0"/>
+                <a:cs typeface="Consolas" panose="020B0609020204030204" pitchFamily="49" charset="0"/>
+              </a:rPr>
+              <a:t># 8, 9, 10 heads out of 10 trials:</a:t>
+            </a:r>
+          </a:p>
+          <a:p>
+            <a:r>
+              <a:rPr lang="en-US" dirty="0" err="1">
+                <a:solidFill>
+                  <a:srgbClr val="0070C0"/>
+                </a:solidFill>
+                <a:latin typeface="Consolas" panose="020B0609020204030204" pitchFamily="49" charset="0"/>
+                <a:cs typeface="Consolas" panose="020B0609020204030204" pitchFamily="49" charset="0"/>
+              </a:rPr>
+              <a:t>binom.pmf</a:t>
+            </a:r>
+            <a:r>
+              <a:rPr lang="en-US" dirty="0">
+                <a:solidFill>
+                  <a:srgbClr val="0070C0"/>
+                </a:solidFill>
+                <a:latin typeface="Consolas" panose="020B0609020204030204" pitchFamily="49" charset="0"/>
+                <a:cs typeface="Consolas" panose="020B0609020204030204" pitchFamily="49" charset="0"/>
+              </a:rPr>
+              <a:t>(8,10,0.5)  # 0.043945</a:t>
+            </a:r>
+          </a:p>
+          <a:p>
+            <a:r>
+              <a:rPr lang="en-US" dirty="0" err="1">
+                <a:solidFill>
+                  <a:srgbClr val="0070C0"/>
+                </a:solidFill>
+                <a:latin typeface="Consolas" panose="020B0609020204030204" pitchFamily="49" charset="0"/>
+                <a:cs typeface="Consolas" panose="020B0609020204030204" pitchFamily="49" charset="0"/>
+              </a:rPr>
+              <a:t>binom.pmf</a:t>
+            </a:r>
+            <a:r>
+              <a:rPr lang="en-US" dirty="0">
+                <a:solidFill>
+                  <a:srgbClr val="0070C0"/>
+                </a:solidFill>
+                <a:latin typeface="Consolas" panose="020B0609020204030204" pitchFamily="49" charset="0"/>
+                <a:cs typeface="Consolas" panose="020B0609020204030204" pitchFamily="49" charset="0"/>
+              </a:rPr>
+              <a:t>(9,10,0.5)  # 0.009766</a:t>
+            </a:r>
+          </a:p>
+          <a:p>
+            <a:r>
+              <a:rPr lang="en-US" dirty="0" err="1">
+                <a:solidFill>
+                  <a:srgbClr val="0070C0"/>
+                </a:solidFill>
+                <a:latin typeface="Consolas" panose="020B0609020204030204" pitchFamily="49" charset="0"/>
+                <a:cs typeface="Consolas" panose="020B0609020204030204" pitchFamily="49" charset="0"/>
+              </a:rPr>
+              <a:t>binom.pmf</a:t>
+            </a:r>
+            <a:r>
+              <a:rPr lang="en-US" dirty="0">
+                <a:solidFill>
+                  <a:srgbClr val="0070C0"/>
+                </a:solidFill>
+                <a:latin typeface="Consolas" panose="020B0609020204030204" pitchFamily="49" charset="0"/>
+                <a:cs typeface="Consolas" panose="020B0609020204030204" pitchFamily="49" charset="0"/>
+              </a:rPr>
+              <a:t>(10,10,0.5) # 0.000977</a:t>
+            </a:r>
+          </a:p>
+        </p:txBody>
+      </p:sp>
+      <p:pic>
+        <p:nvPicPr>
+          <p:cNvPr id="9" name="Picture 8">
+            <a:extLst>
+              <a:ext uri="{FF2B5EF4-FFF2-40B4-BE49-F238E27FC236}">
+                <a16:creationId xmlns:a16="http://schemas.microsoft.com/office/drawing/2014/main" id="{4527922F-8D38-BD4E-A8D7-5C774E16BA5B}"/>
+              </a:ext>
+            </a:extLst>
+          </p:cNvPr>
+          <p:cNvPicPr>
+            <a:picLocks noChangeAspect="1"/>
+          </p:cNvPicPr>
+          <p:nvPr/>
+        </p:nvPicPr>
+        <p:blipFill>
+          <a:blip r:embed="rId2" cstate="email">
+            <a:extLst>
+              <a:ext uri="{28A0092B-C50C-407E-A947-70E740481C1C}">
+                <a14:useLocalDpi xmlns:a14="http://schemas.microsoft.com/office/drawing/2010/main"/>
+              </a:ext>
+            </a:extLst>
+          </a:blip>
+          <a:stretch>
+            <a:fillRect/>
+          </a:stretch>
+        </p:blipFill>
+        <p:spPr>
+          <a:xfrm>
+            <a:off x="8990463" y="778334"/>
+            <a:ext cx="2260600" cy="647700"/>
+          </a:xfrm>
+          <a:prstGeom prst="rect">
+            <a:avLst/>
+          </a:prstGeom>
+        </p:spPr>
+      </p:pic>
+      <p:sp>
+        <p:nvSpPr>
+          <p:cNvPr id="10" name="TextBox 9">
+            <a:extLst>
+              <a:ext uri="{FF2B5EF4-FFF2-40B4-BE49-F238E27FC236}">
+                <a16:creationId xmlns:a16="http://schemas.microsoft.com/office/drawing/2014/main" id="{6C439360-5990-7549-AAFB-E0168AA36860}"/>
+              </a:ext>
+            </a:extLst>
+          </p:cNvPr>
+          <p:cNvSpPr txBox="1"/>
+          <p:nvPr/>
+        </p:nvSpPr>
+        <p:spPr>
+          <a:xfrm>
+            <a:off x="5882186" y="246221"/>
+            <a:ext cx="6216554" cy="523220"/>
+          </a:xfrm>
+          <a:prstGeom prst="rect">
+            <a:avLst/>
+          </a:prstGeom>
+          <a:noFill/>
+        </p:spPr>
+        <p:txBody>
+          <a:bodyPr wrap="square" rtlCol="0">
+            <a:spAutoFit/>
+          </a:bodyPr>
+          <a:lstStyle/>
+          <a:p>
+            <a:r>
+              <a:rPr lang="en-US" b="1" dirty="0" err="1">
+                <a:solidFill>
+                  <a:srgbClr val="FF0000"/>
+                </a:solidFill>
+                <a:latin typeface="Consolas" panose="020B0609020204030204" pitchFamily="49" charset="0"/>
+                <a:cs typeface="Consolas" panose="020B0609020204030204" pitchFamily="49" charset="0"/>
+              </a:rPr>
+              <a:t>pmf</a:t>
+            </a:r>
+            <a:r>
+              <a:rPr lang="en-US" dirty="0">
+                <a:solidFill>
+                  <a:schemeClr val="tx1"/>
+                </a:solidFill>
+                <a:latin typeface="Consolas" panose="020B0609020204030204" pitchFamily="49" charset="0"/>
+                <a:cs typeface="Consolas" panose="020B0609020204030204" pitchFamily="49" charset="0"/>
+              </a:rPr>
+              <a:t> = </a:t>
+            </a:r>
+            <a:r>
+              <a:rPr lang="en-US" b="1" dirty="0">
+                <a:solidFill>
+                  <a:srgbClr val="0070C0"/>
+                </a:solidFill>
+                <a:latin typeface="Consolas" panose="020B0609020204030204" pitchFamily="49" charset="0"/>
+                <a:cs typeface="Consolas" panose="020B0609020204030204" pitchFamily="49" charset="0"/>
+              </a:rPr>
+              <a:t>probability mass function </a:t>
+            </a:r>
+            <a:r>
+              <a:rPr lang="en-US" dirty="0">
+                <a:solidFill>
+                  <a:schemeClr val="tx1"/>
+                </a:solidFill>
+                <a:latin typeface="Consolas" panose="020B0609020204030204" pitchFamily="49" charset="0"/>
+                <a:cs typeface="Consolas" panose="020B0609020204030204" pitchFamily="49" charset="0"/>
+              </a:rPr>
+              <a:t>- gives the probability that a discrete random variable is exactly equal to some value</a:t>
+            </a:r>
+            <a:endParaRPr lang="en-US" dirty="0">
+              <a:solidFill>
+                <a:schemeClr val="tx1"/>
+              </a:solidFill>
+            </a:endParaRPr>
+          </a:p>
+        </p:txBody>
+      </p:sp>
+      <p:sp>
+        <p:nvSpPr>
+          <p:cNvPr id="11" name="TextBox 10">
+            <a:extLst>
+              <a:ext uri="{FF2B5EF4-FFF2-40B4-BE49-F238E27FC236}">
+                <a16:creationId xmlns:a16="http://schemas.microsoft.com/office/drawing/2014/main" id="{6711EA37-ED1E-A141-9FE5-CBEDD2E74AE6}"/>
+              </a:ext>
+            </a:extLst>
+          </p:cNvPr>
+          <p:cNvSpPr txBox="1"/>
+          <p:nvPr/>
+        </p:nvSpPr>
+        <p:spPr>
+          <a:xfrm>
+            <a:off x="6271146" y="948295"/>
+            <a:ext cx="1323833" cy="307777"/>
+          </a:xfrm>
+          <a:prstGeom prst="rect">
+            <a:avLst/>
+          </a:prstGeom>
+          <a:noFill/>
+        </p:spPr>
+        <p:txBody>
+          <a:bodyPr wrap="square" rtlCol="0">
+            <a:spAutoFit/>
+          </a:bodyPr>
+          <a:lstStyle/>
+          <a:p>
+            <a:r>
+              <a:rPr lang="en-US" dirty="0"/>
+              <a:t>Binomial PMF</a:t>
+            </a:r>
+          </a:p>
+        </p:txBody>
+      </p:sp>
+      <p:sp>
+        <p:nvSpPr>
+          <p:cNvPr id="12" name="Right Arrow 11">
+            <a:extLst>
+              <a:ext uri="{FF2B5EF4-FFF2-40B4-BE49-F238E27FC236}">
+                <a16:creationId xmlns:a16="http://schemas.microsoft.com/office/drawing/2014/main" id="{B2B661F4-C902-DE4E-84B8-651079ECB2CC}"/>
+              </a:ext>
+            </a:extLst>
+          </p:cNvPr>
+          <p:cNvSpPr/>
+          <p:nvPr/>
+        </p:nvSpPr>
+        <p:spPr>
+          <a:xfrm>
+            <a:off x="7944703" y="1047990"/>
+            <a:ext cx="696035" cy="187769"/>
+          </a:xfrm>
+          <a:prstGeom prst="rightArrow">
+            <a:avLst/>
+          </a:prstGeom>
+        </p:spPr>
+        <p:style>
+          <a:lnRef idx="2">
+            <a:schemeClr val="accent1">
+              <a:shade val="50000"/>
+            </a:schemeClr>
+          </a:lnRef>
+          <a:fillRef idx="1">
+            <a:schemeClr val="accent1"/>
+          </a:fillRef>
+          <a:effectRef idx="0">
+            <a:schemeClr val="accent1"/>
+          </a:effectRef>
+          <a:fontRef idx="minor">
+            <a:schemeClr val="lt1"/>
+          </a:fontRef>
+        </p:style>
+        <p:txBody>
+          <a:bodyPr rtlCol="0" anchor="ctr"/>
+          <a:lstStyle/>
+          <a:p>
+            <a:pPr algn="ctr"/>
+            <a:endParaRPr lang="en-US"/>
+          </a:p>
+        </p:txBody>
+      </p:sp>
+    </p:spTree>
+    <p:extLst>
+      <p:ext uri="{BB962C8B-B14F-4D97-AF65-F5344CB8AC3E}">
+        <p14:creationId xmlns:p14="http://schemas.microsoft.com/office/powerpoint/2010/main" val="2977782623"/>
+      </p:ext>
+    </p:extLst>
+  </p:cSld>
+  <p:clrMapOvr>
+    <a:masterClrMapping/>
+  </p:clrMapOvr>
+</p:sld>
+</file>
+
+<file path=ppt/slides/slide5.xml><?xml version="1.0" encoding="utf-8"?>
+<p:sld xmlns:a="http://schemas.openxmlformats.org/drawingml/2006/main" xmlns:r="http://schemas.openxmlformats.org/officeDocument/2006/relationships" xmlns:p="http://schemas.openxmlformats.org/presentationml/2006/main">
+  <p:cSld>
+    <p:spTree>
+      <p:nvGrpSpPr>
+        <p:cNvPr id="1" name=""/>
+        <p:cNvGrpSpPr/>
+        <p:nvPr/>
+      </p:nvGrpSpPr>
+      <p:grpSpPr>
+        <a:xfrm>
+          <a:off x="0" y="0"/>
+          <a:ext cx="0" cy="0"/>
+          <a:chOff x="0" y="0"/>
+          <a:chExt cx="0" cy="0"/>
+        </a:xfrm>
+      </p:grpSpPr>
+      <p:sp>
+        <p:nvSpPr>
           <p:cNvPr id="4" name="Google Shape;130;p18">
             <a:extLst>
               <a:ext uri="{FF2B5EF4-FFF2-40B4-BE49-F238E27FC236}">
@@ -17398,8 +18530,8 @@
         </p:nvSpPr>
         <p:spPr>
           <a:xfrm>
-            <a:off x="122583" y="129209"/>
-            <a:ext cx="6172200" cy="4866862"/>
+            <a:off x="122583" y="129208"/>
+            <a:ext cx="6172200" cy="5179771"/>
           </a:xfrm>
           <a:prstGeom prst="rect">
             <a:avLst/>
@@ -17590,6 +18722,82 @@
                 <a:sym typeface="Calibri"/>
               </a:rPr>
               <a:t>Expected values are N/2 for heads and for tails.</a:t>
+            </a:r>
+          </a:p>
+          <a:p>
+            <a:pPr marL="0" lvl="0" indent="0" algn="l" rtl="0">
+              <a:spcBef>
+                <a:spcPts val="0"/>
+              </a:spcBef>
+              <a:spcAft>
+                <a:spcPts val="0"/>
+              </a:spcAft>
+              <a:buNone/>
+            </a:pPr>
+            <a:endParaRPr lang="en-US" sz="1300" dirty="0">
+              <a:latin typeface="Calibri"/>
+              <a:ea typeface="Calibri"/>
+              <a:cs typeface="Calibri"/>
+              <a:sym typeface="Calibri"/>
+            </a:endParaRPr>
+          </a:p>
+          <a:p>
+            <a:pPr lvl="0"/>
+            <a:r>
+              <a:rPr lang="en-US" sz="1300" dirty="0">
+                <a:latin typeface="Calibri"/>
+                <a:ea typeface="Calibri"/>
+                <a:cs typeface="Calibri"/>
+                <a:sym typeface="Calibri"/>
+              </a:rPr>
+              <a:t>Using </a:t>
+            </a:r>
+            <a:r>
+              <a:rPr lang="en-US" b="1" i="1" dirty="0">
+                <a:solidFill>
+                  <a:srgbClr val="222222"/>
+                </a:solidFill>
+                <a:highlight>
+                  <a:srgbClr val="FFFFFF"/>
+                </a:highlight>
+                <a:latin typeface="Times New Roman"/>
+                <a:ea typeface="Times New Roman"/>
+                <a:cs typeface="Times New Roman"/>
+                <a:sym typeface="Times New Roman"/>
+              </a:rPr>
+              <a:t>χ</a:t>
+            </a:r>
+            <a:r>
+              <a:rPr lang="en-US" b="1" baseline="30000" dirty="0">
+                <a:solidFill>
+                  <a:srgbClr val="222222"/>
+                </a:solidFill>
+                <a:highlight>
+                  <a:srgbClr val="FFFFFF"/>
+                </a:highlight>
+                <a:latin typeface="Times New Roman"/>
+                <a:ea typeface="Times New Roman"/>
+                <a:cs typeface="Times New Roman"/>
+                <a:sym typeface="Times New Roman"/>
+              </a:rPr>
+              <a:t>2</a:t>
+            </a:r>
+            <a:r>
+              <a:rPr lang="en-US" b="1" dirty="0">
+                <a:latin typeface="Calibri"/>
+                <a:ea typeface="Calibri"/>
+                <a:cs typeface="Calibri"/>
+                <a:sym typeface="Calibri"/>
+              </a:rPr>
+              <a:t> </a:t>
+            </a:r>
+            <a:r>
+              <a:rPr lang="en-US" sz="1300" dirty="0">
+                <a:latin typeface="Calibri"/>
+                <a:cs typeface="Calibri"/>
+                <a:sym typeface="Calibri"/>
+              </a:rPr>
+              <a:t>goodness of fit test</a:t>
             </a:r>
           </a:p>
           <a:p>
@@ -18211,7 +19419,7 @@
 </p:sld>
 </file>
 
-<file path=ppt/slides/slide5.xml><?xml version="1.0" encoding="utf-8"?>
+<file path=ppt/slides/slide6.xml><?xml version="1.0" encoding="utf-8"?>
 <p:sld xmlns:a="http://schemas.openxmlformats.org/drawingml/2006/main" xmlns:r="http://schemas.openxmlformats.org/officeDocument/2006/relationships" xmlns:p="http://schemas.openxmlformats.org/presentationml/2006/main">
   <p:cSld>
     <p:spTree>
@@ -18242,8 +19450,8 @@
         </p:nvSpPr>
         <p:spPr>
           <a:xfrm>
-            <a:off x="0" y="57383"/>
-            <a:ext cx="5913120" cy="4810539"/>
+            <a:off x="0" y="57384"/>
+            <a:ext cx="5913120" cy="5606438"/>
           </a:xfrm>
           <a:prstGeom prst="rect">
             <a:avLst/>
@@ -18276,14 +19484,65 @@
                 <a:sym typeface="Calibri"/>
               </a:rPr>
             </a:br>
-            <a:br>
+            <a:endParaRPr lang="en-US" sz="1800" dirty="0">
+              <a:latin typeface="Calibri"/>
+              <a:ea typeface="Calibri"/>
+              <a:cs typeface="Calibri"/>
+              <a:sym typeface="Calibri"/>
+            </a:endParaRPr>
+          </a:p>
+          <a:p>
+            <a:r>
               <a:rPr lang="en-US" sz="1300" dirty="0">
                 <a:latin typeface="Calibri"/>
-                <a:ea typeface="Calibri"/>
-                <a:cs typeface="Calibri"/>
-                <a:sym typeface="Calibri"/>
-              </a:rPr>
-            </a:br>
+                <a:cs typeface="Calibri"/>
+                <a:sym typeface="Calibri"/>
+              </a:rPr>
+              <a:t>I am not sure if the t-test can be used for coin flipping hypothesis testing.</a:t>
+            </a:r>
+          </a:p>
+          <a:p>
+            <a:endParaRPr lang="en-US" sz="1300" dirty="0">
+              <a:latin typeface="Calibri"/>
+              <a:cs typeface="Calibri"/>
+              <a:sym typeface="Calibri"/>
+            </a:endParaRPr>
+          </a:p>
+          <a:p>
+            <a:r>
+              <a:rPr lang="en-US" sz="1300" dirty="0">
+                <a:latin typeface="Calibri"/>
+                <a:cs typeface="Calibri"/>
+                <a:sym typeface="Calibri"/>
+              </a:rPr>
+              <a:t>t-test is used for data which is presumed to have normal distribution, and only for small samples of data ( &lt; 30 points).</a:t>
+            </a:r>
+          </a:p>
+          <a:p>
+            <a:endParaRPr lang="en-US" sz="1300" dirty="0">
+              <a:latin typeface="Calibri"/>
+              <a:cs typeface="Calibri"/>
+              <a:sym typeface="Calibri"/>
+            </a:endParaRPr>
+          </a:p>
+          <a:p>
+            <a:r>
+              <a:rPr lang="en-US" sz="1300" dirty="0">
+                <a:latin typeface="Calibri"/>
+                <a:cs typeface="Calibri"/>
+                <a:sym typeface="Calibri"/>
+              </a:rPr>
+              <a:t>But here is formal application of t-test:</a:t>
+            </a:r>
+          </a:p>
+          <a:p>
+            <a:endParaRPr lang="en-US" sz="1300" dirty="0">
+              <a:latin typeface="Calibri"/>
+              <a:cs typeface="Calibri"/>
+              <a:sym typeface="Calibri"/>
+            </a:endParaRPr>
+          </a:p>
+          <a:p>
             <a:r>
               <a:rPr lang="en-US" sz="1300" b="1" u="sng" dirty="0">
                 <a:latin typeface="Calibri"/>
@@ -18358,6 +19617,26 @@
                 <a:sym typeface="Calibri"/>
               </a:rPr>
               <a:t>So number of observed tails T = N-H.</a:t>
+            </a:r>
+          </a:p>
+          <a:p>
+            <a:pPr marL="0" lvl="0" indent="0" algn="l" rtl="0">
+              <a:spcBef>
+                <a:spcPts val="0"/>
+              </a:spcBef>
+              <a:spcAft>
+                <a:spcPts val="0"/>
+              </a:spcAft>
+              <a:buNone/>
+            </a:pPr>
+            <a:r>
+              <a:rPr lang="en-US" sz="1300" dirty="0">
+                <a:latin typeface="Calibri"/>
+                <a:ea typeface="Calibri"/>
+                <a:cs typeface="Calibri"/>
+                <a:sym typeface="Calibri"/>
+              </a:rPr>
+              <a:t>Expected numbers are N/2 for heads and for tails.</a:t>
             </a:r>
           </a:p>
           <a:p>
@@ -18394,7 +19673,19 @@
                 <a:cs typeface="Calibri"/>
                 <a:sym typeface="Calibri"/>
               </a:rPr>
-              <a:t>Expected numbers are N/2 for heads and for tails.</a:t>
+              <a:t>To calculate t-test we assume values 1 for heads and -1 for tails.</a:t>
+            </a:r>
+          </a:p>
+          <a:p>
+            <a:pPr lvl="0"/>
+            <a:r>
+              <a:rPr lang="en-US" sz="1300" dirty="0">
+                <a:latin typeface="Calibri"/>
+                <a:ea typeface="Calibri"/>
+                <a:cs typeface="Calibri"/>
+                <a:sym typeface="Calibri"/>
+              </a:rPr>
+              <a:t>Then suppose N=100, H=60, T=40</a:t>
             </a:r>
           </a:p>
           <a:p>
@@ -18407,12 +19698,15 @@
               </a:spcAft>
               <a:buNone/>
             </a:pPr>
-            <a:endParaRPr lang="en-US" sz="1300" dirty="0">
-              <a:latin typeface="Calibri"/>
-              <a:ea typeface="Calibri"/>
-              <a:cs typeface="Calibri"/>
-              <a:sym typeface="Calibri"/>
-            </a:endParaRPr>
+            <a:r>
+              <a:rPr lang="en-US" sz="1300" dirty="0">
+                <a:latin typeface="Calibri"/>
+                <a:ea typeface="Calibri"/>
+                <a:cs typeface="Calibri"/>
+                <a:sym typeface="Calibri"/>
+              </a:rPr>
+              <a:t>   Sample Mean X = (H – T)/100 = 20/100 = 0.2</a:t>
+            </a:r>
           </a:p>
           <a:p>
             <a:pPr marL="0" lvl="0" indent="0" algn="l" rtl="0">
@@ -18431,7 +19725,27 @@
                 <a:cs typeface="Calibri"/>
                 <a:sym typeface="Calibri"/>
               </a:rPr>
-              <a:t>To calculate t-test we assume values 1 for heads and -1 for tails.</a:t>
+              <a:t>   Expected mean = N/2 – N/2 = 0</a:t>
+            </a:r>
+          </a:p>
+          <a:p>
+            <a:pPr marL="0" lvl="0" indent="0" algn="l" rtl="0">
+              <a:spcBef>
+                <a:spcPts val="0"/>
+              </a:spcBef>
+              <a:spcAft>
+                <a:spcPts val="0"/>
+              </a:spcAft>
+              <a:buNone/>
+            </a:pPr>
+            <a:r>
+              <a:rPr lang="en-US" sz="1300" dirty="0">
+                <a:latin typeface="Calibri"/>
+                <a:ea typeface="Calibri"/>
+                <a:cs typeface="Calibri"/>
+                <a:sym typeface="Calibri"/>
+              </a:rPr>
+              <a:t>   Sample Variance:</a:t>
             </a:r>
           </a:p>
           <a:p>
@@ -18443,19 +19757,17 @@
                 <a:cs typeface="Calibri"/>
                 <a:sym typeface="Calibri"/>
               </a:rPr>
-              <a:t>Then suppose N=100, H=60, T=40</a:t>
-            </a:r>
-          </a:p>
-          <a:p>
-            <a:pPr marL="0" lvl="0" indent="0" algn="l" rtl="0">
-              <a:spcBef>
-                <a:spcPts val="0"/>
-              </a:spcBef>
-              <a:spcAft>
-                <a:spcPts val="0"/>
-              </a:spcAft>
-              <a:buNone/>
-            </a:pPr>
+              <a:t>         S</a:t>
+            </a:r>
+            <a:r>
+              <a:rPr lang="en-US" sz="1300" baseline="30000" dirty="0">
+                <a:latin typeface="Calibri"/>
+                <a:ea typeface="Calibri"/>
+                <a:cs typeface="Calibri"/>
+                <a:sym typeface="Calibri"/>
+              </a:rPr>
+              <a:t>2</a:t>
+            </a:r>
             <a:r>
               <a:rPr lang="en-US" sz="1300" dirty="0">
                 <a:latin typeface="Calibri"/>
@@ -18463,19 +19775,17 @@
                 <a:cs typeface="Calibri"/>
                 <a:sym typeface="Calibri"/>
               </a:rPr>
-              <a:t>   Sample Mean X = (H – T)/100 = 20/100 = 0.2</a:t>
-            </a:r>
-          </a:p>
-          <a:p>
-            <a:pPr marL="0" lvl="0" indent="0" algn="l" rtl="0">
-              <a:spcBef>
-                <a:spcPts val="0"/>
-              </a:spcBef>
-              <a:spcAft>
-                <a:spcPts val="0"/>
-              </a:spcAft>
-              <a:buNone/>
-            </a:pPr>
+              <a:t> = (1/99) *  ( 60*(1-0.2)</a:t>
+            </a:r>
+            <a:r>
+              <a:rPr lang="en-US" sz="1300" baseline="30000" dirty="0">
+                <a:latin typeface="Calibri"/>
+                <a:ea typeface="Calibri"/>
+                <a:cs typeface="Calibri"/>
+                <a:sym typeface="Calibri"/>
+              </a:rPr>
+              <a:t>2</a:t>
+            </a:r>
             <a:r>
               <a:rPr lang="en-US" sz="1300" dirty="0">
                 <a:latin typeface="Calibri"/>
@@ -18483,19 +19793,17 @@
                 <a:cs typeface="Calibri"/>
                 <a:sym typeface="Calibri"/>
               </a:rPr>
-              <a:t>   Expected mean = N/2 – N/2 = 0</a:t>
-            </a:r>
-          </a:p>
-          <a:p>
-            <a:pPr marL="0" lvl="0" indent="0" algn="l" rtl="0">
-              <a:spcBef>
-                <a:spcPts val="0"/>
-              </a:spcBef>
-              <a:spcAft>
-                <a:spcPts val="0"/>
-              </a:spcAft>
-              <a:buNone/>
-            </a:pPr>
+              <a:t> + 40*(-1-0.2)</a:t>
+            </a:r>
+            <a:r>
+              <a:rPr lang="en-US" sz="1300" baseline="30000" dirty="0">
+                <a:latin typeface="Calibri"/>
+                <a:ea typeface="Calibri"/>
+                <a:cs typeface="Calibri"/>
+                <a:sym typeface="Calibri"/>
+              </a:rPr>
+              <a:t>2</a:t>
+            </a:r>
             <a:r>
               <a:rPr lang="en-US" sz="1300" dirty="0">
                 <a:latin typeface="Calibri"/>
@@ -18503,25 +19811,8 @@
                 <a:cs typeface="Calibri"/>
                 <a:sym typeface="Calibri"/>
               </a:rPr>
-              <a:t>   Sample Variance:</a:t>
-            </a:r>
-          </a:p>
-          <a:p>
-            <a:pPr marL="0" lvl="0" indent="0" algn="l" rtl="0">
-              <a:spcBef>
-                <a:spcPts val="0"/>
-              </a:spcBef>
-              <a:spcAft>
-                <a:spcPts val="0"/>
-              </a:spcAft>
-              <a:buNone/>
-            </a:pPr>
-            <a:endParaRPr lang="en-US" sz="1300" dirty="0">
-              <a:latin typeface="Calibri"/>
-              <a:ea typeface="Calibri"/>
-              <a:cs typeface="Calibri"/>
-              <a:sym typeface="Calibri"/>
-            </a:endParaRPr>
+              <a:t> )  = 0.969</a:t>
+            </a:r>
           </a:p>
           <a:p>
             <a:pPr lvl="0"/>
@@ -18532,17 +19823,11 @@
                 <a:cs typeface="Calibri"/>
                 <a:sym typeface="Calibri"/>
               </a:rPr>
-              <a:t>         S</a:t>
-            </a:r>
-            <a:r>
-              <a:rPr lang="en-US" sz="1300" baseline="30000" dirty="0">
-                <a:latin typeface="Calibri"/>
-                <a:ea typeface="Calibri"/>
-                <a:cs typeface="Calibri"/>
-                <a:sym typeface="Calibri"/>
-              </a:rPr>
-              <a:t>2</a:t>
-            </a:r>
+              <a:t>   Sample Standard Deviation:</a:t>
+            </a:r>
+          </a:p>
+          <a:p>
+            <a:pPr lvl="0"/>
             <a:r>
               <a:rPr lang="en-US" sz="1300" dirty="0">
                 <a:latin typeface="Calibri"/>
@@ -18550,17 +19835,11 @@
                 <a:cs typeface="Calibri"/>
                 <a:sym typeface="Calibri"/>
               </a:rPr>
-              <a:t> = (1/99) *  ( 60*(1-0.2)</a:t>
-            </a:r>
-            <a:r>
-              <a:rPr lang="en-US" sz="1300" baseline="30000" dirty="0">
-                <a:latin typeface="Calibri"/>
-                <a:ea typeface="Calibri"/>
-                <a:cs typeface="Calibri"/>
-                <a:sym typeface="Calibri"/>
-              </a:rPr>
-              <a:t>2</a:t>
-            </a:r>
+              <a:t>        S = sqrt(0.9696) = 0.9847</a:t>
+            </a:r>
+          </a:p>
+          <a:p>
+            <a:pPr lvl="0"/>
             <a:r>
               <a:rPr lang="en-US" sz="1300" dirty="0">
                 <a:latin typeface="Calibri"/>
@@ -18568,17 +19847,11 @@
                 <a:cs typeface="Calibri"/>
                 <a:sym typeface="Calibri"/>
               </a:rPr>
-              <a:t> + 40*(-1-0.2)</a:t>
-            </a:r>
-            <a:r>
-              <a:rPr lang="en-US" sz="1300" baseline="30000" dirty="0">
-                <a:latin typeface="Calibri"/>
-                <a:ea typeface="Calibri"/>
-                <a:cs typeface="Calibri"/>
-                <a:sym typeface="Calibri"/>
-              </a:rPr>
-              <a:t>2</a:t>
-            </a:r>
+              <a:t>   t-statistics:</a:t>
+            </a:r>
+          </a:p>
+          <a:p>
+            <a:pPr lvl="0"/>
             <a:r>
               <a:rPr lang="en-US" sz="1300" dirty="0">
                 <a:latin typeface="Calibri"/>
@@ -18586,93 +19859,12 @@
                 <a:cs typeface="Calibri"/>
                 <a:sym typeface="Calibri"/>
               </a:rPr>
-              <a:t> )  = 0.969</a:t>
+              <a:t>        (0.2– 0) / (0.9847 / 10) = 2.031</a:t>
             </a:r>
           </a:p>
           <a:p>
             <a:pPr lvl="0"/>
             <a:endParaRPr lang="en-US" sz="1300" dirty="0">
-              <a:latin typeface="Calibri"/>
-              <a:ea typeface="Calibri"/>
-              <a:cs typeface="Calibri"/>
-              <a:sym typeface="Calibri"/>
-            </a:endParaRPr>
-          </a:p>
-          <a:p>
-            <a:pPr lvl="0"/>
-            <a:r>
-              <a:rPr lang="en-US" sz="1300" dirty="0">
-                <a:latin typeface="Calibri"/>
-                <a:ea typeface="Calibri"/>
-                <a:cs typeface="Calibri"/>
-                <a:sym typeface="Calibri"/>
-              </a:rPr>
-              <a:t>        S = sqrt(0.9696) = 0.9847</a:t>
-            </a:r>
-          </a:p>
-          <a:p>
-            <a:pPr lvl="0"/>
-            <a:endParaRPr lang="en-US" sz="1300" dirty="0">
-              <a:latin typeface="Calibri"/>
-              <a:ea typeface="Calibri"/>
-              <a:cs typeface="Calibri"/>
-              <a:sym typeface="Calibri"/>
-            </a:endParaRPr>
-          </a:p>
-          <a:p>
-            <a:pPr lvl="0"/>
-            <a:r>
-              <a:rPr lang="en-US" sz="1300" dirty="0">
-                <a:latin typeface="Calibri"/>
-                <a:ea typeface="Calibri"/>
-                <a:cs typeface="Calibri"/>
-                <a:sym typeface="Calibri"/>
-              </a:rPr>
-              <a:t>        t-statistics = (0.2– 0) / (0.9847 / 10) = 2.031</a:t>
-            </a:r>
-          </a:p>
-          <a:p>
-            <a:pPr lvl="0"/>
-            <a:endParaRPr lang="en-US" sz="1300" dirty="0">
-              <a:latin typeface="Calibri"/>
-              <a:ea typeface="Calibri"/>
-              <a:cs typeface="Calibri"/>
-              <a:sym typeface="Calibri"/>
-            </a:endParaRPr>
-          </a:p>
-          <a:p>
-            <a:pPr lvl="0"/>
-            <a:r>
-              <a:rPr lang="en-US" sz="1300" b="1" dirty="0">
-                <a:solidFill>
-                  <a:srgbClr val="FF0000"/>
-                </a:solidFill>
-                <a:latin typeface="Calibri"/>
-                <a:ea typeface="Calibri"/>
-                <a:cs typeface="Calibri"/>
-                <a:sym typeface="Calibri"/>
-              </a:rPr>
-              <a:t>????    t-test is not applicable for this problem    </a:t>
-            </a:r>
-            <a:r>
-              <a:rPr lang="en-US" b="1" dirty="0">
-                <a:solidFill>
-                  <a:srgbClr val="FF0000"/>
-                </a:solidFill>
-                <a:highlight>
-                  <a:srgbClr val="FFFFFF"/>
-                </a:highlight>
-                <a:latin typeface="Times New Roman"/>
-                <a:ea typeface="Times New Roman"/>
-                <a:cs typeface="Times New Roman"/>
-                <a:sym typeface="Times New Roman"/>
-              </a:rPr>
-              <a:t>???</a:t>
-            </a:r>
-            <a:endParaRPr lang="en-US" sz="1300" b="1" dirty="0">
-              <a:solidFill>
-                <a:srgbClr val="FF0000"/>
-              </a:solidFill>
               <a:latin typeface="Calibri"/>
               <a:ea typeface="Calibri"/>
               <a:cs typeface="Calibri"/>
@@ -18718,7 +19910,7 @@
         </p:blipFill>
         <p:spPr>
           <a:xfrm>
-            <a:off x="7177350" y="1714708"/>
+            <a:off x="7122758" y="1496340"/>
             <a:ext cx="1331161" cy="612140"/>
           </a:xfrm>
           <a:prstGeom prst="rect">
@@ -18754,7 +19946,7 @@
         </p:blipFill>
         <p:spPr>
           <a:xfrm>
-            <a:off x="7177350" y="2367149"/>
+            <a:off x="7122758" y="2148781"/>
             <a:ext cx="2377908" cy="613968"/>
           </a:xfrm>
           <a:prstGeom prst="rect">
@@ -18790,7 +19982,7 @@
         </p:blipFill>
         <p:spPr>
           <a:xfrm>
-            <a:off x="7093295" y="3221133"/>
+            <a:off x="7038703" y="3002765"/>
             <a:ext cx="702080" cy="616692"/>
           </a:xfrm>
           <a:prstGeom prst="rect">
@@ -18826,7 +20018,7 @@
         </p:blipFill>
         <p:spPr>
           <a:xfrm>
-            <a:off x="7093295" y="4077841"/>
+            <a:off x="7038703" y="3859473"/>
             <a:ext cx="582886" cy="565991"/>
           </a:xfrm>
           <a:prstGeom prst="rect">
@@ -18848,7 +20040,7 @@
         </p:nvSpPr>
         <p:spPr>
           <a:xfrm>
-            <a:off x="6827520" y="456245"/>
+            <a:off x="6772928" y="237877"/>
             <a:ext cx="5318760" cy="1046440"/>
           </a:xfrm>
           <a:prstGeom prst="rect">
@@ -18937,7 +20129,7 @@
         </p:nvSpPr>
         <p:spPr>
           <a:xfrm>
-            <a:off x="9635550" y="1857495"/>
+            <a:off x="9580958" y="1639127"/>
             <a:ext cx="1214439" cy="523220"/>
           </a:xfrm>
           <a:prstGeom prst="rect">
@@ -18978,7 +20170,7 @@
         </p:nvSpPr>
         <p:spPr>
           <a:xfrm>
-            <a:off x="9635550" y="2462653"/>
+            <a:off x="9580958" y="2244285"/>
             <a:ext cx="1406529" cy="523220"/>
           </a:xfrm>
           <a:prstGeom prst="rect">
@@ -19019,7 +20211,7 @@
         </p:nvSpPr>
         <p:spPr>
           <a:xfrm>
-            <a:off x="8099436" y="3370681"/>
+            <a:off x="8044844" y="3152313"/>
             <a:ext cx="2143280" cy="523220"/>
           </a:xfrm>
           <a:prstGeom prst="rect">
@@ -19060,7 +20252,7 @@
         </p:nvSpPr>
         <p:spPr>
           <a:xfrm>
-            <a:off x="8099437" y="4186526"/>
+            <a:off x="8044845" y="3968158"/>
             <a:ext cx="3757284" cy="1169551"/>
           </a:xfrm>
           <a:prstGeom prst="rect">
@@ -19150,7 +20342,7 @@
         </p:blipFill>
         <p:spPr>
           <a:xfrm>
-            <a:off x="25429" y="5343165"/>
+            <a:off x="6584085" y="5246893"/>
             <a:ext cx="5384771" cy="1408156"/>
           </a:xfrm>
           <a:prstGeom prst="rect">
@@ -19158,6 +20350,42 @@
           </a:prstGeom>
         </p:spPr>
       </p:pic>
+      <p:cxnSp>
+        <p:nvCxnSpPr>
+          <p:cNvPr id="3" name="Straight Connector 2">
+            <a:extLst>
+              <a:ext uri="{FF2B5EF4-FFF2-40B4-BE49-F238E27FC236}">
+                <a16:creationId xmlns:a16="http://schemas.microsoft.com/office/drawing/2014/main" id="{D1C0BEE1-1D4E-454C-B8BD-7721E20060BB}"/>
+              </a:ext>
+            </a:extLst>
+          </p:cNvPr>
+          <p:cNvCxnSpPr/>
+          <p:nvPr/>
+        </p:nvCxnSpPr>
+        <p:spPr>
+          <a:xfrm>
+            <a:off x="6291620" y="237877"/>
+            <a:ext cx="0" cy="6463174"/>
+          </a:xfrm>
+          <a:prstGeom prst="line">
+            <a:avLst/>
+          </a:prstGeom>
+        </p:spPr>
+        <p:style>
+          <a:lnRef idx="1">
+            <a:schemeClr val="accent1"/>
+          </a:lnRef>
+          <a:fillRef idx="0">
+            <a:schemeClr val="accent1"/>
+          </a:fillRef>
+          <a:effectRef idx="0">
+            <a:schemeClr val="accent1"/>
+          </a:effectRef>
+          <a:fontRef idx="minor">
+            <a:schemeClr val="tx1"/>
+          </a:fontRef>
+        </p:style>
+      </p:cxnSp>
     </p:spTree>
     <p:extLst>
       <p:ext uri="{BB962C8B-B14F-4D97-AF65-F5344CB8AC3E}">
@@ -19171,7 +20399,7 @@
 </p:sld>
 </file>
 
-<file path=ppt/slides/slide6.xml><?xml version="1.0" encoding="utf-8"?>
+<file path=ppt/slides/slide7.xml><?xml version="1.0" encoding="utf-8"?>
 <p:sld xmlns:a="http://schemas.openxmlformats.org/drawingml/2006/main" xmlns:r="http://schemas.openxmlformats.org/officeDocument/2006/relationships" xmlns:p="http://schemas.openxmlformats.org/presentationml/2006/main">
   <p:cSld>
     <p:spTree>
@@ -20042,7 +21270,7 @@
 </p:sld>
 </file>
 
-<file path=ppt/slides/slide7.xml><?xml version="1.0" encoding="utf-8"?>
+<file path=ppt/slides/slide8.xml><?xml version="1.0" encoding="utf-8"?>
 <p:sld xmlns:a="http://schemas.openxmlformats.org/drawingml/2006/main" xmlns:r="http://schemas.openxmlformats.org/officeDocument/2006/relationships" xmlns:p="http://schemas.openxmlformats.org/presentationml/2006/main">
   <p:cSld>
     <p:spTree>

--- a/statistics_05_hypothesis_testing_p_val.pptx
+++ b/statistics_05_hypothesis_testing_p_val.pptx
@@ -16006,8 +16006,8 @@
         </p:nvSpPr>
         <p:spPr>
           <a:xfrm>
-            <a:off x="1" y="728871"/>
-            <a:ext cx="5367130" cy="3049225"/>
+            <a:off x="81889" y="906295"/>
+            <a:ext cx="4790363" cy="2819547"/>
           </a:xfrm>
           <a:prstGeom prst="rect">
             <a:avLst/>
@@ -16052,23 +16052,6 @@
               </a:spcAft>
               <a:buNone/>
             </a:pPr>
-            <a:endParaRPr lang="en-US" dirty="0">
-              <a:latin typeface="Calibri"/>
-              <a:ea typeface="Calibri"/>
-              <a:cs typeface="Calibri"/>
-              <a:sym typeface="Calibri"/>
-            </a:endParaRPr>
-          </a:p>
-          <a:p>
-            <a:pPr marL="0" lvl="0" indent="0" algn="l" rtl="0">
-              <a:spcBef>
-                <a:spcPts val="0"/>
-              </a:spcBef>
-              <a:spcAft>
-                <a:spcPts val="0"/>
-              </a:spcAft>
-              <a:buNone/>
-            </a:pPr>
             <a:r>
               <a:rPr lang="en-US" dirty="0">
                 <a:latin typeface="Calibri"/>
@@ -16243,7 +16226,7 @@
                 <a:cs typeface="Calibri"/>
                 <a:sym typeface="Calibri"/>
               </a:rPr>
-              <a:t>We just need compute the probability of 8 or more heads in 10 tosses (assuming the coin is fair).</a:t>
+              <a:t>We just need compute the probability of 8 or more heads </a:t>
             </a:r>
           </a:p>
           <a:p>
@@ -16255,7 +16238,7 @@
                 <a:cs typeface="Calibri"/>
                 <a:sym typeface="Calibri"/>
               </a:rPr>
-              <a:t>Note that the number of heads follows a binomial distribution </a:t>
+              <a:t>in 10 tosses (assuming the coin is fair).</a:t>
             </a:r>
           </a:p>
           <a:p>
@@ -16267,7 +16250,7 @@
                 <a:cs typeface="Calibri"/>
                 <a:sym typeface="Calibri"/>
               </a:rPr>
-              <a:t>with n=10 and p=0.5.</a:t>
+              <a:t>Note that the number of heads follows a binomial </a:t>
             </a:r>
           </a:p>
           <a:p>
@@ -16279,17 +16262,20 @@
                 <a:cs typeface="Calibri"/>
                 <a:sym typeface="Calibri"/>
               </a:rPr>
+              <a:t>distribution with n=10 and p=0.5.</a:t>
+            </a:r>
+          </a:p>
+          <a:p>
+            <a:pPr lvl="0"/>
+            <a:r>
+              <a:rPr lang="en-US" dirty="0">
+                <a:latin typeface="Calibri"/>
+                <a:ea typeface="Calibri"/>
+                <a:cs typeface="Calibri"/>
+                <a:sym typeface="Calibri"/>
+              </a:rPr>
               <a:t>So the p-value = P[8] + P[9] + P[10] = .044 + .01 + .001 = 0.055.</a:t>
             </a:r>
-          </a:p>
-          <a:p>
-            <a:pPr lvl="0"/>
-            <a:endParaRPr lang="en-US" dirty="0">
-              <a:latin typeface="Calibri"/>
-              <a:ea typeface="Calibri"/>
-              <a:cs typeface="Calibri"/>
-              <a:sym typeface="Calibri"/>
-            </a:endParaRPr>
           </a:p>
           <a:p>
             <a:pPr lvl="0"/>
@@ -16463,8 +16449,8 @@
         </p:blipFill>
         <p:spPr>
           <a:xfrm>
-            <a:off x="10670547" y="3041496"/>
-            <a:ext cx="711200" cy="736600"/>
+            <a:off x="10442586" y="3445039"/>
+            <a:ext cx="489437" cy="506917"/>
           </a:xfrm>
           <a:prstGeom prst="rect">
             <a:avLst/>
@@ -16499,7 +16485,7 @@
         </p:blipFill>
         <p:spPr>
           <a:xfrm>
-            <a:off x="6950767" y="1868560"/>
+            <a:off x="6925873" y="1390308"/>
             <a:ext cx="5039256" cy="772060"/>
           </a:xfrm>
           <a:prstGeom prst="rect">
@@ -16521,8 +16507,8 @@
         </p:nvSpPr>
         <p:spPr>
           <a:xfrm>
-            <a:off x="6685723" y="205411"/>
-            <a:ext cx="5367130" cy="1928189"/>
+            <a:off x="6749240" y="3218"/>
+            <a:ext cx="5400832" cy="1423564"/>
           </a:xfrm>
           <a:prstGeom prst="rect">
             <a:avLst/>
@@ -16565,9 +16551,6 @@
               </a:rPr>
               <a:t>How many times should we flip a coin to test the null hypothesis.</a:t>
             </a:r>
-          </a:p>
-          <a:p>
-            <a:pPr lvl="0"/>
             <a:endParaRPr lang="en-US" dirty="0">
               <a:latin typeface="Calibri"/>
               <a:ea typeface="Calibri"/>
@@ -16640,15 +16623,6 @@
               </a:rPr>
               <a:t>At large "n" is is approximated with normal distribution.</a:t>
             </a:r>
-          </a:p>
-          <a:p>
-            <a:pPr lvl="0"/>
-            <a:endParaRPr lang="en-US" dirty="0">
-              <a:latin typeface="Calibri"/>
-              <a:ea typeface="Calibri"/>
-              <a:cs typeface="Calibri"/>
-              <a:sym typeface="Calibri"/>
-            </a:endParaRPr>
           </a:p>
           <a:p>
             <a:pPr lvl="0"/>
@@ -16684,8 +16658,8 @@
         </p:nvSpPr>
         <p:spPr>
           <a:xfrm>
-            <a:off x="6685723" y="2640620"/>
-            <a:ext cx="5367130" cy="801753"/>
+            <a:off x="6749240" y="2090673"/>
+            <a:ext cx="5049668" cy="1635169"/>
           </a:xfrm>
           <a:prstGeom prst="rect">
             <a:avLst/>
@@ -16709,11 +16683,20 @@
                 <a:cs typeface="Calibri"/>
                 <a:sym typeface="Calibri"/>
               </a:rPr>
-              <a:t>So the standard error of estimating x will be sqrt(np(1-p)).</a:t>
-            </a:r>
-          </a:p>
-          <a:p>
-            <a:pPr lvl="0"/>
+              <a:t>We use character "</a:t>
+            </a:r>
+            <a:r>
+              <a:rPr lang="el-GR" b="1" dirty="0">
+                <a:solidFill>
+                  <a:srgbClr val="0070C0"/>
+                </a:solidFill>
+                <a:latin typeface="Calibri"/>
+                <a:ea typeface="Calibri"/>
+                <a:cs typeface="Calibri"/>
+                <a:sym typeface="Calibri"/>
+              </a:rPr>
+              <a:t>σ</a:t>
+            </a:r>
             <a:r>
               <a:rPr lang="en-US" dirty="0">
                 <a:latin typeface="Calibri"/>
@@ -16721,24 +16704,77 @@
                 <a:cs typeface="Calibri"/>
                 <a:sym typeface="Calibri"/>
               </a:rPr>
-              <a:t>Note that it has max value when p=0.5.</a:t>
-            </a:r>
-          </a:p>
-          <a:p>
-            <a:pPr lvl="0"/>
-            <a:r>
+              <a:t>" to denote the standard error of estimating x:</a:t>
+            </a:r>
+            <a:br>
               <a:rPr lang="en-US" dirty="0">
                 <a:latin typeface="Calibri"/>
                 <a:ea typeface="Calibri"/>
                 <a:cs typeface="Calibri"/>
                 <a:sym typeface="Calibri"/>
               </a:rPr>
-              <a:t>So lets use the upper estimate of error of (x/n) as:</a:t>
-            </a:r>
-          </a:p>
-          <a:p>
-            <a:pPr lvl="0"/>
-            <a:endParaRPr lang="en-US" dirty="0">
+            </a:br>
+            <a:r>
+              <a:rPr lang="en-US" dirty="0">
+                <a:latin typeface="Calibri"/>
+                <a:ea typeface="Calibri"/>
+                <a:cs typeface="Calibri"/>
+                <a:sym typeface="Calibri"/>
+              </a:rPr>
+              <a:t>          </a:t>
+            </a:r>
+            <a:r>
+              <a:rPr lang="el-GR" b="1" dirty="0">
+                <a:solidFill>
+                  <a:srgbClr val="0070C0"/>
+                </a:solidFill>
+                <a:latin typeface="Calibri"/>
+                <a:ea typeface="Calibri"/>
+                <a:cs typeface="Calibri"/>
+                <a:sym typeface="Calibri"/>
+              </a:rPr>
+              <a:t>σ</a:t>
+            </a:r>
+            <a:r>
+              <a:rPr lang="en-US" b="1" baseline="30000" dirty="0">
+                <a:solidFill>
+                  <a:srgbClr val="0070C0"/>
+                </a:solidFill>
+                <a:latin typeface="Calibri"/>
+                <a:ea typeface="Calibri"/>
+                <a:cs typeface="Calibri"/>
+                <a:sym typeface="Calibri"/>
+              </a:rPr>
+              <a:t>2</a:t>
+            </a:r>
+            <a:r>
+              <a:rPr lang="en-US" b="1" dirty="0">
+                <a:solidFill>
+                  <a:srgbClr val="0070C0"/>
+                </a:solidFill>
+                <a:latin typeface="Calibri"/>
+                <a:ea typeface="Calibri"/>
+                <a:cs typeface="Calibri"/>
+                <a:sym typeface="Calibri"/>
+              </a:rPr>
+              <a:t> = </a:t>
+            </a:r>
+            <a:r>
+              <a:rPr lang="en-US" b="1" dirty="0" err="1">
+                <a:solidFill>
+                  <a:srgbClr val="0070C0"/>
+                </a:solidFill>
+                <a:latin typeface="Calibri"/>
+                <a:ea typeface="Calibri"/>
+                <a:cs typeface="Calibri"/>
+                <a:sym typeface="Calibri"/>
+              </a:rPr>
+              <a:t>npq</a:t>
+            </a:r>
+            <a:endParaRPr lang="en-US" b="1" dirty="0">
+              <a:solidFill>
+                <a:srgbClr val="0070C0"/>
+              </a:solidFill>
               <a:latin typeface="Calibri"/>
               <a:ea typeface="Calibri"/>
               <a:cs typeface="Calibri"/>
@@ -16747,57 +16783,162 @@
           </a:p>
           <a:p>
             <a:pPr lvl="0"/>
-            <a:endParaRPr lang="en-US" dirty="0">
-              <a:latin typeface="Calibri"/>
-              <a:ea typeface="Calibri"/>
-              <a:cs typeface="Calibri"/>
-              <a:sym typeface="Calibri"/>
-            </a:endParaRPr>
+            <a:r>
+              <a:rPr lang="en-US" dirty="0">
+                <a:latin typeface="Calibri"/>
+                <a:ea typeface="Calibri"/>
+                <a:cs typeface="Calibri"/>
+                <a:sym typeface="Calibri"/>
+              </a:rPr>
+              <a:t>Note that it has max value when p = q = 0.5, so </a:t>
+            </a:r>
+            <a:r>
+              <a:rPr lang="el-GR" b="1" dirty="0">
+                <a:solidFill>
+                  <a:srgbClr val="0070C0"/>
+                </a:solidFill>
+                <a:latin typeface="Calibri"/>
+                <a:ea typeface="Calibri"/>
+                <a:cs typeface="Calibri"/>
+                <a:sym typeface="Calibri"/>
+              </a:rPr>
+              <a:t>σ</a:t>
+            </a:r>
+            <a:r>
+              <a:rPr lang="en-US" b="1" baseline="30000" dirty="0">
+                <a:solidFill>
+                  <a:srgbClr val="0070C0"/>
+                </a:solidFill>
+                <a:latin typeface="Calibri"/>
+                <a:ea typeface="Calibri"/>
+                <a:cs typeface="Calibri"/>
+                <a:sym typeface="Calibri"/>
+              </a:rPr>
+              <a:t>2</a:t>
+            </a:r>
+            <a:r>
+              <a:rPr lang="en-US" b="1" dirty="0">
+                <a:solidFill>
+                  <a:srgbClr val="0070C0"/>
+                </a:solidFill>
+                <a:latin typeface="Calibri"/>
+                <a:ea typeface="Calibri"/>
+                <a:cs typeface="Calibri"/>
+                <a:sym typeface="Calibri"/>
+              </a:rPr>
+              <a:t>= n/4</a:t>
+            </a:r>
           </a:p>
           <a:p>
             <a:pPr lvl="0"/>
-            <a:endParaRPr lang="en-US" dirty="0">
-              <a:latin typeface="Calibri"/>
-              <a:ea typeface="Calibri"/>
-              <a:cs typeface="Calibri"/>
-              <a:sym typeface="Calibri"/>
-            </a:endParaRPr>
+            <a:r>
+              <a:rPr lang="en-US" dirty="0">
+                <a:latin typeface="Calibri"/>
+                <a:ea typeface="Calibri"/>
+                <a:cs typeface="Calibri"/>
+                <a:sym typeface="Calibri"/>
+              </a:rPr>
+              <a:t>So we can estimate the error for 2</a:t>
+            </a:r>
+            <a:r>
+              <a:rPr lang="el-GR" b="1" dirty="0">
+                <a:solidFill>
+                  <a:srgbClr val="0070C0"/>
+                </a:solidFill>
+                <a:latin typeface="Calibri"/>
+                <a:ea typeface="Calibri"/>
+                <a:cs typeface="Calibri"/>
+                <a:sym typeface="Calibri"/>
+              </a:rPr>
+              <a:t>σ</a:t>
+            </a:r>
+            <a:r>
+              <a:rPr lang="en-US" dirty="0">
+                <a:latin typeface="Calibri"/>
+                <a:ea typeface="Calibri"/>
+                <a:cs typeface="Calibri"/>
+                <a:sym typeface="Calibri"/>
+              </a:rPr>
+              <a:t> (~ 95% confidence) as:</a:t>
+            </a:r>
           </a:p>
           <a:p>
             <a:pPr lvl="0"/>
-            <a:endParaRPr lang="en-US" dirty="0">
-              <a:latin typeface="Calibri"/>
-              <a:ea typeface="Calibri"/>
-              <a:cs typeface="Calibri"/>
-              <a:sym typeface="Calibri"/>
-            </a:endParaRPr>
+            <a:r>
+              <a:rPr lang="en-US" dirty="0">
+                <a:latin typeface="Calibri"/>
+                <a:ea typeface="Calibri"/>
+                <a:cs typeface="Calibri"/>
+                <a:sym typeface="Calibri"/>
+              </a:rPr>
+              <a:t>          </a:t>
+            </a:r>
+            <a:r>
+              <a:rPr lang="en-US" b="1" dirty="0">
+                <a:solidFill>
+                  <a:srgbClr val="0070C0"/>
+                </a:solidFill>
+                <a:latin typeface="Calibri"/>
+                <a:ea typeface="Calibri"/>
+                <a:cs typeface="Calibri"/>
+                <a:sym typeface="Calibri"/>
+              </a:rPr>
+              <a:t>2</a:t>
+            </a:r>
+            <a:r>
+              <a:rPr lang="el-GR" b="1" dirty="0">
+                <a:solidFill>
+                  <a:srgbClr val="0070C0"/>
+                </a:solidFill>
+                <a:latin typeface="Calibri"/>
+                <a:ea typeface="Calibri"/>
+                <a:cs typeface="Calibri"/>
+                <a:sym typeface="Calibri"/>
+              </a:rPr>
+              <a:t>σ</a:t>
+            </a:r>
+            <a:r>
+              <a:rPr lang="en-US" b="1" dirty="0">
+                <a:solidFill>
+                  <a:srgbClr val="0070C0"/>
+                </a:solidFill>
+                <a:latin typeface="Calibri"/>
+                <a:ea typeface="Calibri"/>
+                <a:cs typeface="Calibri"/>
+                <a:sym typeface="Calibri"/>
+              </a:rPr>
+              <a:t> ~ √n </a:t>
+            </a:r>
           </a:p>
           <a:p>
             <a:pPr lvl="0"/>
-            <a:endParaRPr lang="en-US" dirty="0">
-              <a:latin typeface="Calibri"/>
-              <a:ea typeface="Calibri"/>
-              <a:cs typeface="Calibri"/>
-              <a:sym typeface="Calibri"/>
-            </a:endParaRPr>
+            <a:r>
+              <a:rPr lang="en-US" dirty="0">
+                <a:solidFill>
+                  <a:schemeClr val="tx1"/>
+                </a:solidFill>
+                <a:latin typeface="Calibri"/>
+                <a:ea typeface="Calibri"/>
+                <a:cs typeface="Calibri"/>
+                <a:sym typeface="Calibri"/>
+              </a:rPr>
+              <a:t>This is very easy to remember – error grows as square root of n.</a:t>
+            </a:r>
           </a:p>
           <a:p>
             <a:pPr lvl="0"/>
-            <a:endParaRPr lang="en-US" dirty="0">
-              <a:latin typeface="Calibri"/>
-              <a:ea typeface="Calibri"/>
-              <a:cs typeface="Calibri"/>
-              <a:sym typeface="Calibri"/>
-            </a:endParaRPr>
-          </a:p>
-          <a:p>
-            <a:pPr lvl="0"/>
-            <a:endParaRPr lang="en-US" dirty="0">
-              <a:latin typeface="Calibri"/>
-              <a:ea typeface="Calibri"/>
-              <a:cs typeface="Calibri"/>
-              <a:sym typeface="Calibri"/>
-            </a:endParaRPr>
+            <a:r>
+              <a:rPr lang="en-US" dirty="0">
+                <a:solidFill>
+                  <a:schemeClr val="tx1"/>
+                </a:solidFill>
+                <a:latin typeface="Calibri"/>
+                <a:ea typeface="Calibri"/>
+                <a:cs typeface="Calibri"/>
+                <a:sym typeface="Calibri"/>
+              </a:rPr>
+              <a:t>If we estimate error for ratio "x/n", it will be then:</a:t>
+            </a:r>
           </a:p>
         </p:txBody>
       </p:sp>
@@ -17127,7 +17268,7 @@
         </p:nvSpPr>
         <p:spPr>
           <a:xfrm>
-            <a:off x="6685723" y="3778096"/>
+            <a:off x="6749240" y="4080567"/>
             <a:ext cx="4167807" cy="307777"/>
           </a:xfrm>
           <a:prstGeom prst="rect">
@@ -17179,8 +17320,8 @@
         </p:blipFill>
         <p:spPr>
           <a:xfrm>
-            <a:off x="7798076" y="4074337"/>
-            <a:ext cx="1943100" cy="723900"/>
+            <a:off x="7643965" y="4336930"/>
+            <a:ext cx="1427265" cy="531726"/>
           </a:xfrm>
           <a:prstGeom prst="rect">
             <a:avLst/>
@@ -17201,7 +17342,7 @@
         </p:nvSpPr>
         <p:spPr>
           <a:xfrm>
-            <a:off x="6685722" y="4749764"/>
+            <a:off x="6749240" y="4786008"/>
             <a:ext cx="430695" cy="307777"/>
           </a:xfrm>
           <a:prstGeom prst="rect">
@@ -17253,8 +17394,8 @@
         </p:blipFill>
         <p:spPr>
           <a:xfrm>
-            <a:off x="7756936" y="4784985"/>
-            <a:ext cx="1155700" cy="723900"/>
+            <a:off x="7644289" y="5035673"/>
+            <a:ext cx="928696" cy="581711"/>
           </a:xfrm>
           <a:prstGeom prst="rect">
             <a:avLst/>
@@ -17275,7 +17416,7 @@
         </p:nvSpPr>
         <p:spPr>
           <a:xfrm>
-            <a:off x="6685722" y="5516224"/>
+            <a:off x="6685722" y="5884718"/>
             <a:ext cx="5082208" cy="954107"/>
           </a:xfrm>
           <a:prstGeom prst="rect">
@@ -20424,7 +20565,7 @@
         </p:nvSpPr>
         <p:spPr>
           <a:xfrm>
-            <a:off x="383974" y="715279"/>
+            <a:off x="383974" y="551503"/>
             <a:ext cx="4877100" cy="3147000"/>
           </a:xfrm>
           <a:prstGeom prst="rect">
@@ -20804,7 +20945,7 @@
         </p:nvSpPr>
         <p:spPr>
           <a:xfrm>
-            <a:off x="6067250" y="715279"/>
+            <a:off x="6067250" y="551503"/>
             <a:ext cx="5707800" cy="5944200"/>
           </a:xfrm>
           <a:prstGeom prst="rect">

--- a/statistics_05_hypothesis_testing_p_val.pptx
+++ b/statistics_05_hypothesis_testing_p_val.pptx
@@ -5,17 +5,18 @@
     <p:sldMasterId id="2147483659" r:id="rId1"/>
   </p:sldMasterIdLst>
   <p:notesMasterIdLst>
-    <p:notesMasterId r:id="rId10"/>
+    <p:notesMasterId r:id="rId11"/>
   </p:notesMasterIdLst>
   <p:sldIdLst>
     <p:sldId id="316" r:id="rId2"/>
     <p:sldId id="258" r:id="rId3"/>
     <p:sldId id="259" r:id="rId4"/>
     <p:sldId id="317" r:id="rId5"/>
-    <p:sldId id="314" r:id="rId6"/>
-    <p:sldId id="315" r:id="rId7"/>
-    <p:sldId id="313" r:id="rId8"/>
-    <p:sldId id="294" r:id="rId9"/>
+    <p:sldId id="318" r:id="rId6"/>
+    <p:sldId id="314" r:id="rId7"/>
+    <p:sldId id="315" r:id="rId8"/>
+    <p:sldId id="313" r:id="rId9"/>
+    <p:sldId id="294" r:id="rId10"/>
   </p:sldIdLst>
   <p:sldSz cx="12192000" cy="6858000"/>
   <p:notesSz cx="6858000" cy="9144000"/>
@@ -17553,8 +17554,8 @@
         </p:nvSpPr>
         <p:spPr>
           <a:xfrm>
-            <a:off x="6076666" y="1704583"/>
-            <a:ext cx="5827594" cy="5047536"/>
+            <a:off x="6128885" y="2886495"/>
+            <a:ext cx="5885365" cy="1015663"/>
           </a:xfrm>
           <a:prstGeom prst="rect">
             <a:avLst/>
@@ -17568,360 +17569,162 @@
           <a:lstStyle/>
           <a:p>
             <a:r>
-              <a:rPr lang="en-US" b="1" dirty="0">
+              <a:rPr lang="en-US" sz="1200" b="1" dirty="0" err="1">
                 <a:solidFill>
                   <a:srgbClr val="0070C0"/>
                 </a:solidFill>
                 <a:latin typeface="Consolas" panose="020B0609020204030204" pitchFamily="49" charset="0"/>
                 <a:cs typeface="Consolas" panose="020B0609020204030204" pitchFamily="49" charset="0"/>
               </a:rPr>
-              <a:t># </a:t>
-            </a:r>
-            <a:r>
-              <a:rPr lang="en-US" b="1" dirty="0" err="1">
-                <a:solidFill>
-                  <a:srgbClr val="FF0000"/>
+              <a:t>binom_test</a:t>
+            </a:r>
+            <a:r>
+              <a:rPr lang="en-US" sz="1200" b="1" dirty="0">
+                <a:solidFill>
+                  <a:srgbClr val="0070C0"/>
                 </a:solidFill>
                 <a:latin typeface="Consolas" panose="020B0609020204030204" pitchFamily="49" charset="0"/>
                 <a:cs typeface="Consolas" panose="020B0609020204030204" pitchFamily="49" charset="0"/>
               </a:rPr>
-              <a:t>scipy.stats.binom_test</a:t>
-            </a:r>
-            <a:r>
-              <a:rPr lang="en-US" b="1" dirty="0">
-                <a:solidFill>
-                  <a:srgbClr val="FF0000"/>
+              <a:t>(x=0,   n=1000, p=1/2, alternative='less')  </a:t>
+            </a:r>
+            <a:r>
+              <a:rPr lang="en-US" sz="1200" b="1" dirty="0">
+                <a:solidFill>
+                  <a:srgbClr val="00B050"/>
                 </a:solidFill>
                 <a:latin typeface="Consolas" panose="020B0609020204030204" pitchFamily="49" charset="0"/>
                 <a:cs typeface="Consolas" panose="020B0609020204030204" pitchFamily="49" charset="0"/>
               </a:rPr>
-              <a:t>()</a:t>
-            </a:r>
-          </a:p>
-          <a:p>
-            <a:r>
-              <a:rPr lang="en-US" b="1" dirty="0">
-                <a:solidFill>
-                  <a:srgbClr val="00B050"/>
+              <a:t># 0</a:t>
+            </a:r>
+          </a:p>
+          <a:p>
+            <a:r>
+              <a:rPr lang="en-US" sz="1200" b="1" dirty="0" err="1">
+                <a:solidFill>
+                  <a:srgbClr val="0070C0"/>
                 </a:solidFill>
                 <a:latin typeface="Consolas" panose="020B0609020204030204" pitchFamily="49" charset="0"/>
                 <a:cs typeface="Consolas" panose="020B0609020204030204" pitchFamily="49" charset="0"/>
               </a:rPr>
-              <a:t># Perform a test that the probability of success is p.</a:t>
-            </a:r>
-          </a:p>
-          <a:p>
-            <a:r>
-              <a:rPr lang="en-US" b="1" dirty="0">
-                <a:solidFill>
-                  <a:srgbClr val="00B050"/>
+              <a:t>binom_test</a:t>
+            </a:r>
+            <a:r>
+              <a:rPr lang="en-US" sz="1200" b="1" dirty="0">
+                <a:solidFill>
+                  <a:srgbClr val="0070C0"/>
                 </a:solidFill>
                 <a:latin typeface="Consolas" panose="020B0609020204030204" pitchFamily="49" charset="0"/>
                 <a:cs typeface="Consolas" panose="020B0609020204030204" pitchFamily="49" charset="0"/>
               </a:rPr>
-              <a:t># Returns the p-value of the hypothesis test</a:t>
-            </a:r>
-          </a:p>
-          <a:p>
-            <a:endParaRPr lang="en-US" b="1" dirty="0">
-              <a:solidFill>
-                <a:srgbClr val="0070C0"/>
-              </a:solidFill>
-              <a:latin typeface="Consolas" panose="020B0609020204030204" pitchFamily="49" charset="0"/>
-              <a:cs typeface="Consolas" panose="020B0609020204030204" pitchFamily="49" charset="0"/>
-            </a:endParaRPr>
-          </a:p>
-          <a:p>
-            <a:r>
-              <a:rPr lang="en-US" b="1" dirty="0">
-                <a:solidFill>
-                  <a:srgbClr val="0070C0"/>
+              <a:t>(x=470, n=1000, p=1/2, alternative='less')  </a:t>
+            </a:r>
+            <a:r>
+              <a:rPr lang="en-US" sz="1200" b="1" dirty="0">
+                <a:solidFill>
+                  <a:srgbClr val="00B050"/>
                 </a:solidFill>
                 <a:latin typeface="Consolas" panose="020B0609020204030204" pitchFamily="49" charset="0"/>
                 <a:cs typeface="Consolas" panose="020B0609020204030204" pitchFamily="49" charset="0"/>
               </a:rPr>
-              <a:t>from </a:t>
-            </a:r>
-            <a:r>
-              <a:rPr lang="en-US" b="1" dirty="0" err="1">
+              <a:t># 0.031</a:t>
+            </a:r>
+          </a:p>
+          <a:p>
+            <a:r>
+              <a:rPr lang="en-US" sz="1200" b="1" dirty="0" err="1">
                 <a:solidFill>
                   <a:srgbClr val="0070C0"/>
                 </a:solidFill>
                 <a:latin typeface="Consolas" panose="020B0609020204030204" pitchFamily="49" charset="0"/>
                 <a:cs typeface="Consolas" panose="020B0609020204030204" pitchFamily="49" charset="0"/>
               </a:rPr>
-              <a:t>scipy.stats</a:t>
-            </a:r>
-            <a:r>
-              <a:rPr lang="en-US" b="1" dirty="0">
+              <a:t>binom_test</a:t>
+            </a:r>
+            <a:r>
+              <a:rPr lang="en-US" sz="1200" b="1" dirty="0">
                 <a:solidFill>
                   <a:srgbClr val="0070C0"/>
                 </a:solidFill>
                 <a:latin typeface="Consolas" panose="020B0609020204030204" pitchFamily="49" charset="0"/>
                 <a:cs typeface="Consolas" panose="020B0609020204030204" pitchFamily="49" charset="0"/>
               </a:rPr>
-              <a:t> import </a:t>
-            </a:r>
-            <a:r>
-              <a:rPr lang="en-US" b="1" dirty="0" err="1">
-                <a:solidFill>
-                  <a:srgbClr val="0070C0"/>
+              <a:t>(x=500, n=1000, p=1/2, alternative='less')  </a:t>
+            </a:r>
+            <a:r>
+              <a:rPr lang="en-US" sz="1200" b="1" dirty="0">
+                <a:solidFill>
+                  <a:srgbClr val="00B050"/>
                 </a:solidFill>
                 <a:latin typeface="Consolas" panose="020B0609020204030204" pitchFamily="49" charset="0"/>
                 <a:cs typeface="Consolas" panose="020B0609020204030204" pitchFamily="49" charset="0"/>
               </a:rPr>
-              <a:t>binom_test</a:t>
-            </a:r>
-            <a:endParaRPr lang="en-US" b="1" dirty="0">
-              <a:solidFill>
-                <a:srgbClr val="0070C0"/>
-              </a:solidFill>
-              <a:latin typeface="Consolas" panose="020B0609020204030204" pitchFamily="49" charset="0"/>
-              <a:cs typeface="Consolas" panose="020B0609020204030204" pitchFamily="49" charset="0"/>
-            </a:endParaRPr>
-          </a:p>
-          <a:p>
-            <a:endParaRPr lang="en-US" b="1" dirty="0">
-              <a:solidFill>
-                <a:srgbClr val="0070C0"/>
-              </a:solidFill>
-              <a:latin typeface="Consolas" panose="020B0609020204030204" pitchFamily="49" charset="0"/>
-              <a:cs typeface="Consolas" panose="020B0609020204030204" pitchFamily="49" charset="0"/>
-            </a:endParaRPr>
-          </a:p>
-          <a:p>
-            <a:r>
-              <a:rPr lang="en-US" b="1" dirty="0">
-                <a:solidFill>
-                  <a:srgbClr val="00B050"/>
+              <a:t># 0.5</a:t>
+            </a:r>
+          </a:p>
+          <a:p>
+            <a:r>
+              <a:rPr lang="en-US" sz="1200" b="1" dirty="0" err="1">
+                <a:solidFill>
+                  <a:srgbClr val="0070C0"/>
                 </a:solidFill>
                 <a:latin typeface="Consolas" panose="020B0609020204030204" pitchFamily="49" charset="0"/>
                 <a:cs typeface="Consolas" panose="020B0609020204030204" pitchFamily="49" charset="0"/>
               </a:rPr>
-              <a:t># Example: </a:t>
-            </a:r>
-          </a:p>
-          <a:p>
-            <a:r>
-              <a:rPr lang="en-US" b="1" dirty="0">
-                <a:solidFill>
-                  <a:srgbClr val="00B050"/>
+              <a:t>binom_test</a:t>
+            </a:r>
+            <a:r>
+              <a:rPr lang="en-US" sz="1200" b="1" dirty="0">
+                <a:solidFill>
+                  <a:srgbClr val="0070C0"/>
                 </a:solidFill>
                 <a:latin typeface="Consolas" panose="020B0609020204030204" pitchFamily="49" charset="0"/>
                 <a:cs typeface="Consolas" panose="020B0609020204030204" pitchFamily="49" charset="0"/>
               </a:rPr>
-              <a:t># We flip a coin 10 times and it lands on heads 8 times. </a:t>
-            </a:r>
-          </a:p>
-          <a:p>
-            <a:r>
-              <a:rPr lang="en-US" b="1" dirty="0">
+              <a:t>(x=530, n=1000, p=1/2, alternative='less')  </a:t>
+            </a:r>
+            <a:r>
+              <a:rPr lang="en-US" sz="1200" b="1" dirty="0">
                 <a:solidFill>
                   <a:srgbClr val="00B050"/>
                 </a:solidFill>
                 <a:latin typeface="Consolas" panose="020B0609020204030204" pitchFamily="49" charset="0"/>
                 <a:cs typeface="Consolas" panose="020B0609020204030204" pitchFamily="49" charset="0"/>
               </a:rPr>
-              <a:t># Perform a binomial test to determine if the coin is </a:t>
-            </a:r>
-          </a:p>
-          <a:p>
-            <a:r>
-              <a:rPr lang="en-US" b="1" dirty="0">
-                <a:solidFill>
-                  <a:srgbClr val="00B050"/>
+              <a:t># 0.973</a:t>
+            </a:r>
+          </a:p>
+          <a:p>
+            <a:r>
+              <a:rPr lang="en-US" sz="1200" b="1" dirty="0" err="1">
+                <a:solidFill>
+                  <a:srgbClr val="0070C0"/>
                 </a:solidFill>
                 <a:latin typeface="Consolas" panose="020B0609020204030204" pitchFamily="49" charset="0"/>
                 <a:cs typeface="Consolas" panose="020B0609020204030204" pitchFamily="49" charset="0"/>
               </a:rPr>
-              <a:t># biased towards heads.</a:t>
-            </a:r>
-          </a:p>
-          <a:p>
-            <a:r>
-              <a:rPr lang="en-US" b="1" dirty="0">
-                <a:solidFill>
-                  <a:srgbClr val="00B050"/>
+              <a:t>binom_test</a:t>
+            </a:r>
+            <a:r>
+              <a:rPr lang="en-US" sz="1200" b="1" dirty="0">
+                <a:solidFill>
+                  <a:srgbClr val="0070C0"/>
                 </a:solidFill>
                 <a:latin typeface="Consolas" panose="020B0609020204030204" pitchFamily="49" charset="0"/>
                 <a:cs typeface="Consolas" panose="020B0609020204030204" pitchFamily="49" charset="0"/>
               </a:rPr>
-              <a:t># </a:t>
-            </a:r>
-          </a:p>
-          <a:p>
-            <a:r>
-              <a:rPr lang="en-US" b="1" dirty="0">
+              <a:t>(x=999, n=1000, p=1/2, alternative='less')  </a:t>
+            </a:r>
+            <a:r>
+              <a:rPr lang="en-US" sz="1200" b="1" dirty="0">
                 <a:solidFill>
                   <a:srgbClr val="00B050"/>
                 </a:solidFill>
                 <a:latin typeface="Consolas" panose="020B0609020204030204" pitchFamily="49" charset="0"/>
                 <a:cs typeface="Consolas" panose="020B0609020204030204" pitchFamily="49" charset="0"/>
               </a:rPr>
-              <a:t># The null and alternative hypotheses:</a:t>
-            </a:r>
-          </a:p>
-          <a:p>
-            <a:r>
-              <a:rPr lang="en-US" b="1" dirty="0">
-                <a:solidFill>
-                  <a:srgbClr val="00B050"/>
-                </a:solidFill>
-                <a:latin typeface="Consolas" panose="020B0609020204030204" pitchFamily="49" charset="0"/>
-                <a:cs typeface="Consolas" panose="020B0609020204030204" pitchFamily="49" charset="0"/>
-              </a:rPr>
-              <a:t>#   H0: </a:t>
-            </a:r>
-            <a:r>
-              <a:rPr lang="el-GR" b="1" dirty="0">
-                <a:solidFill>
-                  <a:srgbClr val="00B050"/>
-                </a:solidFill>
-                <a:latin typeface="Consolas" panose="020B0609020204030204" pitchFamily="49" charset="0"/>
-                <a:cs typeface="Consolas" panose="020B0609020204030204" pitchFamily="49" charset="0"/>
-              </a:rPr>
-              <a:t>π ≤ 1/2 (</a:t>
-            </a:r>
-            <a:r>
-              <a:rPr lang="en-US" b="1" dirty="0">
-                <a:solidFill>
-                  <a:srgbClr val="00B050"/>
-                </a:solidFill>
-                <a:latin typeface="Consolas" panose="020B0609020204030204" pitchFamily="49" charset="0"/>
-                <a:cs typeface="Consolas" panose="020B0609020204030204" pitchFamily="49" charset="0"/>
-              </a:rPr>
-              <a:t>the coin is not biased towards heads)</a:t>
-            </a:r>
-          </a:p>
-          <a:p>
-            <a:r>
-              <a:rPr lang="en-US" b="1" dirty="0">
-                <a:solidFill>
-                  <a:srgbClr val="00B050"/>
-                </a:solidFill>
-                <a:latin typeface="Consolas" panose="020B0609020204030204" pitchFamily="49" charset="0"/>
-                <a:cs typeface="Consolas" panose="020B0609020204030204" pitchFamily="49" charset="0"/>
-              </a:rPr>
-              <a:t>#   HA: </a:t>
-            </a:r>
-            <a:r>
-              <a:rPr lang="el-GR" b="1" dirty="0">
-                <a:solidFill>
-                  <a:srgbClr val="00B050"/>
-                </a:solidFill>
-                <a:latin typeface="Consolas" panose="020B0609020204030204" pitchFamily="49" charset="0"/>
-                <a:cs typeface="Consolas" panose="020B0609020204030204" pitchFamily="49" charset="0"/>
-              </a:rPr>
-              <a:t>π &gt; 1/2</a:t>
-            </a:r>
-          </a:p>
-          <a:p>
-            <a:endParaRPr lang="el-GR" b="1" dirty="0">
-              <a:solidFill>
-                <a:srgbClr val="00B050"/>
-              </a:solidFill>
-              <a:latin typeface="Consolas" panose="020B0609020204030204" pitchFamily="49" charset="0"/>
-              <a:cs typeface="Consolas" panose="020B0609020204030204" pitchFamily="49" charset="0"/>
-            </a:endParaRPr>
-          </a:p>
-          <a:p>
-            <a:r>
-              <a:rPr lang="en-US" b="1" dirty="0" err="1">
-                <a:solidFill>
-                  <a:srgbClr val="0070C0"/>
-                </a:solidFill>
-                <a:latin typeface="Consolas" panose="020B0609020204030204" pitchFamily="49" charset="0"/>
-                <a:cs typeface="Consolas" panose="020B0609020204030204" pitchFamily="49" charset="0"/>
-              </a:rPr>
-              <a:t>binom_test</a:t>
-            </a:r>
-            <a:r>
-              <a:rPr lang="en-US" b="1" dirty="0">
-                <a:solidFill>
-                  <a:srgbClr val="0070C0"/>
-                </a:solidFill>
-                <a:latin typeface="Consolas" panose="020B0609020204030204" pitchFamily="49" charset="0"/>
-                <a:cs typeface="Consolas" panose="020B0609020204030204" pitchFamily="49" charset="0"/>
-              </a:rPr>
-              <a:t>(x=8, n=10, p=1/2, alternative='greater')</a:t>
-            </a:r>
-          </a:p>
-          <a:p>
-            <a:endParaRPr lang="en-US" b="1" dirty="0">
-              <a:solidFill>
-                <a:srgbClr val="00B050"/>
-              </a:solidFill>
-              <a:latin typeface="Consolas" panose="020B0609020204030204" pitchFamily="49" charset="0"/>
-              <a:cs typeface="Consolas" panose="020B0609020204030204" pitchFamily="49" charset="0"/>
-            </a:endParaRPr>
-          </a:p>
-          <a:p>
-            <a:r>
-              <a:rPr lang="en-US" b="1" dirty="0">
-                <a:solidFill>
-                  <a:srgbClr val="00B050"/>
-                </a:solidFill>
-                <a:latin typeface="Consolas" panose="020B0609020204030204" pitchFamily="49" charset="0"/>
-                <a:cs typeface="Consolas" panose="020B0609020204030204" pitchFamily="49" charset="0"/>
-              </a:rPr>
-              <a:t># P = 0.0546875</a:t>
-            </a:r>
-          </a:p>
-          <a:p>
-            <a:endParaRPr lang="en-US" b="1" dirty="0">
-              <a:solidFill>
-                <a:srgbClr val="00B050"/>
-              </a:solidFill>
-              <a:latin typeface="Consolas" panose="020B0609020204030204" pitchFamily="49" charset="0"/>
-              <a:cs typeface="Consolas" panose="020B0609020204030204" pitchFamily="49" charset="0"/>
-            </a:endParaRPr>
-          </a:p>
-          <a:p>
-            <a:r>
-              <a:rPr lang="en-US" b="1" dirty="0">
-                <a:solidFill>
-                  <a:srgbClr val="00B050"/>
-                </a:solidFill>
-                <a:latin typeface="Consolas" panose="020B0609020204030204" pitchFamily="49" charset="0"/>
-                <a:cs typeface="Consolas" panose="020B0609020204030204" pitchFamily="49" charset="0"/>
-              </a:rPr>
-              <a:t># Because this p-value (0.0546875) is not less than 0.05, </a:t>
-            </a:r>
-          </a:p>
-          <a:p>
-            <a:r>
-              <a:rPr lang="en-US" b="1" dirty="0">
-                <a:solidFill>
-                  <a:srgbClr val="00B050"/>
-                </a:solidFill>
-                <a:latin typeface="Consolas" panose="020B0609020204030204" pitchFamily="49" charset="0"/>
-                <a:cs typeface="Consolas" panose="020B0609020204030204" pitchFamily="49" charset="0"/>
-              </a:rPr>
-              <a:t># we fail to reject the null hypothesis. </a:t>
-            </a:r>
-          </a:p>
-          <a:p>
-            <a:r>
-              <a:rPr lang="en-US" b="1" dirty="0">
-                <a:solidFill>
-                  <a:srgbClr val="00B050"/>
-                </a:solidFill>
-                <a:latin typeface="Consolas" panose="020B0609020204030204" pitchFamily="49" charset="0"/>
-                <a:cs typeface="Consolas" panose="020B0609020204030204" pitchFamily="49" charset="0"/>
-              </a:rPr>
-              <a:t># We do not have sufficient evidence to say </a:t>
-            </a:r>
-          </a:p>
-          <a:p>
-            <a:r>
-              <a:rPr lang="en-US" b="1" dirty="0">
-                <a:solidFill>
-                  <a:srgbClr val="00B050"/>
-                </a:solidFill>
-                <a:latin typeface="Consolas" panose="020B0609020204030204" pitchFamily="49" charset="0"/>
-                <a:cs typeface="Consolas" panose="020B0609020204030204" pitchFamily="49" charset="0"/>
-              </a:rPr>
-              <a:t># that the coin is biased towards heads.</a:t>
+              <a:t># 1</a:t>
             </a:r>
           </a:p>
         </p:txBody>
@@ -17975,8 +17778,8 @@
         </p:nvSpPr>
         <p:spPr>
           <a:xfrm>
-            <a:off x="136478" y="870276"/>
-            <a:ext cx="4148919" cy="3970318"/>
+            <a:off x="55090" y="507831"/>
+            <a:ext cx="3871452" cy="1384995"/>
           </a:xfrm>
           <a:prstGeom prst="rect">
             <a:avLst/>
@@ -17999,65 +17802,6 @@
               </a:rPr>
               <a:t># binomial distribution</a:t>
             </a:r>
-            <a:endParaRPr lang="en-US" dirty="0">
-              <a:solidFill>
-                <a:srgbClr val="0070C0"/>
-              </a:solidFill>
-              <a:latin typeface="Consolas" panose="020B0609020204030204" pitchFamily="49" charset="0"/>
-              <a:cs typeface="Consolas" panose="020B0609020204030204" pitchFamily="49" charset="0"/>
-            </a:endParaRPr>
-          </a:p>
-          <a:p>
-            <a:r>
-              <a:rPr lang="en-US" dirty="0">
-                <a:solidFill>
-                  <a:srgbClr val="0070C0"/>
-                </a:solidFill>
-                <a:latin typeface="Consolas" panose="020B0609020204030204" pitchFamily="49" charset="0"/>
-                <a:cs typeface="Consolas" panose="020B0609020204030204" pitchFamily="49" charset="0"/>
-              </a:rPr>
-              <a:t>from </a:t>
-            </a:r>
-            <a:r>
-              <a:rPr lang="en-US" dirty="0" err="1">
-                <a:solidFill>
-                  <a:srgbClr val="0070C0"/>
-                </a:solidFill>
-                <a:latin typeface="Consolas" panose="020B0609020204030204" pitchFamily="49" charset="0"/>
-                <a:cs typeface="Consolas" panose="020B0609020204030204" pitchFamily="49" charset="0"/>
-              </a:rPr>
-              <a:t>scipy.stats</a:t>
-            </a:r>
-            <a:r>
-              <a:rPr lang="en-US" dirty="0">
-                <a:solidFill>
-                  <a:srgbClr val="0070C0"/>
-                </a:solidFill>
-                <a:latin typeface="Consolas" panose="020B0609020204030204" pitchFamily="49" charset="0"/>
-                <a:cs typeface="Consolas" panose="020B0609020204030204" pitchFamily="49" charset="0"/>
-              </a:rPr>
-              <a:t> import </a:t>
-            </a:r>
-            <a:r>
-              <a:rPr lang="en-US" dirty="0" err="1">
-                <a:solidFill>
-                  <a:srgbClr val="0070C0"/>
-                </a:solidFill>
-                <a:latin typeface="Consolas" panose="020B0609020204030204" pitchFamily="49" charset="0"/>
-                <a:cs typeface="Consolas" panose="020B0609020204030204" pitchFamily="49" charset="0"/>
-              </a:rPr>
-              <a:t>binom</a:t>
-            </a:r>
-            <a:r>
-              <a:rPr lang="en-US" dirty="0">
-                <a:solidFill>
-                  <a:srgbClr val="0070C0"/>
-                </a:solidFill>
-                <a:latin typeface="Consolas" panose="020B0609020204030204" pitchFamily="49" charset="0"/>
-                <a:cs typeface="Consolas" panose="020B0609020204030204" pitchFamily="49" charset="0"/>
-              </a:rPr>
-              <a:t> </a:t>
-            </a:r>
           </a:p>
           <a:p>
             <a:endParaRPr lang="en-US" b="1" dirty="0">
@@ -18070,101 +17814,45 @@
           </a:p>
           <a:p>
             <a:r>
-              <a:rPr lang="en-US" dirty="0" err="1">
-                <a:solidFill>
-                  <a:srgbClr val="0070C0"/>
+              <a:rPr lang="en-US" b="1" dirty="0" err="1">
+                <a:solidFill>
+                  <a:srgbClr val="FF0000"/>
                 </a:solidFill>
                 <a:latin typeface="Consolas" panose="020B0609020204030204" pitchFamily="49" charset="0"/>
                 <a:cs typeface="Consolas" panose="020B0609020204030204" pitchFamily="49" charset="0"/>
               </a:rPr>
-              <a:t>binom.pmf</a:t>
+              <a:t>pmf</a:t>
             </a:r>
             <a:r>
               <a:rPr lang="en-US" dirty="0">
                 <a:solidFill>
-                  <a:srgbClr val="0070C0"/>
+                  <a:schemeClr val="tx1"/>
                 </a:solidFill>
                 <a:latin typeface="Consolas" panose="020B0609020204030204" pitchFamily="49" charset="0"/>
                 <a:cs typeface="Consolas" panose="020B0609020204030204" pitchFamily="49" charset="0"/>
               </a:rPr>
-              <a:t>(0,2,0.5) </a:t>
+              <a:t> = </a:t>
             </a:r>
             <a:r>
               <a:rPr lang="en-US" b="1" dirty="0">
                 <a:solidFill>
-                  <a:srgbClr val="00B050"/>
+                  <a:srgbClr val="0070C0"/>
                 </a:solidFill>
                 <a:latin typeface="Consolas" panose="020B0609020204030204" pitchFamily="49" charset="0"/>
                 <a:cs typeface="Consolas" panose="020B0609020204030204" pitchFamily="49" charset="0"/>
               </a:rPr>
-              <a:t># 0.25</a:t>
-            </a:r>
-          </a:p>
-          <a:p>
-            <a:r>
-              <a:rPr lang="en-US" dirty="0" err="1">
-                <a:solidFill>
-                  <a:srgbClr val="0070C0"/>
+              <a:t>probability mass function </a:t>
+            </a:r>
+            <a:r>
+              <a:rPr lang="en-US" dirty="0">
+                <a:solidFill>
+                  <a:schemeClr val="tx1"/>
                 </a:solidFill>
                 <a:latin typeface="Consolas" panose="020B0609020204030204" pitchFamily="49" charset="0"/>
                 <a:cs typeface="Consolas" panose="020B0609020204030204" pitchFamily="49" charset="0"/>
               </a:rPr>
-              <a:t>binom.pmf</a:t>
-            </a:r>
-            <a:r>
-              <a:rPr lang="en-US" dirty="0">
-                <a:solidFill>
-                  <a:srgbClr val="0070C0"/>
-                </a:solidFill>
-                <a:latin typeface="Consolas" panose="020B0609020204030204" pitchFamily="49" charset="0"/>
-                <a:cs typeface="Consolas" panose="020B0609020204030204" pitchFamily="49" charset="0"/>
-              </a:rPr>
-              <a:t>(1,2,0.5) </a:t>
-            </a:r>
-            <a:r>
-              <a:rPr lang="en-US" b="1" dirty="0">
-                <a:solidFill>
-                  <a:srgbClr val="00B050"/>
-                </a:solidFill>
-                <a:latin typeface="Consolas" panose="020B0609020204030204" pitchFamily="49" charset="0"/>
-                <a:cs typeface="Consolas" panose="020B0609020204030204" pitchFamily="49" charset="0"/>
-              </a:rPr>
-              <a:t># 0.5</a:t>
-            </a:r>
-          </a:p>
-          <a:p>
-            <a:r>
-              <a:rPr lang="en-US" dirty="0" err="1">
-                <a:solidFill>
-                  <a:srgbClr val="0070C0"/>
-                </a:solidFill>
-                <a:latin typeface="Consolas" panose="020B0609020204030204" pitchFamily="49" charset="0"/>
-                <a:cs typeface="Consolas" panose="020B0609020204030204" pitchFamily="49" charset="0"/>
-              </a:rPr>
-              <a:t>binom.pmf</a:t>
-            </a:r>
-            <a:r>
-              <a:rPr lang="en-US" dirty="0">
-                <a:solidFill>
-                  <a:srgbClr val="0070C0"/>
-                </a:solidFill>
-                <a:latin typeface="Consolas" panose="020B0609020204030204" pitchFamily="49" charset="0"/>
-                <a:cs typeface="Consolas" panose="020B0609020204030204" pitchFamily="49" charset="0"/>
-              </a:rPr>
-              <a:t>(2,2,0.5) </a:t>
-            </a:r>
-            <a:r>
-              <a:rPr lang="en-US" b="1" dirty="0">
-                <a:solidFill>
-                  <a:srgbClr val="00B050"/>
-                </a:solidFill>
-                <a:latin typeface="Consolas" panose="020B0609020204030204" pitchFamily="49" charset="0"/>
-                <a:cs typeface="Consolas" panose="020B0609020204030204" pitchFamily="49" charset="0"/>
-              </a:rPr>
-              <a:t># 0.25</a:t>
-            </a:r>
-          </a:p>
-          <a:p>
+              <a:t>- gives the probability that a discrete random variable is exactly equal to some value</a:t>
+            </a:r>
             <a:endParaRPr lang="en-US" b="1" dirty="0">
               <a:solidFill>
                 <a:srgbClr val="00B050"/>
@@ -18172,265 +17860,6 @@
               <a:latin typeface="Consolas" panose="020B0609020204030204" pitchFamily="49" charset="0"/>
               <a:cs typeface="Consolas" panose="020B0609020204030204" pitchFamily="49" charset="0"/>
             </a:endParaRPr>
-          </a:p>
-          <a:p>
-            <a:r>
-              <a:rPr lang="en-US" dirty="0">
-                <a:solidFill>
-                  <a:srgbClr val="0070C0"/>
-                </a:solidFill>
-                <a:latin typeface="Consolas" panose="020B0609020204030204" pitchFamily="49" charset="0"/>
-                <a:cs typeface="Consolas" panose="020B0609020204030204" pitchFamily="49" charset="0"/>
-              </a:rPr>
-              <a:t>n=10</a:t>
-            </a:r>
-          </a:p>
-          <a:p>
-            <a:r>
-              <a:rPr lang="en-US" dirty="0" err="1">
-                <a:solidFill>
-                  <a:srgbClr val="0070C0"/>
-                </a:solidFill>
-                <a:latin typeface="Consolas" panose="020B0609020204030204" pitchFamily="49" charset="0"/>
-                <a:cs typeface="Consolas" panose="020B0609020204030204" pitchFamily="49" charset="0"/>
-              </a:rPr>
-              <a:t>arr</a:t>
-            </a:r>
-            <a:r>
-              <a:rPr lang="en-US" dirty="0">
-                <a:solidFill>
-                  <a:srgbClr val="0070C0"/>
-                </a:solidFill>
-                <a:latin typeface="Consolas" panose="020B0609020204030204" pitchFamily="49" charset="0"/>
-                <a:cs typeface="Consolas" panose="020B0609020204030204" pitchFamily="49" charset="0"/>
-              </a:rPr>
-              <a:t> = []</a:t>
-            </a:r>
-          </a:p>
-          <a:p>
-            <a:r>
-              <a:rPr lang="en-US" dirty="0">
-                <a:solidFill>
-                  <a:srgbClr val="0070C0"/>
-                </a:solidFill>
-                <a:latin typeface="Consolas" panose="020B0609020204030204" pitchFamily="49" charset="0"/>
-                <a:cs typeface="Consolas" panose="020B0609020204030204" pitchFamily="49" charset="0"/>
-              </a:rPr>
-              <a:t>for ii in range(n+1):</a:t>
-            </a:r>
-          </a:p>
-          <a:p>
-            <a:r>
-              <a:rPr lang="en-US" dirty="0">
-                <a:solidFill>
-                  <a:srgbClr val="0070C0"/>
-                </a:solidFill>
-                <a:latin typeface="Consolas" panose="020B0609020204030204" pitchFamily="49" charset="0"/>
-                <a:cs typeface="Consolas" panose="020B0609020204030204" pitchFamily="49" charset="0"/>
-              </a:rPr>
-              <a:t>    </a:t>
-            </a:r>
-            <a:r>
-              <a:rPr lang="en-US" dirty="0" err="1">
-                <a:solidFill>
-                  <a:srgbClr val="0070C0"/>
-                </a:solidFill>
-                <a:latin typeface="Consolas" panose="020B0609020204030204" pitchFamily="49" charset="0"/>
-                <a:cs typeface="Consolas" panose="020B0609020204030204" pitchFamily="49" charset="0"/>
-              </a:rPr>
-              <a:t>arr.append</a:t>
-            </a:r>
-            <a:r>
-              <a:rPr lang="en-US" dirty="0">
-                <a:solidFill>
-                  <a:srgbClr val="0070C0"/>
-                </a:solidFill>
-                <a:latin typeface="Consolas" panose="020B0609020204030204" pitchFamily="49" charset="0"/>
-                <a:cs typeface="Consolas" panose="020B0609020204030204" pitchFamily="49" charset="0"/>
-              </a:rPr>
-              <a:t>(</a:t>
-            </a:r>
-            <a:r>
-              <a:rPr lang="en-US" dirty="0" err="1">
-                <a:solidFill>
-                  <a:srgbClr val="0070C0"/>
-                </a:solidFill>
-                <a:latin typeface="Consolas" panose="020B0609020204030204" pitchFamily="49" charset="0"/>
-                <a:cs typeface="Consolas" panose="020B0609020204030204" pitchFamily="49" charset="0"/>
-              </a:rPr>
-              <a:t>binom.pmf</a:t>
-            </a:r>
-            <a:r>
-              <a:rPr lang="en-US" dirty="0">
-                <a:solidFill>
-                  <a:srgbClr val="0070C0"/>
-                </a:solidFill>
-                <a:latin typeface="Consolas" panose="020B0609020204030204" pitchFamily="49" charset="0"/>
-                <a:cs typeface="Consolas" panose="020B0609020204030204" pitchFamily="49" charset="0"/>
-              </a:rPr>
-              <a:t>(ii, n, 0.5))</a:t>
-            </a:r>
-          </a:p>
-          <a:p>
-            <a:r>
-              <a:rPr lang="en-US" dirty="0">
-                <a:solidFill>
-                  <a:srgbClr val="0070C0"/>
-                </a:solidFill>
-                <a:latin typeface="Consolas" panose="020B0609020204030204" pitchFamily="49" charset="0"/>
-                <a:cs typeface="Consolas" panose="020B0609020204030204" pitchFamily="49" charset="0"/>
-              </a:rPr>
-              <a:t>print(sum(</a:t>
-            </a:r>
-            <a:r>
-              <a:rPr lang="en-US" dirty="0" err="1">
-                <a:solidFill>
-                  <a:srgbClr val="0070C0"/>
-                </a:solidFill>
-                <a:latin typeface="Consolas" panose="020B0609020204030204" pitchFamily="49" charset="0"/>
-                <a:cs typeface="Consolas" panose="020B0609020204030204" pitchFamily="49" charset="0"/>
-              </a:rPr>
-              <a:t>arr</a:t>
-            </a:r>
-            <a:r>
-              <a:rPr lang="en-US" dirty="0">
-                <a:solidFill>
-                  <a:srgbClr val="0070C0"/>
-                </a:solidFill>
-                <a:latin typeface="Consolas" panose="020B0609020204030204" pitchFamily="49" charset="0"/>
-                <a:cs typeface="Consolas" panose="020B0609020204030204" pitchFamily="49" charset="0"/>
-              </a:rPr>
-              <a:t>))</a:t>
-            </a:r>
-            <a:r>
-              <a:rPr lang="en-US" b="1" dirty="0">
-                <a:solidFill>
-                  <a:srgbClr val="00B050"/>
-                </a:solidFill>
-                <a:latin typeface="Consolas" panose="020B0609020204030204" pitchFamily="49" charset="0"/>
-                <a:cs typeface="Consolas" panose="020B0609020204030204" pitchFamily="49" charset="0"/>
-              </a:rPr>
-              <a:t>  # 1</a:t>
-            </a:r>
-          </a:p>
-          <a:p>
-            <a:r>
-              <a:rPr lang="en-US" dirty="0">
-                <a:solidFill>
-                  <a:srgbClr val="0070C0"/>
-                </a:solidFill>
-                <a:latin typeface="Consolas" panose="020B0609020204030204" pitchFamily="49" charset="0"/>
-                <a:cs typeface="Consolas" panose="020B0609020204030204" pitchFamily="49" charset="0"/>
-              </a:rPr>
-              <a:t>print(</a:t>
-            </a:r>
-            <a:r>
-              <a:rPr lang="en-US" dirty="0" err="1">
-                <a:solidFill>
-                  <a:srgbClr val="0070C0"/>
-                </a:solidFill>
-                <a:latin typeface="Consolas" panose="020B0609020204030204" pitchFamily="49" charset="0"/>
-                <a:cs typeface="Consolas" panose="020B0609020204030204" pitchFamily="49" charset="0"/>
-              </a:rPr>
-              <a:t>arr</a:t>
-            </a:r>
-            <a:r>
-              <a:rPr lang="en-US" dirty="0">
-                <a:solidFill>
-                  <a:srgbClr val="0070C0"/>
-                </a:solidFill>
-                <a:latin typeface="Consolas" panose="020B0609020204030204" pitchFamily="49" charset="0"/>
-                <a:cs typeface="Consolas" panose="020B0609020204030204" pitchFamily="49" charset="0"/>
-              </a:rPr>
-              <a:t>)</a:t>
-            </a:r>
-          </a:p>
-          <a:p>
-            <a:endParaRPr lang="en-US" b="1" dirty="0">
-              <a:solidFill>
-                <a:srgbClr val="00B050"/>
-              </a:solidFill>
-              <a:latin typeface="Consolas" panose="020B0609020204030204" pitchFamily="49" charset="0"/>
-              <a:cs typeface="Consolas" panose="020B0609020204030204" pitchFamily="49" charset="0"/>
-            </a:endParaRPr>
-          </a:p>
-          <a:p>
-            <a:r>
-              <a:rPr lang="en-US" b="1" dirty="0">
-                <a:solidFill>
-                  <a:srgbClr val="00B050"/>
-                </a:solidFill>
-                <a:latin typeface="Consolas" panose="020B0609020204030204" pitchFamily="49" charset="0"/>
-                <a:cs typeface="Consolas" panose="020B0609020204030204" pitchFamily="49" charset="0"/>
-              </a:rPr>
-              <a:t># 8, 9, 10 heads out of 10 trials:</a:t>
-            </a:r>
-          </a:p>
-          <a:p>
-            <a:r>
-              <a:rPr lang="en-US" dirty="0" err="1">
-                <a:solidFill>
-                  <a:srgbClr val="0070C0"/>
-                </a:solidFill>
-                <a:latin typeface="Consolas" panose="020B0609020204030204" pitchFamily="49" charset="0"/>
-                <a:cs typeface="Consolas" panose="020B0609020204030204" pitchFamily="49" charset="0"/>
-              </a:rPr>
-              <a:t>binom.pmf</a:t>
-            </a:r>
-            <a:r>
-              <a:rPr lang="en-US" dirty="0">
-                <a:solidFill>
-                  <a:srgbClr val="0070C0"/>
-                </a:solidFill>
-                <a:latin typeface="Consolas" panose="020B0609020204030204" pitchFamily="49" charset="0"/>
-                <a:cs typeface="Consolas" panose="020B0609020204030204" pitchFamily="49" charset="0"/>
-              </a:rPr>
-              <a:t>(8,10,0.5)  # 0.043945</a:t>
-            </a:r>
-          </a:p>
-          <a:p>
-            <a:r>
-              <a:rPr lang="en-US" dirty="0" err="1">
-                <a:solidFill>
-                  <a:srgbClr val="0070C0"/>
-                </a:solidFill>
-                <a:latin typeface="Consolas" panose="020B0609020204030204" pitchFamily="49" charset="0"/>
-                <a:cs typeface="Consolas" panose="020B0609020204030204" pitchFamily="49" charset="0"/>
-              </a:rPr>
-              <a:t>binom.pmf</a:t>
-            </a:r>
-            <a:r>
-              <a:rPr lang="en-US" dirty="0">
-                <a:solidFill>
-                  <a:srgbClr val="0070C0"/>
-                </a:solidFill>
-                <a:latin typeface="Consolas" panose="020B0609020204030204" pitchFamily="49" charset="0"/>
-                <a:cs typeface="Consolas" panose="020B0609020204030204" pitchFamily="49" charset="0"/>
-              </a:rPr>
-              <a:t>(9,10,0.5)  # 0.009766</a:t>
-            </a:r>
-          </a:p>
-          <a:p>
-            <a:r>
-              <a:rPr lang="en-US" dirty="0" err="1">
-                <a:solidFill>
-                  <a:srgbClr val="0070C0"/>
-                </a:solidFill>
-                <a:latin typeface="Consolas" panose="020B0609020204030204" pitchFamily="49" charset="0"/>
-                <a:cs typeface="Consolas" panose="020B0609020204030204" pitchFamily="49" charset="0"/>
-              </a:rPr>
-              <a:t>binom.pmf</a:t>
-            </a:r>
-            <a:r>
-              <a:rPr lang="en-US" dirty="0">
-                <a:solidFill>
-                  <a:srgbClr val="0070C0"/>
-                </a:solidFill>
-                <a:latin typeface="Consolas" panose="020B0609020204030204" pitchFamily="49" charset="0"/>
-                <a:cs typeface="Consolas" panose="020B0609020204030204" pitchFamily="49" charset="0"/>
-              </a:rPr>
-              <a:t>(10,10,0.5) # 0.000977</a:t>
-            </a:r>
           </a:p>
         </p:txBody>
       </p:sp>
@@ -18462,7 +17891,7 @@
         </p:blipFill>
         <p:spPr>
           <a:xfrm>
-            <a:off x="8990463" y="778334"/>
+            <a:off x="1564141" y="1752488"/>
             <a:ext cx="2260600" cy="647700"/>
           </a:xfrm>
           <a:prstGeom prst="rect">
@@ -18470,82 +17899,6 @@
           </a:prstGeom>
         </p:spPr>
       </p:pic>
-      <p:sp>
-        <p:nvSpPr>
-          <p:cNvPr id="10" name="TextBox 9">
-            <a:extLst>
-              <a:ext uri="{FF2B5EF4-FFF2-40B4-BE49-F238E27FC236}">
-                <a16:creationId xmlns:a16="http://schemas.microsoft.com/office/drawing/2014/main" id="{6C439360-5990-7549-AAFB-E0168AA36860}"/>
-              </a:ext>
-            </a:extLst>
-          </p:cNvPr>
-          <p:cNvSpPr txBox="1"/>
-          <p:nvPr/>
-        </p:nvSpPr>
-        <p:spPr>
-          <a:xfrm>
-            <a:off x="5882186" y="246221"/>
-            <a:ext cx="6216554" cy="523220"/>
-          </a:xfrm>
-          <a:prstGeom prst="rect">
-            <a:avLst/>
-          </a:prstGeom>
-          <a:noFill/>
-        </p:spPr>
-        <p:txBody>
-          <a:bodyPr wrap="square" rtlCol="0">
-            <a:spAutoFit/>
-          </a:bodyPr>
-          <a:lstStyle/>
-          <a:p>
-            <a:r>
-              <a:rPr lang="en-US" b="1" dirty="0" err="1">
-                <a:solidFill>
-                  <a:srgbClr val="FF0000"/>
-                </a:solidFill>
-                <a:latin typeface="Consolas" panose="020B0609020204030204" pitchFamily="49" charset="0"/>
-                <a:cs typeface="Consolas" panose="020B0609020204030204" pitchFamily="49" charset="0"/>
-              </a:rPr>
-              <a:t>pmf</a:t>
-            </a:r>
-            <a:r>
-              <a:rPr lang="en-US" dirty="0">
-                <a:solidFill>
-                  <a:schemeClr val="tx1"/>
-                </a:solidFill>
-                <a:latin typeface="Consolas" panose="020B0609020204030204" pitchFamily="49" charset="0"/>
-                <a:cs typeface="Consolas" panose="020B0609020204030204" pitchFamily="49" charset="0"/>
-              </a:rPr>
-              <a:t> = </a:t>
-            </a:r>
-            <a:r>
-              <a:rPr lang="en-US" b="1" dirty="0">
-                <a:solidFill>
-                  <a:srgbClr val="0070C0"/>
-                </a:solidFill>
-                <a:latin typeface="Consolas" panose="020B0609020204030204" pitchFamily="49" charset="0"/>
-                <a:cs typeface="Consolas" panose="020B0609020204030204" pitchFamily="49" charset="0"/>
-              </a:rPr>
-              <a:t>probability mass function </a:t>
-            </a:r>
-            <a:r>
-              <a:rPr lang="en-US" dirty="0">
-                <a:solidFill>
-                  <a:schemeClr val="tx1"/>
-                </a:solidFill>
-                <a:latin typeface="Consolas" panose="020B0609020204030204" pitchFamily="49" charset="0"/>
-                <a:cs typeface="Consolas" panose="020B0609020204030204" pitchFamily="49" charset="0"/>
-              </a:rPr>
-              <a:t>- gives the probability that a discrete random variable is exactly equal to some value</a:t>
-            </a:r>
-            <a:endParaRPr lang="en-US" dirty="0">
-              <a:solidFill>
-                <a:schemeClr val="tx1"/>
-              </a:solidFill>
-            </a:endParaRPr>
-          </a:p>
-        </p:txBody>
-      </p:sp>
       <p:sp>
         <p:nvSpPr>
           <p:cNvPr id="11" name="TextBox 10">
@@ -18560,8 +17913,8 @@
         </p:nvSpPr>
         <p:spPr>
           <a:xfrm>
-            <a:off x="6271146" y="948295"/>
-            <a:ext cx="1323833" cy="307777"/>
+            <a:off x="0" y="1940107"/>
+            <a:ext cx="1462340" cy="307777"/>
           </a:xfrm>
           <a:prstGeom prst="rect">
             <a:avLst/>
@@ -18576,54 +17929,1288 @@
           <a:p>
             <a:r>
               <a:rPr lang="en-US" dirty="0"/>
-              <a:t>Binomial PMF</a:t>
+              <a:t>Binomial PMF :</a:t>
             </a:r>
           </a:p>
         </p:txBody>
       </p:sp>
-      <p:sp>
-        <p:nvSpPr>
-          <p:cNvPr id="12" name="Right Arrow 11">
+      <p:pic>
+        <p:nvPicPr>
+          <p:cNvPr id="3" name="Picture 2">
             <a:extLst>
               <a:ext uri="{FF2B5EF4-FFF2-40B4-BE49-F238E27FC236}">
-                <a16:creationId xmlns:a16="http://schemas.microsoft.com/office/drawing/2014/main" id="{B2B661F4-C902-DE4E-84B8-651079ECB2CC}"/>
+                <a16:creationId xmlns:a16="http://schemas.microsoft.com/office/drawing/2014/main" id="{8A7A16D1-6A82-EE42-84CE-7A1B0E0722C6}"/>
               </a:ext>
             </a:extLst>
           </p:cNvPr>
-          <p:cNvSpPr/>
+          <p:cNvPicPr>
+            <a:picLocks noChangeAspect="1"/>
+          </p:cNvPicPr>
+          <p:nvPr/>
+        </p:nvPicPr>
+        <p:blipFill>
+          <a:blip r:embed="rId3" cstate="email">
+            <a:extLst>
+              <a:ext uri="{28A0092B-C50C-407E-A947-70E740481C1C}">
+                <a14:useLocalDpi xmlns:a14="http://schemas.microsoft.com/office/drawing/2010/main"/>
+              </a:ext>
+            </a:extLst>
+          </a:blip>
+          <a:stretch>
+            <a:fillRect/>
+          </a:stretch>
+        </p:blipFill>
+        <p:spPr>
+          <a:xfrm>
+            <a:off x="4107674" y="2786705"/>
+            <a:ext cx="1955444" cy="1303629"/>
+          </a:xfrm>
+          <a:prstGeom prst="rect">
+            <a:avLst/>
+          </a:prstGeom>
+        </p:spPr>
+      </p:pic>
+      <p:sp>
+        <p:nvSpPr>
+          <p:cNvPr id="13" name="TextBox 12">
+            <a:extLst>
+              <a:ext uri="{FF2B5EF4-FFF2-40B4-BE49-F238E27FC236}">
+                <a16:creationId xmlns:a16="http://schemas.microsoft.com/office/drawing/2014/main" id="{7A8963DC-8A72-D44C-ABD9-A5F73EA7B869}"/>
+              </a:ext>
+            </a:extLst>
+          </p:cNvPr>
+          <p:cNvSpPr txBox="1"/>
           <p:nvPr/>
         </p:nvSpPr>
         <p:spPr>
           <a:xfrm>
-            <a:off x="7944703" y="1047990"/>
-            <a:ext cx="696035" cy="187769"/>
+            <a:off x="4082134" y="5491884"/>
+            <a:ext cx="5884256" cy="1015663"/>
           </a:xfrm>
-          <a:prstGeom prst="rightArrow">
+          <a:prstGeom prst="rect">
             <a:avLst/>
           </a:prstGeom>
+          <a:noFill/>
+        </p:spPr>
+        <p:txBody>
+          <a:bodyPr wrap="square" rtlCol="0">
+            <a:spAutoFit/>
+          </a:bodyPr>
+          <a:lstStyle/>
+          <a:p>
+            <a:r>
+              <a:rPr lang="en-US" sz="1200" b="1" dirty="0">
+                <a:solidFill>
+                  <a:srgbClr val="00B050"/>
+                </a:solidFill>
+                <a:latin typeface="Consolas" panose="020B0609020204030204" pitchFamily="49" charset="0"/>
+                <a:cs typeface="Consolas" panose="020B0609020204030204" pitchFamily="49" charset="0"/>
+              </a:rPr>
+              <a:t># We flip a coin 10 times and it lands on heads 8 times. </a:t>
+            </a:r>
+          </a:p>
+          <a:p>
+            <a:r>
+              <a:rPr lang="en-US" sz="1200" b="1" dirty="0">
+                <a:solidFill>
+                  <a:srgbClr val="00B050"/>
+                </a:solidFill>
+                <a:latin typeface="Consolas" panose="020B0609020204030204" pitchFamily="49" charset="0"/>
+                <a:cs typeface="Consolas" panose="020B0609020204030204" pitchFamily="49" charset="0"/>
+              </a:rPr>
+              <a:t># Perform a binomial test to determine if the coin is biased.</a:t>
+            </a:r>
+          </a:p>
+          <a:p>
+            <a:r>
+              <a:rPr lang="en-US" sz="1200" b="1" dirty="0" err="1">
+                <a:solidFill>
+                  <a:srgbClr val="0070C0"/>
+                </a:solidFill>
+                <a:latin typeface="Consolas" panose="020B0609020204030204" pitchFamily="49" charset="0"/>
+                <a:cs typeface="Consolas" panose="020B0609020204030204" pitchFamily="49" charset="0"/>
+              </a:rPr>
+              <a:t>binom_test</a:t>
+            </a:r>
+            <a:r>
+              <a:rPr lang="en-US" sz="1200" b="1" dirty="0">
+                <a:solidFill>
+                  <a:srgbClr val="0070C0"/>
+                </a:solidFill>
+                <a:latin typeface="Consolas" panose="020B0609020204030204" pitchFamily="49" charset="0"/>
+                <a:cs typeface="Consolas" panose="020B0609020204030204" pitchFamily="49" charset="0"/>
+              </a:rPr>
+              <a:t>(x=8, n=10, p=1/2, alternative='greater') </a:t>
+            </a:r>
+            <a:r>
+              <a:rPr lang="en-US" sz="1200" b="1" dirty="0">
+                <a:solidFill>
+                  <a:srgbClr val="00B050"/>
+                </a:solidFill>
+                <a:latin typeface="Consolas" panose="020B0609020204030204" pitchFamily="49" charset="0"/>
+                <a:cs typeface="Consolas" panose="020B0609020204030204" pitchFamily="49" charset="0"/>
+              </a:rPr>
+              <a:t># P = 0.0546875</a:t>
+            </a:r>
+          </a:p>
+          <a:p>
+            <a:r>
+              <a:rPr lang="en-US" sz="1200" b="1" dirty="0">
+                <a:solidFill>
+                  <a:srgbClr val="00B050"/>
+                </a:solidFill>
+                <a:latin typeface="Consolas" panose="020B0609020204030204" pitchFamily="49" charset="0"/>
+                <a:cs typeface="Consolas" panose="020B0609020204030204" pitchFamily="49" charset="0"/>
+              </a:rPr>
+              <a:t># Because this p-value (0.0546875) is not less than 0.05, </a:t>
+            </a:r>
+          </a:p>
+          <a:p>
+            <a:r>
+              <a:rPr lang="en-US" sz="1200" b="1" dirty="0">
+                <a:solidFill>
+                  <a:srgbClr val="00B050"/>
+                </a:solidFill>
+                <a:latin typeface="Consolas" panose="020B0609020204030204" pitchFamily="49" charset="0"/>
+                <a:cs typeface="Consolas" panose="020B0609020204030204" pitchFamily="49" charset="0"/>
+              </a:rPr>
+              <a:t># we accept the null hypothesis.</a:t>
+            </a:r>
+          </a:p>
+        </p:txBody>
+      </p:sp>
+      <p:cxnSp>
+        <p:nvCxnSpPr>
+          <p:cNvPr id="7" name="Straight Connector 6">
+            <a:extLst>
+              <a:ext uri="{FF2B5EF4-FFF2-40B4-BE49-F238E27FC236}">
+                <a16:creationId xmlns:a16="http://schemas.microsoft.com/office/drawing/2014/main" id="{CC869036-FE0F-1E47-8797-6B95E97124CA}"/>
+              </a:ext>
+            </a:extLst>
+          </p:cNvPr>
+          <p:cNvCxnSpPr/>
+          <p:nvPr/>
+        </p:nvCxnSpPr>
+        <p:spPr>
+          <a:xfrm>
+            <a:off x="3953437" y="246221"/>
+            <a:ext cx="0" cy="6369732"/>
+          </a:xfrm>
+          <a:prstGeom prst="line">
+            <a:avLst/>
+          </a:prstGeom>
+          <a:ln w="63500"/>
         </p:spPr>
         <p:style>
-          <a:lnRef idx="2">
-            <a:schemeClr val="accent1">
-              <a:shade val="50000"/>
-            </a:schemeClr>
+          <a:lnRef idx="1">
+            <a:schemeClr val="accent1"/>
           </a:lnRef>
-          <a:fillRef idx="1">
+          <a:fillRef idx="0">
             <a:schemeClr val="accent1"/>
           </a:fillRef>
           <a:effectRef idx="0">
             <a:schemeClr val="accent1"/>
           </a:effectRef>
           <a:fontRef idx="minor">
-            <a:schemeClr val="lt1"/>
+            <a:schemeClr val="tx1"/>
           </a:fontRef>
         </p:style>
+      </p:cxnSp>
+      <p:sp>
+        <p:nvSpPr>
+          <p:cNvPr id="14" name="TextBox 13">
+            <a:extLst>
+              <a:ext uri="{FF2B5EF4-FFF2-40B4-BE49-F238E27FC236}">
+                <a16:creationId xmlns:a16="http://schemas.microsoft.com/office/drawing/2014/main" id="{7E734F07-84EA-3747-B35F-8BE91031CC62}"/>
+              </a:ext>
+            </a:extLst>
+          </p:cNvPr>
+          <p:cNvSpPr txBox="1"/>
+          <p:nvPr/>
+        </p:nvSpPr>
+        <p:spPr>
+          <a:xfrm>
+            <a:off x="6128888" y="4149859"/>
+            <a:ext cx="5885361" cy="1015663"/>
+          </a:xfrm>
+          <a:prstGeom prst="rect">
+            <a:avLst/>
+          </a:prstGeom>
+          <a:noFill/>
+        </p:spPr>
         <p:txBody>
-          <a:bodyPr rtlCol="0" anchor="ctr"/>
+          <a:bodyPr wrap="square" rtlCol="0">
+            <a:spAutoFit/>
+          </a:bodyPr>
           <a:lstStyle/>
           <a:p>
-            <a:pPr algn="ctr"/>
-            <a:endParaRPr lang="en-US"/>
+            <a:r>
+              <a:rPr lang="en-US" sz="1200" b="1" dirty="0" err="1">
+                <a:solidFill>
+                  <a:srgbClr val="0070C0"/>
+                </a:solidFill>
+                <a:latin typeface="Consolas" panose="020B0609020204030204" pitchFamily="49" charset="0"/>
+                <a:cs typeface="Consolas" panose="020B0609020204030204" pitchFamily="49" charset="0"/>
+              </a:rPr>
+              <a:t>binom_test</a:t>
+            </a:r>
+            <a:r>
+              <a:rPr lang="en-US" sz="1200" b="1" dirty="0">
+                <a:solidFill>
+                  <a:srgbClr val="0070C0"/>
+                </a:solidFill>
+                <a:latin typeface="Consolas" panose="020B0609020204030204" pitchFamily="49" charset="0"/>
+                <a:cs typeface="Consolas" panose="020B0609020204030204" pitchFamily="49" charset="0"/>
+              </a:rPr>
+              <a:t>(x=0,   n=1000, p=1/2, alternative='two-sided')  </a:t>
+            </a:r>
+            <a:r>
+              <a:rPr lang="en-US" sz="1200" b="1" dirty="0">
+                <a:solidFill>
+                  <a:srgbClr val="00B050"/>
+                </a:solidFill>
+                <a:latin typeface="Consolas" panose="020B0609020204030204" pitchFamily="49" charset="0"/>
+                <a:cs typeface="Consolas" panose="020B0609020204030204" pitchFamily="49" charset="0"/>
+              </a:rPr>
+              <a:t># 0</a:t>
+            </a:r>
+          </a:p>
+          <a:p>
+            <a:r>
+              <a:rPr lang="en-US" sz="1200" b="1" dirty="0" err="1">
+                <a:solidFill>
+                  <a:srgbClr val="0070C0"/>
+                </a:solidFill>
+                <a:latin typeface="Consolas" panose="020B0609020204030204" pitchFamily="49" charset="0"/>
+                <a:cs typeface="Consolas" panose="020B0609020204030204" pitchFamily="49" charset="0"/>
+              </a:rPr>
+              <a:t>binom_test</a:t>
+            </a:r>
+            <a:r>
+              <a:rPr lang="en-US" sz="1200" b="1" dirty="0">
+                <a:solidFill>
+                  <a:srgbClr val="0070C0"/>
+                </a:solidFill>
+                <a:latin typeface="Consolas" panose="020B0609020204030204" pitchFamily="49" charset="0"/>
+                <a:cs typeface="Consolas" panose="020B0609020204030204" pitchFamily="49" charset="0"/>
+              </a:rPr>
+              <a:t>(x=470, n=1000, p=1/2, alternative='two-sided')  </a:t>
+            </a:r>
+            <a:r>
+              <a:rPr lang="en-US" sz="1200" b="1" dirty="0">
+                <a:solidFill>
+                  <a:srgbClr val="00B050"/>
+                </a:solidFill>
+                <a:latin typeface="Consolas" panose="020B0609020204030204" pitchFamily="49" charset="0"/>
+                <a:cs typeface="Consolas" panose="020B0609020204030204" pitchFamily="49" charset="0"/>
+              </a:rPr>
+              <a:t># 0.062</a:t>
+            </a:r>
+          </a:p>
+          <a:p>
+            <a:r>
+              <a:rPr lang="en-US" sz="1200" b="1" dirty="0" err="1">
+                <a:solidFill>
+                  <a:srgbClr val="0070C0"/>
+                </a:solidFill>
+                <a:latin typeface="Consolas" panose="020B0609020204030204" pitchFamily="49" charset="0"/>
+                <a:cs typeface="Consolas" panose="020B0609020204030204" pitchFamily="49" charset="0"/>
+              </a:rPr>
+              <a:t>binom_test</a:t>
+            </a:r>
+            <a:r>
+              <a:rPr lang="en-US" sz="1200" b="1" dirty="0">
+                <a:solidFill>
+                  <a:srgbClr val="0070C0"/>
+                </a:solidFill>
+                <a:latin typeface="Consolas" panose="020B0609020204030204" pitchFamily="49" charset="0"/>
+                <a:cs typeface="Consolas" panose="020B0609020204030204" pitchFamily="49" charset="0"/>
+              </a:rPr>
+              <a:t>(x=500, n=1000, p=1/2, alternative='two-sided')  </a:t>
+            </a:r>
+            <a:r>
+              <a:rPr lang="en-US" sz="1200" b="1" dirty="0">
+                <a:solidFill>
+                  <a:srgbClr val="00B050"/>
+                </a:solidFill>
+                <a:latin typeface="Consolas" panose="020B0609020204030204" pitchFamily="49" charset="0"/>
+                <a:cs typeface="Consolas" panose="020B0609020204030204" pitchFamily="49" charset="0"/>
+              </a:rPr>
+              <a:t># 1.0</a:t>
+            </a:r>
+          </a:p>
+          <a:p>
+            <a:r>
+              <a:rPr lang="en-US" sz="1200" b="1" dirty="0" err="1">
+                <a:solidFill>
+                  <a:srgbClr val="0070C0"/>
+                </a:solidFill>
+                <a:latin typeface="Consolas" panose="020B0609020204030204" pitchFamily="49" charset="0"/>
+                <a:cs typeface="Consolas" panose="020B0609020204030204" pitchFamily="49" charset="0"/>
+              </a:rPr>
+              <a:t>binom_test</a:t>
+            </a:r>
+            <a:r>
+              <a:rPr lang="en-US" sz="1200" b="1" dirty="0">
+                <a:solidFill>
+                  <a:srgbClr val="0070C0"/>
+                </a:solidFill>
+                <a:latin typeface="Consolas" panose="020B0609020204030204" pitchFamily="49" charset="0"/>
+                <a:cs typeface="Consolas" panose="020B0609020204030204" pitchFamily="49" charset="0"/>
+              </a:rPr>
+              <a:t>(x=530, n=1000, p=1/2, alternative='two-sided')  </a:t>
+            </a:r>
+            <a:r>
+              <a:rPr lang="en-US" sz="1200" b="1" dirty="0">
+                <a:solidFill>
+                  <a:srgbClr val="00B050"/>
+                </a:solidFill>
+                <a:latin typeface="Consolas" panose="020B0609020204030204" pitchFamily="49" charset="0"/>
+                <a:cs typeface="Consolas" panose="020B0609020204030204" pitchFamily="49" charset="0"/>
+              </a:rPr>
+              <a:t># 0.062</a:t>
+            </a:r>
+          </a:p>
+          <a:p>
+            <a:r>
+              <a:rPr lang="en-US" sz="1200" b="1" dirty="0" err="1">
+                <a:solidFill>
+                  <a:srgbClr val="0070C0"/>
+                </a:solidFill>
+                <a:latin typeface="Consolas" panose="020B0609020204030204" pitchFamily="49" charset="0"/>
+                <a:cs typeface="Consolas" panose="020B0609020204030204" pitchFamily="49" charset="0"/>
+              </a:rPr>
+              <a:t>binom_test</a:t>
+            </a:r>
+            <a:r>
+              <a:rPr lang="en-US" sz="1200" b="1" dirty="0">
+                <a:solidFill>
+                  <a:srgbClr val="0070C0"/>
+                </a:solidFill>
+                <a:latin typeface="Consolas" panose="020B0609020204030204" pitchFamily="49" charset="0"/>
+                <a:cs typeface="Consolas" panose="020B0609020204030204" pitchFamily="49" charset="0"/>
+              </a:rPr>
+              <a:t>(x=999, n=1000, p=1/2, alternative='two-sided')  </a:t>
+            </a:r>
+            <a:r>
+              <a:rPr lang="en-US" sz="1200" b="1" dirty="0">
+                <a:solidFill>
+                  <a:srgbClr val="00B050"/>
+                </a:solidFill>
+                <a:latin typeface="Consolas" panose="020B0609020204030204" pitchFamily="49" charset="0"/>
+                <a:cs typeface="Consolas" panose="020B0609020204030204" pitchFamily="49" charset="0"/>
+              </a:rPr>
+              <a:t># 0</a:t>
+            </a:r>
+          </a:p>
+        </p:txBody>
+      </p:sp>
+      <p:pic>
+        <p:nvPicPr>
+          <p:cNvPr id="15" name="Picture 14">
+            <a:extLst>
+              <a:ext uri="{FF2B5EF4-FFF2-40B4-BE49-F238E27FC236}">
+                <a16:creationId xmlns:a16="http://schemas.microsoft.com/office/drawing/2014/main" id="{86071A22-B3DB-A94F-8B3F-C3E70C2146C1}"/>
+              </a:ext>
+            </a:extLst>
+          </p:cNvPr>
+          <p:cNvPicPr>
+            <a:picLocks noChangeAspect="1"/>
+          </p:cNvPicPr>
+          <p:nvPr/>
+        </p:nvPicPr>
+        <p:blipFill>
+          <a:blip r:embed="rId4" cstate="email">
+            <a:extLst>
+              <a:ext uri="{28A0092B-C50C-407E-A947-70E740481C1C}">
+                <a14:useLocalDpi xmlns:a14="http://schemas.microsoft.com/office/drawing/2010/main"/>
+              </a:ext>
+            </a:extLst>
+          </a:blip>
+          <a:stretch>
+            <a:fillRect/>
+          </a:stretch>
+        </p:blipFill>
+        <p:spPr>
+          <a:xfrm>
+            <a:off x="4107674" y="4052375"/>
+            <a:ext cx="1955444" cy="1303629"/>
+          </a:xfrm>
+          <a:prstGeom prst="rect">
+            <a:avLst/>
+          </a:prstGeom>
+        </p:spPr>
+      </p:pic>
+      <p:sp>
+        <p:nvSpPr>
+          <p:cNvPr id="16" name="TextBox 15">
+            <a:extLst>
+              <a:ext uri="{FF2B5EF4-FFF2-40B4-BE49-F238E27FC236}">
+                <a16:creationId xmlns:a16="http://schemas.microsoft.com/office/drawing/2014/main" id="{D511F09B-6968-D94E-AA08-C85D9DF4BB1F}"/>
+              </a:ext>
+            </a:extLst>
+          </p:cNvPr>
+          <p:cNvSpPr txBox="1"/>
+          <p:nvPr/>
+        </p:nvSpPr>
+        <p:spPr>
+          <a:xfrm>
+            <a:off x="55090" y="2538720"/>
+            <a:ext cx="3871452" cy="3970318"/>
+          </a:xfrm>
+          <a:prstGeom prst="rect">
+            <a:avLst/>
+          </a:prstGeom>
+          <a:noFill/>
+        </p:spPr>
+        <p:txBody>
+          <a:bodyPr wrap="square" rtlCol="0">
+            <a:spAutoFit/>
+          </a:bodyPr>
+          <a:lstStyle/>
+          <a:p>
+            <a:r>
+              <a:rPr lang="en-US" dirty="0">
+                <a:solidFill>
+                  <a:srgbClr val="0070C0"/>
+                </a:solidFill>
+                <a:latin typeface="Consolas" panose="020B0609020204030204" pitchFamily="49" charset="0"/>
+                <a:cs typeface="Consolas" panose="020B0609020204030204" pitchFamily="49" charset="0"/>
+              </a:rPr>
+              <a:t>from </a:t>
+            </a:r>
+            <a:r>
+              <a:rPr lang="en-US" dirty="0" err="1">
+                <a:solidFill>
+                  <a:srgbClr val="0070C0"/>
+                </a:solidFill>
+                <a:latin typeface="Consolas" panose="020B0609020204030204" pitchFamily="49" charset="0"/>
+                <a:cs typeface="Consolas" panose="020B0609020204030204" pitchFamily="49" charset="0"/>
+              </a:rPr>
+              <a:t>scipy.stats</a:t>
+            </a:r>
+            <a:r>
+              <a:rPr lang="en-US" dirty="0">
+                <a:solidFill>
+                  <a:srgbClr val="0070C0"/>
+                </a:solidFill>
+                <a:latin typeface="Consolas" panose="020B0609020204030204" pitchFamily="49" charset="0"/>
+                <a:cs typeface="Consolas" panose="020B0609020204030204" pitchFamily="49" charset="0"/>
+              </a:rPr>
+              <a:t> import </a:t>
+            </a:r>
+            <a:r>
+              <a:rPr lang="en-US" dirty="0" err="1">
+                <a:solidFill>
+                  <a:srgbClr val="0070C0"/>
+                </a:solidFill>
+                <a:latin typeface="Consolas" panose="020B0609020204030204" pitchFamily="49" charset="0"/>
+                <a:cs typeface="Consolas" panose="020B0609020204030204" pitchFamily="49" charset="0"/>
+              </a:rPr>
+              <a:t>binom</a:t>
+            </a:r>
+            <a:r>
+              <a:rPr lang="en-US" dirty="0">
+                <a:solidFill>
+                  <a:srgbClr val="0070C0"/>
+                </a:solidFill>
+                <a:latin typeface="Consolas" panose="020B0609020204030204" pitchFamily="49" charset="0"/>
+                <a:cs typeface="Consolas" panose="020B0609020204030204" pitchFamily="49" charset="0"/>
+              </a:rPr>
+              <a:t> </a:t>
+            </a:r>
+          </a:p>
+          <a:p>
+            <a:endParaRPr lang="en-US" b="1" dirty="0">
+              <a:solidFill>
+                <a:srgbClr val="00B050"/>
+              </a:solidFill>
+              <a:latin typeface="Consolas" panose="020B0609020204030204" pitchFamily="49" charset="0"/>
+              <a:cs typeface="Consolas" panose="020B0609020204030204" pitchFamily="49" charset="0"/>
+            </a:endParaRPr>
+          </a:p>
+          <a:p>
+            <a:r>
+              <a:rPr lang="en-US" dirty="0" err="1">
+                <a:solidFill>
+                  <a:srgbClr val="0070C0"/>
+                </a:solidFill>
+                <a:latin typeface="Consolas" panose="020B0609020204030204" pitchFamily="49" charset="0"/>
+                <a:cs typeface="Consolas" panose="020B0609020204030204" pitchFamily="49" charset="0"/>
+              </a:rPr>
+              <a:t>binom.pmf</a:t>
+            </a:r>
+            <a:r>
+              <a:rPr lang="en-US" dirty="0">
+                <a:solidFill>
+                  <a:srgbClr val="0070C0"/>
+                </a:solidFill>
+                <a:latin typeface="Consolas" panose="020B0609020204030204" pitchFamily="49" charset="0"/>
+                <a:cs typeface="Consolas" panose="020B0609020204030204" pitchFamily="49" charset="0"/>
+              </a:rPr>
+              <a:t>(0,2,0.5) </a:t>
+            </a:r>
+            <a:r>
+              <a:rPr lang="en-US" b="1" dirty="0">
+                <a:solidFill>
+                  <a:srgbClr val="00B050"/>
+                </a:solidFill>
+                <a:latin typeface="Consolas" panose="020B0609020204030204" pitchFamily="49" charset="0"/>
+                <a:cs typeface="Consolas" panose="020B0609020204030204" pitchFamily="49" charset="0"/>
+              </a:rPr>
+              <a:t># 0.25</a:t>
+            </a:r>
+          </a:p>
+          <a:p>
+            <a:r>
+              <a:rPr lang="en-US" dirty="0" err="1">
+                <a:solidFill>
+                  <a:srgbClr val="0070C0"/>
+                </a:solidFill>
+                <a:latin typeface="Consolas" panose="020B0609020204030204" pitchFamily="49" charset="0"/>
+                <a:cs typeface="Consolas" panose="020B0609020204030204" pitchFamily="49" charset="0"/>
+              </a:rPr>
+              <a:t>binom.pmf</a:t>
+            </a:r>
+            <a:r>
+              <a:rPr lang="en-US" dirty="0">
+                <a:solidFill>
+                  <a:srgbClr val="0070C0"/>
+                </a:solidFill>
+                <a:latin typeface="Consolas" panose="020B0609020204030204" pitchFamily="49" charset="0"/>
+                <a:cs typeface="Consolas" panose="020B0609020204030204" pitchFamily="49" charset="0"/>
+              </a:rPr>
+              <a:t>(1,2,0.5) </a:t>
+            </a:r>
+            <a:r>
+              <a:rPr lang="en-US" b="1" dirty="0">
+                <a:solidFill>
+                  <a:srgbClr val="00B050"/>
+                </a:solidFill>
+                <a:latin typeface="Consolas" panose="020B0609020204030204" pitchFamily="49" charset="0"/>
+                <a:cs typeface="Consolas" panose="020B0609020204030204" pitchFamily="49" charset="0"/>
+              </a:rPr>
+              <a:t># 0.5</a:t>
+            </a:r>
+          </a:p>
+          <a:p>
+            <a:r>
+              <a:rPr lang="en-US" dirty="0" err="1">
+                <a:solidFill>
+                  <a:srgbClr val="0070C0"/>
+                </a:solidFill>
+                <a:latin typeface="Consolas" panose="020B0609020204030204" pitchFamily="49" charset="0"/>
+                <a:cs typeface="Consolas" panose="020B0609020204030204" pitchFamily="49" charset="0"/>
+              </a:rPr>
+              <a:t>binom.pmf</a:t>
+            </a:r>
+            <a:r>
+              <a:rPr lang="en-US" dirty="0">
+                <a:solidFill>
+                  <a:srgbClr val="0070C0"/>
+                </a:solidFill>
+                <a:latin typeface="Consolas" panose="020B0609020204030204" pitchFamily="49" charset="0"/>
+                <a:cs typeface="Consolas" panose="020B0609020204030204" pitchFamily="49" charset="0"/>
+              </a:rPr>
+              <a:t>(2,2,0.5) </a:t>
+            </a:r>
+            <a:r>
+              <a:rPr lang="en-US" b="1" dirty="0">
+                <a:solidFill>
+                  <a:srgbClr val="00B050"/>
+                </a:solidFill>
+                <a:latin typeface="Consolas" panose="020B0609020204030204" pitchFamily="49" charset="0"/>
+                <a:cs typeface="Consolas" panose="020B0609020204030204" pitchFamily="49" charset="0"/>
+              </a:rPr>
+              <a:t># 0.25</a:t>
+            </a:r>
+          </a:p>
+          <a:p>
+            <a:endParaRPr lang="en-US" b="1" dirty="0">
+              <a:solidFill>
+                <a:srgbClr val="00B050"/>
+              </a:solidFill>
+              <a:latin typeface="Consolas" panose="020B0609020204030204" pitchFamily="49" charset="0"/>
+              <a:cs typeface="Consolas" panose="020B0609020204030204" pitchFamily="49" charset="0"/>
+            </a:endParaRPr>
+          </a:p>
+          <a:p>
+            <a:r>
+              <a:rPr lang="en-US" dirty="0">
+                <a:solidFill>
+                  <a:srgbClr val="0070C0"/>
+                </a:solidFill>
+                <a:latin typeface="Consolas" panose="020B0609020204030204" pitchFamily="49" charset="0"/>
+                <a:cs typeface="Consolas" panose="020B0609020204030204" pitchFamily="49" charset="0"/>
+              </a:rPr>
+              <a:t>n=10</a:t>
+            </a:r>
+          </a:p>
+          <a:p>
+            <a:r>
+              <a:rPr lang="en-US" dirty="0" err="1">
+                <a:solidFill>
+                  <a:srgbClr val="0070C0"/>
+                </a:solidFill>
+                <a:latin typeface="Consolas" panose="020B0609020204030204" pitchFamily="49" charset="0"/>
+                <a:cs typeface="Consolas" panose="020B0609020204030204" pitchFamily="49" charset="0"/>
+              </a:rPr>
+              <a:t>arr</a:t>
+            </a:r>
+            <a:r>
+              <a:rPr lang="en-US" dirty="0">
+                <a:solidFill>
+                  <a:srgbClr val="0070C0"/>
+                </a:solidFill>
+                <a:latin typeface="Consolas" panose="020B0609020204030204" pitchFamily="49" charset="0"/>
+                <a:cs typeface="Consolas" panose="020B0609020204030204" pitchFamily="49" charset="0"/>
+              </a:rPr>
+              <a:t> = []</a:t>
+            </a:r>
+          </a:p>
+          <a:p>
+            <a:r>
+              <a:rPr lang="en-US" dirty="0">
+                <a:solidFill>
+                  <a:srgbClr val="0070C0"/>
+                </a:solidFill>
+                <a:latin typeface="Consolas" panose="020B0609020204030204" pitchFamily="49" charset="0"/>
+                <a:cs typeface="Consolas" panose="020B0609020204030204" pitchFamily="49" charset="0"/>
+              </a:rPr>
+              <a:t>for ii in range(n+1):</a:t>
+            </a:r>
+          </a:p>
+          <a:p>
+            <a:r>
+              <a:rPr lang="en-US" dirty="0">
+                <a:solidFill>
+                  <a:srgbClr val="0070C0"/>
+                </a:solidFill>
+                <a:latin typeface="Consolas" panose="020B0609020204030204" pitchFamily="49" charset="0"/>
+                <a:cs typeface="Consolas" panose="020B0609020204030204" pitchFamily="49" charset="0"/>
+              </a:rPr>
+              <a:t>    </a:t>
+            </a:r>
+            <a:r>
+              <a:rPr lang="en-US" dirty="0" err="1">
+                <a:solidFill>
+                  <a:srgbClr val="0070C0"/>
+                </a:solidFill>
+                <a:latin typeface="Consolas" panose="020B0609020204030204" pitchFamily="49" charset="0"/>
+                <a:cs typeface="Consolas" panose="020B0609020204030204" pitchFamily="49" charset="0"/>
+              </a:rPr>
+              <a:t>arr.append</a:t>
+            </a:r>
+            <a:r>
+              <a:rPr lang="en-US" dirty="0">
+                <a:solidFill>
+                  <a:srgbClr val="0070C0"/>
+                </a:solidFill>
+                <a:latin typeface="Consolas" panose="020B0609020204030204" pitchFamily="49" charset="0"/>
+                <a:cs typeface="Consolas" panose="020B0609020204030204" pitchFamily="49" charset="0"/>
+              </a:rPr>
+              <a:t>(</a:t>
+            </a:r>
+            <a:r>
+              <a:rPr lang="en-US" dirty="0" err="1">
+                <a:solidFill>
+                  <a:srgbClr val="0070C0"/>
+                </a:solidFill>
+                <a:latin typeface="Consolas" panose="020B0609020204030204" pitchFamily="49" charset="0"/>
+                <a:cs typeface="Consolas" panose="020B0609020204030204" pitchFamily="49" charset="0"/>
+              </a:rPr>
+              <a:t>binom.pmf</a:t>
+            </a:r>
+            <a:r>
+              <a:rPr lang="en-US" dirty="0">
+                <a:solidFill>
+                  <a:srgbClr val="0070C0"/>
+                </a:solidFill>
+                <a:latin typeface="Consolas" panose="020B0609020204030204" pitchFamily="49" charset="0"/>
+                <a:cs typeface="Consolas" panose="020B0609020204030204" pitchFamily="49" charset="0"/>
+              </a:rPr>
+              <a:t>(ii, n, 0.5))</a:t>
+            </a:r>
+          </a:p>
+          <a:p>
+            <a:r>
+              <a:rPr lang="en-US" dirty="0">
+                <a:solidFill>
+                  <a:srgbClr val="0070C0"/>
+                </a:solidFill>
+                <a:latin typeface="Consolas" panose="020B0609020204030204" pitchFamily="49" charset="0"/>
+                <a:cs typeface="Consolas" panose="020B0609020204030204" pitchFamily="49" charset="0"/>
+              </a:rPr>
+              <a:t>print(sum(</a:t>
+            </a:r>
+            <a:r>
+              <a:rPr lang="en-US" dirty="0" err="1">
+                <a:solidFill>
+                  <a:srgbClr val="0070C0"/>
+                </a:solidFill>
+                <a:latin typeface="Consolas" panose="020B0609020204030204" pitchFamily="49" charset="0"/>
+                <a:cs typeface="Consolas" panose="020B0609020204030204" pitchFamily="49" charset="0"/>
+              </a:rPr>
+              <a:t>arr</a:t>
+            </a:r>
+            <a:r>
+              <a:rPr lang="en-US" dirty="0">
+                <a:solidFill>
+                  <a:srgbClr val="0070C0"/>
+                </a:solidFill>
+                <a:latin typeface="Consolas" panose="020B0609020204030204" pitchFamily="49" charset="0"/>
+                <a:cs typeface="Consolas" panose="020B0609020204030204" pitchFamily="49" charset="0"/>
+              </a:rPr>
+              <a:t>))</a:t>
+            </a:r>
+            <a:r>
+              <a:rPr lang="en-US" b="1" dirty="0">
+                <a:solidFill>
+                  <a:srgbClr val="00B050"/>
+                </a:solidFill>
+                <a:latin typeface="Consolas" panose="020B0609020204030204" pitchFamily="49" charset="0"/>
+                <a:cs typeface="Consolas" panose="020B0609020204030204" pitchFamily="49" charset="0"/>
+              </a:rPr>
+              <a:t>  # 1</a:t>
+            </a:r>
+          </a:p>
+          <a:p>
+            <a:r>
+              <a:rPr lang="en-US" dirty="0">
+                <a:solidFill>
+                  <a:srgbClr val="0070C0"/>
+                </a:solidFill>
+                <a:latin typeface="Consolas" panose="020B0609020204030204" pitchFamily="49" charset="0"/>
+                <a:cs typeface="Consolas" panose="020B0609020204030204" pitchFamily="49" charset="0"/>
+              </a:rPr>
+              <a:t>print(</a:t>
+            </a:r>
+            <a:r>
+              <a:rPr lang="en-US" dirty="0" err="1">
+                <a:solidFill>
+                  <a:srgbClr val="0070C0"/>
+                </a:solidFill>
+                <a:latin typeface="Consolas" panose="020B0609020204030204" pitchFamily="49" charset="0"/>
+                <a:cs typeface="Consolas" panose="020B0609020204030204" pitchFamily="49" charset="0"/>
+              </a:rPr>
+              <a:t>arr</a:t>
+            </a:r>
+            <a:r>
+              <a:rPr lang="en-US" dirty="0">
+                <a:solidFill>
+                  <a:srgbClr val="0070C0"/>
+                </a:solidFill>
+                <a:latin typeface="Consolas" panose="020B0609020204030204" pitchFamily="49" charset="0"/>
+                <a:cs typeface="Consolas" panose="020B0609020204030204" pitchFamily="49" charset="0"/>
+              </a:rPr>
+              <a:t>)</a:t>
+            </a:r>
+          </a:p>
+          <a:p>
+            <a:endParaRPr lang="en-US" b="1" dirty="0">
+              <a:solidFill>
+                <a:srgbClr val="00B050"/>
+              </a:solidFill>
+              <a:latin typeface="Consolas" panose="020B0609020204030204" pitchFamily="49" charset="0"/>
+              <a:cs typeface="Consolas" panose="020B0609020204030204" pitchFamily="49" charset="0"/>
+            </a:endParaRPr>
+          </a:p>
+          <a:p>
+            <a:r>
+              <a:rPr lang="en-US" b="1" dirty="0">
+                <a:solidFill>
+                  <a:srgbClr val="00B050"/>
+                </a:solidFill>
+                <a:latin typeface="Consolas" panose="020B0609020204030204" pitchFamily="49" charset="0"/>
+                <a:cs typeface="Consolas" panose="020B0609020204030204" pitchFamily="49" charset="0"/>
+              </a:rPr>
+              <a:t># 8, 9, 10 heads out of 10 trials:</a:t>
+            </a:r>
+          </a:p>
+          <a:p>
+            <a:r>
+              <a:rPr lang="en-US" dirty="0" err="1">
+                <a:solidFill>
+                  <a:srgbClr val="0070C0"/>
+                </a:solidFill>
+                <a:latin typeface="Consolas" panose="020B0609020204030204" pitchFamily="49" charset="0"/>
+                <a:cs typeface="Consolas" panose="020B0609020204030204" pitchFamily="49" charset="0"/>
+              </a:rPr>
+              <a:t>binom.pmf</a:t>
+            </a:r>
+            <a:r>
+              <a:rPr lang="en-US" dirty="0">
+                <a:solidFill>
+                  <a:srgbClr val="0070C0"/>
+                </a:solidFill>
+                <a:latin typeface="Consolas" panose="020B0609020204030204" pitchFamily="49" charset="0"/>
+                <a:cs typeface="Consolas" panose="020B0609020204030204" pitchFamily="49" charset="0"/>
+              </a:rPr>
+              <a:t>(8,10,0.5)  # 0.043945</a:t>
+            </a:r>
+          </a:p>
+          <a:p>
+            <a:r>
+              <a:rPr lang="en-US" dirty="0" err="1">
+                <a:solidFill>
+                  <a:srgbClr val="0070C0"/>
+                </a:solidFill>
+                <a:latin typeface="Consolas" panose="020B0609020204030204" pitchFamily="49" charset="0"/>
+                <a:cs typeface="Consolas" panose="020B0609020204030204" pitchFamily="49" charset="0"/>
+              </a:rPr>
+              <a:t>binom.pmf</a:t>
+            </a:r>
+            <a:r>
+              <a:rPr lang="en-US" dirty="0">
+                <a:solidFill>
+                  <a:srgbClr val="0070C0"/>
+                </a:solidFill>
+                <a:latin typeface="Consolas" panose="020B0609020204030204" pitchFamily="49" charset="0"/>
+                <a:cs typeface="Consolas" panose="020B0609020204030204" pitchFamily="49" charset="0"/>
+              </a:rPr>
+              <a:t>(9,10,0.5)  # 0.009766</a:t>
+            </a:r>
+          </a:p>
+          <a:p>
+            <a:r>
+              <a:rPr lang="en-US" dirty="0" err="1">
+                <a:solidFill>
+                  <a:srgbClr val="0070C0"/>
+                </a:solidFill>
+                <a:latin typeface="Consolas" panose="020B0609020204030204" pitchFamily="49" charset="0"/>
+                <a:cs typeface="Consolas" panose="020B0609020204030204" pitchFamily="49" charset="0"/>
+              </a:rPr>
+              <a:t>binom.pmf</a:t>
+            </a:r>
+            <a:r>
+              <a:rPr lang="en-US" dirty="0">
+                <a:solidFill>
+                  <a:srgbClr val="0070C0"/>
+                </a:solidFill>
+                <a:latin typeface="Consolas" panose="020B0609020204030204" pitchFamily="49" charset="0"/>
+                <a:cs typeface="Consolas" panose="020B0609020204030204" pitchFamily="49" charset="0"/>
+              </a:rPr>
+              <a:t>(10,10,0.5) # 0.000977</a:t>
+            </a:r>
+          </a:p>
+          <a:p>
+            <a:r>
+              <a:rPr lang="en-US" dirty="0">
+                <a:solidFill>
+                  <a:srgbClr val="0070C0"/>
+                </a:solidFill>
+                <a:latin typeface="Consolas" panose="020B0609020204030204" pitchFamily="49" charset="0"/>
+                <a:cs typeface="Consolas" panose="020B0609020204030204" pitchFamily="49" charset="0"/>
+              </a:rPr>
+              <a:t>                # sum: 0.054688</a:t>
+            </a:r>
+          </a:p>
+        </p:txBody>
+      </p:sp>
+      <p:sp>
+        <p:nvSpPr>
+          <p:cNvPr id="17" name="TextBox 16">
+            <a:extLst>
+              <a:ext uri="{FF2B5EF4-FFF2-40B4-BE49-F238E27FC236}">
+                <a16:creationId xmlns:a16="http://schemas.microsoft.com/office/drawing/2014/main" id="{3AB7D7A0-D8BB-7D4C-9883-4005944A1DA6}"/>
+              </a:ext>
+            </a:extLst>
+          </p:cNvPr>
+          <p:cNvSpPr txBox="1"/>
+          <p:nvPr/>
+        </p:nvSpPr>
+        <p:spPr>
+          <a:xfrm>
+            <a:off x="4107674" y="131094"/>
+            <a:ext cx="7578799" cy="1200329"/>
+          </a:xfrm>
+          <a:prstGeom prst="rect">
+            <a:avLst/>
+          </a:prstGeom>
+          <a:noFill/>
+        </p:spPr>
+        <p:txBody>
+          <a:bodyPr wrap="square" rtlCol="0">
+            <a:spAutoFit/>
+          </a:bodyPr>
+          <a:lstStyle/>
+          <a:p>
+            <a:r>
+              <a:rPr lang="en-US" sz="1200" b="1" dirty="0">
+                <a:solidFill>
+                  <a:srgbClr val="00B050"/>
+                </a:solidFill>
+                <a:latin typeface="Consolas" panose="020B0609020204030204" pitchFamily="49" charset="0"/>
+                <a:cs typeface="Consolas" panose="020B0609020204030204" pitchFamily="49" charset="0"/>
+              </a:rPr>
+              <a:t># We flip a coin N=1000 times.</a:t>
+            </a:r>
+          </a:p>
+          <a:p>
+            <a:r>
+              <a:rPr lang="en-US" sz="1200" b="1" dirty="0">
+                <a:solidFill>
+                  <a:srgbClr val="00B050"/>
+                </a:solidFill>
+                <a:latin typeface="Consolas" panose="020B0609020204030204" pitchFamily="49" charset="0"/>
+                <a:cs typeface="Consolas" panose="020B0609020204030204" pitchFamily="49" charset="0"/>
+              </a:rPr>
+              <a:t># If x is number of heads, it has binomial distribution with sigma = sqrt(N)/2 = 15.81</a:t>
+            </a:r>
+          </a:p>
+          <a:p>
+            <a:r>
+              <a:rPr lang="en-US" sz="1200" b="1" dirty="0">
+                <a:solidFill>
+                  <a:srgbClr val="00B050"/>
+                </a:solidFill>
+                <a:latin typeface="Consolas" panose="020B0609020204030204" pitchFamily="49" charset="0"/>
+                <a:cs typeface="Consolas" panose="020B0609020204030204" pitchFamily="49" charset="0"/>
+              </a:rPr>
+              <a:t># If it lands on heads 531 times, it is within 2*sigma. </a:t>
+            </a:r>
+          </a:p>
+          <a:p>
+            <a:r>
+              <a:rPr lang="en-US" sz="1200" b="1" dirty="0">
+                <a:solidFill>
+                  <a:srgbClr val="00B050"/>
+                </a:solidFill>
+                <a:latin typeface="Consolas" panose="020B0609020204030204" pitchFamily="49" charset="0"/>
+                <a:cs typeface="Consolas" panose="020B0609020204030204" pitchFamily="49" charset="0"/>
+              </a:rPr>
+              <a:t># But let's perform a binomial test for null hypothesis that coin is fair:</a:t>
+            </a:r>
+          </a:p>
+          <a:p>
+            <a:r>
+              <a:rPr lang="en-US" sz="1200" b="1" dirty="0" err="1">
+                <a:solidFill>
+                  <a:srgbClr val="0070C0"/>
+                </a:solidFill>
+                <a:latin typeface="Consolas" panose="020B0609020204030204" pitchFamily="49" charset="0"/>
+                <a:cs typeface="Consolas" panose="020B0609020204030204" pitchFamily="49" charset="0"/>
+              </a:rPr>
+              <a:t>binom_test</a:t>
+            </a:r>
+            <a:r>
+              <a:rPr lang="en-US" sz="1200" b="1" dirty="0">
+                <a:solidFill>
+                  <a:srgbClr val="0070C0"/>
+                </a:solidFill>
+                <a:latin typeface="Consolas" panose="020B0609020204030204" pitchFamily="49" charset="0"/>
+                <a:cs typeface="Consolas" panose="020B0609020204030204" pitchFamily="49" charset="0"/>
+              </a:rPr>
+              <a:t>(x=531, n=1000, p=1/2, alternative='greater') </a:t>
+            </a:r>
+            <a:r>
+              <a:rPr lang="en-US" sz="1200" b="1" dirty="0">
+                <a:solidFill>
+                  <a:srgbClr val="00B050"/>
+                </a:solidFill>
+                <a:latin typeface="Consolas" panose="020B0609020204030204" pitchFamily="49" charset="0"/>
+                <a:cs typeface="Consolas" panose="020B0609020204030204" pitchFamily="49" charset="0"/>
+              </a:rPr>
+              <a:t># P = 0.0268</a:t>
+            </a:r>
+          </a:p>
+          <a:p>
+            <a:r>
+              <a:rPr lang="en-US" sz="1200" b="1" dirty="0">
+                <a:solidFill>
+                  <a:srgbClr val="00B050"/>
+                </a:solidFill>
+                <a:latin typeface="Consolas" panose="020B0609020204030204" pitchFamily="49" charset="0"/>
+                <a:cs typeface="Consolas" panose="020B0609020204030204" pitchFamily="49" charset="0"/>
+              </a:rPr>
+              <a:t># Because this p-value (0.0268) is less than 0.05, we reject the null hypothesis.</a:t>
+            </a:r>
+          </a:p>
+        </p:txBody>
+      </p:sp>
+      <p:pic>
+        <p:nvPicPr>
+          <p:cNvPr id="18" name="Picture 17">
+            <a:extLst>
+              <a:ext uri="{FF2B5EF4-FFF2-40B4-BE49-F238E27FC236}">
+                <a16:creationId xmlns:a16="http://schemas.microsoft.com/office/drawing/2014/main" id="{F0E66C0F-DB7B-5248-ABF5-B1AD675C2E7D}"/>
+              </a:ext>
+            </a:extLst>
+          </p:cNvPr>
+          <p:cNvPicPr>
+            <a:picLocks noChangeAspect="1"/>
+          </p:cNvPicPr>
+          <p:nvPr/>
+        </p:nvPicPr>
+        <p:blipFill>
+          <a:blip r:embed="rId5" cstate="email">
+            <a:extLst>
+              <a:ext uri="{28A0092B-C50C-407E-A947-70E740481C1C}">
+                <a14:useLocalDpi xmlns:a14="http://schemas.microsoft.com/office/drawing/2010/main"/>
+              </a:ext>
+            </a:extLst>
+          </a:blip>
+          <a:stretch>
+            <a:fillRect/>
+          </a:stretch>
+        </p:blipFill>
+        <p:spPr>
+          <a:xfrm>
+            <a:off x="4107674" y="1489196"/>
+            <a:ext cx="1955442" cy="1303628"/>
+          </a:xfrm>
+          <a:prstGeom prst="rect">
+            <a:avLst/>
+          </a:prstGeom>
+        </p:spPr>
+      </p:pic>
+      <p:sp>
+        <p:nvSpPr>
+          <p:cNvPr id="19" name="TextBox 18">
+            <a:extLst>
+              <a:ext uri="{FF2B5EF4-FFF2-40B4-BE49-F238E27FC236}">
+                <a16:creationId xmlns:a16="http://schemas.microsoft.com/office/drawing/2014/main" id="{23B13AD1-74A9-4B45-9F1F-80C123028C44}"/>
+              </a:ext>
+            </a:extLst>
+          </p:cNvPr>
+          <p:cNvSpPr txBox="1"/>
+          <p:nvPr/>
+        </p:nvSpPr>
+        <p:spPr>
+          <a:xfrm>
+            <a:off x="6128884" y="1282539"/>
+            <a:ext cx="5885365" cy="1384995"/>
+          </a:xfrm>
+          <a:prstGeom prst="rect">
+            <a:avLst/>
+          </a:prstGeom>
+          <a:noFill/>
+        </p:spPr>
+        <p:txBody>
+          <a:bodyPr wrap="square" rtlCol="0">
+            <a:spAutoFit/>
+          </a:bodyPr>
+          <a:lstStyle/>
+          <a:p>
+            <a:r>
+              <a:rPr lang="en-US" sz="1200" b="1" dirty="0">
+                <a:solidFill>
+                  <a:srgbClr val="0070C0"/>
+                </a:solidFill>
+                <a:latin typeface="Consolas" panose="020B0609020204030204" pitchFamily="49" charset="0"/>
+                <a:cs typeface="Consolas" panose="020B0609020204030204" pitchFamily="49" charset="0"/>
+              </a:rPr>
+              <a:t>from </a:t>
+            </a:r>
+            <a:r>
+              <a:rPr lang="en-US" sz="1200" b="1" dirty="0" err="1">
+                <a:solidFill>
+                  <a:srgbClr val="0070C0"/>
+                </a:solidFill>
+                <a:latin typeface="Consolas" panose="020B0609020204030204" pitchFamily="49" charset="0"/>
+                <a:cs typeface="Consolas" panose="020B0609020204030204" pitchFamily="49" charset="0"/>
+              </a:rPr>
+              <a:t>scipy.stats</a:t>
+            </a:r>
+            <a:r>
+              <a:rPr lang="en-US" sz="1200" b="1" dirty="0">
+                <a:solidFill>
+                  <a:srgbClr val="0070C0"/>
+                </a:solidFill>
+                <a:latin typeface="Consolas" panose="020B0609020204030204" pitchFamily="49" charset="0"/>
+                <a:cs typeface="Consolas" panose="020B0609020204030204" pitchFamily="49" charset="0"/>
+              </a:rPr>
+              <a:t> import </a:t>
+            </a:r>
+            <a:r>
+              <a:rPr lang="en-US" sz="1200" b="1" dirty="0" err="1">
+                <a:solidFill>
+                  <a:srgbClr val="0070C0"/>
+                </a:solidFill>
+                <a:latin typeface="Consolas" panose="020B0609020204030204" pitchFamily="49" charset="0"/>
+                <a:cs typeface="Consolas" panose="020B0609020204030204" pitchFamily="49" charset="0"/>
+              </a:rPr>
+              <a:t>binom_test</a:t>
+            </a:r>
+            <a:r>
+              <a:rPr lang="en-US" sz="1200" b="1" dirty="0">
+                <a:solidFill>
+                  <a:srgbClr val="00B050"/>
+                </a:solidFill>
+                <a:latin typeface="Consolas" panose="020B0609020204030204" pitchFamily="49" charset="0"/>
+                <a:cs typeface="Consolas" panose="020B0609020204030204" pitchFamily="49" charset="0"/>
+              </a:rPr>
+              <a:t>  # returns p-value of test</a:t>
+            </a:r>
+          </a:p>
+          <a:p>
+            <a:endParaRPr lang="en-US" sz="1200" b="1" dirty="0">
+              <a:solidFill>
+                <a:srgbClr val="0070C0"/>
+              </a:solidFill>
+              <a:latin typeface="Consolas" panose="020B0609020204030204" pitchFamily="49" charset="0"/>
+              <a:cs typeface="Consolas" panose="020B0609020204030204" pitchFamily="49" charset="0"/>
+            </a:endParaRPr>
+          </a:p>
+          <a:p>
+            <a:r>
+              <a:rPr lang="en-US" sz="1200" b="1" dirty="0" err="1">
+                <a:solidFill>
+                  <a:srgbClr val="0070C0"/>
+                </a:solidFill>
+                <a:latin typeface="Consolas" panose="020B0609020204030204" pitchFamily="49" charset="0"/>
+                <a:cs typeface="Consolas" panose="020B0609020204030204" pitchFamily="49" charset="0"/>
+              </a:rPr>
+              <a:t>binom_test</a:t>
+            </a:r>
+            <a:r>
+              <a:rPr lang="en-US" sz="1200" b="1" dirty="0">
+                <a:solidFill>
+                  <a:srgbClr val="0070C0"/>
+                </a:solidFill>
+                <a:latin typeface="Consolas" panose="020B0609020204030204" pitchFamily="49" charset="0"/>
+                <a:cs typeface="Consolas" panose="020B0609020204030204" pitchFamily="49" charset="0"/>
+              </a:rPr>
+              <a:t>(x=0,   n=1000, p=1/2, alternative='less')  </a:t>
+            </a:r>
+            <a:r>
+              <a:rPr lang="en-US" sz="1200" b="1" dirty="0">
+                <a:solidFill>
+                  <a:srgbClr val="00B050"/>
+                </a:solidFill>
+                <a:latin typeface="Consolas" panose="020B0609020204030204" pitchFamily="49" charset="0"/>
+                <a:cs typeface="Consolas" panose="020B0609020204030204" pitchFamily="49" charset="0"/>
+              </a:rPr>
+              <a:t># 1</a:t>
+            </a:r>
+          </a:p>
+          <a:p>
+            <a:r>
+              <a:rPr lang="en-US" sz="1200" b="1" dirty="0" err="1">
+                <a:solidFill>
+                  <a:srgbClr val="0070C0"/>
+                </a:solidFill>
+                <a:latin typeface="Consolas" panose="020B0609020204030204" pitchFamily="49" charset="0"/>
+                <a:cs typeface="Consolas" panose="020B0609020204030204" pitchFamily="49" charset="0"/>
+              </a:rPr>
+              <a:t>binom_test</a:t>
+            </a:r>
+            <a:r>
+              <a:rPr lang="en-US" sz="1200" b="1" dirty="0">
+                <a:solidFill>
+                  <a:srgbClr val="0070C0"/>
+                </a:solidFill>
+                <a:latin typeface="Consolas" panose="020B0609020204030204" pitchFamily="49" charset="0"/>
+                <a:cs typeface="Consolas" panose="020B0609020204030204" pitchFamily="49" charset="0"/>
+              </a:rPr>
+              <a:t>(x=470, n=1000, p=1/2, alternative='less')  </a:t>
+            </a:r>
+            <a:r>
+              <a:rPr lang="en-US" sz="1200" b="1" dirty="0">
+                <a:solidFill>
+                  <a:srgbClr val="00B050"/>
+                </a:solidFill>
+                <a:latin typeface="Consolas" panose="020B0609020204030204" pitchFamily="49" charset="0"/>
+                <a:cs typeface="Consolas" panose="020B0609020204030204" pitchFamily="49" charset="0"/>
+              </a:rPr>
+              <a:t># 0.973</a:t>
+            </a:r>
+          </a:p>
+          <a:p>
+            <a:r>
+              <a:rPr lang="en-US" sz="1200" b="1" dirty="0" err="1">
+                <a:solidFill>
+                  <a:srgbClr val="0070C0"/>
+                </a:solidFill>
+                <a:latin typeface="Consolas" panose="020B0609020204030204" pitchFamily="49" charset="0"/>
+                <a:cs typeface="Consolas" panose="020B0609020204030204" pitchFamily="49" charset="0"/>
+              </a:rPr>
+              <a:t>binom_test</a:t>
+            </a:r>
+            <a:r>
+              <a:rPr lang="en-US" sz="1200" b="1" dirty="0">
+                <a:solidFill>
+                  <a:srgbClr val="0070C0"/>
+                </a:solidFill>
+                <a:latin typeface="Consolas" panose="020B0609020204030204" pitchFamily="49" charset="0"/>
+                <a:cs typeface="Consolas" panose="020B0609020204030204" pitchFamily="49" charset="0"/>
+              </a:rPr>
+              <a:t>(x=500, n=1000, p=1/2, alternative='less')  </a:t>
+            </a:r>
+            <a:r>
+              <a:rPr lang="en-US" sz="1200" b="1" dirty="0">
+                <a:solidFill>
+                  <a:srgbClr val="00B050"/>
+                </a:solidFill>
+                <a:latin typeface="Consolas" panose="020B0609020204030204" pitchFamily="49" charset="0"/>
+                <a:cs typeface="Consolas" panose="020B0609020204030204" pitchFamily="49" charset="0"/>
+              </a:rPr>
+              <a:t># 0.5</a:t>
+            </a:r>
+          </a:p>
+          <a:p>
+            <a:r>
+              <a:rPr lang="en-US" sz="1200" b="1" dirty="0" err="1">
+                <a:solidFill>
+                  <a:srgbClr val="0070C0"/>
+                </a:solidFill>
+                <a:latin typeface="Consolas" panose="020B0609020204030204" pitchFamily="49" charset="0"/>
+                <a:cs typeface="Consolas" panose="020B0609020204030204" pitchFamily="49" charset="0"/>
+              </a:rPr>
+              <a:t>binom_test</a:t>
+            </a:r>
+            <a:r>
+              <a:rPr lang="en-US" sz="1200" b="1" dirty="0">
+                <a:solidFill>
+                  <a:srgbClr val="0070C0"/>
+                </a:solidFill>
+                <a:latin typeface="Consolas" panose="020B0609020204030204" pitchFamily="49" charset="0"/>
+                <a:cs typeface="Consolas" panose="020B0609020204030204" pitchFamily="49" charset="0"/>
+              </a:rPr>
+              <a:t>(x=530, n=1000, p=1/2, alternative='less')  </a:t>
+            </a:r>
+            <a:r>
+              <a:rPr lang="en-US" sz="1200" b="1" dirty="0">
+                <a:solidFill>
+                  <a:srgbClr val="00B050"/>
+                </a:solidFill>
+                <a:latin typeface="Consolas" panose="020B0609020204030204" pitchFamily="49" charset="0"/>
+                <a:cs typeface="Consolas" panose="020B0609020204030204" pitchFamily="49" charset="0"/>
+              </a:rPr>
+              <a:t># 0.031</a:t>
+            </a:r>
+          </a:p>
+          <a:p>
+            <a:r>
+              <a:rPr lang="en-US" sz="1200" b="1" dirty="0" err="1">
+                <a:solidFill>
+                  <a:srgbClr val="0070C0"/>
+                </a:solidFill>
+                <a:latin typeface="Consolas" panose="020B0609020204030204" pitchFamily="49" charset="0"/>
+                <a:cs typeface="Consolas" panose="020B0609020204030204" pitchFamily="49" charset="0"/>
+              </a:rPr>
+              <a:t>binom_test</a:t>
+            </a:r>
+            <a:r>
+              <a:rPr lang="en-US" sz="1200" b="1" dirty="0">
+                <a:solidFill>
+                  <a:srgbClr val="0070C0"/>
+                </a:solidFill>
+                <a:latin typeface="Consolas" panose="020B0609020204030204" pitchFamily="49" charset="0"/>
+                <a:cs typeface="Consolas" panose="020B0609020204030204" pitchFamily="49" charset="0"/>
+              </a:rPr>
+              <a:t>(x=999, n=1000, p=1/2, alternative='less')  </a:t>
+            </a:r>
+            <a:r>
+              <a:rPr lang="en-US" sz="1200" b="1" dirty="0">
+                <a:solidFill>
+                  <a:srgbClr val="00B050"/>
+                </a:solidFill>
+                <a:latin typeface="Consolas" panose="020B0609020204030204" pitchFamily="49" charset="0"/>
+                <a:cs typeface="Consolas" panose="020B0609020204030204" pitchFamily="49" charset="0"/>
+              </a:rPr>
+              <a:t># 0</a:t>
+            </a:r>
           </a:p>
         </p:txBody>
       </p:sp>
@@ -18641,6 +19228,743 @@
 </file>
 
 <file path=ppt/slides/slide5.xml><?xml version="1.0" encoding="utf-8"?>
+<p:sld xmlns:a="http://schemas.openxmlformats.org/drawingml/2006/main" xmlns:r="http://schemas.openxmlformats.org/officeDocument/2006/relationships" xmlns:p="http://schemas.openxmlformats.org/presentationml/2006/main">
+  <p:cSld>
+    <p:spTree>
+      <p:nvGrpSpPr>
+        <p:cNvPr id="1" name=""/>
+        <p:cNvGrpSpPr/>
+        <p:nvPr/>
+      </p:nvGrpSpPr>
+      <p:grpSpPr>
+        <a:xfrm>
+          <a:off x="0" y="0"/>
+          <a:ext cx="0" cy="0"/>
+          <a:chOff x="0" y="0"/>
+          <a:chExt cx="0" cy="0"/>
+        </a:xfrm>
+      </p:grpSpPr>
+      <p:sp>
+        <p:nvSpPr>
+          <p:cNvPr id="4" name="TextBox 3">
+            <a:extLst>
+              <a:ext uri="{FF2B5EF4-FFF2-40B4-BE49-F238E27FC236}">
+                <a16:creationId xmlns:a16="http://schemas.microsoft.com/office/drawing/2014/main" id="{1E4E77F6-2D57-344D-957A-D121D2D97481}"/>
+              </a:ext>
+            </a:extLst>
+          </p:cNvPr>
+          <p:cNvSpPr txBox="1"/>
+          <p:nvPr/>
+        </p:nvSpPr>
+        <p:spPr>
+          <a:xfrm>
+            <a:off x="345688" y="1186087"/>
+            <a:ext cx="3869473" cy="3970318"/>
+          </a:xfrm>
+          <a:prstGeom prst="rect">
+            <a:avLst/>
+          </a:prstGeom>
+          <a:noFill/>
+        </p:spPr>
+        <p:txBody>
+          <a:bodyPr wrap="square" rtlCol="0">
+            <a:spAutoFit/>
+          </a:bodyPr>
+          <a:lstStyle/>
+          <a:p>
+            <a:r>
+              <a:rPr lang="en-US" sz="1200" dirty="0">
+                <a:solidFill>
+                  <a:srgbClr val="0070C0"/>
+                </a:solidFill>
+                <a:latin typeface="Menlo" panose="020B0609030804020204" pitchFamily="49" charset="0"/>
+                <a:ea typeface="Menlo" panose="020B0609030804020204" pitchFamily="49" charset="0"/>
+                <a:cs typeface="Menlo" panose="020B0609030804020204" pitchFamily="49" charset="0"/>
+              </a:rPr>
+              <a:t>import </a:t>
+            </a:r>
+            <a:r>
+              <a:rPr lang="en-US" sz="1200" dirty="0" err="1">
+                <a:solidFill>
+                  <a:srgbClr val="0070C0"/>
+                </a:solidFill>
+                <a:latin typeface="Menlo" panose="020B0609030804020204" pitchFamily="49" charset="0"/>
+                <a:ea typeface="Menlo" panose="020B0609030804020204" pitchFamily="49" charset="0"/>
+                <a:cs typeface="Menlo" panose="020B0609030804020204" pitchFamily="49" charset="0"/>
+              </a:rPr>
+              <a:t>os</a:t>
+            </a:r>
+            <a:r>
+              <a:rPr lang="en-US" sz="1200" dirty="0">
+                <a:solidFill>
+                  <a:srgbClr val="0070C0"/>
+                </a:solidFill>
+                <a:latin typeface="Menlo" panose="020B0609030804020204" pitchFamily="49" charset="0"/>
+                <a:ea typeface="Menlo" panose="020B0609030804020204" pitchFamily="49" charset="0"/>
+                <a:cs typeface="Menlo" panose="020B0609030804020204" pitchFamily="49" charset="0"/>
+              </a:rPr>
+              <a:t>, sys, math</a:t>
+            </a:r>
+          </a:p>
+          <a:p>
+            <a:r>
+              <a:rPr lang="en-US" sz="1200" dirty="0">
+                <a:solidFill>
+                  <a:srgbClr val="0070C0"/>
+                </a:solidFill>
+                <a:latin typeface="Menlo" panose="020B0609030804020204" pitchFamily="49" charset="0"/>
+                <a:ea typeface="Menlo" panose="020B0609030804020204" pitchFamily="49" charset="0"/>
+                <a:cs typeface="Menlo" panose="020B0609030804020204" pitchFamily="49" charset="0"/>
+              </a:rPr>
+              <a:t>from </a:t>
+            </a:r>
+            <a:r>
+              <a:rPr lang="en-US" sz="1200" dirty="0" err="1">
+                <a:solidFill>
+                  <a:srgbClr val="0070C0"/>
+                </a:solidFill>
+                <a:latin typeface="Menlo" panose="020B0609030804020204" pitchFamily="49" charset="0"/>
+                <a:ea typeface="Menlo" panose="020B0609030804020204" pitchFamily="49" charset="0"/>
+                <a:cs typeface="Menlo" panose="020B0609030804020204" pitchFamily="49" charset="0"/>
+              </a:rPr>
+              <a:t>scipy.stats</a:t>
+            </a:r>
+            <a:r>
+              <a:rPr lang="en-US" sz="1200" dirty="0">
+                <a:solidFill>
+                  <a:srgbClr val="0070C0"/>
+                </a:solidFill>
+                <a:latin typeface="Menlo" panose="020B0609030804020204" pitchFamily="49" charset="0"/>
+                <a:ea typeface="Menlo" panose="020B0609030804020204" pitchFamily="49" charset="0"/>
+                <a:cs typeface="Menlo" panose="020B0609030804020204" pitchFamily="49" charset="0"/>
+              </a:rPr>
+              <a:t> import </a:t>
+            </a:r>
+            <a:r>
+              <a:rPr lang="en-US" sz="1200" dirty="0" err="1">
+                <a:solidFill>
+                  <a:srgbClr val="0070C0"/>
+                </a:solidFill>
+                <a:latin typeface="Menlo" panose="020B0609030804020204" pitchFamily="49" charset="0"/>
+                <a:ea typeface="Menlo" panose="020B0609030804020204" pitchFamily="49" charset="0"/>
+                <a:cs typeface="Menlo" panose="020B0609030804020204" pitchFamily="49" charset="0"/>
+              </a:rPr>
+              <a:t>binom_test</a:t>
+            </a:r>
+            <a:endParaRPr lang="en-US" sz="1200" dirty="0">
+              <a:solidFill>
+                <a:srgbClr val="0070C0"/>
+              </a:solidFill>
+              <a:latin typeface="Menlo" panose="020B0609030804020204" pitchFamily="49" charset="0"/>
+              <a:ea typeface="Menlo" panose="020B0609030804020204" pitchFamily="49" charset="0"/>
+              <a:cs typeface="Menlo" panose="020B0609030804020204" pitchFamily="49" charset="0"/>
+            </a:endParaRPr>
+          </a:p>
+          <a:p>
+            <a:r>
+              <a:rPr lang="en-US" sz="1200" dirty="0">
+                <a:solidFill>
+                  <a:srgbClr val="0070C0"/>
+                </a:solidFill>
+                <a:latin typeface="Menlo" panose="020B0609030804020204" pitchFamily="49" charset="0"/>
+                <a:ea typeface="Menlo" panose="020B0609030804020204" pitchFamily="49" charset="0"/>
+                <a:cs typeface="Menlo" panose="020B0609030804020204" pitchFamily="49" charset="0"/>
+              </a:rPr>
+              <a:t>import </a:t>
+            </a:r>
+            <a:r>
+              <a:rPr lang="en-US" sz="1200" dirty="0" err="1">
+                <a:solidFill>
+                  <a:srgbClr val="0070C0"/>
+                </a:solidFill>
+                <a:latin typeface="Menlo" panose="020B0609030804020204" pitchFamily="49" charset="0"/>
+                <a:ea typeface="Menlo" panose="020B0609030804020204" pitchFamily="49" charset="0"/>
+                <a:cs typeface="Menlo" panose="020B0609030804020204" pitchFamily="49" charset="0"/>
+              </a:rPr>
+              <a:t>matplotlib.pyplot</a:t>
+            </a:r>
+            <a:r>
+              <a:rPr lang="en-US" sz="1200" dirty="0">
+                <a:solidFill>
+                  <a:srgbClr val="0070C0"/>
+                </a:solidFill>
+                <a:latin typeface="Menlo" panose="020B0609030804020204" pitchFamily="49" charset="0"/>
+                <a:ea typeface="Menlo" panose="020B0609030804020204" pitchFamily="49" charset="0"/>
+                <a:cs typeface="Menlo" panose="020B0609030804020204" pitchFamily="49" charset="0"/>
+              </a:rPr>
+              <a:t> as </a:t>
+            </a:r>
+            <a:r>
+              <a:rPr lang="en-US" sz="1200" dirty="0" err="1">
+                <a:solidFill>
+                  <a:srgbClr val="0070C0"/>
+                </a:solidFill>
+                <a:latin typeface="Menlo" panose="020B0609030804020204" pitchFamily="49" charset="0"/>
+                <a:ea typeface="Menlo" panose="020B0609030804020204" pitchFamily="49" charset="0"/>
+                <a:cs typeface="Menlo" panose="020B0609030804020204" pitchFamily="49" charset="0"/>
+              </a:rPr>
+              <a:t>plt</a:t>
+            </a:r>
+            <a:endParaRPr lang="en-US" sz="1200" dirty="0">
+              <a:solidFill>
+                <a:srgbClr val="0070C0"/>
+              </a:solidFill>
+              <a:latin typeface="Menlo" panose="020B0609030804020204" pitchFamily="49" charset="0"/>
+              <a:ea typeface="Menlo" panose="020B0609030804020204" pitchFamily="49" charset="0"/>
+              <a:cs typeface="Menlo" panose="020B0609030804020204" pitchFamily="49" charset="0"/>
+            </a:endParaRPr>
+          </a:p>
+          <a:p>
+            <a:r>
+              <a:rPr lang="en-US" sz="1200" dirty="0">
+                <a:solidFill>
+                  <a:srgbClr val="0070C0"/>
+                </a:solidFill>
+                <a:latin typeface="Menlo" panose="020B0609030804020204" pitchFamily="49" charset="0"/>
+                <a:ea typeface="Menlo" panose="020B0609030804020204" pitchFamily="49" charset="0"/>
+                <a:cs typeface="Menlo" panose="020B0609030804020204" pitchFamily="49" charset="0"/>
+              </a:rPr>
+              <a:t>xx  = []</a:t>
+            </a:r>
+          </a:p>
+          <a:p>
+            <a:r>
+              <a:rPr lang="en-US" sz="1200" dirty="0" err="1">
+                <a:solidFill>
+                  <a:srgbClr val="0070C0"/>
+                </a:solidFill>
+                <a:latin typeface="Menlo" panose="020B0609030804020204" pitchFamily="49" charset="0"/>
+                <a:ea typeface="Menlo" panose="020B0609030804020204" pitchFamily="49" charset="0"/>
+                <a:cs typeface="Menlo" panose="020B0609030804020204" pitchFamily="49" charset="0"/>
+              </a:rPr>
+              <a:t>yy</a:t>
+            </a:r>
+            <a:r>
+              <a:rPr lang="en-US" sz="1200" dirty="0">
+                <a:solidFill>
+                  <a:srgbClr val="0070C0"/>
+                </a:solidFill>
+                <a:latin typeface="Menlo" panose="020B0609030804020204" pitchFamily="49" charset="0"/>
+                <a:ea typeface="Menlo" panose="020B0609030804020204" pitchFamily="49" charset="0"/>
+                <a:cs typeface="Menlo" panose="020B0609030804020204" pitchFamily="49" charset="0"/>
+              </a:rPr>
+              <a:t>  = []</a:t>
+            </a:r>
+          </a:p>
+          <a:p>
+            <a:r>
+              <a:rPr lang="en-US" sz="1200" dirty="0">
+                <a:solidFill>
+                  <a:srgbClr val="0070C0"/>
+                </a:solidFill>
+                <a:latin typeface="Menlo" panose="020B0609030804020204" pitchFamily="49" charset="0"/>
+                <a:ea typeface="Menlo" panose="020B0609030804020204" pitchFamily="49" charset="0"/>
+                <a:cs typeface="Menlo" panose="020B0609030804020204" pitchFamily="49" charset="0"/>
+              </a:rPr>
+              <a:t>yy2 = []</a:t>
+            </a:r>
+          </a:p>
+          <a:p>
+            <a:endParaRPr lang="en-US" sz="1200" dirty="0">
+              <a:solidFill>
+                <a:srgbClr val="0070C0"/>
+              </a:solidFill>
+              <a:latin typeface="Menlo" panose="020B0609030804020204" pitchFamily="49" charset="0"/>
+              <a:ea typeface="Menlo" panose="020B0609030804020204" pitchFamily="49" charset="0"/>
+              <a:cs typeface="Menlo" panose="020B0609030804020204" pitchFamily="49" charset="0"/>
+            </a:endParaRPr>
+          </a:p>
+          <a:p>
+            <a:r>
+              <a:rPr lang="en-US" sz="1200" dirty="0">
+                <a:solidFill>
+                  <a:srgbClr val="0070C0"/>
+                </a:solidFill>
+                <a:latin typeface="Menlo" panose="020B0609030804020204" pitchFamily="49" charset="0"/>
+                <a:ea typeface="Menlo" panose="020B0609030804020204" pitchFamily="49" charset="0"/>
+                <a:cs typeface="Menlo" panose="020B0609030804020204" pitchFamily="49" charset="0"/>
+              </a:rPr>
+              <a:t>sigma = </a:t>
+            </a:r>
+            <a:r>
+              <a:rPr lang="en-US" sz="1200" dirty="0" err="1">
+                <a:solidFill>
+                  <a:srgbClr val="0070C0"/>
+                </a:solidFill>
+                <a:latin typeface="Menlo" panose="020B0609030804020204" pitchFamily="49" charset="0"/>
+                <a:ea typeface="Menlo" panose="020B0609030804020204" pitchFamily="49" charset="0"/>
+                <a:cs typeface="Menlo" panose="020B0609030804020204" pitchFamily="49" charset="0"/>
+              </a:rPr>
+              <a:t>math.sqrt</a:t>
+            </a:r>
+            <a:r>
+              <a:rPr lang="en-US" sz="1200" dirty="0">
+                <a:solidFill>
+                  <a:srgbClr val="0070C0"/>
+                </a:solidFill>
+                <a:latin typeface="Menlo" panose="020B0609030804020204" pitchFamily="49" charset="0"/>
+                <a:ea typeface="Menlo" panose="020B0609030804020204" pitchFamily="49" charset="0"/>
+                <a:cs typeface="Menlo" panose="020B0609030804020204" pitchFamily="49" charset="0"/>
+              </a:rPr>
+              <a:t>(5000)/2.0</a:t>
+            </a:r>
+          </a:p>
+          <a:p>
+            <a:r>
+              <a:rPr lang="en-US" sz="1200" dirty="0">
+                <a:solidFill>
+                  <a:srgbClr val="0070C0"/>
+                </a:solidFill>
+                <a:latin typeface="Menlo" panose="020B0609030804020204" pitchFamily="49" charset="0"/>
+                <a:ea typeface="Menlo" panose="020B0609030804020204" pitchFamily="49" charset="0"/>
+                <a:cs typeface="Menlo" panose="020B0609030804020204" pitchFamily="49" charset="0"/>
+              </a:rPr>
+              <a:t>v1 = 2500-sigma</a:t>
+            </a:r>
+          </a:p>
+          <a:p>
+            <a:r>
+              <a:rPr lang="en-US" sz="1200" dirty="0">
+                <a:solidFill>
+                  <a:srgbClr val="0070C0"/>
+                </a:solidFill>
+                <a:latin typeface="Menlo" panose="020B0609030804020204" pitchFamily="49" charset="0"/>
+                <a:ea typeface="Menlo" panose="020B0609030804020204" pitchFamily="49" charset="0"/>
+                <a:cs typeface="Menlo" panose="020B0609030804020204" pitchFamily="49" charset="0"/>
+              </a:rPr>
+              <a:t>v2 = 2500+sigma</a:t>
+            </a:r>
+          </a:p>
+          <a:p>
+            <a:r>
+              <a:rPr lang="en-US" sz="1200" dirty="0">
+                <a:solidFill>
+                  <a:srgbClr val="0070C0"/>
+                </a:solidFill>
+                <a:latin typeface="Menlo" panose="020B0609030804020204" pitchFamily="49" charset="0"/>
+                <a:ea typeface="Menlo" panose="020B0609030804020204" pitchFamily="49" charset="0"/>
+                <a:cs typeface="Menlo" panose="020B0609030804020204" pitchFamily="49" charset="0"/>
+              </a:rPr>
+              <a:t>print(v1,v2)    </a:t>
+            </a:r>
+            <a:r>
+              <a:rPr lang="en-US" sz="1200" dirty="0">
+                <a:solidFill>
+                  <a:srgbClr val="00B050"/>
+                </a:solidFill>
+                <a:latin typeface="Menlo" panose="020B0609030804020204" pitchFamily="49" charset="0"/>
+                <a:ea typeface="Menlo" panose="020B0609030804020204" pitchFamily="49" charset="0"/>
+                <a:cs typeface="Menlo" panose="020B0609030804020204" pitchFamily="49" charset="0"/>
+              </a:rPr>
+              <a:t># 2464.64, 2535.36</a:t>
+            </a:r>
+          </a:p>
+          <a:p>
+            <a:endParaRPr lang="en-US" sz="1200" dirty="0">
+              <a:solidFill>
+                <a:srgbClr val="0070C0"/>
+              </a:solidFill>
+              <a:latin typeface="Menlo" panose="020B0609030804020204" pitchFamily="49" charset="0"/>
+              <a:ea typeface="Menlo" panose="020B0609030804020204" pitchFamily="49" charset="0"/>
+              <a:cs typeface="Menlo" panose="020B0609030804020204" pitchFamily="49" charset="0"/>
+            </a:endParaRPr>
+          </a:p>
+          <a:p>
+            <a:r>
+              <a:rPr lang="en-US" sz="1200" dirty="0">
+                <a:solidFill>
+                  <a:srgbClr val="0070C0"/>
+                </a:solidFill>
+                <a:latin typeface="Menlo" panose="020B0609030804020204" pitchFamily="49" charset="0"/>
+                <a:ea typeface="Menlo" panose="020B0609030804020204" pitchFamily="49" charset="0"/>
+                <a:cs typeface="Menlo" panose="020B0609030804020204" pitchFamily="49" charset="0"/>
+              </a:rPr>
+              <a:t>for ii in range (2300, 2700):</a:t>
+            </a:r>
+          </a:p>
+          <a:p>
+            <a:r>
+              <a:rPr lang="en-US" sz="1200" dirty="0">
+                <a:solidFill>
+                  <a:srgbClr val="0070C0"/>
+                </a:solidFill>
+                <a:latin typeface="Menlo" panose="020B0609030804020204" pitchFamily="49" charset="0"/>
+                <a:ea typeface="Menlo" panose="020B0609030804020204" pitchFamily="49" charset="0"/>
+                <a:cs typeface="Menlo" panose="020B0609030804020204" pitchFamily="49" charset="0"/>
+              </a:rPr>
+              <a:t>    </a:t>
+            </a:r>
+            <a:r>
+              <a:rPr lang="en-US" sz="1200" dirty="0" err="1">
+                <a:solidFill>
+                  <a:srgbClr val="0070C0"/>
+                </a:solidFill>
+                <a:latin typeface="Menlo" panose="020B0609030804020204" pitchFamily="49" charset="0"/>
+                <a:ea typeface="Menlo" panose="020B0609030804020204" pitchFamily="49" charset="0"/>
+                <a:cs typeface="Menlo" panose="020B0609030804020204" pitchFamily="49" charset="0"/>
+              </a:rPr>
+              <a:t>xx.append</a:t>
+            </a:r>
+            <a:r>
+              <a:rPr lang="en-US" sz="1200" dirty="0">
+                <a:solidFill>
+                  <a:srgbClr val="0070C0"/>
+                </a:solidFill>
+                <a:latin typeface="Menlo" panose="020B0609030804020204" pitchFamily="49" charset="0"/>
+                <a:ea typeface="Menlo" panose="020B0609030804020204" pitchFamily="49" charset="0"/>
+                <a:cs typeface="Menlo" panose="020B0609030804020204" pitchFamily="49" charset="0"/>
+              </a:rPr>
+              <a:t>(ii)</a:t>
+            </a:r>
+          </a:p>
+          <a:p>
+            <a:r>
+              <a:rPr lang="en-US" sz="1200" dirty="0">
+                <a:solidFill>
+                  <a:srgbClr val="0070C0"/>
+                </a:solidFill>
+                <a:latin typeface="Menlo" panose="020B0609030804020204" pitchFamily="49" charset="0"/>
+                <a:ea typeface="Menlo" panose="020B0609030804020204" pitchFamily="49" charset="0"/>
+                <a:cs typeface="Menlo" panose="020B0609030804020204" pitchFamily="49" charset="0"/>
+              </a:rPr>
+              <a:t>    </a:t>
+            </a:r>
+            <a:r>
+              <a:rPr lang="en-US" sz="1200" dirty="0" err="1">
+                <a:solidFill>
+                  <a:srgbClr val="0070C0"/>
+                </a:solidFill>
+                <a:latin typeface="Menlo" panose="020B0609030804020204" pitchFamily="49" charset="0"/>
+                <a:ea typeface="Menlo" panose="020B0609030804020204" pitchFamily="49" charset="0"/>
+                <a:cs typeface="Menlo" panose="020B0609030804020204" pitchFamily="49" charset="0"/>
+              </a:rPr>
+              <a:t>yy.append</a:t>
+            </a:r>
+            <a:r>
+              <a:rPr lang="en-US" sz="1200" dirty="0">
+                <a:solidFill>
+                  <a:srgbClr val="0070C0"/>
+                </a:solidFill>
+                <a:latin typeface="Menlo" panose="020B0609030804020204" pitchFamily="49" charset="0"/>
+                <a:ea typeface="Menlo" panose="020B0609030804020204" pitchFamily="49" charset="0"/>
+                <a:cs typeface="Menlo" panose="020B0609030804020204" pitchFamily="49" charset="0"/>
+              </a:rPr>
+              <a:t>(</a:t>
+            </a:r>
+            <a:r>
+              <a:rPr lang="en-US" sz="1200" dirty="0" err="1">
+                <a:solidFill>
+                  <a:srgbClr val="0070C0"/>
+                </a:solidFill>
+                <a:latin typeface="Menlo" panose="020B0609030804020204" pitchFamily="49" charset="0"/>
+                <a:ea typeface="Menlo" panose="020B0609030804020204" pitchFamily="49" charset="0"/>
+                <a:cs typeface="Menlo" panose="020B0609030804020204" pitchFamily="49" charset="0"/>
+              </a:rPr>
+              <a:t>binom.pmf</a:t>
+            </a:r>
+            <a:r>
+              <a:rPr lang="en-US" sz="1200" dirty="0">
+                <a:solidFill>
+                  <a:srgbClr val="0070C0"/>
+                </a:solidFill>
+                <a:latin typeface="Menlo" panose="020B0609030804020204" pitchFamily="49" charset="0"/>
+                <a:ea typeface="Menlo" panose="020B0609030804020204" pitchFamily="49" charset="0"/>
+                <a:cs typeface="Menlo" panose="020B0609030804020204" pitchFamily="49" charset="0"/>
+              </a:rPr>
+              <a:t>(ii,5000,0.5))</a:t>
+            </a:r>
+          </a:p>
+          <a:p>
+            <a:r>
+              <a:rPr lang="en-US" sz="1200" dirty="0">
+                <a:solidFill>
+                  <a:srgbClr val="0070C0"/>
+                </a:solidFill>
+                <a:latin typeface="Menlo" panose="020B0609030804020204" pitchFamily="49" charset="0"/>
+                <a:ea typeface="Menlo" panose="020B0609030804020204" pitchFamily="49" charset="0"/>
+                <a:cs typeface="Menlo" panose="020B0609030804020204" pitchFamily="49" charset="0"/>
+              </a:rPr>
+              <a:t>    </a:t>
+            </a:r>
+            <a:r>
+              <a:rPr lang="en-US" sz="1200" dirty="0" err="1">
+                <a:solidFill>
+                  <a:srgbClr val="0070C0"/>
+                </a:solidFill>
+                <a:latin typeface="Menlo" panose="020B0609030804020204" pitchFamily="49" charset="0"/>
+                <a:ea typeface="Menlo" panose="020B0609030804020204" pitchFamily="49" charset="0"/>
+                <a:cs typeface="Menlo" panose="020B0609030804020204" pitchFamily="49" charset="0"/>
+              </a:rPr>
+              <a:t>val</a:t>
+            </a:r>
+            <a:r>
+              <a:rPr lang="en-US" sz="1200" dirty="0">
+                <a:solidFill>
+                  <a:srgbClr val="0070C0"/>
+                </a:solidFill>
+                <a:latin typeface="Menlo" panose="020B0609030804020204" pitchFamily="49" charset="0"/>
+                <a:ea typeface="Menlo" panose="020B0609030804020204" pitchFamily="49" charset="0"/>
+                <a:cs typeface="Menlo" panose="020B0609030804020204" pitchFamily="49" charset="0"/>
+              </a:rPr>
+              <a:t> = 0.0</a:t>
+            </a:r>
+          </a:p>
+          <a:p>
+            <a:r>
+              <a:rPr lang="en-US" sz="1200" dirty="0">
+                <a:solidFill>
+                  <a:srgbClr val="0070C0"/>
+                </a:solidFill>
+                <a:latin typeface="Menlo" panose="020B0609030804020204" pitchFamily="49" charset="0"/>
+                <a:ea typeface="Menlo" panose="020B0609030804020204" pitchFamily="49" charset="0"/>
+                <a:cs typeface="Menlo" panose="020B0609030804020204" pitchFamily="49" charset="0"/>
+              </a:rPr>
+              <a:t>    if v1 &lt;= ii &lt;= v2:</a:t>
+            </a:r>
+          </a:p>
+          <a:p>
+            <a:r>
+              <a:rPr lang="en-US" sz="1200" dirty="0">
+                <a:solidFill>
+                  <a:srgbClr val="0070C0"/>
+                </a:solidFill>
+                <a:latin typeface="Menlo" panose="020B0609030804020204" pitchFamily="49" charset="0"/>
+                <a:ea typeface="Menlo" panose="020B0609030804020204" pitchFamily="49" charset="0"/>
+                <a:cs typeface="Menlo" panose="020B0609030804020204" pitchFamily="49" charset="0"/>
+              </a:rPr>
+              <a:t>        </a:t>
+            </a:r>
+            <a:r>
+              <a:rPr lang="en-US" sz="1200" dirty="0" err="1">
+                <a:solidFill>
+                  <a:srgbClr val="0070C0"/>
+                </a:solidFill>
+                <a:latin typeface="Menlo" panose="020B0609030804020204" pitchFamily="49" charset="0"/>
+                <a:ea typeface="Menlo" panose="020B0609030804020204" pitchFamily="49" charset="0"/>
+                <a:cs typeface="Menlo" panose="020B0609030804020204" pitchFamily="49" charset="0"/>
+              </a:rPr>
+              <a:t>val</a:t>
+            </a:r>
+            <a:r>
+              <a:rPr lang="en-US" sz="1200" dirty="0">
+                <a:solidFill>
+                  <a:srgbClr val="0070C0"/>
+                </a:solidFill>
+                <a:latin typeface="Menlo" panose="020B0609030804020204" pitchFamily="49" charset="0"/>
+                <a:ea typeface="Menlo" panose="020B0609030804020204" pitchFamily="49" charset="0"/>
+                <a:cs typeface="Menlo" panose="020B0609030804020204" pitchFamily="49" charset="0"/>
+              </a:rPr>
+              <a:t> = 0.01</a:t>
+            </a:r>
+          </a:p>
+          <a:p>
+            <a:r>
+              <a:rPr lang="en-US" sz="1200" dirty="0">
+                <a:solidFill>
+                  <a:srgbClr val="0070C0"/>
+                </a:solidFill>
+                <a:latin typeface="Menlo" panose="020B0609030804020204" pitchFamily="49" charset="0"/>
+                <a:ea typeface="Menlo" panose="020B0609030804020204" pitchFamily="49" charset="0"/>
+                <a:cs typeface="Menlo" panose="020B0609030804020204" pitchFamily="49" charset="0"/>
+              </a:rPr>
+              <a:t>    yy2.append(</a:t>
+            </a:r>
+            <a:r>
+              <a:rPr lang="en-US" sz="1200" dirty="0" err="1">
+                <a:solidFill>
+                  <a:srgbClr val="0070C0"/>
+                </a:solidFill>
+                <a:latin typeface="Menlo" panose="020B0609030804020204" pitchFamily="49" charset="0"/>
+                <a:ea typeface="Menlo" panose="020B0609030804020204" pitchFamily="49" charset="0"/>
+                <a:cs typeface="Menlo" panose="020B0609030804020204" pitchFamily="49" charset="0"/>
+              </a:rPr>
+              <a:t>val</a:t>
+            </a:r>
+            <a:r>
+              <a:rPr lang="en-US" sz="1200" dirty="0">
+                <a:solidFill>
+                  <a:srgbClr val="0070C0"/>
+                </a:solidFill>
+                <a:latin typeface="Menlo" panose="020B0609030804020204" pitchFamily="49" charset="0"/>
+                <a:ea typeface="Menlo" panose="020B0609030804020204" pitchFamily="49" charset="0"/>
+                <a:cs typeface="Menlo" panose="020B0609030804020204" pitchFamily="49" charset="0"/>
+              </a:rPr>
+              <a:t>)</a:t>
+            </a:r>
+          </a:p>
+          <a:p>
+            <a:r>
+              <a:rPr lang="en-US" sz="1200" dirty="0">
+                <a:solidFill>
+                  <a:srgbClr val="0070C0"/>
+                </a:solidFill>
+                <a:latin typeface="Menlo" panose="020B0609030804020204" pitchFamily="49" charset="0"/>
+                <a:ea typeface="Menlo" panose="020B0609030804020204" pitchFamily="49" charset="0"/>
+                <a:cs typeface="Menlo" panose="020B0609030804020204" pitchFamily="49" charset="0"/>
+              </a:rPr>
+              <a:t>_ = </a:t>
+            </a:r>
+            <a:r>
+              <a:rPr lang="en-US" sz="1200" dirty="0" err="1">
+                <a:solidFill>
+                  <a:srgbClr val="0070C0"/>
+                </a:solidFill>
+                <a:latin typeface="Menlo" panose="020B0609030804020204" pitchFamily="49" charset="0"/>
+                <a:ea typeface="Menlo" panose="020B0609030804020204" pitchFamily="49" charset="0"/>
+                <a:cs typeface="Menlo" panose="020B0609030804020204" pitchFamily="49" charset="0"/>
+              </a:rPr>
+              <a:t>plt.plot</a:t>
+            </a:r>
+            <a:r>
+              <a:rPr lang="en-US" sz="1200" dirty="0">
+                <a:solidFill>
+                  <a:srgbClr val="0070C0"/>
+                </a:solidFill>
+                <a:latin typeface="Menlo" panose="020B0609030804020204" pitchFamily="49" charset="0"/>
+                <a:ea typeface="Menlo" panose="020B0609030804020204" pitchFamily="49" charset="0"/>
+                <a:cs typeface="Menlo" panose="020B0609030804020204" pitchFamily="49" charset="0"/>
+              </a:rPr>
+              <a:t>(</a:t>
+            </a:r>
+            <a:r>
+              <a:rPr lang="en-US" sz="1200" dirty="0" err="1">
+                <a:solidFill>
+                  <a:srgbClr val="0070C0"/>
+                </a:solidFill>
+                <a:latin typeface="Menlo" panose="020B0609030804020204" pitchFamily="49" charset="0"/>
+                <a:ea typeface="Menlo" panose="020B0609030804020204" pitchFamily="49" charset="0"/>
+                <a:cs typeface="Menlo" panose="020B0609030804020204" pitchFamily="49" charset="0"/>
+              </a:rPr>
+              <a:t>xx,yy</a:t>
+            </a:r>
+            <a:r>
+              <a:rPr lang="en-US" sz="1200" dirty="0">
+                <a:solidFill>
+                  <a:srgbClr val="0070C0"/>
+                </a:solidFill>
+                <a:latin typeface="Menlo" panose="020B0609030804020204" pitchFamily="49" charset="0"/>
+                <a:ea typeface="Menlo" panose="020B0609030804020204" pitchFamily="49" charset="0"/>
+                <a:cs typeface="Menlo" panose="020B0609030804020204" pitchFamily="49" charset="0"/>
+              </a:rPr>
+              <a:t>)</a:t>
+            </a:r>
+          </a:p>
+          <a:p>
+            <a:r>
+              <a:rPr lang="en-US" sz="1200" dirty="0">
+                <a:solidFill>
+                  <a:srgbClr val="0070C0"/>
+                </a:solidFill>
+                <a:latin typeface="Menlo" panose="020B0609030804020204" pitchFamily="49" charset="0"/>
+                <a:ea typeface="Menlo" panose="020B0609030804020204" pitchFamily="49" charset="0"/>
+                <a:cs typeface="Menlo" panose="020B0609030804020204" pitchFamily="49" charset="0"/>
+              </a:rPr>
+              <a:t>_ = </a:t>
+            </a:r>
+            <a:r>
+              <a:rPr lang="en-US" sz="1200" dirty="0" err="1">
+                <a:solidFill>
+                  <a:srgbClr val="0070C0"/>
+                </a:solidFill>
+                <a:latin typeface="Menlo" panose="020B0609030804020204" pitchFamily="49" charset="0"/>
+                <a:ea typeface="Menlo" panose="020B0609030804020204" pitchFamily="49" charset="0"/>
+                <a:cs typeface="Menlo" panose="020B0609030804020204" pitchFamily="49" charset="0"/>
+              </a:rPr>
+              <a:t>plt.plot</a:t>
+            </a:r>
+            <a:r>
+              <a:rPr lang="en-US" sz="1200" dirty="0">
+                <a:solidFill>
+                  <a:srgbClr val="0070C0"/>
+                </a:solidFill>
+                <a:latin typeface="Menlo" panose="020B0609030804020204" pitchFamily="49" charset="0"/>
+                <a:ea typeface="Menlo" panose="020B0609030804020204" pitchFamily="49" charset="0"/>
+                <a:cs typeface="Menlo" panose="020B0609030804020204" pitchFamily="49" charset="0"/>
+              </a:rPr>
+              <a:t>(xx,yy2) # show sigma range</a:t>
+            </a:r>
+          </a:p>
+        </p:txBody>
+      </p:sp>
+      <p:pic>
+        <p:nvPicPr>
+          <p:cNvPr id="5" name="Picture 4">
+            <a:extLst>
+              <a:ext uri="{FF2B5EF4-FFF2-40B4-BE49-F238E27FC236}">
+                <a16:creationId xmlns:a16="http://schemas.microsoft.com/office/drawing/2014/main" id="{2946C5B3-4D05-D54B-8D93-DB43DC8E13DE}"/>
+              </a:ext>
+            </a:extLst>
+          </p:cNvPr>
+          <p:cNvPicPr>
+            <a:picLocks noChangeAspect="1"/>
+          </p:cNvPicPr>
+          <p:nvPr/>
+        </p:nvPicPr>
+        <p:blipFill>
+          <a:blip r:embed="rId2"/>
+          <a:stretch>
+            <a:fillRect/>
+          </a:stretch>
+        </p:blipFill>
+        <p:spPr>
+          <a:xfrm>
+            <a:off x="4805626" y="1593590"/>
+            <a:ext cx="4876800" cy="3149600"/>
+          </a:xfrm>
+          <a:prstGeom prst="rect">
+            <a:avLst/>
+          </a:prstGeom>
+        </p:spPr>
+      </p:pic>
+      <p:sp>
+        <p:nvSpPr>
+          <p:cNvPr id="6" name="TextBox 5">
+            <a:extLst>
+              <a:ext uri="{FF2B5EF4-FFF2-40B4-BE49-F238E27FC236}">
+                <a16:creationId xmlns:a16="http://schemas.microsoft.com/office/drawing/2014/main" id="{6180DDB0-6998-994F-8A7D-E2271187FE2C}"/>
+              </a:ext>
+            </a:extLst>
+          </p:cNvPr>
+          <p:cNvSpPr txBox="1"/>
+          <p:nvPr/>
+        </p:nvSpPr>
+        <p:spPr>
+          <a:xfrm>
+            <a:off x="345688" y="156117"/>
+            <a:ext cx="6400800" cy="523220"/>
+          </a:xfrm>
+          <a:prstGeom prst="rect">
+            <a:avLst/>
+          </a:prstGeom>
+          <a:noFill/>
+        </p:spPr>
+        <p:txBody>
+          <a:bodyPr wrap="square" rtlCol="0">
+            <a:spAutoFit/>
+          </a:bodyPr>
+          <a:lstStyle/>
+          <a:p>
+            <a:r>
+              <a:rPr lang="en-US" sz="2800" b="1" dirty="0"/>
+              <a:t>Binomial Distribution – Plot, Sigma</a:t>
+            </a:r>
+          </a:p>
+        </p:txBody>
+      </p:sp>
+    </p:spTree>
+    <p:extLst>
+      <p:ext uri="{BB962C8B-B14F-4D97-AF65-F5344CB8AC3E}">
+        <p14:creationId xmlns:p14="http://schemas.microsoft.com/office/powerpoint/2010/main" val="180183310"/>
+      </p:ext>
+    </p:extLst>
+  </p:cSld>
+  <p:clrMapOvr>
+    <a:masterClrMapping/>
+  </p:clrMapOvr>
+</p:sld>
+</file>
+
+<file path=ppt/slides/slide6.xml><?xml version="1.0" encoding="utf-8"?>
 <p:sld xmlns:a="http://schemas.openxmlformats.org/drawingml/2006/main" xmlns:r="http://schemas.openxmlformats.org/officeDocument/2006/relationships" xmlns:p="http://schemas.openxmlformats.org/presentationml/2006/main">
   <p:cSld>
     <p:spTree>
@@ -19560,7 +20884,7 @@
 </p:sld>
 </file>
 
-<file path=ppt/slides/slide6.xml><?xml version="1.0" encoding="utf-8"?>
+<file path=ppt/slides/slide7.xml><?xml version="1.0" encoding="utf-8"?>
 <p:sld xmlns:a="http://schemas.openxmlformats.org/drawingml/2006/main" xmlns:r="http://schemas.openxmlformats.org/officeDocument/2006/relationships" xmlns:p="http://schemas.openxmlformats.org/presentationml/2006/main">
   <p:cSld>
     <p:spTree>
@@ -20540,7 +21864,7 @@
 </p:sld>
 </file>
 
-<file path=ppt/slides/slide7.xml><?xml version="1.0" encoding="utf-8"?>
+<file path=ppt/slides/slide8.xml><?xml version="1.0" encoding="utf-8"?>
 <p:sld xmlns:a="http://schemas.openxmlformats.org/drawingml/2006/main" xmlns:r="http://schemas.openxmlformats.org/officeDocument/2006/relationships" xmlns:p="http://schemas.openxmlformats.org/presentationml/2006/main">
   <p:cSld>
     <p:spTree>
@@ -21411,7 +22735,7 @@
 </p:sld>
 </file>
 
-<file path=ppt/slides/slide8.xml><?xml version="1.0" encoding="utf-8"?>
+<file path=ppt/slides/slide9.xml><?xml version="1.0" encoding="utf-8"?>
 <p:sld xmlns:a="http://schemas.openxmlformats.org/drawingml/2006/main" xmlns:r="http://schemas.openxmlformats.org/officeDocument/2006/relationships" xmlns:p="http://schemas.openxmlformats.org/presentationml/2006/main">
   <p:cSld>
     <p:spTree>

--- a/statistics_05_hypothesis_testing_p_val.pptx
+++ b/statistics_05_hypothesis_testing_p_val.pptx
@@ -14896,8 +14896,8 @@
         </p:nvSpPr>
         <p:spPr>
           <a:xfrm>
-            <a:off x="75825" y="71801"/>
-            <a:ext cx="6523500" cy="5586878"/>
+            <a:off x="75825" y="71800"/>
+            <a:ext cx="6523500" cy="6674687"/>
           </a:xfrm>
           <a:prstGeom prst="rect">
             <a:avLst/>
@@ -15509,6 +15509,186 @@
               </a:rPr>
               <a:t> is the distance from the mean measured in the number of standard deviations.</a:t>
             </a:r>
+          </a:p>
+          <a:p>
+            <a:pPr marL="0" marR="0" lvl="0" indent="0" algn="l" rtl="0">
+              <a:spcBef>
+                <a:spcPts val="0"/>
+              </a:spcBef>
+              <a:spcAft>
+                <a:spcPts val="0"/>
+              </a:spcAft>
+              <a:buSzPts val="1100"/>
+              <a:buNone/>
+            </a:pPr>
+            <a:endParaRPr lang="en-US" dirty="0">
+              <a:solidFill>
+                <a:schemeClr val="dk1"/>
+              </a:solidFill>
+              <a:latin typeface="Calibri"/>
+              <a:ea typeface="Calibri"/>
+              <a:cs typeface="Calibri"/>
+              <a:sym typeface="Calibri"/>
+            </a:endParaRPr>
+          </a:p>
+          <a:p>
+            <a:pPr marL="0" marR="0" lvl="0" indent="0" algn="l" rtl="0">
+              <a:spcBef>
+                <a:spcPts val="0"/>
+              </a:spcBef>
+              <a:spcAft>
+                <a:spcPts val="0"/>
+              </a:spcAft>
+              <a:buSzPts val="1100"/>
+              <a:buNone/>
+            </a:pPr>
+            <a:r>
+              <a:rPr lang="en-US" dirty="0">
+                <a:solidFill>
+                  <a:schemeClr val="dk1"/>
+                </a:solidFill>
+                <a:latin typeface="Calibri"/>
+                <a:ea typeface="Calibri"/>
+                <a:cs typeface="Calibri"/>
+                <a:sym typeface="Calibri"/>
+              </a:rPr>
+              <a:t>Margin of Error – XXXXXX</a:t>
+            </a:r>
+          </a:p>
+          <a:p>
+            <a:pPr marL="0" marR="0" lvl="0" indent="0" algn="l" rtl="0">
+              <a:spcBef>
+                <a:spcPts val="0"/>
+              </a:spcBef>
+              <a:spcAft>
+                <a:spcPts val="0"/>
+              </a:spcAft>
+              <a:buSzPts val="1100"/>
+              <a:buNone/>
+            </a:pPr>
+            <a:r>
+              <a:rPr lang="en-US" sz="1000" dirty="0">
+                <a:solidFill>
+                  <a:schemeClr val="dk1"/>
+                </a:solidFill>
+                <a:latin typeface="Calibri"/>
+                <a:ea typeface="Calibri"/>
+                <a:cs typeface="Calibri"/>
+                <a:sym typeface="Calibri"/>
+              </a:rPr>
+              <a:t> - </a:t>
+            </a:r>
+            <a:r>
+              <a:rPr lang="en-US" sz="1000" dirty="0">
+                <a:solidFill>
+                  <a:schemeClr val="dk1"/>
+                </a:solidFill>
+                <a:latin typeface="Calibri"/>
+                <a:ea typeface="Calibri"/>
+                <a:cs typeface="Calibri"/>
+                <a:sym typeface="Calibri"/>
+                <a:hlinkClick r:id="rId4"/>
+              </a:rPr>
+              <a:t>https://en.wikipedia.org/wiki/Margin_of_error</a:t>
+            </a:r>
+            <a:endParaRPr lang="en-US" sz="1000" dirty="0">
+              <a:solidFill>
+                <a:schemeClr val="dk1"/>
+              </a:solidFill>
+              <a:latin typeface="Calibri"/>
+              <a:ea typeface="Calibri"/>
+              <a:cs typeface="Calibri"/>
+              <a:sym typeface="Calibri"/>
+            </a:endParaRPr>
+          </a:p>
+          <a:p>
+            <a:pPr lvl="0">
+              <a:buSzPts val="1100"/>
+            </a:pPr>
+            <a:r>
+              <a:rPr lang="en-US" sz="1000" dirty="0">
+                <a:solidFill>
+                  <a:schemeClr val="dk1"/>
+                </a:solidFill>
+                <a:latin typeface="Calibri"/>
+                <a:ea typeface="Calibri"/>
+                <a:cs typeface="Calibri"/>
+                <a:sym typeface="Calibri"/>
+              </a:rPr>
+              <a:t> - </a:t>
+            </a:r>
+            <a:r>
+              <a:rPr lang="en-US" sz="1000" dirty="0">
+                <a:solidFill>
+                  <a:schemeClr val="dk1"/>
+                </a:solidFill>
+                <a:latin typeface="Calibri"/>
+                <a:ea typeface="Calibri"/>
+                <a:cs typeface="Calibri"/>
+                <a:sym typeface="Calibri"/>
+                <a:hlinkClick r:id="rId5"/>
+              </a:rPr>
+              <a:t>https://www.surveymonkey.com/mp/margin-of-error-calculator/</a:t>
+            </a:r>
+            <a:r>
+              <a:rPr lang="en-US" sz="1000" dirty="0">
+                <a:solidFill>
+                  <a:schemeClr val="dk1"/>
+                </a:solidFill>
+                <a:latin typeface="Calibri"/>
+                <a:ea typeface="Calibri"/>
+                <a:cs typeface="Calibri"/>
+                <a:sym typeface="Calibri"/>
+              </a:rPr>
+              <a:t> </a:t>
+            </a:r>
+          </a:p>
+          <a:p>
+            <a:pPr lvl="0">
+              <a:buSzPts val="1100"/>
+            </a:pPr>
+            <a:r>
+              <a:rPr lang="en-US" sz="1000" dirty="0">
+                <a:solidFill>
+                  <a:schemeClr val="dk1"/>
+                </a:solidFill>
+                <a:latin typeface="Calibri"/>
+                <a:ea typeface="Calibri"/>
+                <a:cs typeface="Calibri"/>
+                <a:sym typeface="Calibri"/>
+              </a:rPr>
+              <a:t> - </a:t>
+            </a:r>
+            <a:r>
+              <a:rPr lang="en-US" sz="1000" dirty="0">
+                <a:solidFill>
+                  <a:schemeClr val="dk1"/>
+                </a:solidFill>
+                <a:latin typeface="Calibri"/>
+                <a:ea typeface="Calibri"/>
+                <a:cs typeface="Calibri"/>
+                <a:sym typeface="Calibri"/>
+                <a:hlinkClick r:id="rId6"/>
+              </a:rPr>
+              <a:t>https://www.dummies.com/education/math/statistics/how-sample-size-affects-the-margin-of-error/</a:t>
+            </a:r>
+            <a:r>
+              <a:rPr lang="en-US" sz="1000" dirty="0">
+                <a:solidFill>
+                  <a:schemeClr val="dk1"/>
+                </a:solidFill>
+                <a:latin typeface="Calibri"/>
+                <a:ea typeface="Calibri"/>
+                <a:cs typeface="Calibri"/>
+                <a:sym typeface="Calibri"/>
+              </a:rPr>
+              <a:t> </a:t>
+            </a:r>
+          </a:p>
+          <a:p>
+            <a:pPr lvl="0">
+              <a:buSzPts val="1100"/>
+            </a:pPr>
             <a:endParaRPr dirty="0">
               <a:solidFill>
                 <a:schemeClr val="dk1"/>
@@ -15528,7 +15708,7 @@
           <p:nvPr/>
         </p:nvPicPr>
         <p:blipFill rotWithShape="1">
-          <a:blip r:embed="rId4" cstate="email">
+          <a:blip r:embed="rId7" cstate="email">
             <a:alphaModFix/>
             <a:extLst>
               <a:ext uri="{28A0092B-C50C-407E-A947-70E740481C1C}">

--- a/statistics_05_hypothesis_testing_p_val.pptx
+++ b/statistics_05_hypothesis_testing_p_val.pptx
@@ -17722,195 +17722,6 @@
       </p:grpSpPr>
       <p:sp>
         <p:nvSpPr>
-          <p:cNvPr id="4" name="TextBox 3">
-            <a:extLst>
-              <a:ext uri="{FF2B5EF4-FFF2-40B4-BE49-F238E27FC236}">
-                <a16:creationId xmlns:a16="http://schemas.microsoft.com/office/drawing/2014/main" id="{C88C8BE5-9D37-DF42-81EF-135B3A27BAE7}"/>
-              </a:ext>
-            </a:extLst>
-          </p:cNvPr>
-          <p:cNvSpPr txBox="1"/>
-          <p:nvPr/>
-        </p:nvSpPr>
-        <p:spPr>
-          <a:xfrm>
-            <a:off x="6128885" y="2886495"/>
-            <a:ext cx="5885365" cy="1015663"/>
-          </a:xfrm>
-          <a:prstGeom prst="rect">
-            <a:avLst/>
-          </a:prstGeom>
-          <a:noFill/>
-        </p:spPr>
-        <p:txBody>
-          <a:bodyPr wrap="square" rtlCol="0">
-            <a:spAutoFit/>
-          </a:bodyPr>
-          <a:lstStyle/>
-          <a:p>
-            <a:r>
-              <a:rPr lang="en-US" sz="1200" b="1" dirty="0" err="1">
-                <a:solidFill>
-                  <a:srgbClr val="0070C0"/>
-                </a:solidFill>
-                <a:latin typeface="Consolas" panose="020B0609020204030204" pitchFamily="49" charset="0"/>
-                <a:cs typeface="Consolas" panose="020B0609020204030204" pitchFamily="49" charset="0"/>
-              </a:rPr>
-              <a:t>binom_test</a:t>
-            </a:r>
-            <a:r>
-              <a:rPr lang="en-US" sz="1200" b="1" dirty="0">
-                <a:solidFill>
-                  <a:srgbClr val="0070C0"/>
-                </a:solidFill>
-                <a:latin typeface="Consolas" panose="020B0609020204030204" pitchFamily="49" charset="0"/>
-                <a:cs typeface="Consolas" panose="020B0609020204030204" pitchFamily="49" charset="0"/>
-              </a:rPr>
-              <a:t>(x=0,   n=1000, p=1/2, alternative='less')  </a:t>
-            </a:r>
-            <a:r>
-              <a:rPr lang="en-US" sz="1200" b="1" dirty="0">
-                <a:solidFill>
-                  <a:srgbClr val="00B050"/>
-                </a:solidFill>
-                <a:latin typeface="Consolas" panose="020B0609020204030204" pitchFamily="49" charset="0"/>
-                <a:cs typeface="Consolas" panose="020B0609020204030204" pitchFamily="49" charset="0"/>
-              </a:rPr>
-              <a:t># 0</a:t>
-            </a:r>
-          </a:p>
-          <a:p>
-            <a:r>
-              <a:rPr lang="en-US" sz="1200" b="1" dirty="0" err="1">
-                <a:solidFill>
-                  <a:srgbClr val="0070C0"/>
-                </a:solidFill>
-                <a:latin typeface="Consolas" panose="020B0609020204030204" pitchFamily="49" charset="0"/>
-                <a:cs typeface="Consolas" panose="020B0609020204030204" pitchFamily="49" charset="0"/>
-              </a:rPr>
-              <a:t>binom_test</a:t>
-            </a:r>
-            <a:r>
-              <a:rPr lang="en-US" sz="1200" b="1" dirty="0">
-                <a:solidFill>
-                  <a:srgbClr val="0070C0"/>
-                </a:solidFill>
-                <a:latin typeface="Consolas" panose="020B0609020204030204" pitchFamily="49" charset="0"/>
-                <a:cs typeface="Consolas" panose="020B0609020204030204" pitchFamily="49" charset="0"/>
-              </a:rPr>
-              <a:t>(x=470, n=1000, p=1/2, alternative='less')  </a:t>
-            </a:r>
-            <a:r>
-              <a:rPr lang="en-US" sz="1200" b="1" dirty="0">
-                <a:solidFill>
-                  <a:srgbClr val="00B050"/>
-                </a:solidFill>
-                <a:latin typeface="Consolas" panose="020B0609020204030204" pitchFamily="49" charset="0"/>
-                <a:cs typeface="Consolas" panose="020B0609020204030204" pitchFamily="49" charset="0"/>
-              </a:rPr>
-              <a:t># 0.031</a:t>
-            </a:r>
-          </a:p>
-          <a:p>
-            <a:r>
-              <a:rPr lang="en-US" sz="1200" b="1" dirty="0" err="1">
-                <a:solidFill>
-                  <a:srgbClr val="0070C0"/>
-                </a:solidFill>
-                <a:latin typeface="Consolas" panose="020B0609020204030204" pitchFamily="49" charset="0"/>
-                <a:cs typeface="Consolas" panose="020B0609020204030204" pitchFamily="49" charset="0"/>
-              </a:rPr>
-              <a:t>binom_test</a:t>
-            </a:r>
-            <a:r>
-              <a:rPr lang="en-US" sz="1200" b="1" dirty="0">
-                <a:solidFill>
-                  <a:srgbClr val="0070C0"/>
-                </a:solidFill>
-                <a:latin typeface="Consolas" panose="020B0609020204030204" pitchFamily="49" charset="0"/>
-                <a:cs typeface="Consolas" panose="020B0609020204030204" pitchFamily="49" charset="0"/>
-              </a:rPr>
-              <a:t>(x=500, n=1000, p=1/2, alternative='less')  </a:t>
-            </a:r>
-            <a:r>
-              <a:rPr lang="en-US" sz="1200" b="1" dirty="0">
-                <a:solidFill>
-                  <a:srgbClr val="00B050"/>
-                </a:solidFill>
-                <a:latin typeface="Consolas" panose="020B0609020204030204" pitchFamily="49" charset="0"/>
-                <a:cs typeface="Consolas" panose="020B0609020204030204" pitchFamily="49" charset="0"/>
-              </a:rPr>
-              <a:t># 0.5</a:t>
-            </a:r>
-          </a:p>
-          <a:p>
-            <a:r>
-              <a:rPr lang="en-US" sz="1200" b="1" dirty="0" err="1">
-                <a:solidFill>
-                  <a:srgbClr val="0070C0"/>
-                </a:solidFill>
-                <a:latin typeface="Consolas" panose="020B0609020204030204" pitchFamily="49" charset="0"/>
-                <a:cs typeface="Consolas" panose="020B0609020204030204" pitchFamily="49" charset="0"/>
-              </a:rPr>
-              <a:t>binom_test</a:t>
-            </a:r>
-            <a:r>
-              <a:rPr lang="en-US" sz="1200" b="1" dirty="0">
-                <a:solidFill>
-                  <a:srgbClr val="0070C0"/>
-                </a:solidFill>
-                <a:latin typeface="Consolas" panose="020B0609020204030204" pitchFamily="49" charset="0"/>
-                <a:cs typeface="Consolas" panose="020B0609020204030204" pitchFamily="49" charset="0"/>
-              </a:rPr>
-              <a:t>(x=530, n=1000, p=1/2, alternative='less')  </a:t>
-            </a:r>
-            <a:r>
-              <a:rPr lang="en-US" sz="1200" b="1" dirty="0">
-                <a:solidFill>
-                  <a:srgbClr val="00B050"/>
-                </a:solidFill>
-                <a:latin typeface="Consolas" panose="020B0609020204030204" pitchFamily="49" charset="0"/>
-                <a:cs typeface="Consolas" panose="020B0609020204030204" pitchFamily="49" charset="0"/>
-              </a:rPr>
-              <a:t># 0.973</a:t>
-            </a:r>
-          </a:p>
-          <a:p>
-            <a:r>
-              <a:rPr lang="en-US" sz="1200" b="1" dirty="0" err="1">
-                <a:solidFill>
-                  <a:srgbClr val="0070C0"/>
-                </a:solidFill>
-                <a:latin typeface="Consolas" panose="020B0609020204030204" pitchFamily="49" charset="0"/>
-                <a:cs typeface="Consolas" panose="020B0609020204030204" pitchFamily="49" charset="0"/>
-              </a:rPr>
-              <a:t>binom_test</a:t>
-            </a:r>
-            <a:r>
-              <a:rPr lang="en-US" sz="1200" b="1" dirty="0">
-                <a:solidFill>
-                  <a:srgbClr val="0070C0"/>
-                </a:solidFill>
-                <a:latin typeface="Consolas" panose="020B0609020204030204" pitchFamily="49" charset="0"/>
-                <a:cs typeface="Consolas" panose="020B0609020204030204" pitchFamily="49" charset="0"/>
-              </a:rPr>
-              <a:t>(x=999, n=1000, p=1/2, alternative='less')  </a:t>
-            </a:r>
-            <a:r>
-              <a:rPr lang="en-US" sz="1200" b="1" dirty="0">
-                <a:solidFill>
-                  <a:srgbClr val="00B050"/>
-                </a:solidFill>
-                <a:latin typeface="Consolas" panose="020B0609020204030204" pitchFamily="49" charset="0"/>
-                <a:cs typeface="Consolas" panose="020B0609020204030204" pitchFamily="49" charset="0"/>
-              </a:rPr>
-              <a:t># 1</a:t>
-            </a:r>
-          </a:p>
-        </p:txBody>
-      </p:sp>
-      <p:sp>
-        <p:nvSpPr>
           <p:cNvPr id="5" name="TextBox 4">
             <a:extLst>
               <a:ext uri="{FF2B5EF4-FFF2-40B4-BE49-F238E27FC236}">
@@ -18142,7 +17953,7 @@
         </p:blipFill>
         <p:spPr>
           <a:xfrm>
-            <a:off x="4107674" y="2786705"/>
+            <a:off x="4107674" y="2969585"/>
             <a:ext cx="1955444" cy="1303629"/>
           </a:xfrm>
           <a:prstGeom prst="rect">
@@ -18164,7 +17975,7 @@
         </p:nvSpPr>
         <p:spPr>
           <a:xfrm>
-            <a:off x="4082134" y="5491884"/>
+            <a:off x="4082134" y="5663334"/>
             <a:ext cx="5884256" cy="1015663"/>
           </a:xfrm>
           <a:prstGeom prst="rect">
@@ -18296,195 +18107,6 @@
           </a:fontRef>
         </p:style>
       </p:cxnSp>
-      <p:sp>
-        <p:nvSpPr>
-          <p:cNvPr id="14" name="TextBox 13">
-            <a:extLst>
-              <a:ext uri="{FF2B5EF4-FFF2-40B4-BE49-F238E27FC236}">
-                <a16:creationId xmlns:a16="http://schemas.microsoft.com/office/drawing/2014/main" id="{7E734F07-84EA-3747-B35F-8BE91031CC62}"/>
-              </a:ext>
-            </a:extLst>
-          </p:cNvPr>
-          <p:cNvSpPr txBox="1"/>
-          <p:nvPr/>
-        </p:nvSpPr>
-        <p:spPr>
-          <a:xfrm>
-            <a:off x="6128888" y="4149859"/>
-            <a:ext cx="5885361" cy="1015663"/>
-          </a:xfrm>
-          <a:prstGeom prst="rect">
-            <a:avLst/>
-          </a:prstGeom>
-          <a:noFill/>
-        </p:spPr>
-        <p:txBody>
-          <a:bodyPr wrap="square" rtlCol="0">
-            <a:spAutoFit/>
-          </a:bodyPr>
-          <a:lstStyle/>
-          <a:p>
-            <a:r>
-              <a:rPr lang="en-US" sz="1200" b="1" dirty="0" err="1">
-                <a:solidFill>
-                  <a:srgbClr val="0070C0"/>
-                </a:solidFill>
-                <a:latin typeface="Consolas" panose="020B0609020204030204" pitchFamily="49" charset="0"/>
-                <a:cs typeface="Consolas" panose="020B0609020204030204" pitchFamily="49" charset="0"/>
-              </a:rPr>
-              <a:t>binom_test</a:t>
-            </a:r>
-            <a:r>
-              <a:rPr lang="en-US" sz="1200" b="1" dirty="0">
-                <a:solidFill>
-                  <a:srgbClr val="0070C0"/>
-                </a:solidFill>
-                <a:latin typeface="Consolas" panose="020B0609020204030204" pitchFamily="49" charset="0"/>
-                <a:cs typeface="Consolas" panose="020B0609020204030204" pitchFamily="49" charset="0"/>
-              </a:rPr>
-              <a:t>(x=0,   n=1000, p=1/2, alternative='two-sided')  </a:t>
-            </a:r>
-            <a:r>
-              <a:rPr lang="en-US" sz="1200" b="1" dirty="0">
-                <a:solidFill>
-                  <a:srgbClr val="00B050"/>
-                </a:solidFill>
-                <a:latin typeface="Consolas" panose="020B0609020204030204" pitchFamily="49" charset="0"/>
-                <a:cs typeface="Consolas" panose="020B0609020204030204" pitchFamily="49" charset="0"/>
-              </a:rPr>
-              <a:t># 0</a:t>
-            </a:r>
-          </a:p>
-          <a:p>
-            <a:r>
-              <a:rPr lang="en-US" sz="1200" b="1" dirty="0" err="1">
-                <a:solidFill>
-                  <a:srgbClr val="0070C0"/>
-                </a:solidFill>
-                <a:latin typeface="Consolas" panose="020B0609020204030204" pitchFamily="49" charset="0"/>
-                <a:cs typeface="Consolas" panose="020B0609020204030204" pitchFamily="49" charset="0"/>
-              </a:rPr>
-              <a:t>binom_test</a:t>
-            </a:r>
-            <a:r>
-              <a:rPr lang="en-US" sz="1200" b="1" dirty="0">
-                <a:solidFill>
-                  <a:srgbClr val="0070C0"/>
-                </a:solidFill>
-                <a:latin typeface="Consolas" panose="020B0609020204030204" pitchFamily="49" charset="0"/>
-                <a:cs typeface="Consolas" panose="020B0609020204030204" pitchFamily="49" charset="0"/>
-              </a:rPr>
-              <a:t>(x=470, n=1000, p=1/2, alternative='two-sided')  </a:t>
-            </a:r>
-            <a:r>
-              <a:rPr lang="en-US" sz="1200" b="1" dirty="0">
-                <a:solidFill>
-                  <a:srgbClr val="00B050"/>
-                </a:solidFill>
-                <a:latin typeface="Consolas" panose="020B0609020204030204" pitchFamily="49" charset="0"/>
-                <a:cs typeface="Consolas" panose="020B0609020204030204" pitchFamily="49" charset="0"/>
-              </a:rPr>
-              <a:t># 0.062</a:t>
-            </a:r>
-          </a:p>
-          <a:p>
-            <a:r>
-              <a:rPr lang="en-US" sz="1200" b="1" dirty="0" err="1">
-                <a:solidFill>
-                  <a:srgbClr val="0070C0"/>
-                </a:solidFill>
-                <a:latin typeface="Consolas" panose="020B0609020204030204" pitchFamily="49" charset="0"/>
-                <a:cs typeface="Consolas" panose="020B0609020204030204" pitchFamily="49" charset="0"/>
-              </a:rPr>
-              <a:t>binom_test</a:t>
-            </a:r>
-            <a:r>
-              <a:rPr lang="en-US" sz="1200" b="1" dirty="0">
-                <a:solidFill>
-                  <a:srgbClr val="0070C0"/>
-                </a:solidFill>
-                <a:latin typeface="Consolas" panose="020B0609020204030204" pitchFamily="49" charset="0"/>
-                <a:cs typeface="Consolas" panose="020B0609020204030204" pitchFamily="49" charset="0"/>
-              </a:rPr>
-              <a:t>(x=500, n=1000, p=1/2, alternative='two-sided')  </a:t>
-            </a:r>
-            <a:r>
-              <a:rPr lang="en-US" sz="1200" b="1" dirty="0">
-                <a:solidFill>
-                  <a:srgbClr val="00B050"/>
-                </a:solidFill>
-                <a:latin typeface="Consolas" panose="020B0609020204030204" pitchFamily="49" charset="0"/>
-                <a:cs typeface="Consolas" panose="020B0609020204030204" pitchFamily="49" charset="0"/>
-              </a:rPr>
-              <a:t># 1.0</a:t>
-            </a:r>
-          </a:p>
-          <a:p>
-            <a:r>
-              <a:rPr lang="en-US" sz="1200" b="1" dirty="0" err="1">
-                <a:solidFill>
-                  <a:srgbClr val="0070C0"/>
-                </a:solidFill>
-                <a:latin typeface="Consolas" panose="020B0609020204030204" pitchFamily="49" charset="0"/>
-                <a:cs typeface="Consolas" panose="020B0609020204030204" pitchFamily="49" charset="0"/>
-              </a:rPr>
-              <a:t>binom_test</a:t>
-            </a:r>
-            <a:r>
-              <a:rPr lang="en-US" sz="1200" b="1" dirty="0">
-                <a:solidFill>
-                  <a:srgbClr val="0070C0"/>
-                </a:solidFill>
-                <a:latin typeface="Consolas" panose="020B0609020204030204" pitchFamily="49" charset="0"/>
-                <a:cs typeface="Consolas" panose="020B0609020204030204" pitchFamily="49" charset="0"/>
-              </a:rPr>
-              <a:t>(x=530, n=1000, p=1/2, alternative='two-sided')  </a:t>
-            </a:r>
-            <a:r>
-              <a:rPr lang="en-US" sz="1200" b="1" dirty="0">
-                <a:solidFill>
-                  <a:srgbClr val="00B050"/>
-                </a:solidFill>
-                <a:latin typeface="Consolas" panose="020B0609020204030204" pitchFamily="49" charset="0"/>
-                <a:cs typeface="Consolas" panose="020B0609020204030204" pitchFamily="49" charset="0"/>
-              </a:rPr>
-              <a:t># 0.062</a:t>
-            </a:r>
-          </a:p>
-          <a:p>
-            <a:r>
-              <a:rPr lang="en-US" sz="1200" b="1" dirty="0" err="1">
-                <a:solidFill>
-                  <a:srgbClr val="0070C0"/>
-                </a:solidFill>
-                <a:latin typeface="Consolas" panose="020B0609020204030204" pitchFamily="49" charset="0"/>
-                <a:cs typeface="Consolas" panose="020B0609020204030204" pitchFamily="49" charset="0"/>
-              </a:rPr>
-              <a:t>binom_test</a:t>
-            </a:r>
-            <a:r>
-              <a:rPr lang="en-US" sz="1200" b="1" dirty="0">
-                <a:solidFill>
-                  <a:srgbClr val="0070C0"/>
-                </a:solidFill>
-                <a:latin typeface="Consolas" panose="020B0609020204030204" pitchFamily="49" charset="0"/>
-                <a:cs typeface="Consolas" panose="020B0609020204030204" pitchFamily="49" charset="0"/>
-              </a:rPr>
-              <a:t>(x=999, n=1000, p=1/2, alternative='two-sided')  </a:t>
-            </a:r>
-            <a:r>
-              <a:rPr lang="en-US" sz="1200" b="1" dirty="0">
-                <a:solidFill>
-                  <a:srgbClr val="00B050"/>
-                </a:solidFill>
-                <a:latin typeface="Consolas" panose="020B0609020204030204" pitchFamily="49" charset="0"/>
-                <a:cs typeface="Consolas" panose="020B0609020204030204" pitchFamily="49" charset="0"/>
-              </a:rPr>
-              <a:t># 0</a:t>
-            </a:r>
-          </a:p>
-        </p:txBody>
-      </p:sp>
       <p:pic>
         <p:nvPicPr>
           <p:cNvPr id="15" name="Picture 14">
@@ -18513,7 +18135,7 @@
         </p:blipFill>
         <p:spPr>
           <a:xfrm>
-            <a:off x="4107674" y="4052375"/>
+            <a:off x="4107674" y="4235255"/>
             <a:ext cx="1955444" cy="1303629"/>
           </a:xfrm>
           <a:prstGeom prst="rect">
@@ -18926,63 +18548,103 @@
                 <a:latin typeface="Consolas" panose="020B0609020204030204" pitchFamily="49" charset="0"/>
                 <a:cs typeface="Consolas" panose="020B0609020204030204" pitchFamily="49" charset="0"/>
               </a:rPr>
-              <a:t>(8,10,0.5)  # 0.043945</a:t>
-            </a:r>
-          </a:p>
-          <a:p>
-            <a:r>
-              <a:rPr lang="en-US" dirty="0" err="1">
-                <a:solidFill>
-                  <a:srgbClr val="0070C0"/>
+              <a:t>(8,10,0.5)  </a:t>
+            </a:r>
+            <a:r>
+              <a:rPr lang="en-US" dirty="0">
+                <a:solidFill>
+                  <a:srgbClr val="00B050"/>
                 </a:solidFill>
                 <a:latin typeface="Consolas" panose="020B0609020204030204" pitchFamily="49" charset="0"/>
                 <a:cs typeface="Consolas" panose="020B0609020204030204" pitchFamily="49" charset="0"/>
               </a:rPr>
-              <a:t>binom.pmf</a:t>
-            </a:r>
-            <a:r>
-              <a:rPr lang="en-US" dirty="0">
+              <a:t># 0.043945</a:t>
+            </a:r>
+          </a:p>
+          <a:p>
+            <a:r>
+              <a:rPr lang="en-US" dirty="0" err="1">
                 <a:solidFill>
                   <a:srgbClr val="0070C0"/>
                 </a:solidFill>
                 <a:latin typeface="Consolas" panose="020B0609020204030204" pitchFamily="49" charset="0"/>
                 <a:cs typeface="Consolas" panose="020B0609020204030204" pitchFamily="49" charset="0"/>
               </a:rPr>
-              <a:t>(9,10,0.5)  # 0.009766</a:t>
-            </a:r>
-          </a:p>
-          <a:p>
-            <a:r>
-              <a:rPr lang="en-US" dirty="0" err="1">
+              <a:t>binom.pmf</a:t>
+            </a:r>
+            <a:r>
+              <a:rPr lang="en-US" dirty="0">
                 <a:solidFill>
                   <a:srgbClr val="0070C0"/>
                 </a:solidFill>
                 <a:latin typeface="Consolas" panose="020B0609020204030204" pitchFamily="49" charset="0"/>
                 <a:cs typeface="Consolas" panose="020B0609020204030204" pitchFamily="49" charset="0"/>
               </a:rPr>
-              <a:t>binom.pmf</a:t>
+              <a:t>(9,10,0.5)  </a:t>
             </a:r>
             <a:r>
               <a:rPr lang="en-US" dirty="0">
                 <a:solidFill>
-                  <a:srgbClr val="0070C0"/>
+                  <a:srgbClr val="00B050"/>
                 </a:solidFill>
                 <a:latin typeface="Consolas" panose="020B0609020204030204" pitchFamily="49" charset="0"/>
                 <a:cs typeface="Consolas" panose="020B0609020204030204" pitchFamily="49" charset="0"/>
               </a:rPr>
-              <a:t>(10,10,0.5) # 0.000977</a:t>
-            </a:r>
-          </a:p>
-          <a:p>
-            <a:r>
-              <a:rPr lang="en-US" dirty="0">
+              <a:t># 0.009766</a:t>
+            </a:r>
+          </a:p>
+          <a:p>
+            <a:r>
+              <a:rPr lang="en-US" dirty="0" err="1">
                 <a:solidFill>
                   <a:srgbClr val="0070C0"/>
                 </a:solidFill>
                 <a:latin typeface="Consolas" panose="020B0609020204030204" pitchFamily="49" charset="0"/>
                 <a:cs typeface="Consolas" panose="020B0609020204030204" pitchFamily="49" charset="0"/>
               </a:rPr>
-              <a:t>                # sum: 0.054688</a:t>
+              <a:t>binom.pmf</a:t>
+            </a:r>
+            <a:r>
+              <a:rPr lang="en-US" dirty="0">
+                <a:solidFill>
+                  <a:srgbClr val="0070C0"/>
+                </a:solidFill>
+                <a:latin typeface="Consolas" panose="020B0609020204030204" pitchFamily="49" charset="0"/>
+                <a:cs typeface="Consolas" panose="020B0609020204030204" pitchFamily="49" charset="0"/>
+              </a:rPr>
+              <a:t>(10,10,0.5) </a:t>
+            </a:r>
+            <a:r>
+              <a:rPr lang="en-US" dirty="0">
+                <a:solidFill>
+                  <a:srgbClr val="00B050"/>
+                </a:solidFill>
+                <a:latin typeface="Consolas" panose="020B0609020204030204" pitchFamily="49" charset="0"/>
+                <a:cs typeface="Consolas" panose="020B0609020204030204" pitchFamily="49" charset="0"/>
+              </a:rPr>
+              <a:t># 0.000977</a:t>
+            </a:r>
+          </a:p>
+          <a:p>
+            <a:r>
+              <a:rPr lang="en-US" dirty="0">
+                <a:solidFill>
+                  <a:srgbClr val="0070C0"/>
+                </a:solidFill>
+                <a:latin typeface="Consolas" panose="020B0609020204030204" pitchFamily="49" charset="0"/>
+                <a:cs typeface="Consolas" panose="020B0609020204030204" pitchFamily="49" charset="0"/>
+              </a:rPr>
+              <a:t>                </a:t>
+            </a:r>
+            <a:r>
+              <a:rPr lang="en-US" dirty="0">
+                <a:solidFill>
+                  <a:srgbClr val="00B050"/>
+                </a:solidFill>
+                <a:latin typeface="Consolas" panose="020B0609020204030204" pitchFamily="49" charset="0"/>
+                <a:cs typeface="Consolas" panose="020B0609020204030204" pitchFamily="49" charset="0"/>
+              </a:rPr>
+              <a:t># sum: 0.054688</a:t>
             </a:r>
           </a:p>
         </p:txBody>
@@ -19136,7 +18798,7 @@
         </p:blipFill>
         <p:spPr>
           <a:xfrm>
-            <a:off x="4107674" y="1489196"/>
+            <a:off x="4107674" y="1672076"/>
             <a:ext cx="1955442" cy="1303628"/>
           </a:xfrm>
           <a:prstGeom prst="rect">
@@ -19158,7 +18820,7 @@
         </p:nvSpPr>
         <p:spPr>
           <a:xfrm>
-            <a:off x="6128884" y="1282539"/>
+            <a:off x="6128884" y="1465419"/>
             <a:ext cx="5885365" cy="1384995"/>
           </a:xfrm>
           <a:prstGeom prst="rect">
@@ -19222,8 +18884,6 @@
               </a:rPr>
               <a:t>  # returns p-value of test</a:t>
             </a:r>
-          </a:p>
-          <a:p>
             <a:endParaRPr lang="en-US" sz="1200" b="1" dirty="0">
               <a:solidFill>
                 <a:srgbClr val="0070C0"/>
@@ -19241,7 +18901,7 @@
                 <a:latin typeface="Consolas" panose="020B0609020204030204" pitchFamily="49" charset="0"/>
                 <a:cs typeface="Consolas" panose="020B0609020204030204" pitchFamily="49" charset="0"/>
               </a:rPr>
-              <a:t>binom_test</a:t>
+              <a:t>xvals</a:t>
             </a:r>
             <a:r>
               <a:rPr lang="en-US" sz="1200" b="1" dirty="0">
@@ -19251,20 +18911,29 @@
                 <a:latin typeface="Consolas" panose="020B0609020204030204" pitchFamily="49" charset="0"/>
                 <a:cs typeface="Consolas" panose="020B0609020204030204" pitchFamily="49" charset="0"/>
               </a:rPr>
-              <a:t>(x=0,   n=1000, p=1/2, alternative='less')  </a:t>
-            </a:r>
+              <a:t> = [0,470,500,530,999]</a:t>
+            </a:r>
+          </a:p>
+          <a:p>
+            <a:endParaRPr lang="en-US" sz="1200" b="1" dirty="0">
+              <a:solidFill>
+                <a:srgbClr val="0070C0"/>
+              </a:solidFill>
+              <a:latin typeface="Consolas" panose="020B0609020204030204" pitchFamily="49" charset="0"/>
+              <a:cs typeface="Consolas" panose="020B0609020204030204" pitchFamily="49" charset="0"/>
+            </a:endParaRPr>
+          </a:p>
+          <a:p>
             <a:r>
               <a:rPr lang="en-US" sz="1200" b="1" dirty="0">
                 <a:solidFill>
-                  <a:srgbClr val="00B050"/>
+                  <a:srgbClr val="0070C0"/>
                 </a:solidFill>
                 <a:latin typeface="Consolas" panose="020B0609020204030204" pitchFamily="49" charset="0"/>
                 <a:cs typeface="Consolas" panose="020B0609020204030204" pitchFamily="49" charset="0"/>
               </a:rPr>
-              <a:t># 1</a:t>
-            </a:r>
-          </a:p>
-          <a:p>
+              <a:t>for x in </a:t>
+            </a:r>
             <a:r>
               <a:rPr lang="en-US" sz="1200" b="1" dirty="0" err="1">
                 <a:solidFill>
@@ -19273,7 +18942,7 @@
                 <a:latin typeface="Consolas" panose="020B0609020204030204" pitchFamily="49" charset="0"/>
                 <a:cs typeface="Consolas" panose="020B0609020204030204" pitchFamily="49" charset="0"/>
               </a:rPr>
-              <a:t>binom_test</a:t>
+              <a:t>xvals</a:t>
             </a:r>
             <a:r>
               <a:rPr lang="en-US" sz="1200" b="1" dirty="0">
@@ -19283,20 +18952,20 @@
                 <a:latin typeface="Consolas" panose="020B0609020204030204" pitchFamily="49" charset="0"/>
                 <a:cs typeface="Consolas" panose="020B0609020204030204" pitchFamily="49" charset="0"/>
               </a:rPr>
-              <a:t>(x=470, n=1000, p=1/2, alternative='less')  </a:t>
-            </a:r>
+              <a:t>:</a:t>
+            </a:r>
+          </a:p>
+          <a:p>
             <a:r>
               <a:rPr lang="en-US" sz="1200" b="1" dirty="0">
                 <a:solidFill>
-                  <a:srgbClr val="00B050"/>
+                  <a:srgbClr val="0070C0"/>
                 </a:solidFill>
                 <a:latin typeface="Consolas" panose="020B0609020204030204" pitchFamily="49" charset="0"/>
                 <a:cs typeface="Consolas" panose="020B0609020204030204" pitchFamily="49" charset="0"/>
               </a:rPr>
-              <a:t># 0.973</a:t>
-            </a:r>
-          </a:p>
-          <a:p>
+              <a:t>    </a:t>
+            </a:r>
             <a:r>
               <a:rPr lang="en-US" sz="1200" b="1" dirty="0" err="1">
                 <a:solidFill>
@@ -19305,7 +18974,7 @@
                 <a:latin typeface="Consolas" panose="020B0609020204030204" pitchFamily="49" charset="0"/>
                 <a:cs typeface="Consolas" panose="020B0609020204030204" pitchFamily="49" charset="0"/>
               </a:rPr>
-              <a:t>binom_test</a:t>
+              <a:t>myval</a:t>
             </a:r>
             <a:r>
               <a:rPr lang="en-US" sz="1200" b="1" dirty="0">
@@ -19315,81 +18984,385 @@
                 <a:latin typeface="Consolas" panose="020B0609020204030204" pitchFamily="49" charset="0"/>
                 <a:cs typeface="Consolas" panose="020B0609020204030204" pitchFamily="49" charset="0"/>
               </a:rPr>
-              <a:t>(x=500, n=1000, p=1/2, alternative='less')  </a:t>
-            </a:r>
-            <a:r>
-              <a:rPr lang="en-US" sz="1200" b="1" dirty="0">
-                <a:solidFill>
-                  <a:srgbClr val="00B050"/>
+              <a:t> = </a:t>
+            </a:r>
+            <a:r>
+              <a:rPr lang="en-US" sz="1200" b="1" dirty="0" err="1">
+                <a:solidFill>
+                  <a:srgbClr val="0070C0"/>
                 </a:solidFill>
                 <a:latin typeface="Consolas" panose="020B0609020204030204" pitchFamily="49" charset="0"/>
                 <a:cs typeface="Consolas" panose="020B0609020204030204" pitchFamily="49" charset="0"/>
               </a:rPr>
-              <a:t># 0.5</a:t>
-            </a:r>
-          </a:p>
-          <a:p>
-            <a:r>
-              <a:rPr lang="en-US" sz="1200" b="1" dirty="0" err="1">
+              <a:t>binom_test</a:t>
+            </a:r>
+            <a:r>
+              <a:rPr lang="en-US" sz="1200" b="1" dirty="0">
                 <a:solidFill>
                   <a:srgbClr val="0070C0"/>
                 </a:solidFill>
                 <a:latin typeface="Consolas" panose="020B0609020204030204" pitchFamily="49" charset="0"/>
                 <a:cs typeface="Consolas" panose="020B0609020204030204" pitchFamily="49" charset="0"/>
               </a:rPr>
-              <a:t>binom_test</a:t>
+              <a:t>(x=x, n=1000, p=1/2, alternative='</a:t>
             </a:r>
             <a:r>
               <a:rPr lang="en-US" sz="1200" b="1" dirty="0">
                 <a:solidFill>
-                  <a:srgbClr val="0070C0"/>
+                  <a:srgbClr val="00B050"/>
                 </a:solidFill>
                 <a:latin typeface="Consolas" panose="020B0609020204030204" pitchFamily="49" charset="0"/>
                 <a:cs typeface="Consolas" panose="020B0609020204030204" pitchFamily="49" charset="0"/>
               </a:rPr>
-              <a:t>(x=530, n=1000, p=1/2, alternative='less')  </a:t>
+              <a:t>greater</a:t>
             </a:r>
             <a:r>
               <a:rPr lang="en-US" sz="1200" b="1" dirty="0">
                 <a:solidFill>
-                  <a:srgbClr val="00B050"/>
+                  <a:srgbClr val="0070C0"/>
                 </a:solidFill>
                 <a:latin typeface="Consolas" panose="020B0609020204030204" pitchFamily="49" charset="0"/>
                 <a:cs typeface="Consolas" panose="020B0609020204030204" pitchFamily="49" charset="0"/>
               </a:rPr>
-              <a:t># 0.031</a:t>
-            </a:r>
-          </a:p>
-          <a:p>
-            <a:r>
-              <a:rPr lang="en-US" sz="1200" b="1" dirty="0" err="1">
+              <a:t>')</a:t>
+            </a:r>
+          </a:p>
+          <a:p>
+            <a:r>
+              <a:rPr lang="en-US" sz="1200" b="1" dirty="0">
                 <a:solidFill>
                   <a:srgbClr val="0070C0"/>
                 </a:solidFill>
                 <a:latin typeface="Consolas" panose="020B0609020204030204" pitchFamily="49" charset="0"/>
                 <a:cs typeface="Consolas" panose="020B0609020204030204" pitchFamily="49" charset="0"/>
               </a:rPr>
-              <a:t>binom_test</a:t>
-            </a:r>
+              <a:t>    print(f"{myval:.3f}")  </a:t>
+            </a:r>
+          </a:p>
+          <a:p>
             <a:r>
               <a:rPr lang="en-US" sz="1200" b="1" dirty="0">
                 <a:solidFill>
-                  <a:srgbClr val="0070C0"/>
+                  <a:srgbClr val="00B050"/>
                 </a:solidFill>
                 <a:latin typeface="Consolas" panose="020B0609020204030204" pitchFamily="49" charset="0"/>
                 <a:cs typeface="Consolas" panose="020B0609020204030204" pitchFamily="49" charset="0"/>
               </a:rPr>
-              <a:t>(x=999, n=1000, p=1/2, alternative='less')  </a:t>
-            </a:r>
+              <a:t># [1, 0.973, 0.5, 0.031, 0]</a:t>
+            </a:r>
+          </a:p>
+        </p:txBody>
+      </p:sp>
+      <p:sp>
+        <p:nvSpPr>
+          <p:cNvPr id="20" name="TextBox 19">
+            <a:extLst>
+              <a:ext uri="{FF2B5EF4-FFF2-40B4-BE49-F238E27FC236}">
+                <a16:creationId xmlns:a16="http://schemas.microsoft.com/office/drawing/2014/main" id="{AF338543-3670-DC4B-8757-2A6B8ABF849E}"/>
+              </a:ext>
+            </a:extLst>
+          </p:cNvPr>
+          <p:cNvSpPr txBox="1"/>
+          <p:nvPr/>
+        </p:nvSpPr>
+        <p:spPr>
+          <a:xfrm>
+            <a:off x="6128884" y="3242595"/>
+            <a:ext cx="5885365" cy="830997"/>
+          </a:xfrm>
+          <a:prstGeom prst="rect">
+            <a:avLst/>
+          </a:prstGeom>
+          <a:noFill/>
+        </p:spPr>
+        <p:txBody>
+          <a:bodyPr wrap="square" rtlCol="0">
+            <a:spAutoFit/>
+          </a:bodyPr>
+          <a:lstStyle/>
+          <a:p>
             <a:r>
               <a:rPr lang="en-US" sz="1200" b="1" dirty="0">
                 <a:solidFill>
-                  <a:srgbClr val="00B050"/>
+                  <a:srgbClr val="0070C0"/>
                 </a:solidFill>
                 <a:latin typeface="Consolas" panose="020B0609020204030204" pitchFamily="49" charset="0"/>
                 <a:cs typeface="Consolas" panose="020B0609020204030204" pitchFamily="49" charset="0"/>
               </a:rPr>
-              <a:t># 0</a:t>
+              <a:t>for x in </a:t>
+            </a:r>
+            <a:r>
+              <a:rPr lang="en-US" sz="1200" b="1" dirty="0" err="1">
+                <a:solidFill>
+                  <a:srgbClr val="0070C0"/>
+                </a:solidFill>
+                <a:latin typeface="Consolas" panose="020B0609020204030204" pitchFamily="49" charset="0"/>
+                <a:cs typeface="Consolas" panose="020B0609020204030204" pitchFamily="49" charset="0"/>
+              </a:rPr>
+              <a:t>xvals</a:t>
+            </a:r>
+            <a:r>
+              <a:rPr lang="en-US" sz="1200" b="1" dirty="0">
+                <a:solidFill>
+                  <a:srgbClr val="0070C0"/>
+                </a:solidFill>
+                <a:latin typeface="Consolas" panose="020B0609020204030204" pitchFamily="49" charset="0"/>
+                <a:cs typeface="Consolas" panose="020B0609020204030204" pitchFamily="49" charset="0"/>
+              </a:rPr>
+              <a:t>:</a:t>
+            </a:r>
+          </a:p>
+          <a:p>
+            <a:r>
+              <a:rPr lang="en-US" sz="1200" b="1" dirty="0">
+                <a:solidFill>
+                  <a:srgbClr val="0070C0"/>
+                </a:solidFill>
+                <a:latin typeface="Consolas" panose="020B0609020204030204" pitchFamily="49" charset="0"/>
+                <a:cs typeface="Consolas" panose="020B0609020204030204" pitchFamily="49" charset="0"/>
+              </a:rPr>
+              <a:t>    </a:t>
+            </a:r>
+            <a:r>
+              <a:rPr lang="en-US" sz="1200" b="1" dirty="0" err="1">
+                <a:solidFill>
+                  <a:srgbClr val="0070C0"/>
+                </a:solidFill>
+                <a:latin typeface="Consolas" panose="020B0609020204030204" pitchFamily="49" charset="0"/>
+                <a:cs typeface="Consolas" panose="020B0609020204030204" pitchFamily="49" charset="0"/>
+              </a:rPr>
+              <a:t>myval</a:t>
+            </a:r>
+            <a:r>
+              <a:rPr lang="en-US" sz="1200" b="1" dirty="0">
+                <a:solidFill>
+                  <a:srgbClr val="0070C0"/>
+                </a:solidFill>
+                <a:latin typeface="Consolas" panose="020B0609020204030204" pitchFamily="49" charset="0"/>
+                <a:cs typeface="Consolas" panose="020B0609020204030204" pitchFamily="49" charset="0"/>
+              </a:rPr>
+              <a:t> = </a:t>
+            </a:r>
+            <a:r>
+              <a:rPr lang="en-US" sz="1200" b="1" dirty="0" err="1">
+                <a:solidFill>
+                  <a:srgbClr val="0070C0"/>
+                </a:solidFill>
+                <a:latin typeface="Consolas" panose="020B0609020204030204" pitchFamily="49" charset="0"/>
+                <a:cs typeface="Consolas" panose="020B0609020204030204" pitchFamily="49" charset="0"/>
+              </a:rPr>
+              <a:t>binom_test</a:t>
+            </a:r>
+            <a:r>
+              <a:rPr lang="en-US" sz="1200" b="1" dirty="0">
+                <a:solidFill>
+                  <a:srgbClr val="0070C0"/>
+                </a:solidFill>
+                <a:latin typeface="Consolas" panose="020B0609020204030204" pitchFamily="49" charset="0"/>
+                <a:cs typeface="Consolas" panose="020B0609020204030204" pitchFamily="49" charset="0"/>
+              </a:rPr>
+              <a:t>(x=x, n=1000, p=1/2, alternative='</a:t>
+            </a:r>
+            <a:r>
+              <a:rPr lang="en-US" sz="1200" b="1" dirty="0">
+                <a:solidFill>
+                  <a:srgbClr val="00B050"/>
+                </a:solidFill>
+                <a:latin typeface="Consolas" panose="020B0609020204030204" pitchFamily="49" charset="0"/>
+                <a:cs typeface="Consolas" panose="020B0609020204030204" pitchFamily="49" charset="0"/>
+              </a:rPr>
+              <a:t>less</a:t>
+            </a:r>
+            <a:r>
+              <a:rPr lang="en-US" sz="1200" b="1" dirty="0">
+                <a:solidFill>
+                  <a:srgbClr val="0070C0"/>
+                </a:solidFill>
+                <a:latin typeface="Consolas" panose="020B0609020204030204" pitchFamily="49" charset="0"/>
+                <a:cs typeface="Consolas" panose="020B0609020204030204" pitchFamily="49" charset="0"/>
+              </a:rPr>
+              <a:t>')</a:t>
+            </a:r>
+          </a:p>
+          <a:p>
+            <a:r>
+              <a:rPr lang="en-US" sz="1200" b="1" dirty="0">
+                <a:solidFill>
+                  <a:srgbClr val="0070C0"/>
+                </a:solidFill>
+                <a:latin typeface="Consolas" panose="020B0609020204030204" pitchFamily="49" charset="0"/>
+                <a:cs typeface="Consolas" panose="020B0609020204030204" pitchFamily="49" charset="0"/>
+              </a:rPr>
+              <a:t>    print(f"{myval:.3f}")</a:t>
+            </a:r>
+          </a:p>
+          <a:p>
+            <a:r>
+              <a:rPr lang="en-US" sz="1200" b="1" dirty="0">
+                <a:solidFill>
+                  <a:srgbClr val="00B050"/>
+                </a:solidFill>
+                <a:latin typeface="Consolas" panose="020B0609020204030204" pitchFamily="49" charset="0"/>
+                <a:cs typeface="Consolas" panose="020B0609020204030204" pitchFamily="49" charset="0"/>
+              </a:rPr>
+              <a:t># [0, 0.031, 0.5, 0.973, 1]</a:t>
+            </a:r>
+          </a:p>
+        </p:txBody>
+      </p:sp>
+      <p:sp>
+        <p:nvSpPr>
+          <p:cNvPr id="21" name="TextBox 20">
+            <a:extLst>
+              <a:ext uri="{FF2B5EF4-FFF2-40B4-BE49-F238E27FC236}">
+                <a16:creationId xmlns:a16="http://schemas.microsoft.com/office/drawing/2014/main" id="{22578DB8-3D7C-4A46-9833-B1F5343919F1}"/>
+              </a:ext>
+            </a:extLst>
+          </p:cNvPr>
+          <p:cNvSpPr txBox="1"/>
+          <p:nvPr/>
+        </p:nvSpPr>
+        <p:spPr>
+          <a:xfrm>
+            <a:off x="6128884" y="4477302"/>
+            <a:ext cx="5885365" cy="830997"/>
+          </a:xfrm>
+          <a:prstGeom prst="rect">
+            <a:avLst/>
+          </a:prstGeom>
+          <a:noFill/>
+        </p:spPr>
+        <p:txBody>
+          <a:bodyPr wrap="square" rtlCol="0">
+            <a:spAutoFit/>
+          </a:bodyPr>
+          <a:lstStyle/>
+          <a:p>
+            <a:r>
+              <a:rPr lang="en-US" sz="1200" b="1" dirty="0">
+                <a:solidFill>
+                  <a:srgbClr val="0070C0"/>
+                </a:solidFill>
+                <a:latin typeface="Consolas" panose="020B0609020204030204" pitchFamily="49" charset="0"/>
+                <a:cs typeface="Consolas" panose="020B0609020204030204" pitchFamily="49" charset="0"/>
+              </a:rPr>
+              <a:t>for x in </a:t>
+            </a:r>
+            <a:r>
+              <a:rPr lang="en-US" sz="1200" b="1" dirty="0" err="1">
+                <a:solidFill>
+                  <a:srgbClr val="0070C0"/>
+                </a:solidFill>
+                <a:latin typeface="Consolas" panose="020B0609020204030204" pitchFamily="49" charset="0"/>
+                <a:cs typeface="Consolas" panose="020B0609020204030204" pitchFamily="49" charset="0"/>
+              </a:rPr>
+              <a:t>xvals</a:t>
+            </a:r>
+            <a:r>
+              <a:rPr lang="en-US" sz="1200" b="1" dirty="0">
+                <a:solidFill>
+                  <a:srgbClr val="0070C0"/>
+                </a:solidFill>
+                <a:latin typeface="Consolas" panose="020B0609020204030204" pitchFamily="49" charset="0"/>
+                <a:cs typeface="Consolas" panose="020B0609020204030204" pitchFamily="49" charset="0"/>
+              </a:rPr>
+              <a:t>:</a:t>
+            </a:r>
+          </a:p>
+          <a:p>
+            <a:r>
+              <a:rPr lang="en-US" sz="1200" b="1" dirty="0">
+                <a:solidFill>
+                  <a:srgbClr val="0070C0"/>
+                </a:solidFill>
+                <a:latin typeface="Consolas" panose="020B0609020204030204" pitchFamily="49" charset="0"/>
+                <a:cs typeface="Consolas" panose="020B0609020204030204" pitchFamily="49" charset="0"/>
+              </a:rPr>
+              <a:t>    </a:t>
+            </a:r>
+            <a:r>
+              <a:rPr lang="en-US" sz="1200" b="1" dirty="0" err="1">
+                <a:solidFill>
+                  <a:srgbClr val="0070C0"/>
+                </a:solidFill>
+                <a:latin typeface="Consolas" panose="020B0609020204030204" pitchFamily="49" charset="0"/>
+                <a:cs typeface="Consolas" panose="020B0609020204030204" pitchFamily="49" charset="0"/>
+              </a:rPr>
+              <a:t>myval</a:t>
+            </a:r>
+            <a:r>
+              <a:rPr lang="en-US" sz="1200" b="1" dirty="0">
+                <a:solidFill>
+                  <a:srgbClr val="0070C0"/>
+                </a:solidFill>
+                <a:latin typeface="Consolas" panose="020B0609020204030204" pitchFamily="49" charset="0"/>
+                <a:cs typeface="Consolas" panose="020B0609020204030204" pitchFamily="49" charset="0"/>
+              </a:rPr>
+              <a:t> = </a:t>
+            </a:r>
+            <a:r>
+              <a:rPr lang="en-US" sz="1200" b="1" dirty="0" err="1">
+                <a:solidFill>
+                  <a:srgbClr val="0070C0"/>
+                </a:solidFill>
+                <a:latin typeface="Consolas" panose="020B0609020204030204" pitchFamily="49" charset="0"/>
+                <a:cs typeface="Consolas" panose="020B0609020204030204" pitchFamily="49" charset="0"/>
+              </a:rPr>
+              <a:t>binom_test</a:t>
+            </a:r>
+            <a:r>
+              <a:rPr lang="en-US" sz="1200" b="1" dirty="0">
+                <a:solidFill>
+                  <a:srgbClr val="0070C0"/>
+                </a:solidFill>
+                <a:latin typeface="Consolas" panose="020B0609020204030204" pitchFamily="49" charset="0"/>
+                <a:cs typeface="Consolas" panose="020B0609020204030204" pitchFamily="49" charset="0"/>
+              </a:rPr>
+              <a:t>(x=x, n=1000, p=1/2, alternative='</a:t>
+            </a:r>
+            <a:r>
+              <a:rPr lang="en-US" sz="1200" b="1" dirty="0">
+                <a:solidFill>
+                  <a:srgbClr val="00B050"/>
+                </a:solidFill>
+                <a:latin typeface="Consolas" panose="020B0609020204030204" pitchFamily="49" charset="0"/>
+                <a:cs typeface="Consolas" panose="020B0609020204030204" pitchFamily="49" charset="0"/>
+              </a:rPr>
+              <a:t>two-sided</a:t>
+            </a:r>
+            <a:r>
+              <a:rPr lang="en-US" sz="1200" b="1" dirty="0">
+                <a:solidFill>
+                  <a:srgbClr val="0070C0"/>
+                </a:solidFill>
+                <a:latin typeface="Consolas" panose="020B0609020204030204" pitchFamily="49" charset="0"/>
+                <a:cs typeface="Consolas" panose="020B0609020204030204" pitchFamily="49" charset="0"/>
+              </a:rPr>
+              <a:t>')</a:t>
+            </a:r>
+          </a:p>
+          <a:p>
+            <a:r>
+              <a:rPr lang="en-US" sz="1200" b="1" dirty="0">
+                <a:solidFill>
+                  <a:srgbClr val="0070C0"/>
+                </a:solidFill>
+                <a:latin typeface="Consolas" panose="020B0609020204030204" pitchFamily="49" charset="0"/>
+                <a:cs typeface="Consolas" panose="020B0609020204030204" pitchFamily="49" charset="0"/>
+              </a:rPr>
+              <a:t>    print(f"{myval:.3f}")</a:t>
+            </a:r>
+          </a:p>
+          <a:p>
+            <a:r>
+              <a:rPr lang="en-US" sz="1200" b="1" dirty="0">
+                <a:solidFill>
+                  <a:srgbClr val="00B050"/>
+                </a:solidFill>
+                <a:latin typeface="Consolas" panose="020B0609020204030204" pitchFamily="49" charset="0"/>
+                <a:cs typeface="Consolas" panose="020B0609020204030204" pitchFamily="49" charset="0"/>
+              </a:rPr>
+              <a:t># [0, 0.062, 1, 0.062, 0]</a:t>
             </a:r>
           </a:p>
         </p:txBody>

--- a/statistics_05_hypothesis_testing_p_val.pptx
+++ b/statistics_05_hypothesis_testing_p_val.pptx
@@ -5,18 +5,19 @@
     <p:sldMasterId id="2147483659" r:id="rId1"/>
   </p:sldMasterIdLst>
   <p:notesMasterIdLst>
-    <p:notesMasterId r:id="rId11"/>
+    <p:notesMasterId r:id="rId12"/>
   </p:notesMasterIdLst>
   <p:sldIdLst>
     <p:sldId id="316" r:id="rId2"/>
     <p:sldId id="258" r:id="rId3"/>
-    <p:sldId id="259" r:id="rId4"/>
-    <p:sldId id="317" r:id="rId5"/>
-    <p:sldId id="318" r:id="rId6"/>
-    <p:sldId id="314" r:id="rId7"/>
-    <p:sldId id="315" r:id="rId8"/>
-    <p:sldId id="313" r:id="rId9"/>
-    <p:sldId id="294" r:id="rId10"/>
+    <p:sldId id="320" r:id="rId4"/>
+    <p:sldId id="319" r:id="rId5"/>
+    <p:sldId id="317" r:id="rId6"/>
+    <p:sldId id="318" r:id="rId7"/>
+    <p:sldId id="314" r:id="rId8"/>
+    <p:sldId id="321" r:id="rId9"/>
+    <p:sldId id="313" r:id="rId10"/>
+    <p:sldId id="294" r:id="rId11"/>
   </p:sldIdLst>
   <p:sldSz cx="12192000" cy="6858000"/>
   <p:notesSz cx="6858000" cy="9144000"/>
@@ -14871,6 +14872,272 @@
 </p:sld>
 </file>
 
+<file path=ppt/slides/slide10.xml><?xml version="1.0" encoding="utf-8"?>
+<p:sld xmlns:a="http://schemas.openxmlformats.org/drawingml/2006/main" xmlns:r="http://schemas.openxmlformats.org/officeDocument/2006/relationships" xmlns:p="http://schemas.openxmlformats.org/presentationml/2006/main">
+  <p:cSld>
+    <p:spTree>
+      <p:nvGrpSpPr>
+        <p:cNvPr id="1" name=""/>
+        <p:cNvGrpSpPr/>
+        <p:nvPr/>
+      </p:nvGrpSpPr>
+      <p:grpSpPr>
+        <a:xfrm>
+          <a:off x="0" y="0"/>
+          <a:ext cx="0" cy="0"/>
+          <a:chOff x="0" y="0"/>
+          <a:chExt cx="0" cy="0"/>
+        </a:xfrm>
+      </p:grpSpPr>
+      <p:sp>
+        <p:nvSpPr>
+          <p:cNvPr id="4" name="TextBox 3">
+            <a:extLst>
+              <a:ext uri="{FF2B5EF4-FFF2-40B4-BE49-F238E27FC236}">
+                <a16:creationId xmlns:a16="http://schemas.microsoft.com/office/drawing/2014/main" id="{E07D7F6D-CF60-394D-8EB7-E0C54261DB23}"/>
+              </a:ext>
+            </a:extLst>
+          </p:cNvPr>
+          <p:cNvSpPr txBox="1"/>
+          <p:nvPr/>
+        </p:nvSpPr>
+        <p:spPr>
+          <a:xfrm>
+            <a:off x="1431236" y="516838"/>
+            <a:ext cx="9488556" cy="5909310"/>
+          </a:xfrm>
+          <a:prstGeom prst="rect">
+            <a:avLst/>
+          </a:prstGeom>
+          <a:noFill/>
+        </p:spPr>
+        <p:txBody>
+          <a:bodyPr wrap="square" rtlCol="0">
+            <a:spAutoFit/>
+          </a:bodyPr>
+          <a:lstStyle/>
+          <a:p>
+            <a:r>
+              <a:rPr lang="en-US" sz="2400" b="1" dirty="0"/>
+              <a:t>The dichotomous use of p-value in statistical inference </a:t>
+            </a:r>
+          </a:p>
+          <a:p>
+            <a:r>
+              <a:rPr lang="en-US" sz="2400" b="1" dirty="0"/>
+              <a:t>is worse than useless. </a:t>
+            </a:r>
+          </a:p>
+          <a:p>
+            <a:endParaRPr lang="en-US" dirty="0"/>
+          </a:p>
+          <a:p>
+            <a:pPr marL="342900" indent="-342900">
+              <a:buFont typeface="+mj-lt"/>
+              <a:buAutoNum type="arabicPeriod"/>
+            </a:pPr>
+            <a:r>
+              <a:rPr lang="en-US" sz="1600" dirty="0"/>
+              <a:t>p-value is a conditional probability, i.e., </a:t>
+            </a:r>
+            <a:r>
+              <a:rPr lang="en-US" sz="1600" b="1" dirty="0" err="1">
+                <a:solidFill>
+                  <a:srgbClr val="0070C0"/>
+                </a:solidFill>
+              </a:rPr>
+              <a:t>Pr</a:t>
+            </a:r>
+            <a:r>
+              <a:rPr lang="en-US" sz="1600" b="1" dirty="0">
+                <a:solidFill>
+                  <a:srgbClr val="0070C0"/>
+                </a:solidFill>
+              </a:rPr>
+              <a:t>( Data | H0 is true) </a:t>
+            </a:r>
+            <a:br>
+              <a:rPr lang="en-US" sz="1600" dirty="0"/>
+            </a:br>
+            <a:r>
+              <a:rPr lang="en-US" sz="1600" dirty="0"/>
+              <a:t>but what we want to know is </a:t>
+            </a:r>
+            <a:r>
+              <a:rPr lang="en-US" sz="1600" b="1" dirty="0" err="1">
+                <a:solidFill>
+                  <a:srgbClr val="0070C0"/>
+                </a:solidFill>
+              </a:rPr>
+              <a:t>Pr</a:t>
+            </a:r>
+            <a:r>
+              <a:rPr lang="en-US" sz="1600" b="1" dirty="0">
+                <a:solidFill>
+                  <a:srgbClr val="0070C0"/>
+                </a:solidFill>
+              </a:rPr>
+              <a:t>(H0 is true | Data)</a:t>
+            </a:r>
+          </a:p>
+          <a:p>
+            <a:pPr marL="342900" indent="-342900">
+              <a:buFont typeface="+mj-lt"/>
+              <a:buAutoNum type="arabicPeriod"/>
+            </a:pPr>
+            <a:r>
+              <a:rPr lang="en-US" sz="1600" dirty="0"/>
+              <a:t>the calculation of p-value depends on at least three things: </a:t>
+            </a:r>
+            <a:br>
+              <a:rPr lang="en-US" sz="1600" dirty="0"/>
+            </a:br>
+            <a:r>
+              <a:rPr lang="en-US" sz="1600" dirty="0"/>
+              <a:t> - the effect size (e.g., difference of two means due to two treatment, odds ratio, etc.), </a:t>
+            </a:r>
+            <a:br>
+              <a:rPr lang="en-US" sz="1600" dirty="0"/>
+            </a:br>
+            <a:r>
+              <a:rPr lang="en-US" sz="1600" dirty="0"/>
+              <a:t> - the uncertainty level of the point estimate (e.g., standard deviation), </a:t>
+            </a:r>
+            <a:br>
+              <a:rPr lang="en-US" sz="1600" dirty="0"/>
+            </a:br>
+            <a:r>
+              <a:rPr lang="en-US" sz="1600" dirty="0"/>
+              <a:t> - and sample size</a:t>
+            </a:r>
+          </a:p>
+          <a:p>
+            <a:pPr marL="342900" indent="-342900">
+              <a:buFont typeface="+mj-lt"/>
+              <a:buAutoNum type="arabicPeriod"/>
+            </a:pPr>
+            <a:r>
+              <a:rPr lang="en-US" sz="1600" dirty="0"/>
+              <a:t>it is a standard result in statistics theory that, based on one set of sample data we cannot tell the observed effect </a:t>
+            </a:r>
+            <a:r>
+              <a:rPr lang="en-US" sz="1600" b="1" dirty="0">
+                <a:solidFill>
+                  <a:srgbClr val="0070C0"/>
+                </a:solidFill>
+              </a:rPr>
+              <a:t>size is due to treatment or due to random variation </a:t>
+            </a:r>
+            <a:r>
+              <a:rPr lang="en-US" sz="1600" dirty="0"/>
+              <a:t>(i.e., sampling distribution requires we repeat the same experiment many times before any confirmatory conclusion can be made)</a:t>
+            </a:r>
+          </a:p>
+          <a:p>
+            <a:pPr marL="342900" indent="-342900">
+              <a:buFont typeface="+mj-lt"/>
+              <a:buAutoNum type="arabicPeriod"/>
+            </a:pPr>
+            <a:r>
+              <a:rPr lang="en-US" sz="1600" dirty="0"/>
+              <a:t>if by nature the H0 is false (in the majority cases of real life data / research questions), p-value =0.</a:t>
+            </a:r>
+          </a:p>
+          <a:p>
+            <a:pPr marL="342900" indent="-342900">
+              <a:buFont typeface="+mj-lt"/>
+              <a:buAutoNum type="arabicPeriod"/>
+            </a:pPr>
+            <a:endParaRPr lang="en-US" sz="1600" dirty="0"/>
+          </a:p>
+          <a:p>
+            <a:r>
+              <a:rPr lang="en-US" sz="1600" b="1" dirty="0">
+                <a:solidFill>
+                  <a:srgbClr val="0070C0"/>
+                </a:solidFill>
+              </a:rPr>
+              <a:t>In summary, P-value based Null Hypothesis Significance Test (NHST) </a:t>
+            </a:r>
+          </a:p>
+          <a:p>
+            <a:r>
+              <a:rPr lang="en-US" sz="1600" b="1" dirty="0">
+                <a:solidFill>
+                  <a:srgbClr val="0070C0"/>
+                </a:solidFill>
+              </a:rPr>
+              <a:t>is logically not defensible, technically flawed and practically damaging</a:t>
+            </a:r>
+          </a:p>
+          <a:p>
+            <a:endParaRPr lang="en-US" sz="1600" dirty="0"/>
+          </a:p>
+          <a:p>
+            <a:r>
+              <a:rPr lang="en-US" sz="1600" dirty="0"/>
+              <a:t>Gang (John) </a:t>
+            </a:r>
+            <a:r>
+              <a:rPr lang="en-US" sz="1600" dirty="0" err="1"/>
+              <a:t>Xie</a:t>
+            </a:r>
+            <a:r>
+              <a:rPr lang="en-US" sz="1600" dirty="0"/>
+              <a:t>, </a:t>
+            </a:r>
+          </a:p>
+          <a:p>
+            <a:r>
+              <a:rPr lang="en-US" sz="1600" dirty="0"/>
+              <a:t>Ph.D. in Statistics, </a:t>
+            </a:r>
+          </a:p>
+          <a:p>
+            <a:r>
+              <a:rPr lang="en-US" sz="1600" dirty="0"/>
+              <a:t>Quantitative Consulting Unit in Research Office</a:t>
+            </a:r>
+          </a:p>
+          <a:p>
+            <a:endParaRPr lang="en-US" dirty="0"/>
+          </a:p>
+          <a:p>
+            <a:r>
+              <a:rPr lang="en-US" dirty="0">
+                <a:hlinkClick r:id="rId2"/>
+              </a:rPr>
+              <a:t>https://</a:t>
+            </a:r>
+            <a:r>
+              <a:rPr lang="en-US" dirty="0" err="1">
+                <a:hlinkClick r:id="rId2"/>
+              </a:rPr>
+              <a:t>www.researchgate.net</a:t>
+            </a:r>
+            <a:r>
+              <a:rPr lang="en-US" dirty="0">
+                <a:hlinkClick r:id="rId2"/>
+              </a:rPr>
+              <a:t>/post/What_is_the_relationship_between_R-squared_and_p-value_in_a_regression</a:t>
+            </a:r>
+            <a:endParaRPr lang="en-US" dirty="0"/>
+          </a:p>
+        </p:txBody>
+      </p:sp>
+    </p:spTree>
+    <p:extLst>
+      <p:ext uri="{BB962C8B-B14F-4D97-AF65-F5344CB8AC3E}">
+        <p14:creationId xmlns:p14="http://schemas.microsoft.com/office/powerpoint/2010/main" val="2666971068"/>
+      </p:ext>
+    </p:extLst>
+  </p:cSld>
+  <p:clrMapOvr>
+    <a:masterClrMapping/>
+  </p:clrMapOvr>
+</p:sld>
+</file>
+
 <file path=ppt/slides/slide2.xml><?xml version="1.0" encoding="utf-8"?>
 <p:sld xmlns:a="http://schemas.openxmlformats.org/drawingml/2006/main" xmlns:r="http://schemas.openxmlformats.org/officeDocument/2006/relationships" xmlns:p="http://schemas.openxmlformats.org/presentationml/2006/main">
   <p:cSld>
@@ -14896,8 +15163,8 @@
         </p:nvSpPr>
         <p:spPr>
           <a:xfrm>
-            <a:off x="75825" y="71800"/>
-            <a:ext cx="6523500" cy="6674687"/>
+            <a:off x="0" y="0"/>
+            <a:ext cx="7419372" cy="6674687"/>
           </a:xfrm>
           <a:prstGeom prst="rect">
             <a:avLst/>
@@ -14923,7 +15190,7 @@
               <a:buNone/>
             </a:pPr>
             <a:r>
-              <a:rPr lang="en-US" sz="3200" b="1" dirty="0">
+              <a:rPr lang="en-US" sz="2800" b="1" dirty="0">
                 <a:solidFill>
                   <a:schemeClr val="dk1"/>
                 </a:solidFill>
@@ -14934,7 +15201,7 @@
               </a:rPr>
               <a:t>p-value &amp; null hypothesis</a:t>
             </a:r>
-            <a:endParaRPr sz="3200" b="1" dirty="0">
+            <a:endParaRPr sz="2800" b="1" dirty="0">
               <a:solidFill>
                 <a:schemeClr val="dk1"/>
               </a:solidFill>
@@ -15010,7 +15277,133 @@
                 <a:cs typeface="Calibri"/>
                 <a:sym typeface="Calibri"/>
               </a:rPr>
-              <a:t> (probability value) is a probability of getting results at least as extreme as yours. If this probability is very small, this means that the result is unlikely to be explained by the null hypothesis. So we should reject the null hypothesis.</a:t>
+              <a:t> (probability value) is a probability of getting results at least as extreme as yours. </a:t>
+            </a:r>
+            <a:br>
+              <a:rPr lang="en-US" dirty="0">
+                <a:solidFill>
+                  <a:schemeClr val="dk1"/>
+                </a:solidFill>
+                <a:latin typeface="Calibri"/>
+                <a:ea typeface="Calibri"/>
+                <a:cs typeface="Calibri"/>
+                <a:sym typeface="Calibri"/>
+              </a:rPr>
+            </a:br>
+            <a:r>
+              <a:rPr lang="en-US" dirty="0">
+                <a:solidFill>
+                  <a:schemeClr val="dk1"/>
+                </a:solidFill>
+                <a:latin typeface="Calibri"/>
+                <a:ea typeface="Calibri"/>
+                <a:cs typeface="Calibri"/>
+                <a:sym typeface="Calibri"/>
+              </a:rPr>
+              <a:t>Given two things:</a:t>
+            </a:r>
+          </a:p>
+          <a:p>
+            <a:pPr marL="0" marR="0" lvl="0" indent="0" algn="l" rtl="0">
+              <a:spcBef>
+                <a:spcPts val="0"/>
+              </a:spcBef>
+              <a:spcAft>
+                <a:spcPts val="0"/>
+              </a:spcAft>
+              <a:buSzPts val="1100"/>
+              <a:buNone/>
+            </a:pPr>
+            <a:r>
+              <a:rPr lang="en-US" dirty="0">
+                <a:solidFill>
+                  <a:schemeClr val="dk1"/>
+                </a:solidFill>
+                <a:latin typeface="Calibri"/>
+                <a:ea typeface="Calibri"/>
+                <a:cs typeface="Calibri"/>
+                <a:sym typeface="Calibri"/>
+              </a:rPr>
+              <a:t>        1. A null-hypothesis (value)</a:t>
+            </a:r>
+          </a:p>
+          <a:p>
+            <a:pPr lvl="0">
+              <a:buSzPts val="1100"/>
+            </a:pPr>
+            <a:r>
+              <a:rPr lang="en-US" dirty="0">
+                <a:solidFill>
+                  <a:schemeClr val="dk1"/>
+                </a:solidFill>
+                <a:latin typeface="Calibri"/>
+                <a:ea typeface="Calibri"/>
+                <a:cs typeface="Calibri"/>
+                <a:sym typeface="Calibri"/>
+              </a:rPr>
+              <a:t>        2. A distribution – explicit, theoretical, or sample (Gaussian, t-Student, Chi-squared, F-, etc.)</a:t>
+            </a:r>
+          </a:p>
+          <a:p>
+            <a:pPr lvl="0">
+              <a:buSzPts val="1100"/>
+            </a:pPr>
+            <a:r>
+              <a:rPr lang="en-US" dirty="0">
+                <a:solidFill>
+                  <a:schemeClr val="dk1"/>
+                </a:solidFill>
+                <a:latin typeface="Calibri"/>
+                <a:ea typeface="Calibri"/>
+                <a:cs typeface="Calibri"/>
+                <a:sym typeface="Calibri"/>
+              </a:rPr>
+              <a:t>we calculate the probability to get the result "at least as extreme as yours" ?</a:t>
+            </a:r>
+          </a:p>
+          <a:p>
+            <a:pPr marL="0" marR="0" lvl="0" indent="0" algn="l" rtl="0">
+              <a:spcBef>
+                <a:spcPts val="0"/>
+              </a:spcBef>
+              <a:spcAft>
+                <a:spcPts val="0"/>
+              </a:spcAft>
+              <a:buSzPts val="1100"/>
+              <a:buNone/>
+            </a:pPr>
+            <a:endParaRPr lang="en-US" sz="800" dirty="0">
+              <a:solidFill>
+                <a:schemeClr val="dk1"/>
+              </a:solidFill>
+              <a:latin typeface="Calibri"/>
+              <a:ea typeface="Calibri"/>
+              <a:cs typeface="Calibri"/>
+              <a:sym typeface="Calibri"/>
+            </a:endParaRPr>
+          </a:p>
+          <a:p>
+            <a:pPr marL="0" marR="0" lvl="0" indent="0" algn="l" rtl="0">
+              <a:spcBef>
+                <a:spcPts val="0"/>
+              </a:spcBef>
+              <a:spcAft>
+                <a:spcPts val="0"/>
+              </a:spcAft>
+              <a:buSzPts val="1100"/>
+              <a:buNone/>
+            </a:pPr>
+            <a:r>
+              <a:rPr lang="en-US" dirty="0">
+                <a:solidFill>
+                  <a:schemeClr val="dk1"/>
+                </a:solidFill>
+                <a:latin typeface="Calibri"/>
+                <a:ea typeface="Calibri"/>
+                <a:cs typeface="Calibri"/>
+                <a:sym typeface="Calibri"/>
+              </a:rPr>
+              <a:t>If this probability is very small, this means that the result is unlikely to be explained by the null hypothesis – so we reject the null hypothesis.</a:t>
             </a:r>
             <a:endParaRPr dirty="0">
               <a:solidFill>
@@ -15055,9 +15448,9 @@
               <a:buNone/>
             </a:pPr>
             <a:r>
-              <a:rPr lang="en-US" dirty="0">
-                <a:solidFill>
-                  <a:schemeClr val="dk1"/>
+              <a:rPr lang="en-US" sz="1200" b="1" dirty="0">
+                <a:solidFill>
+                  <a:srgbClr val="0070C0"/>
                 </a:solidFill>
                 <a:latin typeface="Courier New"/>
                 <a:ea typeface="Courier New"/>
@@ -15066,9 +15459,9 @@
               </a:rPr>
               <a:t>P-value    probability of observed</a:t>
             </a:r>
-            <a:endParaRPr dirty="0">
+            <a:endParaRPr sz="1200" b="1" dirty="0">
               <a:solidFill>
-                <a:schemeClr val="dk1"/>
+                <a:srgbClr val="0070C0"/>
               </a:solidFill>
               <a:latin typeface="Courier New"/>
               <a:ea typeface="Courier New"/>
@@ -15088,9 +15481,9 @@
               <a:buNone/>
             </a:pPr>
             <a:r>
-              <a:rPr lang="en-US" dirty="0">
-                <a:solidFill>
-                  <a:schemeClr val="dk1"/>
+              <a:rPr lang="en-US" sz="1200" b="1" dirty="0">
+                <a:solidFill>
+                  <a:srgbClr val="0070C0"/>
                 </a:solidFill>
                 <a:latin typeface="Courier New"/>
                 <a:ea typeface="Courier New"/>
@@ -15099,9 +15492,9 @@
               </a:rPr>
               <a:t>-------------------------------</a:t>
             </a:r>
-            <a:endParaRPr dirty="0">
+            <a:endParaRPr sz="1200" b="1" dirty="0">
               <a:solidFill>
-                <a:schemeClr val="dk1"/>
+                <a:srgbClr val="0070C0"/>
               </a:solidFill>
               <a:latin typeface="Courier New"/>
               <a:ea typeface="Courier New"/>
@@ -15121,9 +15514,9 @@
               <a:buNone/>
             </a:pPr>
             <a:r>
-              <a:rPr lang="en-US" dirty="0">
-                <a:solidFill>
-                  <a:schemeClr val="dk1"/>
+              <a:rPr lang="en-US" sz="1200" b="1" dirty="0">
+                <a:solidFill>
+                  <a:srgbClr val="0070C0"/>
                 </a:solidFill>
                 <a:latin typeface="Courier New"/>
                 <a:ea typeface="Courier New"/>
@@ -15132,9 +15525,9 @@
               </a:rPr>
               <a:t>P &lt; 0.05         5%</a:t>
             </a:r>
-            <a:endParaRPr dirty="0">
+            <a:endParaRPr sz="1200" b="1" dirty="0">
               <a:solidFill>
-                <a:schemeClr val="dk1"/>
+                <a:srgbClr val="0070C0"/>
               </a:solidFill>
               <a:latin typeface="Courier New"/>
               <a:ea typeface="Courier New"/>
@@ -15154,9 +15547,9 @@
               <a:buNone/>
             </a:pPr>
             <a:r>
-              <a:rPr lang="en-US" dirty="0">
-                <a:solidFill>
-                  <a:schemeClr val="dk1"/>
+              <a:rPr lang="en-US" sz="1200" b="1" dirty="0">
+                <a:solidFill>
+                  <a:srgbClr val="0070C0"/>
                 </a:solidFill>
                 <a:latin typeface="Courier New"/>
                 <a:ea typeface="Courier New"/>
@@ -15165,9 +15558,9 @@
               </a:rPr>
               <a:t>P &lt; 0.01         1%</a:t>
             </a:r>
-            <a:endParaRPr dirty="0">
+            <a:endParaRPr sz="1200" b="1" dirty="0">
               <a:solidFill>
-                <a:schemeClr val="dk1"/>
+                <a:srgbClr val="0070C0"/>
               </a:solidFill>
               <a:latin typeface="Courier New"/>
               <a:ea typeface="Courier New"/>
@@ -15187,9 +15580,9 @@
               <a:buNone/>
             </a:pPr>
             <a:r>
-              <a:rPr lang="en-US" dirty="0">
-                <a:solidFill>
-                  <a:schemeClr val="dk1"/>
+              <a:rPr lang="en-US" sz="1200" b="1" dirty="0">
+                <a:solidFill>
+                  <a:srgbClr val="0070C0"/>
                 </a:solidFill>
                 <a:latin typeface="Courier New"/>
                 <a:ea typeface="Courier New"/>
@@ -15198,9 +15591,9 @@
               </a:rPr>
               <a:t>p &lt; 0.001        0.1%</a:t>
             </a:r>
-            <a:endParaRPr dirty="0">
+            <a:endParaRPr sz="1200" b="1" dirty="0">
               <a:solidFill>
-                <a:schemeClr val="dk1"/>
+                <a:srgbClr val="0070C0"/>
               </a:solidFill>
               <a:latin typeface="Courier New"/>
               <a:ea typeface="Courier New"/>
@@ -15220,9 +15613,9 @@
               <a:buNone/>
             </a:pPr>
             <a:r>
-              <a:rPr lang="en-US" dirty="0">
-                <a:solidFill>
-                  <a:schemeClr val="dk1"/>
+              <a:rPr lang="en-US" sz="1200" b="1" dirty="0">
+                <a:solidFill>
+                  <a:srgbClr val="0070C0"/>
                 </a:solidFill>
                 <a:latin typeface="Courier New"/>
                 <a:ea typeface="Courier New"/>
@@ -15231,15 +15624,87 @@
               </a:rPr>
               <a:t>-------------------------------</a:t>
             </a:r>
-            <a:endParaRPr dirty="0">
+            <a:endParaRPr sz="800" dirty="0">
               <a:solidFill>
                 <a:schemeClr val="dk1"/>
               </a:solidFill>
-              <a:latin typeface="Courier New"/>
-              <a:ea typeface="Courier New"/>
-              <a:cs typeface="Courier New"/>
-              <a:sym typeface="Courier New"/>
+              <a:latin typeface="Calibri"/>
+              <a:ea typeface="Calibri"/>
+              <a:cs typeface="Calibri"/>
+              <a:sym typeface="Calibri"/>
             </a:endParaRPr>
+          </a:p>
+          <a:p>
+            <a:pPr marL="0" marR="0" lvl="0" indent="0" algn="l" rtl="0">
+              <a:spcBef>
+                <a:spcPts val="0"/>
+              </a:spcBef>
+              <a:spcAft>
+                <a:spcPts val="0"/>
+              </a:spcAft>
+              <a:buSzPts val="1100"/>
+              <a:buNone/>
+            </a:pPr>
+            <a:r>
+              <a:rPr lang="en-US" dirty="0">
+                <a:solidFill>
+                  <a:schemeClr val="dk1"/>
+                </a:solidFill>
+                <a:latin typeface="Calibri"/>
+                <a:ea typeface="Calibri"/>
+                <a:cs typeface="Calibri"/>
+                <a:sym typeface="Calibri"/>
+              </a:rPr>
+              <a:t>A small p-value (typically ≤ 0.05) indicates strong evidence </a:t>
+            </a:r>
+            <a:r>
+              <a:rPr lang="en-US" b="1" dirty="0">
+                <a:solidFill>
+                  <a:srgbClr val="FF0000"/>
+                </a:solidFill>
+                <a:latin typeface="Calibri"/>
+                <a:ea typeface="Calibri"/>
+                <a:cs typeface="Calibri"/>
+                <a:sym typeface="Calibri"/>
+              </a:rPr>
+              <a:t>against</a:t>
+            </a:r>
+            <a:r>
+              <a:rPr lang="en-US" dirty="0">
+                <a:solidFill>
+                  <a:schemeClr val="dk1"/>
+                </a:solidFill>
+                <a:latin typeface="Calibri"/>
+                <a:ea typeface="Calibri"/>
+                <a:cs typeface="Calibri"/>
+                <a:sym typeface="Calibri"/>
+              </a:rPr>
+              <a:t> the null hypothesis, so you reject the null hypothesis. People say that this evidence is </a:t>
+            </a:r>
+            <a:r>
+              <a:rPr lang="en-US" b="1" dirty="0">
+                <a:solidFill>
+                  <a:srgbClr val="FF0000"/>
+                </a:solidFill>
+                <a:latin typeface="Calibri"/>
+                <a:ea typeface="Calibri"/>
+                <a:cs typeface="Calibri"/>
+                <a:sym typeface="Calibri"/>
+              </a:rPr>
+              <a:t>"statistically significant</a:t>
+            </a:r>
+            <a:r>
+              <a:rPr lang="en-US" dirty="0">
+                <a:solidFill>
+                  <a:schemeClr val="dk1"/>
+                </a:solidFill>
+                <a:latin typeface="Calibri"/>
+                <a:ea typeface="Calibri"/>
+                <a:cs typeface="Calibri"/>
+                <a:sym typeface="Calibri"/>
+              </a:rPr>
+              <a:t>".</a:t>
+            </a:r>
           </a:p>
           <a:p>
             <a:pPr marL="0" marR="0" lvl="0" indent="0" algn="l" rtl="0">
@@ -15263,41 +15728,75 @@
             </a:endParaRPr>
           </a:p>
           <a:p>
-            <a:pPr marL="0" marR="0" lvl="0" indent="0" algn="l" rtl="0">
-              <a:spcBef>
-                <a:spcPts val="0"/>
-              </a:spcBef>
-              <a:spcAft>
-                <a:spcPts val="0"/>
-              </a:spcAft>
+            <a:pPr lvl="0">
               <a:buSzPts val="1100"/>
-              <a:buNone/>
             </a:pPr>
             <a:r>
+              <a:rPr lang="en-US" b="1" dirty="0">
+                <a:solidFill>
+                  <a:srgbClr val="0000FF"/>
+                </a:solidFill>
+                <a:latin typeface="Calibri"/>
+                <a:cs typeface="Calibri"/>
+              </a:rPr>
+              <a:t>Level of significance</a:t>
+            </a:r>
+            <a:r>
               <a:rPr lang="en-US" dirty="0">
                 <a:solidFill>
-                  <a:schemeClr val="dk1"/>
-                </a:solidFill>
-                <a:latin typeface="Calibri"/>
-                <a:ea typeface="Calibri"/>
-                <a:cs typeface="Calibri"/>
-                <a:sym typeface="Calibri"/>
-              </a:rPr>
-              <a:t>A small p-value (typically ≤ 0.05) indicates strong evidence against the null hypothesis, so you reject the null hypothesis. People say that this evidence is "statistically significant".</a:t>
-            </a:r>
-          </a:p>
-          <a:p>
-            <a:pPr marL="0" marR="0" lvl="0" indent="0" algn="l" rtl="0">
-              <a:spcBef>
-                <a:spcPts val="0"/>
-              </a:spcBef>
-              <a:spcAft>
-                <a:spcPts val="0"/>
-              </a:spcAft>
+                  <a:schemeClr val="tx1"/>
+                </a:solidFill>
+                <a:latin typeface="Calibri"/>
+                <a:cs typeface="Calibri"/>
+              </a:rPr>
+              <a:t> (</a:t>
+            </a:r>
+            <a:r>
+              <a:rPr lang="en-US" b="1" dirty="0">
+                <a:solidFill>
+                  <a:srgbClr val="FF0000"/>
+                </a:solidFill>
+                <a:latin typeface="Calibri"/>
+                <a:cs typeface="Calibri"/>
+              </a:rPr>
+              <a:t>alpha</a:t>
+            </a:r>
+            <a:r>
+              <a:rPr lang="en-US" dirty="0">
+                <a:solidFill>
+                  <a:schemeClr val="tx1"/>
+                </a:solidFill>
+                <a:latin typeface="Calibri"/>
+                <a:cs typeface="Calibri"/>
+              </a:rPr>
+              <a:t> or </a:t>
+            </a:r>
+            <a:r>
+              <a:rPr lang="el-GR" b="1" dirty="0">
+                <a:solidFill>
+                  <a:srgbClr val="FF0000"/>
+                </a:solidFill>
+                <a:latin typeface="Calibri"/>
+                <a:cs typeface="Calibri"/>
+              </a:rPr>
+              <a:t>α</a:t>
+            </a:r>
+            <a:r>
+              <a:rPr lang="en-US" dirty="0">
+                <a:solidFill>
+                  <a:schemeClr val="tx1"/>
+                </a:solidFill>
+                <a:latin typeface="Calibri"/>
+                <a:cs typeface="Calibri"/>
+              </a:rPr>
+              <a:t>, typically 0.05) - probability that the event could have occurred by chance. </a:t>
+            </a:r>
+          </a:p>
+          <a:p>
+            <a:pPr lvl="0">
               <a:buSzPts val="1100"/>
-              <a:buNone/>
             </a:pPr>
-            <a:endParaRPr dirty="0">
+            <a:endParaRPr sz="800" dirty="0">
               <a:solidFill>
                 <a:schemeClr val="dk1"/>
               </a:solidFill>
@@ -15308,75 +15807,84 @@
             </a:endParaRPr>
           </a:p>
           <a:p>
-            <a:pPr lvl="0">
+            <a:pPr marL="0" marR="0" lvl="0" indent="0" algn="l" rtl="0">
+              <a:spcBef>
+                <a:spcPts val="0"/>
+              </a:spcBef>
+              <a:spcAft>
+                <a:spcPts val="0"/>
+              </a:spcAft>
+              <a:buSzPts val="1100"/>
+              <a:buNone/>
+            </a:pPr>
+            <a:r>
+              <a:rPr lang="en-US" b="1" dirty="0">
+                <a:solidFill>
+                  <a:srgbClr val="0000FF"/>
+                </a:solidFill>
+                <a:latin typeface="Calibri"/>
+                <a:ea typeface="Calibri"/>
+                <a:cs typeface="Calibri"/>
+                <a:sym typeface="Calibri"/>
+              </a:rPr>
+              <a:t>Confidence Interval (CI)</a:t>
+            </a:r>
+            <a:r>
+              <a:rPr lang="en-US" dirty="0">
+                <a:solidFill>
+                  <a:schemeClr val="dk1"/>
+                </a:solidFill>
+                <a:latin typeface="Calibri"/>
+                <a:ea typeface="Calibri"/>
+                <a:cs typeface="Calibri"/>
+                <a:sym typeface="Calibri"/>
+              </a:rPr>
+              <a:t>. A 95% CI is the interval that you are 95% certain contains the true population value as it might be estimated from a much larger study.</a:t>
+            </a:r>
+          </a:p>
+          <a:p>
+            <a:pPr>
               <a:buSzPts val="1100"/>
             </a:pPr>
             <a:r>
-              <a:rPr lang="en-US" b="1" dirty="0">
-                <a:solidFill>
-                  <a:srgbClr val="0000FF"/>
-                </a:solidFill>
-                <a:latin typeface="Calibri"/>
-                <a:cs typeface="Calibri"/>
-              </a:rPr>
-              <a:t>Level of significance</a:t>
-            </a:r>
-            <a:r>
               <a:rPr lang="en-US" dirty="0">
                 <a:solidFill>
-                  <a:schemeClr val="tx1"/>
-                </a:solidFill>
-                <a:latin typeface="Calibri"/>
-                <a:cs typeface="Calibri"/>
-              </a:rPr>
-              <a:t> (</a:t>
-            </a:r>
-            <a:r>
-              <a:rPr lang="en-US" b="1" dirty="0">
-                <a:solidFill>
-                  <a:srgbClr val="FF0000"/>
-                </a:solidFill>
-                <a:latin typeface="Calibri"/>
-                <a:cs typeface="Calibri"/>
-              </a:rPr>
-              <a:t>alpha</a:t>
+                  <a:schemeClr val="dk1"/>
+                </a:solidFill>
+                <a:latin typeface="Calibri"/>
+                <a:ea typeface="Calibri"/>
+                <a:cs typeface="Calibri"/>
+                <a:sym typeface="Calibri"/>
+              </a:rPr>
+              <a:t> </a:t>
+            </a:r>
+            <a:r>
+              <a:rPr lang="en-US" dirty="0"/>
+              <a:t>- </a:t>
             </a:r>
             <a:r>
               <a:rPr lang="en-US" dirty="0">
-                <a:solidFill>
-                  <a:schemeClr val="tx1"/>
-                </a:solidFill>
-                <a:latin typeface="Calibri"/>
-                <a:cs typeface="Calibri"/>
-              </a:rPr>
-              <a:t> or </a:t>
-            </a:r>
-            <a:r>
-              <a:rPr lang="el-GR" b="1" dirty="0">
-                <a:solidFill>
-                  <a:srgbClr val="FF0000"/>
-                </a:solidFill>
-                <a:latin typeface="Calibri"/>
-                <a:cs typeface="Calibri"/>
-              </a:rPr>
-              <a:t>α</a:t>
-            </a:r>
-            <a:r>
-              <a:rPr lang="en-US" dirty="0">
-                <a:solidFill>
-                  <a:schemeClr val="tx1"/>
-                </a:solidFill>
-                <a:latin typeface="Calibri"/>
-                <a:cs typeface="Calibri"/>
-              </a:rPr>
-              <a:t>, typically 0.05) - probability that the event could have occurred by chance. </a:t>
-            </a:r>
-          </a:p>
-          <a:p>
-            <a:pPr lvl="0">
+                <a:hlinkClick r:id="rId3"/>
+              </a:rPr>
+              <a:t>https://en.wikipedia.org/wiki/Confidence_interval</a:t>
+            </a:r>
+            <a:r>
+              <a:rPr lang="en-US" dirty="0"/>
+              <a:t> </a:t>
+            </a:r>
+          </a:p>
+          <a:p>
+            <a:pPr marL="0" marR="0" lvl="0" indent="0" algn="l" rtl="0">
+              <a:spcBef>
+                <a:spcPts val="0"/>
+              </a:spcBef>
+              <a:spcAft>
+                <a:spcPts val="0"/>
+              </a:spcAft>
               <a:buSzPts val="1100"/>
+              <a:buNone/>
             </a:pPr>
-            <a:endParaRPr dirty="0">
+            <a:endParaRPr sz="800" dirty="0">
               <a:solidFill>
                 <a:schemeClr val="dk1"/>
               </a:solidFill>
@@ -15407,7 +15915,7 @@
                 <a:cs typeface="Calibri"/>
                 <a:sym typeface="Calibri"/>
               </a:rPr>
-              <a:t>Confidence Interval (CI)</a:t>
+              <a:t>z-score</a:t>
             </a:r>
             <a:r>
               <a:rPr lang="en-US" dirty="0">
@@ -15419,109 +15927,21 @@
                 <a:cs typeface="Calibri"/>
                 <a:sym typeface="Calibri"/>
               </a:rPr>
-              <a:t>. A 95% CI is the interval that you are 95% certain contains the true population value as it might be estimated from a much larger study.</a:t>
-            </a:r>
-          </a:p>
-          <a:p>
-            <a:pPr>
+              <a:t> is the distance from the mean measured in the number of standard deviations.</a:t>
+            </a:r>
+          </a:p>
+          <a:p>
+            <a:pPr marL="0" marR="0" lvl="0" indent="0" algn="l" rtl="0">
+              <a:spcBef>
+                <a:spcPts val="0"/>
+              </a:spcBef>
+              <a:spcAft>
+                <a:spcPts val="0"/>
+              </a:spcAft>
               <a:buSzPts val="1100"/>
+              <a:buNone/>
             </a:pPr>
-            <a:r>
-              <a:rPr lang="en-US" dirty="0">
-                <a:solidFill>
-                  <a:schemeClr val="dk1"/>
-                </a:solidFill>
-                <a:latin typeface="Calibri"/>
-                <a:ea typeface="Calibri"/>
-                <a:cs typeface="Calibri"/>
-                <a:sym typeface="Calibri"/>
-              </a:rPr>
-              <a:t> </a:t>
-            </a:r>
-            <a:r>
-              <a:rPr lang="en-US" dirty="0"/>
-              <a:t>- </a:t>
-            </a:r>
-            <a:r>
-              <a:rPr lang="en-US" dirty="0">
-                <a:hlinkClick r:id="rId3"/>
-              </a:rPr>
-              <a:t>https://en.wikipedia.org/wiki/Confidence_interval</a:t>
-            </a:r>
-            <a:r>
-              <a:rPr lang="en-US" dirty="0"/>
-              <a:t> </a:t>
-            </a:r>
-          </a:p>
-          <a:p>
-            <a:pPr marL="0" marR="0" lvl="0" indent="0" algn="l" rtl="0">
-              <a:spcBef>
-                <a:spcPts val="0"/>
-              </a:spcBef>
-              <a:spcAft>
-                <a:spcPts val="0"/>
-              </a:spcAft>
-              <a:buSzPts val="1100"/>
-              <a:buNone/>
-            </a:pPr>
-            <a:endParaRPr dirty="0">
-              <a:solidFill>
-                <a:schemeClr val="dk1"/>
-              </a:solidFill>
-              <a:latin typeface="Calibri"/>
-              <a:ea typeface="Calibri"/>
-              <a:cs typeface="Calibri"/>
-              <a:sym typeface="Calibri"/>
-            </a:endParaRPr>
-          </a:p>
-          <a:p>
-            <a:pPr marL="0" marR="0" lvl="0" indent="0" algn="l" rtl="0">
-              <a:spcBef>
-                <a:spcPts val="0"/>
-              </a:spcBef>
-              <a:spcAft>
-                <a:spcPts val="0"/>
-              </a:spcAft>
-              <a:buSzPts val="1100"/>
-              <a:buNone/>
-            </a:pPr>
-            <a:r>
-              <a:rPr lang="en-US" b="1" dirty="0">
-                <a:solidFill>
-                  <a:srgbClr val="0000FF"/>
-                </a:solidFill>
-                <a:latin typeface="Calibri"/>
-                <a:ea typeface="Calibri"/>
-                <a:cs typeface="Calibri"/>
-                <a:sym typeface="Calibri"/>
-              </a:rPr>
-              <a:t>z-score</a:t>
-            </a:r>
-            <a:r>
-              <a:rPr lang="en-US" dirty="0">
-                <a:solidFill>
-                  <a:schemeClr val="dk1"/>
-                </a:solidFill>
-                <a:latin typeface="Calibri"/>
-                <a:ea typeface="Calibri"/>
-                <a:cs typeface="Calibri"/>
-                <a:sym typeface="Calibri"/>
-              </a:rPr>
-              <a:t> is the distance from the mean measured in the number of standard deviations.</a:t>
-            </a:r>
-          </a:p>
-          <a:p>
-            <a:pPr marL="0" marR="0" lvl="0" indent="0" algn="l" rtl="0">
-              <a:spcBef>
-                <a:spcPts val="0"/>
-              </a:spcBef>
-              <a:spcAft>
-                <a:spcPts val="0"/>
-              </a:spcAft>
-              <a:buSzPts val="1100"/>
-              <a:buNone/>
-            </a:pPr>
-            <a:endParaRPr lang="en-US" dirty="0">
+            <a:endParaRPr lang="en-US" sz="800" dirty="0">
               <a:solidFill>
                 <a:schemeClr val="dk1"/>
               </a:solidFill>
@@ -15721,8 +16141,8 @@
         </p:blipFill>
         <p:spPr>
           <a:xfrm>
-            <a:off x="7404350" y="129325"/>
-            <a:ext cx="4721174" cy="2382325"/>
+            <a:off x="8113852" y="71800"/>
+            <a:ext cx="4011671" cy="1803299"/>
           </a:xfrm>
           <a:prstGeom prst="rect">
             <a:avLst/>
@@ -15741,8 +16161,8 @@
         </p:nvSpPr>
         <p:spPr>
           <a:xfrm>
-            <a:off x="7404350" y="2822419"/>
-            <a:ext cx="4582062" cy="742415"/>
+            <a:off x="7999473" y="2458945"/>
+            <a:ext cx="4116702" cy="907523"/>
           </a:xfrm>
           <a:prstGeom prst="rect">
             <a:avLst/>
@@ -15771,18 +16191,56 @@
               <a:buNone/>
             </a:pPr>
             <a:r>
-              <a:rPr lang="en-US" sz="1600" dirty="0">
-                <a:solidFill>
-                  <a:schemeClr val="dk1"/>
-                </a:solidFill>
-                <a:latin typeface="Calibri"/>
-                <a:ea typeface="Calibri"/>
-                <a:cs typeface="Calibri"/>
-                <a:sym typeface="Calibri"/>
-              </a:rPr>
-              <a:t>Type I error - false rejection of the null hypothesis</a:t>
-            </a:r>
-            <a:endParaRPr sz="1600" dirty="0">
+              <a:rPr lang="en-US" b="1" dirty="0">
+                <a:solidFill>
+                  <a:schemeClr val="dk1"/>
+                </a:solidFill>
+                <a:latin typeface="Calibri"/>
+                <a:ea typeface="Calibri"/>
+                <a:cs typeface="Calibri"/>
+                <a:sym typeface="Calibri"/>
+              </a:rPr>
+              <a:t>Two types of Errors:</a:t>
+            </a:r>
+          </a:p>
+          <a:p>
+            <a:pPr marL="0" marR="0" lvl="0" indent="0" algn="l" rtl="0">
+              <a:lnSpc>
+                <a:spcPct val="100000"/>
+              </a:lnSpc>
+              <a:spcBef>
+                <a:spcPts val="0"/>
+              </a:spcBef>
+              <a:spcAft>
+                <a:spcPts val="0"/>
+              </a:spcAft>
+              <a:buNone/>
+            </a:pPr>
+            <a:r>
+              <a:rPr lang="en-US" b="1" dirty="0">
+                <a:solidFill>
+                  <a:srgbClr val="FF0000"/>
+                </a:solidFill>
+                <a:latin typeface="Calibri"/>
+                <a:ea typeface="Calibri"/>
+                <a:cs typeface="Calibri"/>
+                <a:sym typeface="Calibri"/>
+              </a:rPr>
+              <a:t>Type I error</a:t>
+            </a:r>
+            <a:r>
+              <a:rPr lang="en-US" dirty="0">
+                <a:solidFill>
+                  <a:schemeClr val="dk1"/>
+                </a:solidFill>
+                <a:latin typeface="Calibri"/>
+                <a:ea typeface="Calibri"/>
+                <a:cs typeface="Calibri"/>
+                <a:sym typeface="Calibri"/>
+              </a:rPr>
+              <a:t> - false rejection of the null hypothesis</a:t>
+            </a:r>
+            <a:endParaRPr dirty="0">
               <a:solidFill>
                 <a:schemeClr val="dk1"/>
               </a:solidFill>
@@ -15806,18 +16264,30 @@
               <a:buNone/>
             </a:pPr>
             <a:r>
-              <a:rPr lang="en-US" sz="1600" dirty="0">
-                <a:solidFill>
-                  <a:schemeClr val="dk1"/>
-                </a:solidFill>
-                <a:latin typeface="Calibri"/>
-                <a:ea typeface="Calibri"/>
-                <a:cs typeface="Calibri"/>
-                <a:sym typeface="Calibri"/>
-              </a:rPr>
-              <a:t>Type II error - false acceptance of the null hypothesis</a:t>
-            </a:r>
-            <a:endParaRPr sz="1600" dirty="0">
+              <a:rPr lang="en-US" b="1" dirty="0">
+                <a:solidFill>
+                  <a:srgbClr val="FF0000"/>
+                </a:solidFill>
+                <a:latin typeface="Calibri"/>
+                <a:ea typeface="Calibri"/>
+                <a:cs typeface="Calibri"/>
+                <a:sym typeface="Calibri"/>
+              </a:rPr>
+              <a:t>Type II error</a:t>
+            </a:r>
+            <a:r>
+              <a:rPr lang="en-US" dirty="0">
+                <a:solidFill>
+                  <a:schemeClr val="dk1"/>
+                </a:solidFill>
+                <a:latin typeface="Calibri"/>
+                <a:ea typeface="Calibri"/>
+                <a:cs typeface="Calibri"/>
+                <a:sym typeface="Calibri"/>
+              </a:rPr>
+              <a:t> - false acceptance of the null hypothesis</a:t>
+            </a:r>
+            <a:endParaRPr dirty="0">
               <a:solidFill>
                 <a:schemeClr val="dk1"/>
               </a:solidFill>
@@ -15833,10 +16303,16 @@
         <p:nvGraphicFramePr>
           <p:cNvPr id="109" name="Google Shape;109;p15"/>
           <p:cNvGraphicFramePr/>
-          <p:nvPr/>
+          <p:nvPr>
+            <p:extLst>
+              <p:ext uri="{D42A27DB-BD31-4B8C-83A1-F6EECF244321}">
+                <p14:modId xmlns:p14="http://schemas.microsoft.com/office/powerpoint/2010/main" val="1216816036"/>
+              </p:ext>
+            </p:extLst>
+          </p:nvPr>
         </p:nvGraphicFramePr>
         <p:xfrm>
-          <a:off x="7701913" y="4175913"/>
+          <a:off x="7999473" y="3366468"/>
           <a:ext cx="4126050" cy="2382300"/>
         </p:xfrm>
         <a:graphic>
@@ -15924,10 +16400,14 @@
                         <a:buNone/>
                       </a:pPr>
                       <a:r>
-                        <a:rPr lang="en-US"/>
-                        <a:t>Decision to Accept Ho</a:t>
+                        <a:rPr lang="en-US" dirty="0"/>
+                        <a:t>Decision to Accept H</a:t>
                       </a:r>
-                      <a:endParaRPr/>
+                      <a:r>
+                        <a:rPr lang="en-US" baseline="-25000" dirty="0"/>
+                        <a:t>0</a:t>
+                      </a:r>
+                      <a:endParaRPr dirty="0"/>
                     </a:p>
                   </a:txBody>
                   <a:tcPr marL="91425" marR="91425" marT="91425" marB="91425"/>
@@ -15952,14 +16432,22 @@
                         <a:buNone/>
                       </a:pPr>
                       <a:r>
-                        <a:rPr lang="en-US">
+                        <a:rPr lang="en-US" dirty="0">
                           <a:solidFill>
                             <a:schemeClr val="dk1"/>
                           </a:solidFill>
                         </a:rPr>
-                        <a:t>Decision to Reject Ho</a:t>
+                        <a:t>Decision to Reject </a:t>
                       </a:r>
-                      <a:endParaRPr/>
+                      <a:r>
+                        <a:rPr lang="en-US" dirty="0"/>
+                        <a:t>H</a:t>
+                      </a:r>
+                      <a:r>
+                        <a:rPr lang="en-US" baseline="-25000" dirty="0"/>
+                        <a:t>0</a:t>
+                      </a:r>
+                      <a:endParaRPr dirty="0"/>
                     </a:p>
                   </a:txBody>
                   <a:tcPr marL="91425" marR="91425" marT="91425" marB="91425"/>
@@ -15986,10 +16474,18 @@
                         <a:buNone/>
                       </a:pPr>
                       <a:r>
-                        <a:rPr lang="en-US"/>
-                        <a:t>Ho is True</a:t>
+                        <a:rPr lang="en-US" dirty="0"/>
+                        <a:t>H</a:t>
                       </a:r>
-                      <a:endParaRPr/>
+                      <a:r>
+                        <a:rPr lang="en-US" baseline="-25000" dirty="0"/>
+                        <a:t>0</a:t>
+                      </a:r>
+                      <a:r>
+                        <a:rPr lang="en-US" dirty="0"/>
+                        <a:t> is True</a:t>
+                      </a:r>
+                      <a:endParaRPr dirty="0"/>
                     </a:p>
                   </a:txBody>
                   <a:tcPr marL="91425" marR="91425" marT="91425" marB="91425"/>
@@ -16043,10 +16539,18 @@
                         <a:buNone/>
                       </a:pPr>
                       <a:r>
-                        <a:rPr lang="en-US"/>
+                        <a:rPr lang="en-US" b="1" dirty="0">
+                          <a:solidFill>
+                            <a:srgbClr val="FF0000"/>
+                          </a:solidFill>
+                        </a:rPr>
                         <a:t>type I error</a:t>
                       </a:r>
-                      <a:endParaRPr/>
+                      <a:endParaRPr b="1" dirty="0">
+                        <a:solidFill>
+                          <a:srgbClr val="FF0000"/>
+                        </a:solidFill>
+                      </a:endParaRPr>
                     </a:p>
                   </a:txBody>
                   <a:tcPr marL="91425" marR="91425" marT="91425" marB="91425"/>
@@ -16073,10 +16577,18 @@
                         <a:buNone/>
                       </a:pPr>
                       <a:r>
-                        <a:rPr lang="en-US"/>
-                        <a:t>Ho is False</a:t>
+                        <a:rPr lang="en-US" dirty="0"/>
+                        <a:t>H</a:t>
                       </a:r>
-                      <a:endParaRPr/>
+                      <a:r>
+                        <a:rPr lang="en-US" baseline="-25000" dirty="0"/>
+                        <a:t>0</a:t>
+                      </a:r>
+                      <a:r>
+                        <a:rPr lang="en-US" dirty="0"/>
+                        <a:t> is False</a:t>
+                      </a:r>
+                      <a:endParaRPr dirty="0"/>
                     </a:p>
                   </a:txBody>
                   <a:tcPr marL="91425" marR="91425" marT="91425" marB="91425"/>
@@ -16096,10 +16608,18 @@
                         <a:buNone/>
                       </a:pPr>
                       <a:r>
-                        <a:rPr lang="en-US"/>
+                        <a:rPr lang="en-US" b="1" dirty="0">
+                          <a:solidFill>
+                            <a:srgbClr val="FF0000"/>
+                          </a:solidFill>
+                        </a:rPr>
                         <a:t>type II error</a:t>
                       </a:r>
-                      <a:endParaRPr/>
+                      <a:endParaRPr b="1" dirty="0">
+                        <a:solidFill>
+                          <a:srgbClr val="FF0000"/>
+                        </a:solidFill>
+                      </a:endParaRPr>
                     </a:p>
                   </a:txBody>
                   <a:tcPr marL="91425" marR="91425" marT="91425" marB="91425"/>
@@ -16119,17 +16639,17 @@
                         <a:buNone/>
                       </a:pPr>
                       <a:r>
-                        <a:rPr lang="en-US"/>
+                        <a:rPr lang="en-US" dirty="0"/>
                         <a:t>Correct </a:t>
                       </a:r>
                       <a:br>
-                        <a:rPr lang="en-US"/>
+                        <a:rPr lang="en-US" dirty="0"/>
                       </a:br>
                       <a:r>
-                        <a:rPr lang="en-US"/>
+                        <a:rPr lang="en-US" dirty="0"/>
                         <a:t>Decision</a:t>
                       </a:r>
-                      <a:endParaRPr/>
+                      <a:endParaRPr dirty="0"/>
                     </a:p>
                   </a:txBody>
                   <a:tcPr marL="91425" marR="91425" marT="91425" marB="91425">
@@ -16630,7 +17150,7 @@
         </p:blipFill>
         <p:spPr>
           <a:xfrm>
-            <a:off x="10442586" y="3445039"/>
+            <a:off x="10578510" y="3472383"/>
             <a:ext cx="489437" cy="506917"/>
           </a:xfrm>
           <a:prstGeom prst="rect">
@@ -17019,7 +17539,7 @@
                 <a:cs typeface="Calibri"/>
                 <a:sym typeface="Calibri"/>
               </a:rPr>
-              <a:t>So we can estimate the error for 2</a:t>
+              <a:t>So we can estimate the error </a:t>
             </a:r>
             <a:r>
               <a:rPr lang="el-GR" b="1" dirty="0">
@@ -17040,7 +17560,7 @@
                 <a:cs typeface="Calibri"/>
                 <a:sym typeface="Calibri"/>
               </a:rPr>
-              <a:t> (~ 95% confidence) as:</a:t>
+              <a:t> as:</a:t>
             </a:r>
           </a:p>
           <a:p>
@@ -17055,6 +17575,18 @@
               <a:t>          </a:t>
             </a:r>
             <a:r>
+              <a:rPr lang="el-GR" b="1" dirty="0">
+                <a:solidFill>
+                  <a:srgbClr val="0070C0"/>
+                </a:solidFill>
+                <a:latin typeface="Calibri"/>
+                <a:ea typeface="Calibri"/>
+                <a:cs typeface="Calibri"/>
+                <a:sym typeface="Calibri"/>
+              </a:rPr>
+              <a:t>σ</a:t>
+            </a:r>
+            <a:r>
               <a:rPr lang="en-US" b="1" dirty="0">
                 <a:solidFill>
                   <a:srgbClr val="0070C0"/>
@@ -17064,31 +17596,7 @@
                 <a:cs typeface="Calibri"/>
                 <a:sym typeface="Calibri"/>
               </a:rPr>
-              <a:t>2</a:t>
-            </a:r>
-            <a:r>
-              <a:rPr lang="el-GR" b="1" dirty="0">
-                <a:solidFill>
-                  <a:srgbClr val="0070C0"/>
-                </a:solidFill>
-                <a:latin typeface="Calibri"/>
-                <a:ea typeface="Calibri"/>
-                <a:cs typeface="Calibri"/>
-                <a:sym typeface="Calibri"/>
-              </a:rPr>
-              <a:t>σ</a:t>
-            </a:r>
-            <a:r>
-              <a:rPr lang="en-US" b="1" dirty="0">
-                <a:solidFill>
-                  <a:srgbClr val="0070C0"/>
-                </a:solidFill>
-                <a:latin typeface="Calibri"/>
-                <a:ea typeface="Calibri"/>
-                <a:cs typeface="Calibri"/>
-                <a:sym typeface="Calibri"/>
-              </a:rPr>
-              <a:t> ~ √n </a:t>
+              <a:t> ~ √n/2 </a:t>
             </a:r>
           </a:p>
           <a:p>
@@ -17118,7 +17626,7 @@
                 <a:cs typeface="Calibri"/>
                 <a:sym typeface="Calibri"/>
               </a:rPr>
-              <a:t>If we estimate error for ratio "x/n", it will be then:</a:t>
+              <a:t>If we estimate error for ratio "x/n", we divide by n:</a:t>
             </a:r>
           </a:p>
         </p:txBody>
@@ -17449,8 +17957,8 @@
         </p:nvSpPr>
         <p:spPr>
           <a:xfrm>
-            <a:off x="6749240" y="4080567"/>
-            <a:ext cx="4167807" cy="307777"/>
+            <a:off x="6808873" y="4080567"/>
+            <a:ext cx="4108174" cy="738664"/>
           </a:xfrm>
           <a:prstGeom prst="rect">
             <a:avLst/>
@@ -17468,17 +17976,69 @@
                 <a:latin typeface="Calibri"/>
                 <a:cs typeface="Calibri"/>
               </a:rPr>
-              <a:t>And hence the value of maximum error (E) is given by:</a:t>
+              <a:t>We express error E in terms of Z (number of </a:t>
+            </a:r>
+            <a:r>
+              <a:rPr lang="en-US" dirty="0" err="1">
+                <a:latin typeface="Calibri"/>
+                <a:cs typeface="Calibri"/>
+              </a:rPr>
+              <a:t>sigmas</a:t>
+            </a:r>
+            <a:r>
+              <a:rPr lang="en-US" dirty="0">
+                <a:latin typeface="Calibri"/>
+                <a:cs typeface="Calibri"/>
+              </a:rPr>
+              <a:t>): </a:t>
+            </a:r>
+          </a:p>
+          <a:p>
+            <a:r>
+              <a:rPr lang="en-US" dirty="0">
+                <a:latin typeface="Calibri"/>
+                <a:cs typeface="Calibri"/>
+              </a:rPr>
+              <a:t>            E = Z</a:t>
+            </a:r>
+            <a:r>
+              <a:rPr lang="el-GR" dirty="0">
+                <a:latin typeface="Calibri"/>
+                <a:cs typeface="Calibri"/>
+                <a:sym typeface="Calibri"/>
+              </a:rPr>
+              <a:t>σ</a:t>
+            </a:r>
+            <a:r>
+              <a:rPr lang="en-US" dirty="0">
+                <a:latin typeface="Calibri"/>
+                <a:cs typeface="Calibri"/>
+                <a:sym typeface="Calibri"/>
+              </a:rPr>
+              <a:t> = Z/2√n</a:t>
+            </a:r>
+          </a:p>
+          <a:p>
+            <a:r>
+              <a:rPr lang="en-US" dirty="0">
+                <a:solidFill>
+                  <a:schemeClr val="tx1"/>
+                </a:solidFill>
+                <a:latin typeface="Calibri"/>
+                <a:cs typeface="Calibri"/>
+                <a:sym typeface="Calibri"/>
+              </a:rPr>
+              <a:t>or:</a:t>
             </a:r>
           </a:p>
         </p:txBody>
       </p:sp>
       <p:pic>
         <p:nvPicPr>
-          <p:cNvPr id="11" name="Picture 10">
+          <p:cNvPr id="12" name="Picture 11">
             <a:extLst>
               <a:ext uri="{FF2B5EF4-FFF2-40B4-BE49-F238E27FC236}">
-                <a16:creationId xmlns:a16="http://schemas.microsoft.com/office/drawing/2014/main" id="{72637CC1-BEE4-154D-98AD-65986D051565}"/>
+                <a16:creationId xmlns:a16="http://schemas.microsoft.com/office/drawing/2014/main" id="{4BC789A4-98D4-F041-9CDE-34D490398ACE}"/>
               </a:ext>
             </a:extLst>
           </p:cNvPr>
@@ -17501,81 +18061,7 @@
         </p:blipFill>
         <p:spPr>
           <a:xfrm>
-            <a:off x="7643965" y="4336930"/>
-            <a:ext cx="1427265" cy="531726"/>
-          </a:xfrm>
-          <a:prstGeom prst="rect">
-            <a:avLst/>
-          </a:prstGeom>
-        </p:spPr>
-      </p:pic>
-      <p:sp>
-        <p:nvSpPr>
-          <p:cNvPr id="14" name="TextBox 13">
-            <a:extLst>
-              <a:ext uri="{FF2B5EF4-FFF2-40B4-BE49-F238E27FC236}">
-                <a16:creationId xmlns:a16="http://schemas.microsoft.com/office/drawing/2014/main" id="{638FBC29-A8F9-284A-A1BF-DA59A1CFE356}"/>
-              </a:ext>
-            </a:extLst>
-          </p:cNvPr>
-          <p:cNvSpPr txBox="1"/>
-          <p:nvPr/>
-        </p:nvSpPr>
-        <p:spPr>
-          <a:xfrm>
-            <a:off x="6749240" y="4786008"/>
-            <a:ext cx="430695" cy="307777"/>
-          </a:xfrm>
-          <a:prstGeom prst="rect">
-            <a:avLst/>
-          </a:prstGeom>
-          <a:noFill/>
-        </p:spPr>
-        <p:txBody>
-          <a:bodyPr wrap="square" rtlCol="0">
-            <a:spAutoFit/>
-          </a:bodyPr>
-          <a:lstStyle/>
-          <a:p>
-            <a:r>
-              <a:rPr lang="en-US" dirty="0">
-                <a:latin typeface="Calibri"/>
-                <a:cs typeface="Calibri"/>
-              </a:rPr>
-              <a:t>Or:</a:t>
-            </a:r>
-          </a:p>
-        </p:txBody>
-      </p:sp>
-      <p:pic>
-        <p:nvPicPr>
-          <p:cNvPr id="12" name="Picture 11">
-            <a:extLst>
-              <a:ext uri="{FF2B5EF4-FFF2-40B4-BE49-F238E27FC236}">
-                <a16:creationId xmlns:a16="http://schemas.microsoft.com/office/drawing/2014/main" id="{4BC789A4-98D4-F041-9CDE-34D490398ACE}"/>
-              </a:ext>
-            </a:extLst>
-          </p:cNvPr>
-          <p:cNvPicPr>
-            <a:picLocks noChangeAspect="1"/>
-          </p:cNvPicPr>
-          <p:nvPr/>
-        </p:nvPicPr>
-        <p:blipFill>
-          <a:blip r:embed="rId7" cstate="email">
-            <a:extLst>
-              <a:ext uri="{28A0092B-C50C-407E-A947-70E740481C1C}">
-                <a14:useLocalDpi xmlns:a14="http://schemas.microsoft.com/office/drawing/2010/main"/>
-              </a:ext>
-            </a:extLst>
-          </a:blip>
-          <a:stretch>
-            <a:fillRect/>
-          </a:stretch>
-        </p:blipFill>
-        <p:spPr>
-          <a:xfrm>
-            <a:off x="7644289" y="5035673"/>
+            <a:off x="7294195" y="4641154"/>
             <a:ext cx="928696" cy="581711"/>
           </a:xfrm>
           <a:prstGeom prst="rect">
@@ -17597,8 +18083,8 @@
         </p:nvSpPr>
         <p:spPr>
           <a:xfrm>
-            <a:off x="6685722" y="5884718"/>
-            <a:ext cx="5082208" cy="954107"/>
+            <a:off x="6811449" y="5470732"/>
+            <a:ext cx="5082208" cy="1169551"/>
           </a:xfrm>
           <a:prstGeom prst="rect">
             <a:avLst/>
@@ -17616,7 +18102,44 @@
                 <a:latin typeface="Calibri"/>
                 <a:cs typeface="Calibri"/>
               </a:rPr>
-              <a:t>For example, if we want confidence 95% (Z=1.9599), then </a:t>
+              <a:t>For example, if we want confidence 95% (Z=1.9599), then</a:t>
+            </a:r>
+          </a:p>
+          <a:p>
+            <a:r>
+              <a:rPr lang="en-US" dirty="0">
+                <a:latin typeface="Calibri"/>
+                <a:cs typeface="Calibri"/>
+              </a:rPr>
+              <a:t>Z</a:t>
+            </a:r>
+            <a:r>
+              <a:rPr lang="en-US" baseline="30000" dirty="0">
+                <a:latin typeface="Calibri"/>
+                <a:cs typeface="Calibri"/>
+              </a:rPr>
+              <a:t>2</a:t>
+            </a:r>
+            <a:r>
+              <a:rPr lang="en-US" dirty="0">
+                <a:latin typeface="Calibri"/>
+                <a:cs typeface="Calibri"/>
+              </a:rPr>
+              <a:t>/4 = (1.9599)</a:t>
+            </a:r>
+            <a:r>
+              <a:rPr lang="en-US" baseline="30000" dirty="0">
+                <a:latin typeface="Calibri"/>
+                <a:cs typeface="Calibri"/>
+              </a:rPr>
+              <a:t>2</a:t>
+            </a:r>
+            <a:r>
+              <a:rPr lang="en-US" dirty="0">
+                <a:latin typeface="Calibri"/>
+                <a:cs typeface="Calibri"/>
+              </a:rPr>
+              <a:t> / 4 = 1 </a:t>
             </a:r>
           </a:p>
           <a:p>
@@ -17629,7 +18152,21 @@
                 <a:latin typeface="Calibri"/>
                 <a:cs typeface="Calibri"/>
               </a:rPr>
-              <a:t>for E=0.5   we need n = (1.9599)**2 / (4*0.5**2)   = 4 flips  </a:t>
+              <a:t>for E=0.5   we need n = 1 / 0.5</a:t>
+            </a:r>
+            <a:r>
+              <a:rPr lang="en-US" baseline="30000" dirty="0">
+                <a:latin typeface="Calibri"/>
+                <a:cs typeface="Calibri"/>
+              </a:rPr>
+              <a:t>2</a:t>
+            </a:r>
+            <a:r>
+              <a:rPr lang="en-US" dirty="0">
+                <a:latin typeface="Calibri"/>
+                <a:cs typeface="Calibri"/>
+              </a:rPr>
+              <a:t>  = 4 flips  </a:t>
             </a:r>
           </a:p>
           <a:p>
@@ -17642,7 +18179,21 @@
                 <a:latin typeface="Calibri"/>
                 <a:cs typeface="Calibri"/>
               </a:rPr>
-              <a:t>for E=0.25 we need n = (1.9599)**2 / (4*0.25**2) = 16 flips  </a:t>
+              <a:t>for E=0.25 we need n = 1 / 0.25</a:t>
+            </a:r>
+            <a:r>
+              <a:rPr lang="en-US" baseline="30000" dirty="0">
+                <a:latin typeface="Calibri"/>
+                <a:cs typeface="Calibri"/>
+              </a:rPr>
+              <a:t>2</a:t>
+            </a:r>
+            <a:r>
+              <a:rPr lang="en-US" dirty="0">
+                <a:latin typeface="Calibri"/>
+                <a:cs typeface="Calibri"/>
+              </a:rPr>
+              <a:t> = 16 flips  </a:t>
             </a:r>
           </a:p>
           <a:p>
@@ -17655,7 +18206,21 @@
                 <a:latin typeface="Calibri"/>
                 <a:cs typeface="Calibri"/>
               </a:rPr>
-              <a:t>for E=0.01, we need n = (1.9599)**2 /(4*0.01**2) = 9,603 flips</a:t>
+              <a:t>for E=0.01 we need n = 1 / 0.01</a:t>
+            </a:r>
+            <a:r>
+              <a:rPr lang="en-US" baseline="30000" dirty="0">
+                <a:latin typeface="Calibri"/>
+                <a:cs typeface="Calibri"/>
+              </a:rPr>
+              <a:t>2</a:t>
+            </a:r>
+            <a:r>
+              <a:rPr lang="en-US" dirty="0">
+                <a:latin typeface="Calibri"/>
+                <a:cs typeface="Calibri"/>
+              </a:rPr>
+              <a:t> = 9,603 flips</a:t>
             </a:r>
           </a:p>
         </p:txBody>
@@ -17675,7 +18240,7 @@
           <p:nvPr/>
         </p:nvPicPr>
         <p:blipFill rotWithShape="1">
-          <a:blip r:embed="rId8" cstate="email">
+          <a:blip r:embed="rId7" cstate="email">
             <a:extLst>
               <a:ext uri="{28A0092B-C50C-407E-A947-70E740481C1C}">
                 <a14:useLocalDpi xmlns:a14="http://schemas.microsoft.com/office/drawing/2010/main"/>
@@ -17704,6 +18269,943 @@
 </file>
 
 <file path=ppt/slides/slide4.xml><?xml version="1.0" encoding="utf-8"?>
+<p:sld xmlns:a="http://schemas.openxmlformats.org/drawingml/2006/main" xmlns:r="http://schemas.openxmlformats.org/officeDocument/2006/relationships" xmlns:p="http://schemas.openxmlformats.org/presentationml/2006/main">
+  <p:cSld>
+    <p:spTree>
+      <p:nvGrpSpPr>
+        <p:cNvPr id="1" name=""/>
+        <p:cNvGrpSpPr/>
+        <p:nvPr/>
+      </p:nvGrpSpPr>
+      <p:grpSpPr>
+        <a:xfrm>
+          <a:off x="0" y="0"/>
+          <a:ext cx="0" cy="0"/>
+          <a:chOff x="0" y="0"/>
+          <a:chExt cx="0" cy="0"/>
+        </a:xfrm>
+      </p:grpSpPr>
+      <p:sp>
+        <p:nvSpPr>
+          <p:cNvPr id="2" name="Rectangle 1">
+            <a:extLst>
+              <a:ext uri="{FF2B5EF4-FFF2-40B4-BE49-F238E27FC236}">
+                <a16:creationId xmlns:a16="http://schemas.microsoft.com/office/drawing/2014/main" id="{E57461BF-3772-4D42-8663-515C48A8AE0D}"/>
+              </a:ext>
+            </a:extLst>
+          </p:cNvPr>
+          <p:cNvSpPr/>
+          <p:nvPr/>
+        </p:nvSpPr>
+        <p:spPr>
+          <a:xfrm>
+            <a:off x="0" y="0"/>
+            <a:ext cx="6763390" cy="523220"/>
+          </a:xfrm>
+          <a:prstGeom prst="rect">
+            <a:avLst/>
+          </a:prstGeom>
+        </p:spPr>
+        <p:txBody>
+          <a:bodyPr wrap="none">
+            <a:spAutoFit/>
+          </a:bodyPr>
+          <a:lstStyle/>
+          <a:p>
+            <a:r>
+              <a:rPr lang="en-US" sz="2800" b="1" dirty="0">
+                <a:solidFill>
+                  <a:schemeClr val="dk1"/>
+                </a:solidFill>
+                <a:latin typeface="Calibri"/>
+                <a:ea typeface="Calibri"/>
+                <a:cs typeface="Calibri"/>
+                <a:sym typeface="Calibri"/>
+              </a:rPr>
+              <a:t>More examples of p-value &amp; null hypothesis</a:t>
+            </a:r>
+            <a:endParaRPr lang="en-US" sz="2800" dirty="0"/>
+          </a:p>
+        </p:txBody>
+      </p:sp>
+      <p:sp>
+        <p:nvSpPr>
+          <p:cNvPr id="3" name="TextBox 2">
+            <a:extLst>
+              <a:ext uri="{FF2B5EF4-FFF2-40B4-BE49-F238E27FC236}">
+                <a16:creationId xmlns:a16="http://schemas.microsoft.com/office/drawing/2014/main" id="{8AE09831-DEFD-754A-BFDE-A062EDF7C962}"/>
+              </a:ext>
+            </a:extLst>
+          </p:cNvPr>
+          <p:cNvSpPr txBox="1"/>
+          <p:nvPr/>
+        </p:nvSpPr>
+        <p:spPr>
+          <a:xfrm>
+            <a:off x="1553710" y="1076298"/>
+            <a:ext cx="6861086" cy="2431435"/>
+          </a:xfrm>
+          <a:prstGeom prst="rect">
+            <a:avLst/>
+          </a:prstGeom>
+          <a:noFill/>
+        </p:spPr>
+        <p:txBody>
+          <a:bodyPr wrap="square" rtlCol="0">
+            <a:spAutoFit/>
+          </a:bodyPr>
+          <a:lstStyle/>
+          <a:p>
+            <a:r>
+              <a:rPr lang="en-US" sz="2000" b="1" dirty="0">
+                <a:solidFill>
+                  <a:srgbClr val="FF0000"/>
+                </a:solidFill>
+              </a:rPr>
+              <a:t>t-test:</a:t>
+            </a:r>
+          </a:p>
+          <a:p>
+            <a:r>
+              <a:rPr lang="en-US" dirty="0">
+                <a:solidFill>
+                  <a:schemeClr val="tx1"/>
+                </a:solidFill>
+              </a:rPr>
+              <a:t>We compare sample mean with theoretical value or with some other sample mean.</a:t>
+            </a:r>
+          </a:p>
+          <a:p>
+            <a:r>
+              <a:rPr lang="en-US" dirty="0">
+                <a:solidFill>
+                  <a:schemeClr val="tx1"/>
+                </a:solidFill>
+              </a:rPr>
+              <a:t>We use sample variance</a:t>
+            </a:r>
+          </a:p>
+          <a:p>
+            <a:r>
+              <a:rPr lang="en-US" dirty="0">
+                <a:solidFill>
+                  <a:schemeClr val="tx1"/>
+                </a:solidFill>
+              </a:rPr>
+              <a:t>We use t-distribution to calculate p-value  (bigger t -&gt; smaller p-value -&gt; reject)</a:t>
+            </a:r>
+          </a:p>
+          <a:p>
+            <a:endParaRPr lang="en-US" dirty="0"/>
+          </a:p>
+          <a:p>
+            <a:r>
+              <a:rPr lang="en-US" sz="2000" b="1" dirty="0">
+                <a:solidFill>
+                  <a:srgbClr val="FF0000"/>
+                </a:solidFill>
+              </a:rPr>
+              <a:t>Three types of t-tests:</a:t>
+            </a:r>
+          </a:p>
+          <a:p>
+            <a:pPr marL="285750" indent="-285750">
+              <a:buFont typeface="Arial" panose="020B0604020202020204" pitchFamily="34" charset="0"/>
+              <a:buChar char="•"/>
+            </a:pPr>
+            <a:r>
+              <a:rPr lang="en-US" b="1" dirty="0">
+                <a:solidFill>
+                  <a:srgbClr val="FF0000"/>
+                </a:solidFill>
+              </a:rPr>
+              <a:t>one-sample t-test</a:t>
+            </a:r>
+            <a:r>
+              <a:rPr lang="en-US" dirty="0"/>
+              <a:t> - compare sample mean with given value</a:t>
+            </a:r>
+          </a:p>
+          <a:p>
+            <a:pPr marL="285750" indent="-285750">
+              <a:buFont typeface="Arial" panose="020B0604020202020204" pitchFamily="34" charset="0"/>
+              <a:buChar char="•"/>
+            </a:pPr>
+            <a:r>
+              <a:rPr lang="en-US" b="1" dirty="0">
+                <a:solidFill>
+                  <a:srgbClr val="FF0000"/>
+                </a:solidFill>
+              </a:rPr>
+              <a:t>two-sample t-test</a:t>
+            </a:r>
+            <a:r>
+              <a:rPr lang="en-US" dirty="0"/>
+              <a:t> (a.k.a. Independent Samples t Test) compares </a:t>
+            </a:r>
+            <a:br>
+              <a:rPr lang="en-US" dirty="0"/>
+            </a:br>
+            <a:r>
+              <a:rPr lang="en-US" dirty="0"/>
+              <a:t>the means of two independent groups</a:t>
+            </a:r>
+          </a:p>
+          <a:p>
+            <a:pPr marL="285750" indent="-285750">
+              <a:buFont typeface="Arial" panose="020B0604020202020204" pitchFamily="34" charset="0"/>
+              <a:buChar char="•"/>
+            </a:pPr>
+            <a:r>
+              <a:rPr lang="en-US" b="1" dirty="0">
+                <a:solidFill>
+                  <a:srgbClr val="FF0000"/>
+                </a:solidFill>
+              </a:rPr>
+              <a:t>paired t-test</a:t>
+            </a:r>
+            <a:r>
+              <a:rPr lang="en-US" dirty="0"/>
+              <a:t> (for dependent samples - before/after treatment)</a:t>
+            </a:r>
+          </a:p>
+        </p:txBody>
+      </p:sp>
+      <p:pic>
+        <p:nvPicPr>
+          <p:cNvPr id="4" name="Picture 3">
+            <a:extLst>
+              <a:ext uri="{FF2B5EF4-FFF2-40B4-BE49-F238E27FC236}">
+                <a16:creationId xmlns:a16="http://schemas.microsoft.com/office/drawing/2014/main" id="{DBAFCCE4-9CBE-0B45-9209-550454F17A9C}"/>
+              </a:ext>
+            </a:extLst>
+          </p:cNvPr>
+          <p:cNvPicPr>
+            <a:picLocks noChangeAspect="1"/>
+          </p:cNvPicPr>
+          <p:nvPr/>
+        </p:nvPicPr>
+        <p:blipFill>
+          <a:blip r:embed="rId2" cstate="email">
+            <a:extLst>
+              <a:ext uri="{28A0092B-C50C-407E-A947-70E740481C1C}">
+                <a14:useLocalDpi xmlns:a14="http://schemas.microsoft.com/office/drawing/2010/main"/>
+              </a:ext>
+            </a:extLst>
+          </a:blip>
+          <a:stretch>
+            <a:fillRect/>
+          </a:stretch>
+        </p:blipFill>
+        <p:spPr>
+          <a:xfrm>
+            <a:off x="161549" y="1375920"/>
+            <a:ext cx="1149092" cy="808373"/>
+          </a:xfrm>
+          <a:prstGeom prst="rect">
+            <a:avLst/>
+          </a:prstGeom>
+        </p:spPr>
+      </p:pic>
+      <p:sp>
+        <p:nvSpPr>
+          <p:cNvPr id="5" name="Google Shape;121;p17">
+            <a:extLst>
+              <a:ext uri="{FF2B5EF4-FFF2-40B4-BE49-F238E27FC236}">
+                <a16:creationId xmlns:a16="http://schemas.microsoft.com/office/drawing/2014/main" id="{4A7EA9C4-15AA-0B42-A068-425F2634EFA2}"/>
+              </a:ext>
+            </a:extLst>
+          </p:cNvPr>
+          <p:cNvSpPr txBox="1"/>
+          <p:nvPr/>
+        </p:nvSpPr>
+        <p:spPr>
+          <a:xfrm>
+            <a:off x="2140225" y="3845367"/>
+            <a:ext cx="6020184" cy="2069296"/>
+          </a:xfrm>
+          <a:prstGeom prst="rect">
+            <a:avLst/>
+          </a:prstGeom>
+          <a:noFill/>
+          <a:ln>
+            <a:noFill/>
+          </a:ln>
+        </p:spPr>
+        <p:txBody>
+          <a:bodyPr spcFirstLastPara="1" wrap="square" lIns="91425" tIns="91425" rIns="91425" bIns="91425" anchor="t" anchorCtr="0">
+            <a:noAutofit/>
+          </a:bodyPr>
+          <a:lstStyle/>
+          <a:p>
+            <a:pPr marL="0" lvl="0" indent="0" algn="l" rtl="0">
+              <a:spcBef>
+                <a:spcPts val="0"/>
+              </a:spcBef>
+              <a:spcAft>
+                <a:spcPts val="0"/>
+              </a:spcAft>
+              <a:buNone/>
+            </a:pPr>
+            <a:r>
+              <a:rPr lang="en-US" sz="2000" b="1" dirty="0">
+                <a:solidFill>
+                  <a:srgbClr val="FF0000"/>
+                </a:solidFill>
+                <a:sym typeface="Calibri"/>
+              </a:rPr>
+              <a:t>Chi-Square  </a:t>
+            </a:r>
+            <a:r>
+              <a:rPr lang="en-US" sz="2000" b="1" dirty="0">
+                <a:solidFill>
+                  <a:srgbClr val="FF0000"/>
+                </a:solidFill>
+                <a:sym typeface="Times New Roman"/>
+              </a:rPr>
+              <a:t>χ2</a:t>
+            </a:r>
+            <a:r>
+              <a:rPr lang="en-US" sz="2000" b="1" dirty="0">
+                <a:solidFill>
+                  <a:srgbClr val="FF0000"/>
+                </a:solidFill>
+                <a:sym typeface="Calibri"/>
+              </a:rPr>
+              <a:t>  Goodness of Fit Test</a:t>
+            </a:r>
+            <a:endParaRPr sz="2000" b="1" dirty="0">
+              <a:solidFill>
+                <a:srgbClr val="FF0000"/>
+              </a:solidFill>
+              <a:sym typeface="Calibri"/>
+            </a:endParaRPr>
+          </a:p>
+          <a:p>
+            <a:pPr marL="0" lvl="0" indent="0" algn="l" rtl="0">
+              <a:spcBef>
+                <a:spcPts val="0"/>
+              </a:spcBef>
+              <a:spcAft>
+                <a:spcPts val="0"/>
+              </a:spcAft>
+              <a:buClr>
+                <a:schemeClr val="dk1"/>
+              </a:buClr>
+              <a:buSzPts val="1100"/>
+              <a:buFont typeface="Arial"/>
+              <a:buNone/>
+            </a:pPr>
+            <a:r>
+              <a:rPr lang="en-US" dirty="0">
+                <a:latin typeface="Calibri"/>
+                <a:ea typeface="Calibri"/>
+                <a:cs typeface="Calibri"/>
+                <a:sym typeface="Calibri"/>
+              </a:rPr>
+              <a:t>Suppose we have N observations of k mutually-exclusive classes</a:t>
+            </a:r>
+            <a:endParaRPr dirty="0">
+              <a:latin typeface="Calibri"/>
+              <a:ea typeface="Calibri"/>
+              <a:cs typeface="Calibri"/>
+              <a:sym typeface="Calibri"/>
+            </a:endParaRPr>
+          </a:p>
+          <a:p>
+            <a:pPr lvl="0">
+              <a:buClr>
+                <a:schemeClr val="dk1"/>
+              </a:buClr>
+              <a:buSzPts val="1100"/>
+            </a:pPr>
+            <a:r>
+              <a:rPr lang="en-US" dirty="0" err="1">
+                <a:latin typeface="Calibri"/>
+                <a:ea typeface="Calibri"/>
+                <a:cs typeface="Calibri"/>
+                <a:sym typeface="Calibri"/>
+              </a:rPr>
+              <a:t>n</a:t>
+            </a:r>
+            <a:r>
+              <a:rPr lang="en-US" baseline="-25000" dirty="0" err="1">
+                <a:latin typeface="Calibri"/>
+                <a:ea typeface="Calibri"/>
+                <a:cs typeface="Calibri"/>
+                <a:sym typeface="Calibri"/>
+              </a:rPr>
+              <a:t>i</a:t>
+            </a:r>
+            <a:r>
+              <a:rPr lang="en-US" dirty="0">
+                <a:latin typeface="Calibri"/>
+                <a:ea typeface="Calibri"/>
+                <a:cs typeface="Calibri"/>
+                <a:sym typeface="Calibri"/>
+              </a:rPr>
+              <a:t> - number of observations for each class (</a:t>
+            </a:r>
+            <a:r>
+              <a:rPr lang="en-US" dirty="0" err="1">
+                <a:latin typeface="Calibri"/>
+                <a:ea typeface="Calibri"/>
+                <a:cs typeface="Calibri"/>
+                <a:sym typeface="Calibri"/>
+              </a:rPr>
+              <a:t>i</a:t>
+            </a:r>
+            <a:r>
+              <a:rPr lang="en-US" dirty="0">
+                <a:latin typeface="Calibri"/>
+                <a:ea typeface="Calibri"/>
+                <a:cs typeface="Calibri"/>
+                <a:sym typeface="Calibri"/>
+              </a:rPr>
+              <a:t>=1,2,...k) </a:t>
+            </a:r>
+            <a:endParaRPr dirty="0">
+              <a:latin typeface="Calibri"/>
+              <a:ea typeface="Calibri"/>
+              <a:cs typeface="Calibri"/>
+              <a:sym typeface="Calibri"/>
+            </a:endParaRPr>
+          </a:p>
+          <a:p>
+            <a:pPr lvl="0">
+              <a:buClr>
+                <a:schemeClr val="dk1"/>
+              </a:buClr>
+              <a:buSzPts val="1100"/>
+            </a:pPr>
+            <a:r>
+              <a:rPr lang="en-US" dirty="0">
+                <a:latin typeface="Calibri"/>
+                <a:ea typeface="Calibri"/>
+                <a:cs typeface="Calibri"/>
+                <a:sym typeface="Calibri"/>
+              </a:rPr>
+              <a:t>m</a:t>
+            </a:r>
+            <a:r>
+              <a:rPr lang="en-US" baseline="-25000" dirty="0">
+                <a:latin typeface="Calibri"/>
+                <a:ea typeface="Calibri"/>
+                <a:cs typeface="Calibri"/>
+                <a:sym typeface="Calibri"/>
+              </a:rPr>
+              <a:t>i </a:t>
+            </a:r>
+            <a:r>
+              <a:rPr lang="en-US" dirty="0">
+                <a:latin typeface="Calibri"/>
+                <a:ea typeface="Calibri"/>
+                <a:cs typeface="Calibri"/>
+                <a:sym typeface="Calibri"/>
+              </a:rPr>
+              <a:t>- expected number of observations for each class</a:t>
+            </a:r>
+          </a:p>
+          <a:p>
+            <a:pPr lvl="0">
+              <a:buClr>
+                <a:schemeClr val="dk1"/>
+              </a:buClr>
+              <a:buSzPts val="1100"/>
+            </a:pPr>
+            <a:r>
+              <a:rPr lang="en-US" dirty="0">
+                <a:latin typeface="Calibri"/>
+                <a:ea typeface="Calibri"/>
+                <a:cs typeface="Calibri"/>
+                <a:sym typeface="Calibri"/>
+              </a:rPr>
+              <a:t>Calculate </a:t>
+            </a:r>
+            <a:r>
+              <a:rPr lang="en-US" b="1" dirty="0">
+                <a:solidFill>
+                  <a:srgbClr val="FF0000"/>
+                </a:solidFill>
+                <a:latin typeface="Calibri"/>
+                <a:ea typeface="Calibri"/>
+                <a:cs typeface="Calibri"/>
+                <a:sym typeface="Calibri"/>
+              </a:rPr>
+              <a:t>X</a:t>
+            </a:r>
+            <a:r>
+              <a:rPr lang="en-US" b="1" baseline="30000" dirty="0">
+                <a:solidFill>
+                  <a:srgbClr val="FF0000"/>
+                </a:solidFill>
+                <a:latin typeface="Calibri"/>
+                <a:ea typeface="Calibri"/>
+                <a:cs typeface="Calibri"/>
+                <a:sym typeface="Calibri"/>
+              </a:rPr>
+              <a:t>2</a:t>
+            </a:r>
+            <a:r>
+              <a:rPr lang="en-US" b="1" dirty="0">
+                <a:solidFill>
+                  <a:srgbClr val="FF0000"/>
+                </a:solidFill>
+                <a:latin typeface="Calibri"/>
+                <a:ea typeface="Calibri"/>
+                <a:cs typeface="Calibri"/>
+                <a:sym typeface="Calibri"/>
+              </a:rPr>
+              <a:t> = sum((</a:t>
+            </a:r>
+            <a:r>
+              <a:rPr lang="en-US" b="1" dirty="0" err="1">
+                <a:solidFill>
+                  <a:srgbClr val="FF0000"/>
+                </a:solidFill>
+                <a:latin typeface="Calibri"/>
+                <a:ea typeface="Calibri"/>
+                <a:cs typeface="Calibri"/>
+                <a:sym typeface="Calibri"/>
+              </a:rPr>
+              <a:t>n</a:t>
+            </a:r>
+            <a:r>
+              <a:rPr lang="en-US" b="1" baseline="-25000" dirty="0" err="1">
+                <a:solidFill>
+                  <a:srgbClr val="FF0000"/>
+                </a:solidFill>
+                <a:latin typeface="Calibri"/>
+                <a:ea typeface="Calibri"/>
+                <a:cs typeface="Calibri"/>
+                <a:sym typeface="Calibri"/>
+              </a:rPr>
+              <a:t>i</a:t>
+            </a:r>
+            <a:r>
+              <a:rPr lang="en-US" b="1" dirty="0">
+                <a:solidFill>
+                  <a:srgbClr val="FF0000"/>
+                </a:solidFill>
+                <a:latin typeface="Calibri"/>
+                <a:ea typeface="Calibri"/>
+                <a:cs typeface="Calibri"/>
+                <a:sym typeface="Calibri"/>
+              </a:rPr>
+              <a:t>-m</a:t>
+            </a:r>
+            <a:r>
+              <a:rPr lang="en-US" b="1" baseline="-25000" dirty="0">
+                <a:solidFill>
+                  <a:srgbClr val="FF0000"/>
+                </a:solidFill>
+                <a:latin typeface="Calibri"/>
+                <a:ea typeface="Calibri"/>
+                <a:cs typeface="Calibri"/>
+                <a:sym typeface="Calibri"/>
+              </a:rPr>
+              <a:t>i</a:t>
+            </a:r>
+            <a:r>
+              <a:rPr lang="en-US" b="1" dirty="0">
+                <a:solidFill>
+                  <a:srgbClr val="FF0000"/>
+                </a:solidFill>
+                <a:latin typeface="Calibri"/>
+                <a:ea typeface="Calibri"/>
+                <a:cs typeface="Calibri"/>
+                <a:sym typeface="Calibri"/>
+              </a:rPr>
+              <a:t>)</a:t>
+            </a:r>
+            <a:r>
+              <a:rPr lang="en-US" b="1" baseline="30000" dirty="0">
+                <a:solidFill>
+                  <a:srgbClr val="FF0000"/>
+                </a:solidFill>
+                <a:latin typeface="Calibri"/>
+                <a:ea typeface="Calibri"/>
+                <a:cs typeface="Calibri"/>
+                <a:sym typeface="Calibri"/>
+              </a:rPr>
+              <a:t>2</a:t>
+            </a:r>
+            <a:r>
+              <a:rPr lang="en-US" b="1" dirty="0">
+                <a:solidFill>
+                  <a:srgbClr val="FF0000"/>
+                </a:solidFill>
+                <a:latin typeface="Calibri"/>
+                <a:ea typeface="Calibri"/>
+                <a:cs typeface="Calibri"/>
+                <a:sym typeface="Calibri"/>
+              </a:rPr>
+              <a:t>/m</a:t>
+            </a:r>
+            <a:r>
+              <a:rPr lang="en-US" b="1" baseline="-25000" dirty="0">
+                <a:solidFill>
+                  <a:srgbClr val="FF0000"/>
+                </a:solidFill>
+                <a:latin typeface="Calibri"/>
+                <a:ea typeface="Calibri"/>
+                <a:cs typeface="Calibri"/>
+                <a:sym typeface="Calibri"/>
+              </a:rPr>
+              <a:t>i</a:t>
+            </a:r>
+            <a:r>
+              <a:rPr lang="en-US" b="1" dirty="0">
+                <a:solidFill>
+                  <a:srgbClr val="FF0000"/>
+                </a:solidFill>
+                <a:latin typeface="Calibri"/>
+                <a:ea typeface="Calibri"/>
+                <a:cs typeface="Calibri"/>
+                <a:sym typeface="Calibri"/>
+              </a:rPr>
+              <a:t>) </a:t>
+            </a:r>
+            <a:endParaRPr lang="en-US" dirty="0">
+              <a:latin typeface="Calibri"/>
+              <a:ea typeface="Calibri"/>
+              <a:cs typeface="Calibri"/>
+              <a:sym typeface="Calibri"/>
+            </a:endParaRPr>
+          </a:p>
+          <a:p>
+            <a:pPr lvl="0">
+              <a:buClr>
+                <a:schemeClr val="dk1"/>
+              </a:buClr>
+              <a:buSzPts val="1100"/>
+            </a:pPr>
+            <a:r>
+              <a:rPr lang="en-US" dirty="0">
+                <a:solidFill>
+                  <a:schemeClr val="tx1"/>
+                </a:solidFill>
+                <a:latin typeface="Calibri"/>
+                <a:ea typeface="Calibri"/>
+                <a:cs typeface="Calibri"/>
+                <a:sym typeface="Calibri"/>
+              </a:rPr>
+              <a:t>Approximate it with </a:t>
+            </a:r>
+            <a:r>
+              <a:rPr lang="en-US" b="1" i="1" dirty="0">
+                <a:solidFill>
+                  <a:srgbClr val="FF0000"/>
+                </a:solidFill>
+                <a:highlight>
+                  <a:srgbClr val="FFFFFF"/>
+                </a:highlight>
+                <a:latin typeface="Times New Roman"/>
+                <a:ea typeface="Times New Roman"/>
+                <a:cs typeface="Times New Roman"/>
+                <a:sym typeface="Times New Roman"/>
+              </a:rPr>
+              <a:t>χ</a:t>
+            </a:r>
+            <a:r>
+              <a:rPr lang="en-US" b="1" baseline="30000" dirty="0">
+                <a:solidFill>
+                  <a:srgbClr val="FF0000"/>
+                </a:solidFill>
+                <a:highlight>
+                  <a:srgbClr val="FFFFFF"/>
+                </a:highlight>
+                <a:latin typeface="Times New Roman"/>
+                <a:ea typeface="Times New Roman"/>
+                <a:cs typeface="Times New Roman"/>
+                <a:sym typeface="Times New Roman"/>
+              </a:rPr>
+              <a:t>2</a:t>
+            </a:r>
+            <a:r>
+              <a:rPr lang="en-US" dirty="0">
+                <a:solidFill>
+                  <a:schemeClr val="tx1"/>
+                </a:solidFill>
+                <a:latin typeface="Calibri"/>
+                <a:ea typeface="Calibri"/>
+                <a:cs typeface="Calibri"/>
+                <a:sym typeface="Calibri"/>
+              </a:rPr>
+              <a:t> distribution with (k − 1) degrees of freedom.</a:t>
+            </a:r>
+          </a:p>
+          <a:p>
+            <a:pPr lvl="0">
+              <a:buClr>
+                <a:schemeClr val="dk1"/>
+              </a:buClr>
+              <a:buSzPts val="1100"/>
+            </a:pPr>
+            <a:r>
+              <a:rPr lang="en-US" dirty="0">
+                <a:solidFill>
+                  <a:schemeClr val="tx1"/>
+                </a:solidFill>
+                <a:latin typeface="Calibri"/>
+                <a:ea typeface="Calibri"/>
+                <a:cs typeface="Calibri"/>
+                <a:sym typeface="Calibri"/>
+              </a:rPr>
+              <a:t>The P-value is the probability that a chi-square statistic having (k-1) degrees of freedom is more extreme than </a:t>
+            </a:r>
+            <a:r>
+              <a:rPr lang="en-US" b="1" dirty="0">
+                <a:solidFill>
+                  <a:srgbClr val="FF0000"/>
+                </a:solidFill>
+                <a:latin typeface="Calibri"/>
+                <a:ea typeface="Calibri"/>
+                <a:cs typeface="Calibri"/>
+                <a:sym typeface="Calibri"/>
+              </a:rPr>
+              <a:t>X</a:t>
+            </a:r>
+            <a:r>
+              <a:rPr lang="en-US" b="1" baseline="30000" dirty="0">
+                <a:solidFill>
+                  <a:srgbClr val="FF0000"/>
+                </a:solidFill>
+                <a:latin typeface="Calibri"/>
+                <a:ea typeface="Calibri"/>
+                <a:cs typeface="Calibri"/>
+                <a:sym typeface="Calibri"/>
+              </a:rPr>
+              <a:t>2</a:t>
+            </a:r>
+            <a:r>
+              <a:rPr lang="en-US" dirty="0">
+                <a:solidFill>
+                  <a:schemeClr val="tx1"/>
+                </a:solidFill>
+                <a:latin typeface="Calibri"/>
+                <a:ea typeface="Calibri"/>
+                <a:cs typeface="Calibri"/>
+                <a:sym typeface="Calibri"/>
+              </a:rPr>
+              <a:t>.</a:t>
+            </a:r>
+          </a:p>
+          <a:p>
+            <a:pPr lvl="0">
+              <a:buClr>
+                <a:schemeClr val="dk1"/>
+              </a:buClr>
+              <a:buSzPts val="1100"/>
+            </a:pPr>
+            <a:endParaRPr lang="en-US" dirty="0">
+              <a:solidFill>
+                <a:schemeClr val="tx1"/>
+              </a:solidFill>
+              <a:latin typeface="Calibri"/>
+              <a:ea typeface="Calibri"/>
+              <a:cs typeface="Calibri"/>
+              <a:sym typeface="Calibri"/>
+            </a:endParaRPr>
+          </a:p>
+          <a:p>
+            <a:pPr lvl="0">
+              <a:buClr>
+                <a:schemeClr val="dk1"/>
+              </a:buClr>
+              <a:buSzPts val="1100"/>
+            </a:pPr>
+            <a:endParaRPr lang="en-US" dirty="0">
+              <a:solidFill>
+                <a:schemeClr val="tx1"/>
+              </a:solidFill>
+              <a:latin typeface="Calibri"/>
+              <a:ea typeface="Calibri"/>
+              <a:cs typeface="Calibri"/>
+              <a:sym typeface="Calibri"/>
+            </a:endParaRPr>
+          </a:p>
+        </p:txBody>
+      </p:sp>
+      <p:pic>
+        <p:nvPicPr>
+          <p:cNvPr id="6" name="Picture 5">
+            <a:extLst>
+              <a:ext uri="{FF2B5EF4-FFF2-40B4-BE49-F238E27FC236}">
+                <a16:creationId xmlns:a16="http://schemas.microsoft.com/office/drawing/2014/main" id="{B3BAEE09-F65D-1041-8799-3A9172D2EDF0}"/>
+              </a:ext>
+            </a:extLst>
+          </p:cNvPr>
+          <p:cNvPicPr>
+            <a:picLocks noChangeAspect="1"/>
+          </p:cNvPicPr>
+          <p:nvPr/>
+        </p:nvPicPr>
+        <p:blipFill>
+          <a:blip r:embed="rId3" cstate="email">
+            <a:extLst>
+              <a:ext uri="{28A0092B-C50C-407E-A947-70E740481C1C}">
+                <a14:useLocalDpi xmlns:a14="http://schemas.microsoft.com/office/drawing/2010/main"/>
+              </a:ext>
+            </a:extLst>
+          </a:blip>
+          <a:stretch>
+            <a:fillRect/>
+          </a:stretch>
+        </p:blipFill>
+        <p:spPr>
+          <a:xfrm>
+            <a:off x="161549" y="4144989"/>
+            <a:ext cx="1778000" cy="736600"/>
+          </a:xfrm>
+          <a:prstGeom prst="rect">
+            <a:avLst/>
+          </a:prstGeom>
+        </p:spPr>
+      </p:pic>
+      <p:pic>
+        <p:nvPicPr>
+          <p:cNvPr id="7" name="Picture 6">
+            <a:extLst>
+              <a:ext uri="{FF2B5EF4-FFF2-40B4-BE49-F238E27FC236}">
+                <a16:creationId xmlns:a16="http://schemas.microsoft.com/office/drawing/2014/main" id="{DF13BB26-4763-1A4F-B97B-5199EC4D2646}"/>
+              </a:ext>
+            </a:extLst>
+          </p:cNvPr>
+          <p:cNvPicPr>
+            <a:picLocks noChangeAspect="1"/>
+          </p:cNvPicPr>
+          <p:nvPr/>
+        </p:nvPicPr>
+        <p:blipFill rotWithShape="1">
+          <a:blip r:embed="rId4" cstate="email">
+            <a:extLst>
+              <a:ext uri="{28A0092B-C50C-407E-A947-70E740481C1C}">
+                <a14:useLocalDpi xmlns:a14="http://schemas.microsoft.com/office/drawing/2010/main"/>
+              </a:ext>
+            </a:extLst>
+          </a:blip>
+          <a:srcRect/>
+          <a:stretch/>
+        </p:blipFill>
+        <p:spPr>
+          <a:xfrm>
+            <a:off x="9427800" y="4372442"/>
+            <a:ext cx="2170032" cy="1409260"/>
+          </a:xfrm>
+          <a:prstGeom prst="rect">
+            <a:avLst/>
+          </a:prstGeom>
+        </p:spPr>
+      </p:pic>
+      <p:pic>
+        <p:nvPicPr>
+          <p:cNvPr id="1026" name="Picture 2" descr="1.6 - Hypothesis Testing | STAT 462">
+            <a:extLst>
+              <a:ext uri="{FF2B5EF4-FFF2-40B4-BE49-F238E27FC236}">
+                <a16:creationId xmlns:a16="http://schemas.microsoft.com/office/drawing/2014/main" id="{1B2A0F67-1909-EB43-885B-368BD5BEBA56}"/>
+              </a:ext>
+            </a:extLst>
+          </p:cNvPr>
+          <p:cNvPicPr>
+            <a:picLocks noChangeAspect="1" noChangeArrowheads="1"/>
+          </p:cNvPicPr>
+          <p:nvPr/>
+        </p:nvPicPr>
+        <p:blipFill>
+          <a:blip r:embed="rId5" cstate="email">
+            <a:extLst>
+              <a:ext uri="{28A0092B-C50C-407E-A947-70E740481C1C}">
+                <a14:useLocalDpi xmlns:a14="http://schemas.microsoft.com/office/drawing/2010/main"/>
+              </a:ext>
+            </a:extLst>
+          </a:blip>
+          <a:srcRect/>
+          <a:stretch>
+            <a:fillRect/>
+          </a:stretch>
+        </p:blipFill>
+        <p:spPr bwMode="auto">
+          <a:xfrm>
+            <a:off x="9754092" y="523220"/>
+            <a:ext cx="1768396" cy="1547347"/>
+          </a:xfrm>
+          <a:prstGeom prst="rect">
+            <a:avLst/>
+          </a:prstGeom>
+          <a:noFill/>
+          <a:extLst>
+            <a:ext uri="{909E8E84-426E-40DD-AFC4-6F175D3DCCD1}">
+              <a14:hiddenFill xmlns:a14="http://schemas.microsoft.com/office/drawing/2010/main">
+                <a:solidFill>
+                  <a:srgbClr val="FFFFFF"/>
+                </a:solidFill>
+              </a14:hiddenFill>
+            </a:ext>
+          </a:extLst>
+        </p:spPr>
+      </p:pic>
+      <p:pic>
+        <p:nvPicPr>
+          <p:cNvPr id="1028" name="Picture 4" descr="t-test">
+            <a:extLst>
+              <a:ext uri="{FF2B5EF4-FFF2-40B4-BE49-F238E27FC236}">
+                <a16:creationId xmlns:a16="http://schemas.microsoft.com/office/drawing/2014/main" id="{5AF12945-FA0D-A34F-BAC0-A70D6B5C88FA}"/>
+              </a:ext>
+            </a:extLst>
+          </p:cNvPr>
+          <p:cNvPicPr>
+            <a:picLocks noChangeAspect="1" noChangeArrowheads="1"/>
+          </p:cNvPicPr>
+          <p:nvPr/>
+        </p:nvPicPr>
+        <p:blipFill>
+          <a:blip r:embed="rId6">
+            <a:extLst>
+              <a:ext uri="{28A0092B-C50C-407E-A947-70E740481C1C}">
+                <a14:useLocalDpi xmlns:a14="http://schemas.microsoft.com/office/drawing/2010/main"/>
+              </a:ext>
+            </a:extLst>
+          </a:blip>
+          <a:srcRect/>
+          <a:stretch>
+            <a:fillRect/>
+          </a:stretch>
+        </p:blipFill>
+        <p:spPr bwMode="auto">
+          <a:xfrm>
+            <a:off x="9565140" y="2184293"/>
+            <a:ext cx="2146300" cy="1409700"/>
+          </a:xfrm>
+          <a:prstGeom prst="rect">
+            <a:avLst/>
+          </a:prstGeom>
+          <a:noFill/>
+          <a:extLst>
+            <a:ext uri="{909E8E84-426E-40DD-AFC4-6F175D3DCCD1}">
+              <a14:hiddenFill xmlns:a14="http://schemas.microsoft.com/office/drawing/2010/main">
+                <a:solidFill>
+                  <a:srgbClr val="FFFFFF"/>
+                </a:solidFill>
+              </a14:hiddenFill>
+            </a:ext>
+          </a:extLst>
+        </p:spPr>
+      </p:pic>
+    </p:spTree>
+    <p:extLst>
+      <p:ext uri="{BB962C8B-B14F-4D97-AF65-F5344CB8AC3E}">
+        <p14:creationId xmlns:p14="http://schemas.microsoft.com/office/powerpoint/2010/main" val="4183708595"/>
+      </p:ext>
+    </p:extLst>
+  </p:cSld>
+  <p:clrMapOvr>
+    <a:masterClrMapping/>
+  </p:clrMapOvr>
+</p:sld>
+</file>
+
+<file path=ppt/slides/slide5.xml><?xml version="1.0" encoding="utf-8"?>
 <p:sld xmlns:a="http://schemas.openxmlformats.org/drawingml/2006/main" xmlns:r="http://schemas.openxmlformats.org/officeDocument/2006/relationships" xmlns:p="http://schemas.openxmlformats.org/presentationml/2006/main">
   <p:cSld>
     <p:spTree>
@@ -19380,7 +20882,7 @@
 </p:sld>
 </file>
 
-<file path=ppt/slides/slide5.xml><?xml version="1.0" encoding="utf-8"?>
+<file path=ppt/slides/slide6.xml><?xml version="1.0" encoding="utf-8"?>
 <p:sld xmlns:a="http://schemas.openxmlformats.org/drawingml/2006/main" xmlns:r="http://schemas.openxmlformats.org/officeDocument/2006/relationships" xmlns:p="http://schemas.openxmlformats.org/presentationml/2006/main">
   <p:cSld>
     <p:spTree>
@@ -20117,7 +21619,7 @@
 </p:sld>
 </file>
 
-<file path=ppt/slides/slide6.xml><?xml version="1.0" encoding="utf-8"?>
+<file path=ppt/slides/slide7.xml><?xml version="1.0" encoding="utf-8"?>
 <p:sld xmlns:a="http://schemas.openxmlformats.org/drawingml/2006/main" xmlns:r="http://schemas.openxmlformats.org/officeDocument/2006/relationships" xmlns:p="http://schemas.openxmlformats.org/presentationml/2006/main">
   <p:cSld>
     <p:spTree>
@@ -20841,6 +22343,34 @@
               </a:rPr>
               <a:t>So we reject the null hypothesis (that the coin is fair).</a:t>
             </a:r>
+          </a:p>
+          <a:p>
+            <a:pPr>
+              <a:buClr>
+                <a:schemeClr val="dk1"/>
+              </a:buClr>
+              <a:buSzPts val="1100"/>
+            </a:pPr>
+            <a:endParaRPr lang="en-US" sz="1300" dirty="0">
+              <a:latin typeface="Calibri"/>
+              <a:ea typeface="Calibri"/>
+              <a:cs typeface="Calibri"/>
+              <a:sym typeface="Calibri"/>
+            </a:endParaRPr>
+          </a:p>
+          <a:p>
+            <a:pPr>
+              <a:buClr>
+                <a:schemeClr val="dk1"/>
+              </a:buClr>
+              <a:buSzPts val="1100"/>
+            </a:pPr>
+            <a:endParaRPr lang="en-US" sz="1300" dirty="0">
+              <a:latin typeface="Calibri"/>
+              <a:ea typeface="Calibri"/>
+              <a:cs typeface="Calibri"/>
+              <a:sym typeface="Calibri"/>
+            </a:endParaRPr>
           </a:p>
         </p:txBody>
       </p:sp>
@@ -21037,7 +22567,7 @@
 </p:sld>
 </file>
 
-<file path=ppt/slides/slide7.xml><?xml version="1.0" encoding="utf-8"?>
+<file path=ppt/slides/slide8.xml><?xml version="1.0" encoding="utf-8"?>
 <p:sld xmlns:a="http://schemas.openxmlformats.org/drawingml/2006/main" xmlns:r="http://schemas.openxmlformats.org/officeDocument/2006/relationships" xmlns:p="http://schemas.openxmlformats.org/presentationml/2006/main">
   <p:cSld>
     <p:spTree>
@@ -21068,8 +22598,8 @@
         </p:nvSpPr>
         <p:spPr>
           <a:xfrm>
-            <a:off x="0" y="57384"/>
-            <a:ext cx="5913120" cy="5606438"/>
+            <a:off x="0" y="57383"/>
+            <a:ext cx="5913120" cy="6800617"/>
           </a:xfrm>
           <a:prstGeom prst="rect">
             <a:avLst/>
@@ -21102,7 +22632,7 @@
                 <a:sym typeface="Calibri"/>
               </a:rPr>
             </a:br>
-            <a:endParaRPr lang="en-US" sz="1800" dirty="0">
+            <a:endParaRPr lang="en-US" sz="900" dirty="0">
               <a:latin typeface="Calibri"/>
               <a:ea typeface="Calibri"/>
               <a:cs typeface="Calibri"/>
@@ -21120,7 +22650,7 @@
             </a:r>
           </a:p>
           <a:p>
-            <a:endParaRPr lang="en-US" sz="1300" dirty="0">
+            <a:endParaRPr lang="en-US" sz="800" dirty="0">
               <a:latin typeface="Calibri"/>
               <a:cs typeface="Calibri"/>
               <a:sym typeface="Calibri"/>
@@ -21137,7 +22667,7 @@
             </a:r>
           </a:p>
           <a:p>
-            <a:endParaRPr lang="en-US" sz="1300" dirty="0">
+            <a:endParaRPr lang="en-US" sz="800" dirty="0">
               <a:latin typeface="Calibri"/>
               <a:cs typeface="Calibri"/>
               <a:sym typeface="Calibri"/>
@@ -21154,7 +22684,7 @@
             </a:r>
           </a:p>
           <a:p>
-            <a:endParaRPr lang="en-US" sz="1300" dirty="0">
+            <a:endParaRPr lang="en-US" sz="800" dirty="0">
               <a:latin typeface="Calibri"/>
               <a:cs typeface="Calibri"/>
               <a:sym typeface="Calibri"/>
@@ -21267,6 +22797,241 @@
               </a:spcAft>
               <a:buNone/>
             </a:pPr>
+            <a:endParaRPr lang="en-US" sz="800" dirty="0">
+              <a:latin typeface="Calibri"/>
+              <a:ea typeface="Calibri"/>
+              <a:cs typeface="Calibri"/>
+              <a:sym typeface="Calibri"/>
+            </a:endParaRPr>
+          </a:p>
+          <a:p>
+            <a:pPr marL="0" lvl="0" indent="0" algn="l" rtl="0">
+              <a:spcBef>
+                <a:spcPts val="0"/>
+              </a:spcBef>
+              <a:spcAft>
+                <a:spcPts val="0"/>
+              </a:spcAft>
+              <a:buNone/>
+            </a:pPr>
+            <a:r>
+              <a:rPr lang="en-US" sz="1300" dirty="0">
+                <a:latin typeface="Calibri"/>
+                <a:ea typeface="Calibri"/>
+                <a:cs typeface="Calibri"/>
+                <a:sym typeface="Calibri"/>
+              </a:rPr>
+              <a:t>To calculate t-test we assume values 1 for heads and -1 for tails.</a:t>
+            </a:r>
+          </a:p>
+          <a:p>
+            <a:pPr lvl="0"/>
+            <a:r>
+              <a:rPr lang="en-US" sz="1300" dirty="0">
+                <a:latin typeface="Calibri"/>
+                <a:ea typeface="Calibri"/>
+                <a:cs typeface="Calibri"/>
+                <a:sym typeface="Calibri"/>
+              </a:rPr>
+              <a:t>Then suppose N=100, H=60, T=40</a:t>
+            </a:r>
+          </a:p>
+          <a:p>
+            <a:pPr marL="0" lvl="0" indent="0" algn="l" rtl="0">
+              <a:spcBef>
+                <a:spcPts val="0"/>
+              </a:spcBef>
+              <a:spcAft>
+                <a:spcPts val="0"/>
+              </a:spcAft>
+              <a:buNone/>
+            </a:pPr>
+            <a:r>
+              <a:rPr lang="en-US" sz="1300" dirty="0">
+                <a:latin typeface="Calibri"/>
+                <a:ea typeface="Calibri"/>
+                <a:cs typeface="Calibri"/>
+                <a:sym typeface="Calibri"/>
+              </a:rPr>
+              <a:t>   Sample Mean X = (H – T)/100 = 20/100 = 0.2</a:t>
+            </a:r>
+          </a:p>
+          <a:p>
+            <a:pPr marL="0" lvl="0" indent="0" algn="l" rtl="0">
+              <a:spcBef>
+                <a:spcPts val="0"/>
+              </a:spcBef>
+              <a:spcAft>
+                <a:spcPts val="0"/>
+              </a:spcAft>
+              <a:buNone/>
+            </a:pPr>
+            <a:r>
+              <a:rPr lang="en-US" sz="1300" dirty="0">
+                <a:latin typeface="Calibri"/>
+                <a:ea typeface="Calibri"/>
+                <a:cs typeface="Calibri"/>
+                <a:sym typeface="Calibri"/>
+              </a:rPr>
+              <a:t>   Expected mean = N/2 – N/2 = 0</a:t>
+            </a:r>
+          </a:p>
+          <a:p>
+            <a:pPr marL="0" lvl="0" indent="0" algn="l" rtl="0">
+              <a:spcBef>
+                <a:spcPts val="0"/>
+              </a:spcBef>
+              <a:spcAft>
+                <a:spcPts val="0"/>
+              </a:spcAft>
+              <a:buNone/>
+            </a:pPr>
+            <a:r>
+              <a:rPr lang="en-US" sz="1300" dirty="0">
+                <a:latin typeface="Calibri"/>
+                <a:ea typeface="Calibri"/>
+                <a:cs typeface="Calibri"/>
+                <a:sym typeface="Calibri"/>
+              </a:rPr>
+              <a:t>   Degrees of Freedom = N-1 = 99</a:t>
+            </a:r>
+          </a:p>
+          <a:p>
+            <a:pPr marL="0" lvl="0" indent="0" algn="l" rtl="0">
+              <a:spcBef>
+                <a:spcPts val="0"/>
+              </a:spcBef>
+              <a:spcAft>
+                <a:spcPts val="0"/>
+              </a:spcAft>
+              <a:buNone/>
+            </a:pPr>
+            <a:r>
+              <a:rPr lang="en-US" sz="1300" dirty="0">
+                <a:latin typeface="Calibri"/>
+                <a:ea typeface="Calibri"/>
+                <a:cs typeface="Calibri"/>
+                <a:sym typeface="Calibri"/>
+              </a:rPr>
+              <a:t>   Sample Variance:</a:t>
+            </a:r>
+          </a:p>
+          <a:p>
+            <a:pPr lvl="0"/>
+            <a:r>
+              <a:rPr lang="en-US" sz="1300" dirty="0">
+                <a:latin typeface="Calibri"/>
+                <a:ea typeface="Calibri"/>
+                <a:cs typeface="Calibri"/>
+                <a:sym typeface="Calibri"/>
+              </a:rPr>
+              <a:t>         S</a:t>
+            </a:r>
+            <a:r>
+              <a:rPr lang="en-US" sz="1300" baseline="30000" dirty="0">
+                <a:latin typeface="Calibri"/>
+                <a:ea typeface="Calibri"/>
+                <a:cs typeface="Calibri"/>
+                <a:sym typeface="Calibri"/>
+              </a:rPr>
+              <a:t>2</a:t>
+            </a:r>
+            <a:r>
+              <a:rPr lang="en-US" sz="1300" dirty="0">
+                <a:latin typeface="Calibri"/>
+                <a:ea typeface="Calibri"/>
+                <a:cs typeface="Calibri"/>
+                <a:sym typeface="Calibri"/>
+              </a:rPr>
+              <a:t> = (1/99) *  ( 60*(1-0.2)</a:t>
+            </a:r>
+            <a:r>
+              <a:rPr lang="en-US" sz="1300" baseline="30000" dirty="0">
+                <a:latin typeface="Calibri"/>
+                <a:ea typeface="Calibri"/>
+                <a:cs typeface="Calibri"/>
+                <a:sym typeface="Calibri"/>
+              </a:rPr>
+              <a:t>2</a:t>
+            </a:r>
+            <a:r>
+              <a:rPr lang="en-US" sz="1300" dirty="0">
+                <a:latin typeface="Calibri"/>
+                <a:ea typeface="Calibri"/>
+                <a:cs typeface="Calibri"/>
+                <a:sym typeface="Calibri"/>
+              </a:rPr>
+              <a:t> + 40*(-1-0.2)</a:t>
+            </a:r>
+            <a:r>
+              <a:rPr lang="en-US" sz="1300" baseline="30000" dirty="0">
+                <a:latin typeface="Calibri"/>
+                <a:ea typeface="Calibri"/>
+                <a:cs typeface="Calibri"/>
+                <a:sym typeface="Calibri"/>
+              </a:rPr>
+              <a:t>2</a:t>
+            </a:r>
+            <a:r>
+              <a:rPr lang="en-US" sz="1300" dirty="0">
+                <a:latin typeface="Calibri"/>
+                <a:ea typeface="Calibri"/>
+                <a:cs typeface="Calibri"/>
+                <a:sym typeface="Calibri"/>
+              </a:rPr>
+              <a:t> )  = 0.969</a:t>
+            </a:r>
+          </a:p>
+          <a:p>
+            <a:pPr lvl="0"/>
+            <a:r>
+              <a:rPr lang="en-US" sz="1300" dirty="0">
+                <a:latin typeface="Calibri"/>
+                <a:ea typeface="Calibri"/>
+                <a:cs typeface="Calibri"/>
+                <a:sym typeface="Calibri"/>
+              </a:rPr>
+              <a:t>   Sample Standard Deviation:</a:t>
+            </a:r>
+          </a:p>
+          <a:p>
+            <a:pPr lvl="0"/>
+            <a:r>
+              <a:rPr lang="en-US" sz="1300" dirty="0">
+                <a:latin typeface="Calibri"/>
+                <a:ea typeface="Calibri"/>
+                <a:cs typeface="Calibri"/>
+                <a:sym typeface="Calibri"/>
+              </a:rPr>
+              <a:t>        S = sqrt(0.9696) = 0.9847</a:t>
+            </a:r>
+          </a:p>
+          <a:p>
+            <a:pPr lvl="0"/>
+            <a:r>
+              <a:rPr lang="en-US" sz="1300" dirty="0">
+                <a:latin typeface="Calibri"/>
+                <a:ea typeface="Calibri"/>
+                <a:cs typeface="Calibri"/>
+                <a:sym typeface="Calibri"/>
+              </a:rPr>
+              <a:t>   t-statistics:</a:t>
+            </a:r>
+          </a:p>
+          <a:p>
+            <a:pPr lvl="0"/>
+            <a:r>
+              <a:rPr lang="en-US" sz="1300" dirty="0">
+                <a:latin typeface="Calibri"/>
+                <a:ea typeface="Calibri"/>
+                <a:cs typeface="Calibri"/>
+                <a:sym typeface="Calibri"/>
+              </a:rPr>
+              <a:t>        (0.2– 0) / (0.9847 / 10) = 2.031</a:t>
+            </a:r>
+          </a:p>
+          <a:p>
+            <a:pPr lvl="0"/>
             <a:endParaRPr lang="en-US" sz="1300" dirty="0">
               <a:latin typeface="Calibri"/>
               <a:ea typeface="Calibri"/>
@@ -21275,15 +23040,7 @@
             </a:endParaRPr>
           </a:p>
           <a:p>
-            <a:pPr marL="0" lvl="0" indent="0" algn="l" rtl="0">
-              <a:spcBef>
-                <a:spcPts val="0"/>
-              </a:spcBef>
-              <a:spcAft>
-                <a:spcPts val="0"/>
-              </a:spcAft>
-              <a:buNone/>
-            </a:pPr>
+            <a:pPr lvl="0"/>
             <a:r>
               <a:rPr lang="en-US" sz="1300" dirty="0">
                 <a:latin typeface="Calibri"/>
@@ -21291,7 +23048,7 @@
                 <a:cs typeface="Calibri"/>
                 <a:sym typeface="Calibri"/>
               </a:rPr>
-              <a:t>To calculate t-test we assume values 1 for heads and -1 for tails.</a:t>
+              <a:t>Note: for two-sided t-test with 100 degrees of freedom and P-value 0.05</a:t>
             </a:r>
           </a:p>
           <a:p>
@@ -21303,19 +23060,11 @@
                 <a:cs typeface="Calibri"/>
                 <a:sym typeface="Calibri"/>
               </a:rPr>
-              <a:t>Then suppose N=100, H=60, T=40</a:t>
-            </a:r>
-          </a:p>
-          <a:p>
-            <a:pPr marL="0" lvl="0" indent="0" algn="l" rtl="0">
-              <a:spcBef>
-                <a:spcPts val="0"/>
-              </a:spcBef>
-              <a:spcAft>
-                <a:spcPts val="0"/>
-              </a:spcAft>
-              <a:buNone/>
-            </a:pPr>
+              <a:t>we have (from t-test table): 1.984</a:t>
+            </a:r>
+          </a:p>
+          <a:p>
+            <a:pPr lvl="0"/>
             <a:r>
               <a:rPr lang="en-US" sz="1300" dirty="0">
                 <a:latin typeface="Calibri"/>
@@ -21323,19 +23072,20 @@
                 <a:cs typeface="Calibri"/>
                 <a:sym typeface="Calibri"/>
               </a:rPr>
-              <a:t>   Sample Mean X = (H – T)/100 = 20/100 = 0.2</a:t>
-            </a:r>
-          </a:p>
-          <a:p>
-            <a:pPr marL="0" lvl="0" indent="0" algn="l" rtl="0">
-              <a:spcBef>
-                <a:spcPts val="0"/>
-              </a:spcBef>
-              <a:spcAft>
-                <a:spcPts val="0"/>
-              </a:spcAft>
-              <a:buNone/>
-            </a:pPr>
+              <a:t>Our t-statistics is 2.031, it is more extreme, so we reject the null hypothesis</a:t>
+            </a:r>
+          </a:p>
+          <a:p>
+            <a:pPr lvl="0"/>
+            <a:endParaRPr lang="en-US" sz="1300" dirty="0">
+              <a:latin typeface="Calibri"/>
+              <a:ea typeface="Calibri"/>
+              <a:cs typeface="Calibri"/>
+              <a:sym typeface="Calibri"/>
+            </a:endParaRPr>
+          </a:p>
+          <a:p>
+            <a:pPr lvl="0"/>
             <a:r>
               <a:rPr lang="en-US" sz="1300" dirty="0">
                 <a:latin typeface="Calibri"/>
@@ -21343,142 +23093,116 @@
                 <a:cs typeface="Calibri"/>
                 <a:sym typeface="Calibri"/>
               </a:rPr>
-              <a:t>   Expected mean = N/2 – N/2 = 0</a:t>
-            </a:r>
-          </a:p>
-          <a:p>
-            <a:pPr marL="0" lvl="0" indent="0" algn="l" rtl="0">
-              <a:spcBef>
-                <a:spcPts val="0"/>
-              </a:spcBef>
-              <a:spcAft>
-                <a:spcPts val="0"/>
-              </a:spcAft>
-              <a:buNone/>
-            </a:pPr>
-            <a:r>
-              <a:rPr lang="en-US" sz="1300" dirty="0">
-                <a:latin typeface="Calibri"/>
-                <a:ea typeface="Calibri"/>
-                <a:cs typeface="Calibri"/>
-                <a:sym typeface="Calibri"/>
-              </a:rPr>
-              <a:t>   Sample Variance:</a:t>
+              <a:t>In Python:</a:t>
             </a:r>
           </a:p>
           <a:p>
             <a:pPr lvl="0"/>
             <a:r>
-              <a:rPr lang="en-US" sz="1300" dirty="0">
-                <a:latin typeface="Calibri"/>
-                <a:ea typeface="Calibri"/>
-                <a:cs typeface="Calibri"/>
-                <a:sym typeface="Calibri"/>
-              </a:rPr>
-              <a:t>         S</a:t>
-            </a:r>
-            <a:r>
-              <a:rPr lang="en-US" sz="1300" baseline="30000" dirty="0">
-                <a:latin typeface="Calibri"/>
-                <a:ea typeface="Calibri"/>
-                <a:cs typeface="Calibri"/>
-                <a:sym typeface="Calibri"/>
-              </a:rPr>
-              <a:t>2</a:t>
-            </a:r>
-            <a:r>
-              <a:rPr lang="en-US" sz="1300" dirty="0">
-                <a:latin typeface="Calibri"/>
-                <a:ea typeface="Calibri"/>
-                <a:cs typeface="Calibri"/>
-                <a:sym typeface="Calibri"/>
-              </a:rPr>
-              <a:t> = (1/99) *  ( 60*(1-0.2)</a:t>
-            </a:r>
-            <a:r>
-              <a:rPr lang="en-US" sz="1300" baseline="30000" dirty="0">
-                <a:latin typeface="Calibri"/>
-                <a:ea typeface="Calibri"/>
-                <a:cs typeface="Calibri"/>
-                <a:sym typeface="Calibri"/>
-              </a:rPr>
-              <a:t>2</a:t>
-            </a:r>
-            <a:r>
-              <a:rPr lang="en-US" sz="1300" dirty="0">
-                <a:latin typeface="Calibri"/>
-                <a:ea typeface="Calibri"/>
-                <a:cs typeface="Calibri"/>
-                <a:sym typeface="Calibri"/>
-              </a:rPr>
-              <a:t> + 40*(-1-0.2)</a:t>
-            </a:r>
-            <a:r>
-              <a:rPr lang="en-US" sz="1300" baseline="30000" dirty="0">
-                <a:latin typeface="Calibri"/>
-                <a:ea typeface="Calibri"/>
-                <a:cs typeface="Calibri"/>
-                <a:sym typeface="Calibri"/>
-              </a:rPr>
-              <a:t>2</a:t>
-            </a:r>
-            <a:r>
-              <a:rPr lang="en-US" sz="1300" dirty="0">
-                <a:latin typeface="Calibri"/>
-                <a:ea typeface="Calibri"/>
-                <a:cs typeface="Calibri"/>
-                <a:sym typeface="Calibri"/>
-              </a:rPr>
-              <a:t> )  = 0.969</a:t>
+              <a:rPr lang="en-US" sz="1100" dirty="0">
+                <a:solidFill>
+                  <a:srgbClr val="0070C0"/>
+                </a:solidFill>
+                <a:latin typeface="Menlo" panose="020B0609030804020204" pitchFamily="49" charset="0"/>
+                <a:ea typeface="Menlo" panose="020B0609030804020204" pitchFamily="49" charset="0"/>
+                <a:cs typeface="Menlo" panose="020B0609030804020204" pitchFamily="49" charset="0"/>
+                <a:sym typeface="Calibri"/>
+              </a:rPr>
+              <a:t>     from </a:t>
+            </a:r>
+            <a:r>
+              <a:rPr lang="en-US" sz="1100" dirty="0" err="1">
+                <a:solidFill>
+                  <a:srgbClr val="0070C0"/>
+                </a:solidFill>
+                <a:latin typeface="Menlo" panose="020B0609030804020204" pitchFamily="49" charset="0"/>
+                <a:ea typeface="Menlo" panose="020B0609030804020204" pitchFamily="49" charset="0"/>
+                <a:cs typeface="Menlo" panose="020B0609030804020204" pitchFamily="49" charset="0"/>
+                <a:sym typeface="Calibri"/>
+              </a:rPr>
+              <a:t>scipy</a:t>
+            </a:r>
+            <a:r>
+              <a:rPr lang="en-US" sz="1100" dirty="0">
+                <a:solidFill>
+                  <a:srgbClr val="0070C0"/>
+                </a:solidFill>
+                <a:latin typeface="Menlo" panose="020B0609030804020204" pitchFamily="49" charset="0"/>
+                <a:ea typeface="Menlo" panose="020B0609030804020204" pitchFamily="49" charset="0"/>
+                <a:cs typeface="Menlo" panose="020B0609030804020204" pitchFamily="49" charset="0"/>
+                <a:sym typeface="Calibri"/>
+              </a:rPr>
+              <a:t> import stats</a:t>
             </a:r>
           </a:p>
           <a:p>
             <a:pPr lvl="0"/>
             <a:r>
-              <a:rPr lang="en-US" sz="1300" dirty="0">
-                <a:latin typeface="Calibri"/>
-                <a:ea typeface="Calibri"/>
-                <a:cs typeface="Calibri"/>
-                <a:sym typeface="Calibri"/>
-              </a:rPr>
-              <a:t>   Sample Standard Deviation:</a:t>
+              <a:rPr lang="en-US" sz="1100" dirty="0">
+                <a:solidFill>
+                  <a:srgbClr val="0070C0"/>
+                </a:solidFill>
+                <a:latin typeface="Menlo" panose="020B0609030804020204" pitchFamily="49" charset="0"/>
+                <a:ea typeface="Menlo" panose="020B0609030804020204" pitchFamily="49" charset="0"/>
+                <a:cs typeface="Menlo" panose="020B0609030804020204" pitchFamily="49" charset="0"/>
+                <a:sym typeface="Calibri"/>
+              </a:rPr>
+              <a:t>     </a:t>
+            </a:r>
+            <a:r>
+              <a:rPr lang="en-US" sz="1100" dirty="0" err="1">
+                <a:solidFill>
+                  <a:srgbClr val="0070C0"/>
+                </a:solidFill>
+                <a:latin typeface="Menlo" panose="020B0609030804020204" pitchFamily="49" charset="0"/>
+                <a:ea typeface="Menlo" panose="020B0609030804020204" pitchFamily="49" charset="0"/>
+                <a:cs typeface="Menlo" panose="020B0609030804020204" pitchFamily="49" charset="0"/>
+                <a:sym typeface="Calibri"/>
+              </a:rPr>
+              <a:t>stats.t.cdf</a:t>
+            </a:r>
+            <a:r>
+              <a:rPr lang="en-US" sz="1100" dirty="0">
+                <a:solidFill>
+                  <a:srgbClr val="0070C0"/>
+                </a:solidFill>
+                <a:latin typeface="Menlo" panose="020B0609030804020204" pitchFamily="49" charset="0"/>
+                <a:ea typeface="Menlo" panose="020B0609030804020204" pitchFamily="49" charset="0"/>
+                <a:cs typeface="Menlo" panose="020B0609030804020204" pitchFamily="49" charset="0"/>
+                <a:sym typeface="Calibri"/>
+              </a:rPr>
+              <a:t>(2.031,df=99)    </a:t>
+            </a:r>
+            <a:r>
+              <a:rPr lang="en-US" sz="1100" dirty="0">
+                <a:solidFill>
+                  <a:srgbClr val="00B050"/>
+                </a:solidFill>
+                <a:latin typeface="Menlo" panose="020B0609030804020204" pitchFamily="49" charset="0"/>
+                <a:ea typeface="Menlo" panose="020B0609030804020204" pitchFamily="49" charset="0"/>
+                <a:cs typeface="Menlo" panose="020B0609030804020204" pitchFamily="49" charset="0"/>
+                <a:sym typeface="Calibri"/>
+              </a:rPr>
+              <a:t># 0.9775 , more extreme than 0.95</a:t>
             </a:r>
           </a:p>
           <a:p>
             <a:pPr lvl="0"/>
-            <a:r>
-              <a:rPr lang="en-US" sz="1300" dirty="0">
-                <a:latin typeface="Calibri"/>
-                <a:ea typeface="Calibri"/>
-                <a:cs typeface="Calibri"/>
-                <a:sym typeface="Calibri"/>
-              </a:rPr>
-              <a:t>        S = sqrt(0.9696) = 0.9847</a:t>
-            </a:r>
+            <a:endParaRPr lang="en-US" sz="1300" dirty="0">
+              <a:latin typeface="Calibri"/>
+              <a:ea typeface="Calibri"/>
+              <a:cs typeface="Calibri"/>
+              <a:sym typeface="Calibri"/>
+            </a:endParaRPr>
           </a:p>
           <a:p>
             <a:pPr lvl="0"/>
-            <a:r>
-              <a:rPr lang="en-US" sz="1300" dirty="0">
-                <a:latin typeface="Calibri"/>
-                <a:ea typeface="Calibri"/>
-                <a:cs typeface="Calibri"/>
-                <a:sym typeface="Calibri"/>
-              </a:rPr>
-              <a:t>   t-statistics:</a:t>
-            </a:r>
-          </a:p>
-          <a:p>
-            <a:pPr lvl="0"/>
-            <a:r>
-              <a:rPr lang="en-US" sz="1300" dirty="0">
-                <a:latin typeface="Calibri"/>
-                <a:ea typeface="Calibri"/>
-                <a:cs typeface="Calibri"/>
-                <a:sym typeface="Calibri"/>
-              </a:rPr>
-              <a:t>        (0.2– 0) / (0.9847 / 10) = 2.031</a:t>
-            </a:r>
+            <a:endParaRPr lang="en-US" sz="1300" dirty="0">
+              <a:latin typeface="Calibri"/>
+              <a:ea typeface="Calibri"/>
+              <a:cs typeface="Calibri"/>
+              <a:sym typeface="Calibri"/>
+            </a:endParaRPr>
           </a:p>
           <a:p>
             <a:pPr lvl="0"/>
@@ -22007,7 +23731,7 @@
     </p:spTree>
     <p:extLst>
       <p:ext uri="{BB962C8B-B14F-4D97-AF65-F5344CB8AC3E}">
-        <p14:creationId xmlns:p14="http://schemas.microsoft.com/office/powerpoint/2010/main" val="588195948"/>
+        <p14:creationId xmlns:p14="http://schemas.microsoft.com/office/powerpoint/2010/main" val="3379995339"/>
       </p:ext>
     </p:extLst>
   </p:cSld>
@@ -22017,7 +23741,7 @@
 </p:sld>
 </file>
 
-<file path=ppt/slides/slide8.xml><?xml version="1.0" encoding="utf-8"?>
+<file path=ppt/slides/slide9.xml><?xml version="1.0" encoding="utf-8"?>
 <p:sld xmlns:a="http://schemas.openxmlformats.org/drawingml/2006/main" xmlns:r="http://schemas.openxmlformats.org/officeDocument/2006/relationships" xmlns:p="http://schemas.openxmlformats.org/presentationml/2006/main">
   <p:cSld>
     <p:spTree>
@@ -22855,7 +24579,7 @@
         <p:spPr>
           <a:xfrm>
             <a:off x="92765" y="106017"/>
-            <a:ext cx="4108174" cy="400110"/>
+            <a:ext cx="5416784" cy="400110"/>
           </a:xfrm>
           <a:prstGeom prst="rect">
             <a:avLst/>
@@ -22870,7 +24594,7 @@
           <a:p>
             <a:r>
               <a:rPr lang="en-US" sz="2000" b="1" dirty="0"/>
-              <a:t>Hypothesis Testing Examples</a:t>
+              <a:t>More Hypothesis Testing Examples</a:t>
             </a:r>
           </a:p>
         </p:txBody>
@@ -22879,272 +24603,6 @@
     <p:extLst>
       <p:ext uri="{BB962C8B-B14F-4D97-AF65-F5344CB8AC3E}">
         <p14:creationId xmlns:p14="http://schemas.microsoft.com/office/powerpoint/2010/main" val="3916857598"/>
-      </p:ext>
-    </p:extLst>
-  </p:cSld>
-  <p:clrMapOvr>
-    <a:masterClrMapping/>
-  </p:clrMapOvr>
-</p:sld>
-</file>
-
-<file path=ppt/slides/slide9.xml><?xml version="1.0" encoding="utf-8"?>
-<p:sld xmlns:a="http://schemas.openxmlformats.org/drawingml/2006/main" xmlns:r="http://schemas.openxmlformats.org/officeDocument/2006/relationships" xmlns:p="http://schemas.openxmlformats.org/presentationml/2006/main">
-  <p:cSld>
-    <p:spTree>
-      <p:nvGrpSpPr>
-        <p:cNvPr id="1" name=""/>
-        <p:cNvGrpSpPr/>
-        <p:nvPr/>
-      </p:nvGrpSpPr>
-      <p:grpSpPr>
-        <a:xfrm>
-          <a:off x="0" y="0"/>
-          <a:ext cx="0" cy="0"/>
-          <a:chOff x="0" y="0"/>
-          <a:chExt cx="0" cy="0"/>
-        </a:xfrm>
-      </p:grpSpPr>
-      <p:sp>
-        <p:nvSpPr>
-          <p:cNvPr id="4" name="TextBox 3">
-            <a:extLst>
-              <a:ext uri="{FF2B5EF4-FFF2-40B4-BE49-F238E27FC236}">
-                <a16:creationId xmlns:a16="http://schemas.microsoft.com/office/drawing/2014/main" id="{E07D7F6D-CF60-394D-8EB7-E0C54261DB23}"/>
-              </a:ext>
-            </a:extLst>
-          </p:cNvPr>
-          <p:cNvSpPr txBox="1"/>
-          <p:nvPr/>
-        </p:nvSpPr>
-        <p:spPr>
-          <a:xfrm>
-            <a:off x="1431236" y="516838"/>
-            <a:ext cx="9488556" cy="5909310"/>
-          </a:xfrm>
-          <a:prstGeom prst="rect">
-            <a:avLst/>
-          </a:prstGeom>
-          <a:noFill/>
-        </p:spPr>
-        <p:txBody>
-          <a:bodyPr wrap="square" rtlCol="0">
-            <a:spAutoFit/>
-          </a:bodyPr>
-          <a:lstStyle/>
-          <a:p>
-            <a:r>
-              <a:rPr lang="en-US" sz="2400" b="1" dirty="0"/>
-              <a:t>The dichotomous use of p-value in statistical inference </a:t>
-            </a:r>
-          </a:p>
-          <a:p>
-            <a:r>
-              <a:rPr lang="en-US" sz="2400" b="1" dirty="0"/>
-              <a:t>is worse than useless. </a:t>
-            </a:r>
-          </a:p>
-          <a:p>
-            <a:endParaRPr lang="en-US" dirty="0"/>
-          </a:p>
-          <a:p>
-            <a:pPr marL="342900" indent="-342900">
-              <a:buFont typeface="+mj-lt"/>
-              <a:buAutoNum type="arabicPeriod"/>
-            </a:pPr>
-            <a:r>
-              <a:rPr lang="en-US" sz="1600" dirty="0"/>
-              <a:t>p-value is a conditional probability, i.e., </a:t>
-            </a:r>
-            <a:r>
-              <a:rPr lang="en-US" sz="1600" b="1" dirty="0" err="1">
-                <a:solidFill>
-                  <a:srgbClr val="0070C0"/>
-                </a:solidFill>
-              </a:rPr>
-              <a:t>Pr</a:t>
-            </a:r>
-            <a:r>
-              <a:rPr lang="en-US" sz="1600" b="1" dirty="0">
-                <a:solidFill>
-                  <a:srgbClr val="0070C0"/>
-                </a:solidFill>
-              </a:rPr>
-              <a:t>( Data | H0 is true) </a:t>
-            </a:r>
-            <a:br>
-              <a:rPr lang="en-US" sz="1600" dirty="0"/>
-            </a:br>
-            <a:r>
-              <a:rPr lang="en-US" sz="1600" dirty="0"/>
-              <a:t>but what we want to know is </a:t>
-            </a:r>
-            <a:r>
-              <a:rPr lang="en-US" sz="1600" b="1" dirty="0" err="1">
-                <a:solidFill>
-                  <a:srgbClr val="0070C0"/>
-                </a:solidFill>
-              </a:rPr>
-              <a:t>Pr</a:t>
-            </a:r>
-            <a:r>
-              <a:rPr lang="en-US" sz="1600" b="1" dirty="0">
-                <a:solidFill>
-                  <a:srgbClr val="0070C0"/>
-                </a:solidFill>
-              </a:rPr>
-              <a:t>(H0 is true | Data)</a:t>
-            </a:r>
-          </a:p>
-          <a:p>
-            <a:pPr marL="342900" indent="-342900">
-              <a:buFont typeface="+mj-lt"/>
-              <a:buAutoNum type="arabicPeriod"/>
-            </a:pPr>
-            <a:r>
-              <a:rPr lang="en-US" sz="1600" dirty="0"/>
-              <a:t>the calculation of p-value depends on at least three things: </a:t>
-            </a:r>
-            <a:br>
-              <a:rPr lang="en-US" sz="1600" dirty="0"/>
-            </a:br>
-            <a:r>
-              <a:rPr lang="en-US" sz="1600" dirty="0"/>
-              <a:t> - the effect size (e.g., difference of two means due to two treatment, odds ratio, etc.), </a:t>
-            </a:r>
-            <a:br>
-              <a:rPr lang="en-US" sz="1600" dirty="0"/>
-            </a:br>
-            <a:r>
-              <a:rPr lang="en-US" sz="1600" dirty="0"/>
-              <a:t> - the uncertainty level of the point estimate (e.g., standard deviation), </a:t>
-            </a:r>
-            <a:br>
-              <a:rPr lang="en-US" sz="1600" dirty="0"/>
-            </a:br>
-            <a:r>
-              <a:rPr lang="en-US" sz="1600" dirty="0"/>
-              <a:t> - and sample size</a:t>
-            </a:r>
-          </a:p>
-          <a:p>
-            <a:pPr marL="342900" indent="-342900">
-              <a:buFont typeface="+mj-lt"/>
-              <a:buAutoNum type="arabicPeriod"/>
-            </a:pPr>
-            <a:r>
-              <a:rPr lang="en-US" sz="1600" dirty="0"/>
-              <a:t>it is a standard result in statistics theory that, based on one set of sample data we cannot tell the observed effect </a:t>
-            </a:r>
-            <a:r>
-              <a:rPr lang="en-US" sz="1600" b="1" dirty="0">
-                <a:solidFill>
-                  <a:srgbClr val="0070C0"/>
-                </a:solidFill>
-              </a:rPr>
-              <a:t>size is due to treatment or due to random variation </a:t>
-            </a:r>
-            <a:r>
-              <a:rPr lang="en-US" sz="1600" dirty="0"/>
-              <a:t>(i.e., sampling distribution requires we repeat the same experiment many times before any confirmatory conclusion can be made)</a:t>
-            </a:r>
-          </a:p>
-          <a:p>
-            <a:pPr marL="342900" indent="-342900">
-              <a:buFont typeface="+mj-lt"/>
-              <a:buAutoNum type="arabicPeriod"/>
-            </a:pPr>
-            <a:r>
-              <a:rPr lang="en-US" sz="1600" dirty="0"/>
-              <a:t>if by nature the H0 is false (in the majority cases of real life data / research questions), p-value =0.</a:t>
-            </a:r>
-          </a:p>
-          <a:p>
-            <a:pPr marL="342900" indent="-342900">
-              <a:buFont typeface="+mj-lt"/>
-              <a:buAutoNum type="arabicPeriod"/>
-            </a:pPr>
-            <a:endParaRPr lang="en-US" sz="1600" dirty="0"/>
-          </a:p>
-          <a:p>
-            <a:r>
-              <a:rPr lang="en-US" sz="1600" b="1" dirty="0">
-                <a:solidFill>
-                  <a:srgbClr val="0070C0"/>
-                </a:solidFill>
-              </a:rPr>
-              <a:t>In summary, P-value based Null Hypothesis Significance Test (NHST) </a:t>
-            </a:r>
-          </a:p>
-          <a:p>
-            <a:r>
-              <a:rPr lang="en-US" sz="1600" b="1" dirty="0">
-                <a:solidFill>
-                  <a:srgbClr val="0070C0"/>
-                </a:solidFill>
-              </a:rPr>
-              <a:t>is logically not defensible, technically flawed and practically damaging</a:t>
-            </a:r>
-          </a:p>
-          <a:p>
-            <a:endParaRPr lang="en-US" sz="1600" dirty="0"/>
-          </a:p>
-          <a:p>
-            <a:r>
-              <a:rPr lang="en-US" sz="1600" dirty="0"/>
-              <a:t>Gang (John) </a:t>
-            </a:r>
-            <a:r>
-              <a:rPr lang="en-US" sz="1600" dirty="0" err="1"/>
-              <a:t>Xie</a:t>
-            </a:r>
-            <a:r>
-              <a:rPr lang="en-US" sz="1600" dirty="0"/>
-              <a:t>, </a:t>
-            </a:r>
-          </a:p>
-          <a:p>
-            <a:r>
-              <a:rPr lang="en-US" sz="1600" dirty="0"/>
-              <a:t>Ph.D. in Statistics, </a:t>
-            </a:r>
-          </a:p>
-          <a:p>
-            <a:r>
-              <a:rPr lang="en-US" sz="1600" dirty="0"/>
-              <a:t>Quantitative Consulting Unit in Research Office</a:t>
-            </a:r>
-          </a:p>
-          <a:p>
-            <a:endParaRPr lang="en-US" dirty="0"/>
-          </a:p>
-          <a:p>
-            <a:r>
-              <a:rPr lang="en-US" dirty="0">
-                <a:hlinkClick r:id="rId2"/>
-              </a:rPr>
-              <a:t>https://</a:t>
-            </a:r>
-            <a:r>
-              <a:rPr lang="en-US" dirty="0" err="1">
-                <a:hlinkClick r:id="rId2"/>
-              </a:rPr>
-              <a:t>www.researchgate.net</a:t>
-            </a:r>
-            <a:r>
-              <a:rPr lang="en-US" dirty="0">
-                <a:hlinkClick r:id="rId2"/>
-              </a:rPr>
-              <a:t>/post/What_is_the_relationship_between_R-squared_and_p-value_in_a_regression</a:t>
-            </a:r>
-            <a:endParaRPr lang="en-US" dirty="0"/>
-          </a:p>
-        </p:txBody>
-      </p:sp>
-    </p:spTree>
-    <p:extLst>
-      <p:ext uri="{BB962C8B-B14F-4D97-AF65-F5344CB8AC3E}">
-        <p14:creationId xmlns:p14="http://schemas.microsoft.com/office/powerpoint/2010/main" val="2666971068"/>
       </p:ext>
     </p:extLst>
   </p:cSld>

--- a/statistics_05_hypothesis_testing_p_val.pptx
+++ b/statistics_05_hypothesis_testing_p_val.pptx
@@ -5,19 +5,20 @@
     <p:sldMasterId id="2147483659" r:id="rId1"/>
   </p:sldMasterIdLst>
   <p:notesMasterIdLst>
-    <p:notesMasterId r:id="rId12"/>
+    <p:notesMasterId r:id="rId13"/>
   </p:notesMasterIdLst>
   <p:sldIdLst>
     <p:sldId id="316" r:id="rId2"/>
     <p:sldId id="258" r:id="rId3"/>
-    <p:sldId id="320" r:id="rId4"/>
-    <p:sldId id="319" r:id="rId5"/>
-    <p:sldId id="317" r:id="rId6"/>
-    <p:sldId id="318" r:id="rId7"/>
-    <p:sldId id="314" r:id="rId8"/>
-    <p:sldId id="321" r:id="rId9"/>
-    <p:sldId id="313" r:id="rId10"/>
-    <p:sldId id="294" r:id="rId11"/>
+    <p:sldId id="323" r:id="rId4"/>
+    <p:sldId id="320" r:id="rId5"/>
+    <p:sldId id="319" r:id="rId6"/>
+    <p:sldId id="317" r:id="rId7"/>
+    <p:sldId id="318" r:id="rId8"/>
+    <p:sldId id="314" r:id="rId9"/>
+    <p:sldId id="321" r:id="rId10"/>
+    <p:sldId id="313" r:id="rId11"/>
+    <p:sldId id="294" r:id="rId12"/>
   </p:sldIdLst>
   <p:sldSz cx="12192000" cy="6858000"/>
   <p:notesSz cx="6858000" cy="9144000"/>
@@ -1560,6 +1561,115 @@
   <p:cSld>
     <p:spTree>
       <p:nvGrpSpPr>
+        <p:cNvPr id="1" name="Shape 102"/>
+        <p:cNvGrpSpPr/>
+        <p:nvPr/>
+      </p:nvGrpSpPr>
+      <p:grpSpPr>
+        <a:xfrm>
+          <a:off x="0" y="0"/>
+          <a:ext cx="0" cy="0"/>
+          <a:chOff x="0" y="0"/>
+          <a:chExt cx="0" cy="0"/>
+        </a:xfrm>
+      </p:grpSpPr>
+      <p:sp>
+        <p:nvSpPr>
+          <p:cNvPr id="103" name="Google Shape;103;p3:notes"/>
+          <p:cNvSpPr txBox="1">
+            <a:spLocks noGrp="1"/>
+          </p:cNvSpPr>
+          <p:nvPr>
+            <p:ph type="body" idx="1"/>
+          </p:nvPr>
+        </p:nvSpPr>
+        <p:spPr>
+          <a:xfrm>
+            <a:off x="685800" y="4400550"/>
+            <a:ext cx="5486400" cy="3600450"/>
+          </a:xfrm>
+          <a:prstGeom prst="rect">
+            <a:avLst/>
+          </a:prstGeom>
+        </p:spPr>
+        <p:txBody>
+          <a:bodyPr spcFirstLastPara="1" wrap="square" lIns="91425" tIns="91425" rIns="91425" bIns="91425" anchor="t" anchorCtr="0">
+            <a:noAutofit/>
+          </a:bodyPr>
+          <a:lstStyle/>
+          <a:p>
+            <a:pPr marL="0" lvl="0" indent="0" algn="l" rtl="0">
+              <a:spcBef>
+                <a:spcPts val="0"/>
+              </a:spcBef>
+              <a:spcAft>
+                <a:spcPts val="0"/>
+              </a:spcAft>
+              <a:buNone/>
+            </a:pPr>
+            <a:endParaRPr/>
+          </a:p>
+        </p:txBody>
+      </p:sp>
+      <p:sp>
+        <p:nvSpPr>
+          <p:cNvPr id="104" name="Google Shape;104;p3:notes"/>
+          <p:cNvSpPr>
+            <a:spLocks noGrp="1" noRot="1" noChangeAspect="1"/>
+          </p:cNvSpPr>
+          <p:nvPr>
+            <p:ph type="sldImg" idx="2"/>
+          </p:nvPr>
+        </p:nvSpPr>
+        <p:spPr>
+          <a:xfrm>
+            <a:off x="685800" y="1143000"/>
+            <a:ext cx="5486400" cy="3086100"/>
+          </a:xfrm>
+          <a:custGeom>
+            <a:avLst/>
+            <a:gdLst/>
+            <a:ahLst/>
+            <a:cxnLst/>
+            <a:rect l="l" t="t" r="r" b="b"/>
+            <a:pathLst>
+              <a:path w="120000" h="120000" extrusionOk="0">
+                <a:moveTo>
+                  <a:pt x="0" y="0"/>
+                </a:moveTo>
+                <a:lnTo>
+                  <a:pt x="120000" y="0"/>
+                </a:lnTo>
+                <a:lnTo>
+                  <a:pt x="120000" y="120000"/>
+                </a:lnTo>
+                <a:lnTo>
+                  <a:pt x="0" y="120000"/>
+                </a:lnTo>
+                <a:close/>
+              </a:path>
+            </a:pathLst>
+          </a:custGeom>
+        </p:spPr>
+      </p:sp>
+    </p:spTree>
+    <p:extLst>
+      <p:ext uri="{BB962C8B-B14F-4D97-AF65-F5344CB8AC3E}">
+        <p14:creationId xmlns:p14="http://schemas.microsoft.com/office/powerpoint/2010/main" val="4218630179"/>
+      </p:ext>
+    </p:extLst>
+  </p:cSld>
+  <p:clrMapOvr>
+    <a:masterClrMapping/>
+  </p:clrMapOvr>
+</p:notes>
+</file>
+
+<file path=ppt/notesSlides/notesSlide3.xml><?xml version="1.0" encoding="utf-8"?>
+<p:notes xmlns:a="http://schemas.openxmlformats.org/drawingml/2006/main" xmlns:r="http://schemas.openxmlformats.org/officeDocument/2006/relationships" xmlns:p="http://schemas.openxmlformats.org/presentationml/2006/main" showMasterSp="0" showMasterPhAnim="0">
+  <p:cSld>
+    <p:spTree>
+      <p:nvGrpSpPr>
         <p:cNvPr id="1" name="Shape 110"/>
         <p:cNvGrpSpPr/>
         <p:nvPr/>
@@ -1659,7 +1769,7 @@
 </p:notes>
 </file>
 
-<file path=ppt/notesSlides/notesSlide3.xml><?xml version="1.0" encoding="utf-8"?>
+<file path=ppt/notesSlides/notesSlide4.xml><?xml version="1.0" encoding="utf-8"?>
 <p:notes xmlns:a="http://schemas.openxmlformats.org/drawingml/2006/main" xmlns:r="http://schemas.openxmlformats.org/officeDocument/2006/relationships" xmlns:p="http://schemas.openxmlformats.org/presentationml/2006/main" showMasterSp="0" showMasterPhAnim="0">
   <p:cSld>
     <p:spTree>
@@ -14661,7 +14771,7 @@
             </a:r>
             <a:r>
               <a:rPr lang="en-US" dirty="0"/>
-              <a:t>and means the probability of rejecting the null hypothesis when it is true. Most common choice for the value of alpha is 0.05.</a:t>
+              <a:t>and means the probability of rejecting the null hypothesis. Most common choice for the value of alpha is 0.05 (5%).</a:t>
             </a:r>
           </a:p>
           <a:p>
@@ -14677,15 +14787,7 @@
             </a:br>
             <a:r>
               <a:rPr lang="en-US" dirty="0"/>
-              <a:t>Select the test type and compute the test statistic. There are many different types of tests in statistics like t-</a:t>
-            </a:r>
-            <a:r>
-              <a:rPr lang="en-US" dirty="0" err="1"/>
-              <a:t>test,Z</a:t>
-            </a:r>
-            <a:r>
-              <a:rPr lang="en-US" dirty="0"/>
-              <a:t>-</a:t>
+              <a:t>Select the test type and compute the test statistic. There are many different types of tests in statistics like t-test, z-</a:t>
             </a:r>
             <a:r>
               <a:rPr lang="en-US" dirty="0" err="1"/>
@@ -14749,7 +14851,7 @@
         </p:blipFill>
         <p:spPr>
           <a:xfrm>
-            <a:off x="6591869" y="1064526"/>
+            <a:off x="6897907" y="77448"/>
             <a:ext cx="5199797" cy="3425588"/>
           </a:xfrm>
           <a:prstGeom prst="rect">
@@ -14759,10 +14861,10 @@
       </p:pic>
       <p:sp>
         <p:nvSpPr>
-          <p:cNvPr id="6" name="Google Shape;108;p15">
+          <p:cNvPr id="7" name="Google Shape;108;p15">
             <a:extLst>
               <a:ext uri="{FF2B5EF4-FFF2-40B4-BE49-F238E27FC236}">
-                <a16:creationId xmlns:a16="http://schemas.microsoft.com/office/drawing/2014/main" id="{76B7BDFB-13D9-7047-B830-394DFFB32328}"/>
+                <a16:creationId xmlns:a16="http://schemas.microsoft.com/office/drawing/2014/main" id="{FB73B722-BA02-8744-ADB4-189F6123868C}"/>
               </a:ext>
             </a:extLst>
           </p:cNvPr>
@@ -14771,8 +14873,8 @@
         </p:nvSpPr>
         <p:spPr>
           <a:xfrm>
-            <a:off x="7008565" y="4692162"/>
-            <a:ext cx="4582062" cy="742415"/>
+            <a:off x="7148945" y="3631172"/>
+            <a:ext cx="4865634" cy="1188630"/>
           </a:xfrm>
           <a:prstGeom prst="rect">
             <a:avLst/>
@@ -14801,18 +14903,57 @@
               <a:buNone/>
             </a:pPr>
             <a:r>
-              <a:rPr lang="en-US" sz="1600" dirty="0">
-                <a:solidFill>
-                  <a:schemeClr val="dk1"/>
-                </a:solidFill>
-                <a:latin typeface="Calibri"/>
-                <a:ea typeface="Calibri"/>
-                <a:cs typeface="Calibri"/>
-                <a:sym typeface="Calibri"/>
-              </a:rPr>
-              <a:t>Type I error - false rejection of the null hypothesis</a:t>
-            </a:r>
-            <a:endParaRPr sz="1600" dirty="0">
+              <a:rPr lang="en-US" b="1" dirty="0">
+                <a:solidFill>
+                  <a:schemeClr val="dk1"/>
+                </a:solidFill>
+                <a:latin typeface="Calibri"/>
+                <a:ea typeface="Calibri"/>
+                <a:cs typeface="Calibri"/>
+                <a:sym typeface="Calibri"/>
+              </a:rPr>
+              <a:t>Two types of Errors:</a:t>
+            </a:r>
+          </a:p>
+          <a:p>
+            <a:pPr marL="285750" marR="0" lvl="0" indent="-285750" algn="l" rtl="0">
+              <a:lnSpc>
+                <a:spcPct val="100000"/>
+              </a:lnSpc>
+              <a:spcBef>
+                <a:spcPts val="0"/>
+              </a:spcBef>
+              <a:spcAft>
+                <a:spcPts val="0"/>
+              </a:spcAft>
+              <a:buFont typeface="Arial" panose="020B0604020202020204" pitchFamily="34" charset="0"/>
+              <a:buChar char="•"/>
+            </a:pPr>
+            <a:r>
+              <a:rPr lang="en-US" b="1" dirty="0">
+                <a:solidFill>
+                  <a:srgbClr val="FF0000"/>
+                </a:solidFill>
+                <a:latin typeface="Calibri"/>
+                <a:ea typeface="Calibri"/>
+                <a:cs typeface="Calibri"/>
+                <a:sym typeface="Calibri"/>
+              </a:rPr>
+              <a:t>Type I error</a:t>
+            </a:r>
+            <a:r>
+              <a:rPr lang="en-US" dirty="0">
+                <a:solidFill>
+                  <a:schemeClr val="dk1"/>
+                </a:solidFill>
+                <a:latin typeface="Calibri"/>
+                <a:ea typeface="Calibri"/>
+                <a:cs typeface="Calibri"/>
+                <a:sym typeface="Calibri"/>
+              </a:rPr>
+              <a:t> - false rejection of the null hypothesis ("false-positive" conclusion, innocent person convicted)</a:t>
+            </a:r>
+            <a:endParaRPr dirty="0">
               <a:solidFill>
                 <a:schemeClr val="dk1"/>
               </a:solidFill>
@@ -14823,31 +14964,35 @@
             </a:endParaRPr>
           </a:p>
           <a:p>
-            <a:pPr marL="0" marR="0" lvl="0" indent="0" algn="l" rtl="0">
-              <a:lnSpc>
-                <a:spcPct val="100000"/>
-              </a:lnSpc>
-              <a:spcBef>
-                <a:spcPts val="0"/>
-              </a:spcBef>
-              <a:spcAft>
-                <a:spcPts val="0"/>
-              </a:spcAft>
-              <a:buNone/>
+            <a:pPr marL="285750" lvl="0" indent="-285750">
+              <a:buFont typeface="Arial" panose="020B0604020202020204" pitchFamily="34" charset="0"/>
+              <a:buChar char="•"/>
             </a:pPr>
             <a:r>
-              <a:rPr lang="en-US" sz="1600" dirty="0">
-                <a:solidFill>
-                  <a:schemeClr val="dk1"/>
-                </a:solidFill>
-                <a:latin typeface="Calibri"/>
-                <a:ea typeface="Calibri"/>
-                <a:cs typeface="Calibri"/>
-                <a:sym typeface="Calibri"/>
-              </a:rPr>
-              <a:t>Type II error - false acceptance of the null hypothesis</a:t>
-            </a:r>
-            <a:endParaRPr sz="1600" dirty="0">
+              <a:rPr lang="en-US" b="1" dirty="0">
+                <a:solidFill>
+                  <a:srgbClr val="FF0000"/>
+                </a:solidFill>
+                <a:latin typeface="Calibri"/>
+                <a:ea typeface="Calibri"/>
+                <a:cs typeface="Calibri"/>
+                <a:sym typeface="Calibri"/>
+              </a:rPr>
+              <a:t>Type II error</a:t>
+            </a:r>
+            <a:r>
+              <a:rPr lang="en-US" dirty="0">
+                <a:solidFill>
+                  <a:schemeClr val="dk1"/>
+                </a:solidFill>
+                <a:latin typeface="Calibri"/>
+                <a:ea typeface="Calibri"/>
+                <a:cs typeface="Calibri"/>
+                <a:sym typeface="Calibri"/>
+              </a:rPr>
+              <a:t> - false acceptance of the null hypothesis ("false negative" conclusion, guilty person not convicted)</a:t>
+            </a:r>
+            <a:endParaRPr dirty="0">
               <a:solidFill>
                 <a:schemeClr val="dk1"/>
               </a:solidFill>
@@ -14859,6 +15004,382 @@
           </a:p>
         </p:txBody>
       </p:sp>
+      <p:graphicFrame>
+        <p:nvGraphicFramePr>
+          <p:cNvPr id="8" name="Google Shape;109;p15">
+            <a:extLst>
+              <a:ext uri="{FF2B5EF4-FFF2-40B4-BE49-F238E27FC236}">
+                <a16:creationId xmlns:a16="http://schemas.microsoft.com/office/drawing/2014/main" id="{7F724635-B194-9243-8576-8553DA3EE5A4}"/>
+              </a:ext>
+            </a:extLst>
+          </p:cNvPr>
+          <p:cNvGraphicFramePr/>
+          <p:nvPr>
+            <p:extLst>
+              <p:ext uri="{D42A27DB-BD31-4B8C-83A1-F6EECF244321}">
+                <p14:modId xmlns:p14="http://schemas.microsoft.com/office/powerpoint/2010/main" val="494948554"/>
+              </p:ext>
+            </p:extLst>
+          </p:nvPr>
+        </p:nvGraphicFramePr>
+        <p:xfrm>
+          <a:off x="7475157" y="5201223"/>
+          <a:ext cx="4213209" cy="1188630"/>
+        </p:xfrm>
+        <a:graphic>
+          <a:graphicData uri="http://schemas.openxmlformats.org/drawingml/2006/table">
+            <a:tbl>
+              <a:tblPr>
+                <a:noFill/>
+                <a:tableStyleId>{B1618C5A-BF4F-44D7-ADB2-C5301EF81F8A}</a:tableStyleId>
+              </a:tblPr>
+              <a:tblGrid>
+                <a:gridCol w="1404403">
+                  <a:extLst>
+                    <a:ext uri="{9D8B030D-6E8A-4147-A177-3AD203B41FA5}">
+                      <a16:colId xmlns:a16="http://schemas.microsoft.com/office/drawing/2014/main" val="20000"/>
+                    </a:ext>
+                  </a:extLst>
+                </a:gridCol>
+                <a:gridCol w="1404403">
+                  <a:extLst>
+                    <a:ext uri="{9D8B030D-6E8A-4147-A177-3AD203B41FA5}">
+                      <a16:colId xmlns:a16="http://schemas.microsoft.com/office/drawing/2014/main" val="20001"/>
+                    </a:ext>
+                  </a:extLst>
+                </a:gridCol>
+                <a:gridCol w="1404403">
+                  <a:extLst>
+                    <a:ext uri="{9D8B030D-6E8A-4147-A177-3AD203B41FA5}">
+                      <a16:colId xmlns:a16="http://schemas.microsoft.com/office/drawing/2014/main" val="20002"/>
+                    </a:ext>
+                  </a:extLst>
+                </a:gridCol>
+              </a:tblGrid>
+              <a:tr h="340128">
+                <a:tc>
+                  <a:txBody>
+                    <a:bodyPr/>
+                    <a:lstStyle/>
+                    <a:p>
+                      <a:pPr marL="0" lvl="0" indent="0" algn="l" rtl="0">
+                        <a:spcBef>
+                          <a:spcPts val="0"/>
+                        </a:spcBef>
+                        <a:spcAft>
+                          <a:spcPts val="0"/>
+                        </a:spcAft>
+                        <a:buNone/>
+                      </a:pPr>
+                      <a:endParaRPr sz="1400" dirty="0"/>
+                    </a:p>
+                  </a:txBody>
+                  <a:tcPr marL="91425" marR="91425" marT="91425" marB="91425">
+                    <a:solidFill>
+                      <a:schemeClr val="accent6">
+                        <a:lumMod val="20000"/>
+                        <a:lumOff val="80000"/>
+                      </a:schemeClr>
+                    </a:solidFill>
+                  </a:tcPr>
+                </a:tc>
+                <a:tc>
+                  <a:txBody>
+                    <a:bodyPr/>
+                    <a:lstStyle/>
+                    <a:p>
+                      <a:pPr marL="0" lvl="0" indent="0" algn="l" rtl="0">
+                        <a:spcBef>
+                          <a:spcPts val="0"/>
+                        </a:spcBef>
+                        <a:spcAft>
+                          <a:spcPts val="0"/>
+                        </a:spcAft>
+                        <a:buNone/>
+                      </a:pPr>
+                      <a:r>
+                        <a:rPr lang="en-US" sz="1400" dirty="0"/>
+                        <a:t>Accept H</a:t>
+                      </a:r>
+                      <a:r>
+                        <a:rPr lang="en-US" sz="1400" baseline="-25000" dirty="0"/>
+                        <a:t>0</a:t>
+                      </a:r>
+                      <a:endParaRPr sz="1400" dirty="0"/>
+                    </a:p>
+                  </a:txBody>
+                  <a:tcPr marL="91425" marR="91425" marT="91425" marB="91425">
+                    <a:solidFill>
+                      <a:schemeClr val="accent6">
+                        <a:lumMod val="20000"/>
+                        <a:lumOff val="80000"/>
+                      </a:schemeClr>
+                    </a:solidFill>
+                  </a:tcPr>
+                </a:tc>
+                <a:tc>
+                  <a:txBody>
+                    <a:bodyPr/>
+                    <a:lstStyle/>
+                    <a:p>
+                      <a:pPr marL="0" lvl="0" indent="0" algn="l" rtl="0">
+                        <a:spcBef>
+                          <a:spcPts val="0"/>
+                        </a:spcBef>
+                        <a:spcAft>
+                          <a:spcPts val="0"/>
+                        </a:spcAft>
+                        <a:buClr>
+                          <a:schemeClr val="dk1"/>
+                        </a:buClr>
+                        <a:buSzPts val="1100"/>
+                        <a:buFont typeface="Arial"/>
+                        <a:buNone/>
+                      </a:pPr>
+                      <a:r>
+                        <a:rPr lang="en-US" sz="1400" dirty="0">
+                          <a:solidFill>
+                            <a:schemeClr val="dk1"/>
+                          </a:solidFill>
+                        </a:rPr>
+                        <a:t>Reject </a:t>
+                      </a:r>
+                      <a:r>
+                        <a:rPr lang="en-US" sz="1400" dirty="0"/>
+                        <a:t>H</a:t>
+                      </a:r>
+                      <a:r>
+                        <a:rPr lang="en-US" sz="1400" baseline="-25000" dirty="0"/>
+                        <a:t>0</a:t>
+                      </a:r>
+                      <a:endParaRPr sz="1400" dirty="0"/>
+                    </a:p>
+                  </a:txBody>
+                  <a:tcPr marL="91425" marR="91425" marT="91425" marB="91425">
+                    <a:solidFill>
+                      <a:schemeClr val="accent6">
+                        <a:lumMod val="20000"/>
+                        <a:lumOff val="80000"/>
+                      </a:schemeClr>
+                    </a:solidFill>
+                  </a:tcPr>
+                </a:tc>
+                <a:extLst>
+                  <a:ext uri="{0D108BD9-81ED-4DB2-BD59-A6C34878D82A}">
+                    <a16:rowId xmlns:a16="http://schemas.microsoft.com/office/drawing/2014/main" val="10000"/>
+                  </a:ext>
+                </a:extLst>
+              </a:tr>
+              <a:tr h="346597">
+                <a:tc>
+                  <a:txBody>
+                    <a:bodyPr/>
+                    <a:lstStyle/>
+                    <a:p>
+                      <a:pPr marL="0" lvl="0" indent="0" algn="l" rtl="0">
+                        <a:spcBef>
+                          <a:spcPts val="0"/>
+                        </a:spcBef>
+                        <a:spcAft>
+                          <a:spcPts val="0"/>
+                        </a:spcAft>
+                        <a:buNone/>
+                      </a:pPr>
+                      <a:r>
+                        <a:rPr lang="en-US" sz="1400" dirty="0"/>
+                        <a:t>H</a:t>
+                      </a:r>
+                      <a:r>
+                        <a:rPr lang="en-US" sz="1400" baseline="-25000" dirty="0"/>
+                        <a:t>0</a:t>
+                      </a:r>
+                      <a:r>
+                        <a:rPr lang="en-US" sz="1400" dirty="0"/>
+                        <a:t> is True</a:t>
+                      </a:r>
+                      <a:endParaRPr sz="1400" dirty="0"/>
+                    </a:p>
+                  </a:txBody>
+                  <a:tcPr marL="91425" marR="91425" marT="91425" marB="91425">
+                    <a:solidFill>
+                      <a:schemeClr val="accent6">
+                        <a:lumMod val="20000"/>
+                        <a:lumOff val="80000"/>
+                      </a:schemeClr>
+                    </a:solidFill>
+                  </a:tcPr>
+                </a:tc>
+                <a:tc>
+                  <a:txBody>
+                    <a:bodyPr/>
+                    <a:lstStyle/>
+                    <a:p>
+                      <a:pPr marL="0" lvl="0" indent="0" algn="l" rtl="0">
+                        <a:spcBef>
+                          <a:spcPts val="0"/>
+                        </a:spcBef>
+                        <a:spcAft>
+                          <a:spcPts val="0"/>
+                        </a:spcAft>
+                        <a:buNone/>
+                      </a:pPr>
+                      <a:r>
+                        <a:rPr lang="en-US" sz="1400" dirty="0"/>
+                        <a:t>Correct</a:t>
+                      </a:r>
+                      <a:endParaRPr sz="1400" dirty="0"/>
+                    </a:p>
+                  </a:txBody>
+                  <a:tcPr marL="91425" marR="91425" marT="91425" marB="91425">
+                    <a:solidFill>
+                      <a:srgbClr val="C9DAF8"/>
+                    </a:solidFill>
+                  </a:tcPr>
+                </a:tc>
+                <a:tc>
+                  <a:txBody>
+                    <a:bodyPr/>
+                    <a:lstStyle/>
+                    <a:p>
+                      <a:pPr marL="0" lvl="0" indent="0" algn="l" rtl="0">
+                        <a:spcBef>
+                          <a:spcPts val="0"/>
+                        </a:spcBef>
+                        <a:spcAft>
+                          <a:spcPts val="0"/>
+                        </a:spcAft>
+                        <a:buNone/>
+                      </a:pPr>
+                      <a:r>
+                        <a:rPr lang="en-US" sz="1400" b="1" dirty="0">
+                          <a:solidFill>
+                            <a:srgbClr val="FF0000"/>
+                          </a:solidFill>
+                        </a:rPr>
+                        <a:t>type I error</a:t>
+                      </a:r>
+                      <a:endParaRPr sz="1400" b="1" dirty="0">
+                        <a:solidFill>
+                          <a:srgbClr val="FF0000"/>
+                        </a:solidFill>
+                      </a:endParaRPr>
+                    </a:p>
+                  </a:txBody>
+                  <a:tcPr marL="91425" marR="91425" marT="91425" marB="91425"/>
+                </a:tc>
+                <a:extLst>
+                  <a:ext uri="{0D108BD9-81ED-4DB2-BD59-A6C34878D82A}">
+                    <a16:rowId xmlns:a16="http://schemas.microsoft.com/office/drawing/2014/main" val="10001"/>
+                  </a:ext>
+                </a:extLst>
+              </a:tr>
+              <a:tr h="346597">
+                <a:tc>
+                  <a:txBody>
+                    <a:bodyPr/>
+                    <a:lstStyle/>
+                    <a:p>
+                      <a:pPr marL="0" lvl="0" indent="0" algn="l" rtl="0">
+                        <a:spcBef>
+                          <a:spcPts val="0"/>
+                        </a:spcBef>
+                        <a:spcAft>
+                          <a:spcPts val="0"/>
+                        </a:spcAft>
+                        <a:buNone/>
+                      </a:pPr>
+                      <a:r>
+                        <a:rPr lang="en-US" sz="1400" dirty="0"/>
+                        <a:t>H</a:t>
+                      </a:r>
+                      <a:r>
+                        <a:rPr lang="en-US" sz="1400" baseline="-25000" dirty="0"/>
+                        <a:t>0</a:t>
+                      </a:r>
+                      <a:r>
+                        <a:rPr lang="en-US" sz="1400" dirty="0"/>
+                        <a:t> is False</a:t>
+                      </a:r>
+                      <a:endParaRPr sz="1400" dirty="0"/>
+                    </a:p>
+                  </a:txBody>
+                  <a:tcPr marL="91425" marR="91425" marT="91425" marB="91425">
+                    <a:solidFill>
+                      <a:schemeClr val="accent6">
+                        <a:lumMod val="20000"/>
+                        <a:lumOff val="80000"/>
+                      </a:schemeClr>
+                    </a:solidFill>
+                  </a:tcPr>
+                </a:tc>
+                <a:tc>
+                  <a:txBody>
+                    <a:bodyPr/>
+                    <a:lstStyle/>
+                    <a:p>
+                      <a:pPr marL="0" lvl="0" indent="0" algn="l" rtl="0">
+                        <a:spcBef>
+                          <a:spcPts val="0"/>
+                        </a:spcBef>
+                        <a:spcAft>
+                          <a:spcPts val="0"/>
+                        </a:spcAft>
+                        <a:buNone/>
+                      </a:pPr>
+                      <a:r>
+                        <a:rPr lang="en-US" sz="1400" b="1" dirty="0">
+                          <a:solidFill>
+                            <a:srgbClr val="FF0000"/>
+                          </a:solidFill>
+                        </a:rPr>
+                        <a:t>type II error</a:t>
+                      </a:r>
+                      <a:endParaRPr sz="1400" b="1" dirty="0">
+                        <a:solidFill>
+                          <a:srgbClr val="FF0000"/>
+                        </a:solidFill>
+                      </a:endParaRPr>
+                    </a:p>
+                  </a:txBody>
+                  <a:tcPr marL="91425" marR="91425" marT="91425" marB="91425"/>
+                </a:tc>
+                <a:tc>
+                  <a:txBody>
+                    <a:bodyPr/>
+                    <a:lstStyle/>
+                    <a:p>
+                      <a:pPr marL="0" lvl="0" indent="0" algn="l" rtl="0">
+                        <a:spcBef>
+                          <a:spcPts val="0"/>
+                        </a:spcBef>
+                        <a:spcAft>
+                          <a:spcPts val="0"/>
+                        </a:spcAft>
+                        <a:buNone/>
+                      </a:pPr>
+                      <a:r>
+                        <a:rPr lang="en-US" sz="1400" dirty="0"/>
+                        <a:t>Correct </a:t>
+                      </a:r>
+                      <a:endParaRPr sz="1400" dirty="0"/>
+                    </a:p>
+                  </a:txBody>
+                  <a:tcPr marL="91425" marR="91425" marT="91425" marB="91425">
+                    <a:solidFill>
+                      <a:srgbClr val="C9DAF8"/>
+                    </a:solidFill>
+                  </a:tcPr>
+                </a:tc>
+                <a:extLst>
+                  <a:ext uri="{0D108BD9-81ED-4DB2-BD59-A6C34878D82A}">
+                    <a16:rowId xmlns:a16="http://schemas.microsoft.com/office/drawing/2014/main" val="10002"/>
+                  </a:ext>
+                </a:extLst>
+              </a:tr>
+            </a:tbl>
+          </a:graphicData>
+        </a:graphic>
+      </p:graphicFrame>
     </p:spTree>
     <p:extLst>
       <p:ext uri="{BB962C8B-B14F-4D97-AF65-F5344CB8AC3E}">
@@ -14873,6 +15394,877 @@
 </file>
 
 <file path=ppt/slides/slide10.xml><?xml version="1.0" encoding="utf-8"?>
+<p:sld xmlns:a="http://schemas.openxmlformats.org/drawingml/2006/main" xmlns:r="http://schemas.openxmlformats.org/officeDocument/2006/relationships" xmlns:p="http://schemas.openxmlformats.org/presentationml/2006/main">
+  <p:cSld>
+    <p:spTree>
+      <p:nvGrpSpPr>
+        <p:cNvPr id="1" name="Shape 113"/>
+        <p:cNvGrpSpPr/>
+        <p:nvPr/>
+      </p:nvGrpSpPr>
+      <p:grpSpPr>
+        <a:xfrm>
+          <a:off x="0" y="0"/>
+          <a:ext cx="0" cy="0"/>
+          <a:chOff x="0" y="0"/>
+          <a:chExt cx="0" cy="0"/>
+        </a:xfrm>
+      </p:grpSpPr>
+      <p:sp>
+        <p:nvSpPr>
+          <p:cNvPr id="114" name="Google Shape;114;p16"/>
+          <p:cNvSpPr txBox="1"/>
+          <p:nvPr/>
+        </p:nvSpPr>
+        <p:spPr>
+          <a:xfrm>
+            <a:off x="383974" y="551503"/>
+            <a:ext cx="4877100" cy="3147000"/>
+          </a:xfrm>
+          <a:prstGeom prst="rect">
+            <a:avLst/>
+          </a:prstGeom>
+          <a:noFill/>
+          <a:ln>
+            <a:noFill/>
+          </a:ln>
+        </p:spPr>
+        <p:txBody>
+          <a:bodyPr spcFirstLastPara="1" wrap="square" lIns="91425" tIns="91425" rIns="91425" bIns="91425" anchor="t" anchorCtr="0">
+            <a:noAutofit/>
+          </a:bodyPr>
+          <a:lstStyle/>
+          <a:p>
+            <a:pPr marL="0" lvl="0" indent="0" algn="l" rtl="0">
+              <a:spcBef>
+                <a:spcPts val="0"/>
+              </a:spcBef>
+              <a:spcAft>
+                <a:spcPts val="0"/>
+              </a:spcAft>
+              <a:buNone/>
+            </a:pPr>
+            <a:r>
+              <a:rPr lang="en-US" dirty="0">
+                <a:latin typeface="Calibri"/>
+                <a:ea typeface="Calibri"/>
+                <a:cs typeface="Calibri"/>
+                <a:sym typeface="Calibri"/>
+              </a:rPr>
+              <a:t>Problem1:</a:t>
+            </a:r>
+            <a:endParaRPr dirty="0">
+              <a:latin typeface="Calibri"/>
+              <a:ea typeface="Calibri"/>
+              <a:cs typeface="Calibri"/>
+              <a:sym typeface="Calibri"/>
+            </a:endParaRPr>
+          </a:p>
+          <a:p>
+            <a:pPr marL="0" lvl="0" indent="0" algn="l" rtl="0">
+              <a:spcBef>
+                <a:spcPts val="0"/>
+              </a:spcBef>
+              <a:spcAft>
+                <a:spcPts val="0"/>
+              </a:spcAft>
+              <a:buNone/>
+            </a:pPr>
+            <a:endParaRPr dirty="0">
+              <a:latin typeface="Calibri"/>
+              <a:ea typeface="Calibri"/>
+              <a:cs typeface="Calibri"/>
+              <a:sym typeface="Calibri"/>
+            </a:endParaRPr>
+          </a:p>
+          <a:p>
+            <a:pPr marL="0" lvl="0" indent="0" algn="l" rtl="0">
+              <a:spcBef>
+                <a:spcPts val="0"/>
+              </a:spcBef>
+              <a:spcAft>
+                <a:spcPts val="0"/>
+              </a:spcAft>
+              <a:buNone/>
+            </a:pPr>
+            <a:r>
+              <a:rPr lang="en-US" dirty="0">
+                <a:latin typeface="Calibri"/>
+                <a:ea typeface="Calibri"/>
+                <a:cs typeface="Calibri"/>
+                <a:sym typeface="Calibri"/>
+              </a:rPr>
+              <a:t>Given: women's heights are normally distributed with the mean 65″ and standard deviation of 3.5″</a:t>
+            </a:r>
+            <a:endParaRPr dirty="0">
+              <a:latin typeface="Calibri"/>
+              <a:ea typeface="Calibri"/>
+              <a:cs typeface="Calibri"/>
+              <a:sym typeface="Calibri"/>
+            </a:endParaRPr>
+          </a:p>
+          <a:p>
+            <a:pPr marL="0" lvl="0" indent="0" algn="l" rtl="0">
+              <a:spcBef>
+                <a:spcPts val="0"/>
+              </a:spcBef>
+              <a:spcAft>
+                <a:spcPts val="0"/>
+              </a:spcAft>
+              <a:buNone/>
+            </a:pPr>
+            <a:r>
+              <a:rPr lang="en-US" dirty="0">
+                <a:latin typeface="Calibri"/>
+                <a:ea typeface="Calibri"/>
+                <a:cs typeface="Calibri"/>
+                <a:sym typeface="Calibri"/>
+              </a:rPr>
+              <a:t>Question: What is the probability of finding a random sample of 50 women with a mean height of 70″.</a:t>
+            </a:r>
+            <a:endParaRPr dirty="0">
+              <a:latin typeface="Calibri"/>
+              <a:ea typeface="Calibri"/>
+              <a:cs typeface="Calibri"/>
+              <a:sym typeface="Calibri"/>
+            </a:endParaRPr>
+          </a:p>
+          <a:p>
+            <a:pPr marL="0" lvl="0" indent="0" algn="l" rtl="0">
+              <a:spcBef>
+                <a:spcPts val="0"/>
+              </a:spcBef>
+              <a:spcAft>
+                <a:spcPts val="0"/>
+              </a:spcAft>
+              <a:buNone/>
+            </a:pPr>
+            <a:endParaRPr dirty="0">
+              <a:latin typeface="Calibri"/>
+              <a:ea typeface="Calibri"/>
+              <a:cs typeface="Calibri"/>
+              <a:sym typeface="Calibri"/>
+            </a:endParaRPr>
+          </a:p>
+          <a:p>
+            <a:pPr marL="0" lvl="0" indent="0" algn="l" rtl="0">
+              <a:spcBef>
+                <a:spcPts val="0"/>
+              </a:spcBef>
+              <a:spcAft>
+                <a:spcPts val="0"/>
+              </a:spcAft>
+              <a:buNone/>
+            </a:pPr>
+            <a:r>
+              <a:rPr lang="en-US" dirty="0">
+                <a:latin typeface="Calibri"/>
+                <a:ea typeface="Calibri"/>
+                <a:cs typeface="Calibri"/>
+                <a:sym typeface="Calibri"/>
+              </a:rPr>
+              <a:t>To answer, let's estimate the </a:t>
+            </a:r>
+            <a:r>
+              <a:rPr lang="en-US" b="1" dirty="0">
+                <a:solidFill>
+                  <a:srgbClr val="0000FF"/>
+                </a:solidFill>
+                <a:latin typeface="Calibri"/>
+                <a:ea typeface="Calibri"/>
+                <a:cs typeface="Calibri"/>
+                <a:sym typeface="Calibri"/>
+              </a:rPr>
+              <a:t>z-score</a:t>
+            </a:r>
+            <a:r>
+              <a:rPr lang="en-US" dirty="0">
+                <a:latin typeface="Calibri"/>
+                <a:ea typeface="Calibri"/>
+                <a:cs typeface="Calibri"/>
+                <a:sym typeface="Calibri"/>
+              </a:rPr>
+              <a:t>:</a:t>
+            </a:r>
+            <a:endParaRPr dirty="0">
+              <a:latin typeface="Calibri"/>
+              <a:ea typeface="Calibri"/>
+              <a:cs typeface="Calibri"/>
+              <a:sym typeface="Calibri"/>
+            </a:endParaRPr>
+          </a:p>
+          <a:p>
+            <a:pPr marL="0" lvl="0" indent="0" algn="l" rtl="0">
+              <a:spcBef>
+                <a:spcPts val="0"/>
+              </a:spcBef>
+              <a:spcAft>
+                <a:spcPts val="0"/>
+              </a:spcAft>
+              <a:buClr>
+                <a:schemeClr val="dk1"/>
+              </a:buClr>
+              <a:buSzPts val="1100"/>
+              <a:buFont typeface="Arial"/>
+              <a:buNone/>
+            </a:pPr>
+            <a:r>
+              <a:rPr lang="en-US" dirty="0">
+                <a:latin typeface="Calibri"/>
+                <a:ea typeface="Calibri"/>
+                <a:cs typeface="Calibri"/>
+                <a:sym typeface="Calibri"/>
+              </a:rPr>
+              <a:t>z = (x – </a:t>
+            </a:r>
+            <a:r>
+              <a:rPr lang="en-US" dirty="0" err="1">
+                <a:latin typeface="Calibri"/>
+                <a:ea typeface="Calibri"/>
+                <a:cs typeface="Calibri"/>
+                <a:sym typeface="Calibri"/>
+              </a:rPr>
+              <a:t>μ</a:t>
+            </a:r>
+            <a:r>
+              <a:rPr lang="en-US" dirty="0">
+                <a:latin typeface="Calibri"/>
+                <a:ea typeface="Calibri"/>
+                <a:cs typeface="Calibri"/>
+                <a:sym typeface="Calibri"/>
+              </a:rPr>
+              <a:t>) / (</a:t>
+            </a:r>
+            <a:r>
+              <a:rPr lang="en-US" dirty="0" err="1">
+                <a:latin typeface="Calibri"/>
+                <a:ea typeface="Calibri"/>
+                <a:cs typeface="Calibri"/>
+                <a:sym typeface="Calibri"/>
+              </a:rPr>
+              <a:t>σ</a:t>
+            </a:r>
+            <a:r>
+              <a:rPr lang="en-US" dirty="0">
+                <a:latin typeface="Calibri"/>
+                <a:ea typeface="Calibri"/>
+                <a:cs typeface="Calibri"/>
+                <a:sym typeface="Calibri"/>
+              </a:rPr>
+              <a:t> / √n) = (70 – 65) / (3.5/√50) = 5 / 0.495 = 10.1</a:t>
+            </a:r>
+            <a:endParaRPr dirty="0">
+              <a:latin typeface="Calibri"/>
+              <a:ea typeface="Calibri"/>
+              <a:cs typeface="Calibri"/>
+              <a:sym typeface="Calibri"/>
+            </a:endParaRPr>
+          </a:p>
+          <a:p>
+            <a:pPr marL="0" lvl="0" indent="0" algn="l" rtl="0">
+              <a:spcBef>
+                <a:spcPts val="0"/>
+              </a:spcBef>
+              <a:spcAft>
+                <a:spcPts val="0"/>
+              </a:spcAft>
+              <a:buNone/>
+            </a:pPr>
+            <a:endParaRPr dirty="0">
+              <a:latin typeface="Calibri"/>
+              <a:ea typeface="Calibri"/>
+              <a:cs typeface="Calibri"/>
+              <a:sym typeface="Calibri"/>
+            </a:endParaRPr>
+          </a:p>
+          <a:p>
+            <a:pPr marL="0" lvl="0" indent="0" algn="l" rtl="0">
+              <a:spcBef>
+                <a:spcPts val="0"/>
+              </a:spcBef>
+              <a:spcAft>
+                <a:spcPts val="0"/>
+              </a:spcAft>
+              <a:buNone/>
+            </a:pPr>
+            <a:r>
+              <a:rPr lang="en-US" dirty="0">
+                <a:latin typeface="Calibri"/>
+                <a:ea typeface="Calibri"/>
+                <a:cs typeface="Calibri"/>
+                <a:sym typeface="Calibri"/>
+              </a:rPr>
+              <a:t>We know that 99% of values fall within 3</a:t>
+            </a:r>
+            <a:r>
+              <a:rPr lang="en-US" dirty="0">
+                <a:solidFill>
+                  <a:schemeClr val="dk1"/>
+                </a:solidFill>
+                <a:latin typeface="Calibri"/>
+                <a:ea typeface="Calibri"/>
+                <a:cs typeface="Calibri"/>
+                <a:sym typeface="Calibri"/>
+              </a:rPr>
+              <a:t>σ</a:t>
+            </a:r>
+            <a:r>
+              <a:rPr lang="en-US" dirty="0">
+                <a:latin typeface="Calibri"/>
+                <a:ea typeface="Calibri"/>
+                <a:cs typeface="Calibri"/>
+                <a:sym typeface="Calibri"/>
+              </a:rPr>
+              <a:t> (68,  95,  99.7 rule).</a:t>
+            </a:r>
+            <a:endParaRPr dirty="0">
+              <a:latin typeface="Calibri"/>
+              <a:ea typeface="Calibri"/>
+              <a:cs typeface="Calibri"/>
+              <a:sym typeface="Calibri"/>
+            </a:endParaRPr>
+          </a:p>
+          <a:p>
+            <a:pPr marL="0" lvl="0" indent="0" algn="l" rtl="0">
+              <a:spcBef>
+                <a:spcPts val="0"/>
+              </a:spcBef>
+              <a:spcAft>
+                <a:spcPts val="0"/>
+              </a:spcAft>
+              <a:buNone/>
+            </a:pPr>
+            <a:r>
+              <a:rPr lang="en-US" dirty="0">
+                <a:latin typeface="Calibri"/>
+                <a:ea typeface="Calibri"/>
+                <a:cs typeface="Calibri"/>
+                <a:sym typeface="Calibri"/>
+              </a:rPr>
+              <a:t>We have z-score = 10, which is much more than 3.</a:t>
+            </a:r>
+            <a:endParaRPr dirty="0">
+              <a:latin typeface="Calibri"/>
+              <a:ea typeface="Calibri"/>
+              <a:cs typeface="Calibri"/>
+              <a:sym typeface="Calibri"/>
+            </a:endParaRPr>
+          </a:p>
+          <a:p>
+            <a:pPr marL="0" lvl="0" indent="0" algn="l" rtl="0">
+              <a:spcBef>
+                <a:spcPts val="0"/>
+              </a:spcBef>
+              <a:spcAft>
+                <a:spcPts val="0"/>
+              </a:spcAft>
+              <a:buNone/>
+            </a:pPr>
+            <a:r>
+              <a:rPr lang="en-US" dirty="0">
+                <a:latin typeface="Calibri"/>
+                <a:ea typeface="Calibri"/>
+                <a:cs typeface="Calibri"/>
+                <a:sym typeface="Calibri"/>
+              </a:rPr>
+              <a:t>So the probability </a:t>
+            </a:r>
+            <a:r>
+              <a:rPr lang="en-US" dirty="0">
+                <a:solidFill>
+                  <a:schemeClr val="dk1"/>
+                </a:solidFill>
+                <a:latin typeface="Calibri"/>
+                <a:ea typeface="Calibri"/>
+                <a:cs typeface="Calibri"/>
+                <a:sym typeface="Calibri"/>
+              </a:rPr>
+              <a:t>that any sample of 50 women will have a mean height of 70″ will be much-much less than 1%.</a:t>
+            </a:r>
+            <a:endParaRPr dirty="0">
+              <a:latin typeface="Calibri"/>
+              <a:ea typeface="Calibri"/>
+              <a:cs typeface="Calibri"/>
+              <a:sym typeface="Calibri"/>
+            </a:endParaRPr>
+          </a:p>
+        </p:txBody>
+      </p:sp>
+      <p:sp>
+        <p:nvSpPr>
+          <p:cNvPr id="115" name="Google Shape;115;p16"/>
+          <p:cNvSpPr txBox="1"/>
+          <p:nvPr/>
+        </p:nvSpPr>
+        <p:spPr>
+          <a:xfrm>
+            <a:off x="6067250" y="551503"/>
+            <a:ext cx="5707800" cy="5944200"/>
+          </a:xfrm>
+          <a:prstGeom prst="rect">
+            <a:avLst/>
+          </a:prstGeom>
+          <a:noFill/>
+          <a:ln>
+            <a:noFill/>
+          </a:ln>
+        </p:spPr>
+        <p:txBody>
+          <a:bodyPr spcFirstLastPara="1" wrap="square" lIns="91425" tIns="91425" rIns="91425" bIns="91425" anchor="t" anchorCtr="0">
+            <a:noAutofit/>
+          </a:bodyPr>
+          <a:lstStyle/>
+          <a:p>
+            <a:pPr marL="0" lvl="0" indent="0" algn="l" rtl="0">
+              <a:spcBef>
+                <a:spcPts val="0"/>
+              </a:spcBef>
+              <a:spcAft>
+                <a:spcPts val="0"/>
+              </a:spcAft>
+              <a:buNone/>
+            </a:pPr>
+            <a:r>
+              <a:rPr lang="en-US">
+                <a:latin typeface="Calibri"/>
+                <a:ea typeface="Calibri"/>
+                <a:cs typeface="Calibri"/>
+                <a:sym typeface="Calibri"/>
+              </a:rPr>
+              <a:t>Problem 2:</a:t>
+            </a:r>
+            <a:endParaRPr>
+              <a:latin typeface="Calibri"/>
+              <a:ea typeface="Calibri"/>
+              <a:cs typeface="Calibri"/>
+              <a:sym typeface="Calibri"/>
+            </a:endParaRPr>
+          </a:p>
+          <a:p>
+            <a:pPr marL="0" lvl="0" indent="0" algn="l" rtl="0">
+              <a:spcBef>
+                <a:spcPts val="0"/>
+              </a:spcBef>
+              <a:spcAft>
+                <a:spcPts val="0"/>
+              </a:spcAft>
+              <a:buNone/>
+            </a:pPr>
+            <a:endParaRPr>
+              <a:latin typeface="Calibri"/>
+              <a:ea typeface="Calibri"/>
+              <a:cs typeface="Calibri"/>
+              <a:sym typeface="Calibri"/>
+            </a:endParaRPr>
+          </a:p>
+          <a:p>
+            <a:pPr marL="0" lvl="0" indent="0" algn="l" rtl="0">
+              <a:spcBef>
+                <a:spcPts val="0"/>
+              </a:spcBef>
+              <a:spcAft>
+                <a:spcPts val="0"/>
+              </a:spcAft>
+              <a:buNone/>
+            </a:pPr>
+            <a:r>
+              <a:rPr lang="en-US">
+                <a:latin typeface="Calibri"/>
+                <a:ea typeface="Calibri"/>
+                <a:cs typeface="Calibri"/>
+                <a:sym typeface="Calibri"/>
+              </a:rPr>
+              <a:t>Suppose you are testing a claim that the percentage of all women with varicose veins is 25%, and your sample of 100 women had 20% with varicose veins. </a:t>
+            </a:r>
+            <a:endParaRPr>
+              <a:latin typeface="Calibri"/>
+              <a:ea typeface="Calibri"/>
+              <a:cs typeface="Calibri"/>
+              <a:sym typeface="Calibri"/>
+            </a:endParaRPr>
+          </a:p>
+          <a:p>
+            <a:pPr marL="0" lvl="0" indent="0" algn="l" rtl="0">
+              <a:spcBef>
+                <a:spcPts val="0"/>
+              </a:spcBef>
+              <a:spcAft>
+                <a:spcPts val="0"/>
+              </a:spcAft>
+              <a:buNone/>
+            </a:pPr>
+            <a:r>
+              <a:rPr lang="en-US">
+                <a:latin typeface="Calibri"/>
+                <a:ea typeface="Calibri"/>
+                <a:cs typeface="Calibri"/>
+                <a:sym typeface="Calibri"/>
+              </a:rPr>
+              <a:t>Then the sample proportion p=0.20. </a:t>
+            </a:r>
+            <a:endParaRPr>
+              <a:latin typeface="Calibri"/>
+              <a:ea typeface="Calibri"/>
+              <a:cs typeface="Calibri"/>
+              <a:sym typeface="Calibri"/>
+            </a:endParaRPr>
+          </a:p>
+          <a:p>
+            <a:pPr marL="0" lvl="0" indent="0" algn="l" rtl="0">
+              <a:spcBef>
+                <a:spcPts val="0"/>
+              </a:spcBef>
+              <a:spcAft>
+                <a:spcPts val="0"/>
+              </a:spcAft>
+              <a:buNone/>
+            </a:pPr>
+            <a:r>
+              <a:rPr lang="en-US">
+                <a:latin typeface="Calibri"/>
+                <a:ea typeface="Calibri"/>
+                <a:cs typeface="Calibri"/>
+                <a:sym typeface="Calibri"/>
+              </a:rPr>
+              <a:t>The standard error for your sample percentage is the square root of p(1-p)/n which equals 0.04 or 4%. </a:t>
+            </a:r>
+            <a:endParaRPr>
+              <a:latin typeface="Calibri"/>
+              <a:ea typeface="Calibri"/>
+              <a:cs typeface="Calibri"/>
+              <a:sym typeface="Calibri"/>
+            </a:endParaRPr>
+          </a:p>
+          <a:p>
+            <a:pPr marL="0" lvl="0" indent="0" algn="l" rtl="0">
+              <a:spcBef>
+                <a:spcPts val="0"/>
+              </a:spcBef>
+              <a:spcAft>
+                <a:spcPts val="0"/>
+              </a:spcAft>
+              <a:buNone/>
+            </a:pPr>
+            <a:endParaRPr>
+              <a:latin typeface="Calibri"/>
+              <a:ea typeface="Calibri"/>
+              <a:cs typeface="Calibri"/>
+              <a:sym typeface="Calibri"/>
+            </a:endParaRPr>
+          </a:p>
+          <a:p>
+            <a:pPr marL="0" lvl="0" indent="0" algn="l" rtl="0">
+              <a:spcBef>
+                <a:spcPts val="0"/>
+              </a:spcBef>
+              <a:spcAft>
+                <a:spcPts val="0"/>
+              </a:spcAft>
+              <a:buNone/>
+            </a:pPr>
+            <a:r>
+              <a:rPr lang="en-US">
+                <a:latin typeface="Calibri"/>
+                <a:ea typeface="Calibri"/>
+                <a:cs typeface="Calibri"/>
+                <a:sym typeface="Calibri"/>
+              </a:rPr>
+              <a:t>You find the test statistic by taking the proportion in the sample with varicose veins, 0.20, subtracting the claimed proportion of all women with varicose veins, 0.25, and then dividing the result by the standard error, 0.04. </a:t>
+            </a:r>
+            <a:endParaRPr>
+              <a:latin typeface="Calibri"/>
+              <a:ea typeface="Calibri"/>
+              <a:cs typeface="Calibri"/>
+              <a:sym typeface="Calibri"/>
+            </a:endParaRPr>
+          </a:p>
+          <a:p>
+            <a:pPr marL="0" lvl="0" indent="0" algn="l" rtl="0">
+              <a:spcBef>
+                <a:spcPts val="0"/>
+              </a:spcBef>
+              <a:spcAft>
+                <a:spcPts val="0"/>
+              </a:spcAft>
+              <a:buNone/>
+            </a:pPr>
+            <a:endParaRPr>
+              <a:latin typeface="Calibri"/>
+              <a:ea typeface="Calibri"/>
+              <a:cs typeface="Calibri"/>
+              <a:sym typeface="Calibri"/>
+            </a:endParaRPr>
+          </a:p>
+          <a:p>
+            <a:pPr marL="0" lvl="0" indent="0" algn="l" rtl="0">
+              <a:spcBef>
+                <a:spcPts val="0"/>
+              </a:spcBef>
+              <a:spcAft>
+                <a:spcPts val="0"/>
+              </a:spcAft>
+              <a:buNone/>
+            </a:pPr>
+            <a:r>
+              <a:rPr lang="en-US">
+                <a:latin typeface="Calibri"/>
+                <a:ea typeface="Calibri"/>
+                <a:cs typeface="Calibri"/>
+                <a:sym typeface="Calibri"/>
+              </a:rPr>
+              <a:t>These calculations give you a test statistic (standard score) of –0.05 divided by 0.04 = –1.25. </a:t>
+            </a:r>
+            <a:endParaRPr>
+              <a:latin typeface="Calibri"/>
+              <a:ea typeface="Calibri"/>
+              <a:cs typeface="Calibri"/>
+              <a:sym typeface="Calibri"/>
+            </a:endParaRPr>
+          </a:p>
+          <a:p>
+            <a:pPr marL="0" lvl="0" indent="0" algn="l" rtl="0">
+              <a:spcBef>
+                <a:spcPts val="0"/>
+              </a:spcBef>
+              <a:spcAft>
+                <a:spcPts val="0"/>
+              </a:spcAft>
+              <a:buNone/>
+            </a:pPr>
+            <a:endParaRPr>
+              <a:latin typeface="Calibri"/>
+              <a:ea typeface="Calibri"/>
+              <a:cs typeface="Calibri"/>
+              <a:sym typeface="Calibri"/>
+            </a:endParaRPr>
+          </a:p>
+          <a:p>
+            <a:pPr marL="0" lvl="0" indent="0" algn="l" rtl="0">
+              <a:spcBef>
+                <a:spcPts val="0"/>
+              </a:spcBef>
+              <a:spcAft>
+                <a:spcPts val="0"/>
+              </a:spcAft>
+              <a:buClr>
+                <a:schemeClr val="dk1"/>
+              </a:buClr>
+              <a:buSzPts val="1100"/>
+              <a:buFont typeface="Arial"/>
+              <a:buNone/>
+            </a:pPr>
+            <a:r>
+              <a:rPr lang="en-US">
+                <a:latin typeface="Calibri"/>
+                <a:ea typeface="Calibri"/>
+                <a:cs typeface="Calibri"/>
+                <a:sym typeface="Calibri"/>
+              </a:rPr>
+              <a:t>This tells you that your sample results and the population claim in H0 are 1.25 standard errors apart; in particular, your sample results are 1.25 standard errors below the claim.</a:t>
+            </a:r>
+            <a:endParaRPr>
+              <a:latin typeface="Calibri"/>
+              <a:ea typeface="Calibri"/>
+              <a:cs typeface="Calibri"/>
+              <a:sym typeface="Calibri"/>
+            </a:endParaRPr>
+          </a:p>
+          <a:p>
+            <a:pPr marL="0" lvl="0" indent="0" algn="l" rtl="0">
+              <a:spcBef>
+                <a:spcPts val="0"/>
+              </a:spcBef>
+              <a:spcAft>
+                <a:spcPts val="0"/>
+              </a:spcAft>
+              <a:buClr>
+                <a:schemeClr val="dk1"/>
+              </a:buClr>
+              <a:buSzPts val="1100"/>
+              <a:buFont typeface="Arial"/>
+              <a:buNone/>
+            </a:pPr>
+            <a:endParaRPr>
+              <a:latin typeface="Calibri"/>
+              <a:ea typeface="Calibri"/>
+              <a:cs typeface="Calibri"/>
+              <a:sym typeface="Calibri"/>
+            </a:endParaRPr>
+          </a:p>
+          <a:p>
+            <a:pPr marL="0" lvl="0" indent="0" algn="l" rtl="0">
+              <a:spcBef>
+                <a:spcPts val="0"/>
+              </a:spcBef>
+              <a:spcAft>
+                <a:spcPts val="0"/>
+              </a:spcAft>
+              <a:buNone/>
+            </a:pPr>
+            <a:r>
+              <a:rPr lang="en-US">
+                <a:latin typeface="Calibri"/>
+                <a:ea typeface="Calibri"/>
+                <a:cs typeface="Calibri"/>
+                <a:sym typeface="Calibri"/>
+              </a:rPr>
+              <a:t>When testing H0: p = 0.25 versus Ha: p &lt; 0.25, you find that the p-value of -1.25 by finding the probability that Z is less than -1.25. When you look this number up on the </a:t>
+            </a:r>
+            <a:r>
+              <a:rPr lang="en-US" b="1">
+                <a:solidFill>
+                  <a:srgbClr val="0000FF"/>
+                </a:solidFill>
+                <a:latin typeface="Calibri"/>
+                <a:ea typeface="Calibri"/>
+                <a:cs typeface="Calibri"/>
+                <a:sym typeface="Calibri"/>
+              </a:rPr>
+              <a:t>Z-table</a:t>
+            </a:r>
+            <a:r>
+              <a:rPr lang="en-US">
+                <a:latin typeface="Calibri"/>
+                <a:ea typeface="Calibri"/>
+                <a:cs typeface="Calibri"/>
+                <a:sym typeface="Calibri"/>
+              </a:rPr>
+              <a:t>, you find a probability of 0.1056 of Z being less than this value.</a:t>
+            </a:r>
+            <a:endParaRPr>
+              <a:latin typeface="Calibri"/>
+              <a:ea typeface="Calibri"/>
+              <a:cs typeface="Calibri"/>
+              <a:sym typeface="Calibri"/>
+            </a:endParaRPr>
+          </a:p>
+          <a:p>
+            <a:pPr marL="0" lvl="0" indent="0" algn="l" rtl="0">
+              <a:spcBef>
+                <a:spcPts val="0"/>
+              </a:spcBef>
+              <a:spcAft>
+                <a:spcPts val="0"/>
+              </a:spcAft>
+              <a:buNone/>
+            </a:pPr>
+            <a:endParaRPr>
+              <a:latin typeface="Calibri"/>
+              <a:ea typeface="Calibri"/>
+              <a:cs typeface="Calibri"/>
+              <a:sym typeface="Calibri"/>
+            </a:endParaRPr>
+          </a:p>
+          <a:p>
+            <a:pPr marL="0" lvl="0" indent="0" algn="l" rtl="0">
+              <a:spcBef>
+                <a:spcPts val="0"/>
+              </a:spcBef>
+              <a:spcAft>
+                <a:spcPts val="0"/>
+              </a:spcAft>
+              <a:buNone/>
+            </a:pPr>
+            <a:r>
+              <a:rPr lang="en-US">
+                <a:latin typeface="Calibri"/>
+                <a:ea typeface="Calibri"/>
+                <a:cs typeface="Calibri"/>
+                <a:sym typeface="Calibri"/>
+              </a:rPr>
+              <a:t>Note: A </a:t>
+            </a:r>
+            <a:r>
+              <a:rPr lang="en-US" b="1">
+                <a:solidFill>
+                  <a:srgbClr val="0000FF"/>
+                </a:solidFill>
+                <a:latin typeface="Calibri"/>
+                <a:ea typeface="Calibri"/>
+                <a:cs typeface="Calibri"/>
+                <a:sym typeface="Calibri"/>
+              </a:rPr>
+              <a:t>Z-table</a:t>
+            </a:r>
+            <a:r>
+              <a:rPr lang="en-US">
+                <a:latin typeface="Calibri"/>
+                <a:ea typeface="Calibri"/>
+                <a:cs typeface="Calibri"/>
+                <a:sym typeface="Calibri"/>
+              </a:rPr>
+              <a:t> is simply a table of values of the </a:t>
+            </a:r>
+            <a:r>
+              <a:rPr lang="en-US">
+                <a:solidFill>
+                  <a:schemeClr val="dk1"/>
+                </a:solidFill>
+                <a:latin typeface="Calibri"/>
+                <a:ea typeface="Calibri"/>
+                <a:cs typeface="Calibri"/>
+                <a:sym typeface="Calibri"/>
+              </a:rPr>
+              <a:t>cumulative distribution function of the normal distribution.</a:t>
+            </a:r>
+            <a:endParaRPr>
+              <a:latin typeface="Calibri"/>
+              <a:ea typeface="Calibri"/>
+              <a:cs typeface="Calibri"/>
+              <a:sym typeface="Calibri"/>
+            </a:endParaRPr>
+          </a:p>
+        </p:txBody>
+      </p:sp>
+      <p:sp>
+        <p:nvSpPr>
+          <p:cNvPr id="2" name="TextBox 1">
+            <a:extLst>
+              <a:ext uri="{FF2B5EF4-FFF2-40B4-BE49-F238E27FC236}">
+                <a16:creationId xmlns:a16="http://schemas.microsoft.com/office/drawing/2014/main" id="{7D2AE4FC-9024-9547-829E-724CC7A63A22}"/>
+              </a:ext>
+            </a:extLst>
+          </p:cNvPr>
+          <p:cNvSpPr txBox="1"/>
+          <p:nvPr/>
+        </p:nvSpPr>
+        <p:spPr>
+          <a:xfrm>
+            <a:off x="92765" y="106017"/>
+            <a:ext cx="5416784" cy="400110"/>
+          </a:xfrm>
+          <a:prstGeom prst="rect">
+            <a:avLst/>
+          </a:prstGeom>
+          <a:noFill/>
+        </p:spPr>
+        <p:txBody>
+          <a:bodyPr wrap="square" rtlCol="0">
+            <a:spAutoFit/>
+          </a:bodyPr>
+          <a:lstStyle/>
+          <a:p>
+            <a:r>
+              <a:rPr lang="en-US" sz="2000" b="1" dirty="0"/>
+              <a:t>More Hypothesis Testing Examples</a:t>
+            </a:r>
+          </a:p>
+        </p:txBody>
+      </p:sp>
+    </p:spTree>
+    <p:extLst>
+      <p:ext uri="{BB962C8B-B14F-4D97-AF65-F5344CB8AC3E}">
+        <p14:creationId xmlns:p14="http://schemas.microsoft.com/office/powerpoint/2010/main" val="3916857598"/>
+      </p:ext>
+    </p:extLst>
+  </p:cSld>
+  <p:clrMapOvr>
+    <a:masterClrMapping/>
+  </p:clrMapOvr>
+</p:sld>
+</file>
+
+<file path=ppt/slides/slide11.xml><?xml version="1.0" encoding="utf-8"?>
 <p:sld xmlns:a="http://schemas.openxmlformats.org/drawingml/2006/main" xmlns:r="http://schemas.openxmlformats.org/officeDocument/2006/relationships" xmlns:p="http://schemas.openxmlformats.org/presentationml/2006/main">
   <p:cSld>
     <p:spTree>
@@ -15163,8 +16555,8 @@
         </p:nvSpPr>
         <p:spPr>
           <a:xfrm>
-            <a:off x="0" y="0"/>
-            <a:ext cx="7419372" cy="6674687"/>
+            <a:off x="1" y="0"/>
+            <a:ext cx="4263242" cy="486121"/>
           </a:xfrm>
           <a:prstGeom prst="rect">
             <a:avLst/>
@@ -15212,900 +16604,6 @@
             </a:endParaRPr>
           </a:p>
           <a:p>
-            <a:pPr marL="0" marR="0" lvl="0" indent="0" algn="l" rtl="0">
-              <a:spcBef>
-                <a:spcPts val="0"/>
-              </a:spcBef>
-              <a:spcAft>
-                <a:spcPts val="0"/>
-              </a:spcAft>
-              <a:buSzPts val="1100"/>
-              <a:buNone/>
-            </a:pPr>
-            <a:endParaRPr sz="800" dirty="0">
-              <a:solidFill>
-                <a:schemeClr val="dk1"/>
-              </a:solidFill>
-              <a:latin typeface="Calibri"/>
-              <a:ea typeface="Calibri"/>
-              <a:cs typeface="Calibri"/>
-              <a:sym typeface="Calibri"/>
-            </a:endParaRPr>
-          </a:p>
-          <a:p>
-            <a:pPr marL="0" marR="0" lvl="0" indent="0" algn="l" rtl="0">
-              <a:spcBef>
-                <a:spcPts val="0"/>
-              </a:spcBef>
-              <a:spcAft>
-                <a:spcPts val="0"/>
-              </a:spcAft>
-              <a:buSzPts val="1100"/>
-              <a:buNone/>
-            </a:pPr>
-            <a:r>
-              <a:rPr lang="en-US" dirty="0">
-                <a:solidFill>
-                  <a:schemeClr val="dk1"/>
-                </a:solidFill>
-                <a:latin typeface="Calibri"/>
-                <a:ea typeface="Calibri"/>
-                <a:cs typeface="Calibri"/>
-                <a:sym typeface="Calibri"/>
-              </a:rPr>
-              <a:t>A </a:t>
-            </a:r>
-            <a:r>
-              <a:rPr lang="en-US" b="1" dirty="0">
-                <a:solidFill>
-                  <a:srgbClr val="0000FF"/>
-                </a:solidFill>
-                <a:latin typeface="Calibri"/>
-                <a:ea typeface="Calibri"/>
-                <a:cs typeface="Calibri"/>
-                <a:sym typeface="Calibri"/>
-              </a:rPr>
-              <a:t>p-value</a:t>
-            </a:r>
-            <a:r>
-              <a:rPr lang="en-US" dirty="0">
-                <a:solidFill>
-                  <a:schemeClr val="dk1"/>
-                </a:solidFill>
-                <a:latin typeface="Calibri"/>
-                <a:ea typeface="Calibri"/>
-                <a:cs typeface="Calibri"/>
-                <a:sym typeface="Calibri"/>
-              </a:rPr>
-              <a:t> (probability value) is a probability of getting results at least as extreme as yours. </a:t>
-            </a:r>
-            <a:br>
-              <a:rPr lang="en-US" dirty="0">
-                <a:solidFill>
-                  <a:schemeClr val="dk1"/>
-                </a:solidFill>
-                <a:latin typeface="Calibri"/>
-                <a:ea typeface="Calibri"/>
-                <a:cs typeface="Calibri"/>
-                <a:sym typeface="Calibri"/>
-              </a:rPr>
-            </a:br>
-            <a:r>
-              <a:rPr lang="en-US" dirty="0">
-                <a:solidFill>
-                  <a:schemeClr val="dk1"/>
-                </a:solidFill>
-                <a:latin typeface="Calibri"/>
-                <a:ea typeface="Calibri"/>
-                <a:cs typeface="Calibri"/>
-                <a:sym typeface="Calibri"/>
-              </a:rPr>
-              <a:t>Given two things:</a:t>
-            </a:r>
-          </a:p>
-          <a:p>
-            <a:pPr marL="0" marR="0" lvl="0" indent="0" algn="l" rtl="0">
-              <a:spcBef>
-                <a:spcPts val="0"/>
-              </a:spcBef>
-              <a:spcAft>
-                <a:spcPts val="0"/>
-              </a:spcAft>
-              <a:buSzPts val="1100"/>
-              <a:buNone/>
-            </a:pPr>
-            <a:r>
-              <a:rPr lang="en-US" dirty="0">
-                <a:solidFill>
-                  <a:schemeClr val="dk1"/>
-                </a:solidFill>
-                <a:latin typeface="Calibri"/>
-                <a:ea typeface="Calibri"/>
-                <a:cs typeface="Calibri"/>
-                <a:sym typeface="Calibri"/>
-              </a:rPr>
-              <a:t>        1. A null-hypothesis (value)</a:t>
-            </a:r>
-          </a:p>
-          <a:p>
-            <a:pPr lvl="0">
-              <a:buSzPts val="1100"/>
-            </a:pPr>
-            <a:r>
-              <a:rPr lang="en-US" dirty="0">
-                <a:solidFill>
-                  <a:schemeClr val="dk1"/>
-                </a:solidFill>
-                <a:latin typeface="Calibri"/>
-                <a:ea typeface="Calibri"/>
-                <a:cs typeface="Calibri"/>
-                <a:sym typeface="Calibri"/>
-              </a:rPr>
-              <a:t>        2. A distribution – explicit, theoretical, or sample (Gaussian, t-Student, Chi-squared, F-, etc.)</a:t>
-            </a:r>
-          </a:p>
-          <a:p>
-            <a:pPr lvl="0">
-              <a:buSzPts val="1100"/>
-            </a:pPr>
-            <a:r>
-              <a:rPr lang="en-US" dirty="0">
-                <a:solidFill>
-                  <a:schemeClr val="dk1"/>
-                </a:solidFill>
-                <a:latin typeface="Calibri"/>
-                <a:ea typeface="Calibri"/>
-                <a:cs typeface="Calibri"/>
-                <a:sym typeface="Calibri"/>
-              </a:rPr>
-              <a:t>we calculate the probability to get the result "at least as extreme as yours" ?</a:t>
-            </a:r>
-          </a:p>
-          <a:p>
-            <a:pPr marL="0" marR="0" lvl="0" indent="0" algn="l" rtl="0">
-              <a:spcBef>
-                <a:spcPts val="0"/>
-              </a:spcBef>
-              <a:spcAft>
-                <a:spcPts val="0"/>
-              </a:spcAft>
-              <a:buSzPts val="1100"/>
-              <a:buNone/>
-            </a:pPr>
-            <a:endParaRPr lang="en-US" sz="800" dirty="0">
-              <a:solidFill>
-                <a:schemeClr val="dk1"/>
-              </a:solidFill>
-              <a:latin typeface="Calibri"/>
-              <a:ea typeface="Calibri"/>
-              <a:cs typeface="Calibri"/>
-              <a:sym typeface="Calibri"/>
-            </a:endParaRPr>
-          </a:p>
-          <a:p>
-            <a:pPr marL="0" marR="0" lvl="0" indent="0" algn="l" rtl="0">
-              <a:spcBef>
-                <a:spcPts val="0"/>
-              </a:spcBef>
-              <a:spcAft>
-                <a:spcPts val="0"/>
-              </a:spcAft>
-              <a:buSzPts val="1100"/>
-              <a:buNone/>
-            </a:pPr>
-            <a:r>
-              <a:rPr lang="en-US" dirty="0">
-                <a:solidFill>
-                  <a:schemeClr val="dk1"/>
-                </a:solidFill>
-                <a:latin typeface="Calibri"/>
-                <a:ea typeface="Calibri"/>
-                <a:cs typeface="Calibri"/>
-                <a:sym typeface="Calibri"/>
-              </a:rPr>
-              <a:t>If this probability is very small, this means that the result is unlikely to be explained by the null hypothesis – so we reject the null hypothesis.</a:t>
-            </a:r>
-            <a:endParaRPr dirty="0">
-              <a:solidFill>
-                <a:schemeClr val="dk1"/>
-              </a:solidFill>
-              <a:latin typeface="Calibri"/>
-              <a:ea typeface="Calibri"/>
-              <a:cs typeface="Calibri"/>
-              <a:sym typeface="Calibri"/>
-            </a:endParaRPr>
-          </a:p>
-          <a:p>
-            <a:pPr marL="0" marR="0" lvl="0" indent="0" algn="l" rtl="0">
-              <a:spcBef>
-                <a:spcPts val="0"/>
-              </a:spcBef>
-              <a:spcAft>
-                <a:spcPts val="0"/>
-              </a:spcAft>
-              <a:buSzPts val="1100"/>
-              <a:buNone/>
-            </a:pPr>
-            <a:endParaRPr sz="800" dirty="0">
-              <a:solidFill>
-                <a:schemeClr val="dk1"/>
-              </a:solidFill>
-              <a:latin typeface="Calibri"/>
-              <a:ea typeface="Calibri"/>
-              <a:cs typeface="Calibri"/>
-              <a:sym typeface="Calibri"/>
-            </a:endParaRPr>
-          </a:p>
-          <a:p>
-            <a:pPr marL="0" lvl="0" indent="0" algn="l" rtl="0">
-              <a:spcBef>
-                <a:spcPts val="0"/>
-              </a:spcBef>
-              <a:spcAft>
-                <a:spcPts val="0"/>
-              </a:spcAft>
-              <a:buSzPts val="1100"/>
-              <a:buNone/>
-            </a:pPr>
-            <a:r>
-              <a:rPr lang="en-US" sz="1200" b="1" dirty="0">
-                <a:solidFill>
-                  <a:srgbClr val="0070C0"/>
-                </a:solidFill>
-                <a:latin typeface="Courier New"/>
-                <a:ea typeface="Courier New"/>
-                <a:cs typeface="Courier New"/>
-                <a:sym typeface="Courier New"/>
-              </a:rPr>
-              <a:t>P-value    probability of observed</a:t>
-            </a:r>
-            <a:endParaRPr sz="1200" b="1" dirty="0">
-              <a:solidFill>
-                <a:srgbClr val="0070C0"/>
-              </a:solidFill>
-              <a:latin typeface="Courier New"/>
-              <a:ea typeface="Courier New"/>
-              <a:cs typeface="Courier New"/>
-              <a:sym typeface="Courier New"/>
-            </a:endParaRPr>
-          </a:p>
-          <a:p>
-            <a:pPr marL="0" lvl="0" indent="0" algn="l" rtl="0">
-              <a:spcBef>
-                <a:spcPts val="0"/>
-              </a:spcBef>
-              <a:spcAft>
-                <a:spcPts val="0"/>
-              </a:spcAft>
-              <a:buSzPts val="1100"/>
-              <a:buNone/>
-            </a:pPr>
-            <a:r>
-              <a:rPr lang="en-US" sz="1200" b="1" dirty="0">
-                <a:solidFill>
-                  <a:srgbClr val="0070C0"/>
-                </a:solidFill>
-                <a:latin typeface="Courier New"/>
-                <a:ea typeface="Courier New"/>
-                <a:cs typeface="Courier New"/>
-                <a:sym typeface="Courier New"/>
-              </a:rPr>
-              <a:t>-------------------------------</a:t>
-            </a:r>
-            <a:endParaRPr sz="1200" b="1" dirty="0">
-              <a:solidFill>
-                <a:srgbClr val="0070C0"/>
-              </a:solidFill>
-              <a:latin typeface="Courier New"/>
-              <a:ea typeface="Courier New"/>
-              <a:cs typeface="Courier New"/>
-              <a:sym typeface="Courier New"/>
-            </a:endParaRPr>
-          </a:p>
-          <a:p>
-            <a:pPr marL="0" lvl="0" indent="0" algn="l" rtl="0">
-              <a:spcBef>
-                <a:spcPts val="0"/>
-              </a:spcBef>
-              <a:spcAft>
-                <a:spcPts val="0"/>
-              </a:spcAft>
-              <a:buSzPts val="1100"/>
-              <a:buNone/>
-            </a:pPr>
-            <a:r>
-              <a:rPr lang="en-US" sz="1200" b="1" dirty="0">
-                <a:solidFill>
-                  <a:srgbClr val="0070C0"/>
-                </a:solidFill>
-                <a:latin typeface="Courier New"/>
-                <a:ea typeface="Courier New"/>
-                <a:cs typeface="Courier New"/>
-                <a:sym typeface="Courier New"/>
-              </a:rPr>
-              <a:t>P &lt; 0.05         5%</a:t>
-            </a:r>
-            <a:endParaRPr sz="1200" b="1" dirty="0">
-              <a:solidFill>
-                <a:srgbClr val="0070C0"/>
-              </a:solidFill>
-              <a:latin typeface="Courier New"/>
-              <a:ea typeface="Courier New"/>
-              <a:cs typeface="Courier New"/>
-              <a:sym typeface="Courier New"/>
-            </a:endParaRPr>
-          </a:p>
-          <a:p>
-            <a:pPr marL="0" lvl="0" indent="0" algn="l" rtl="0">
-              <a:spcBef>
-                <a:spcPts val="0"/>
-              </a:spcBef>
-              <a:spcAft>
-                <a:spcPts val="0"/>
-              </a:spcAft>
-              <a:buSzPts val="1100"/>
-              <a:buNone/>
-            </a:pPr>
-            <a:r>
-              <a:rPr lang="en-US" sz="1200" b="1" dirty="0">
-                <a:solidFill>
-                  <a:srgbClr val="0070C0"/>
-                </a:solidFill>
-                <a:latin typeface="Courier New"/>
-                <a:ea typeface="Courier New"/>
-                <a:cs typeface="Courier New"/>
-                <a:sym typeface="Courier New"/>
-              </a:rPr>
-              <a:t>P &lt; 0.01         1%</a:t>
-            </a:r>
-            <a:endParaRPr sz="1200" b="1" dirty="0">
-              <a:solidFill>
-                <a:srgbClr val="0070C0"/>
-              </a:solidFill>
-              <a:latin typeface="Courier New"/>
-              <a:ea typeface="Courier New"/>
-              <a:cs typeface="Courier New"/>
-              <a:sym typeface="Courier New"/>
-            </a:endParaRPr>
-          </a:p>
-          <a:p>
-            <a:pPr marL="0" lvl="0" indent="0" algn="l" rtl="0">
-              <a:spcBef>
-                <a:spcPts val="0"/>
-              </a:spcBef>
-              <a:spcAft>
-                <a:spcPts val="0"/>
-              </a:spcAft>
-              <a:buSzPts val="1100"/>
-              <a:buNone/>
-            </a:pPr>
-            <a:r>
-              <a:rPr lang="en-US" sz="1200" b="1" dirty="0">
-                <a:solidFill>
-                  <a:srgbClr val="0070C0"/>
-                </a:solidFill>
-                <a:latin typeface="Courier New"/>
-                <a:ea typeface="Courier New"/>
-                <a:cs typeface="Courier New"/>
-                <a:sym typeface="Courier New"/>
-              </a:rPr>
-              <a:t>p &lt; 0.001        0.1%</a:t>
-            </a:r>
-            <a:endParaRPr sz="1200" b="1" dirty="0">
-              <a:solidFill>
-                <a:srgbClr val="0070C0"/>
-              </a:solidFill>
-              <a:latin typeface="Courier New"/>
-              <a:ea typeface="Courier New"/>
-              <a:cs typeface="Courier New"/>
-              <a:sym typeface="Courier New"/>
-            </a:endParaRPr>
-          </a:p>
-          <a:p>
-            <a:pPr marL="0" lvl="0" indent="0" algn="l" rtl="0">
-              <a:spcBef>
-                <a:spcPts val="0"/>
-              </a:spcBef>
-              <a:spcAft>
-                <a:spcPts val="0"/>
-              </a:spcAft>
-              <a:buSzPts val="1100"/>
-              <a:buNone/>
-            </a:pPr>
-            <a:r>
-              <a:rPr lang="en-US" sz="1200" b="1" dirty="0">
-                <a:solidFill>
-                  <a:srgbClr val="0070C0"/>
-                </a:solidFill>
-                <a:latin typeface="Courier New"/>
-                <a:ea typeface="Courier New"/>
-                <a:cs typeface="Courier New"/>
-                <a:sym typeface="Courier New"/>
-              </a:rPr>
-              <a:t>-------------------------------</a:t>
-            </a:r>
-            <a:endParaRPr sz="800" dirty="0">
-              <a:solidFill>
-                <a:schemeClr val="dk1"/>
-              </a:solidFill>
-              <a:latin typeface="Calibri"/>
-              <a:ea typeface="Calibri"/>
-              <a:cs typeface="Calibri"/>
-              <a:sym typeface="Calibri"/>
-            </a:endParaRPr>
-          </a:p>
-          <a:p>
-            <a:pPr marL="0" marR="0" lvl="0" indent="0" algn="l" rtl="0">
-              <a:spcBef>
-                <a:spcPts val="0"/>
-              </a:spcBef>
-              <a:spcAft>
-                <a:spcPts val="0"/>
-              </a:spcAft>
-              <a:buSzPts val="1100"/>
-              <a:buNone/>
-            </a:pPr>
-            <a:r>
-              <a:rPr lang="en-US" dirty="0">
-                <a:solidFill>
-                  <a:schemeClr val="dk1"/>
-                </a:solidFill>
-                <a:latin typeface="Calibri"/>
-                <a:ea typeface="Calibri"/>
-                <a:cs typeface="Calibri"/>
-                <a:sym typeface="Calibri"/>
-              </a:rPr>
-              <a:t>A small p-value (typically ≤ 0.05) indicates strong evidence </a:t>
-            </a:r>
-            <a:r>
-              <a:rPr lang="en-US" b="1" dirty="0">
-                <a:solidFill>
-                  <a:srgbClr val="FF0000"/>
-                </a:solidFill>
-                <a:latin typeface="Calibri"/>
-                <a:ea typeface="Calibri"/>
-                <a:cs typeface="Calibri"/>
-                <a:sym typeface="Calibri"/>
-              </a:rPr>
-              <a:t>against</a:t>
-            </a:r>
-            <a:r>
-              <a:rPr lang="en-US" dirty="0">
-                <a:solidFill>
-                  <a:schemeClr val="dk1"/>
-                </a:solidFill>
-                <a:latin typeface="Calibri"/>
-                <a:ea typeface="Calibri"/>
-                <a:cs typeface="Calibri"/>
-                <a:sym typeface="Calibri"/>
-              </a:rPr>
-              <a:t> the null hypothesis, so you reject the null hypothesis. People say that this evidence is </a:t>
-            </a:r>
-            <a:r>
-              <a:rPr lang="en-US" b="1" dirty="0">
-                <a:solidFill>
-                  <a:srgbClr val="FF0000"/>
-                </a:solidFill>
-                <a:latin typeface="Calibri"/>
-                <a:ea typeface="Calibri"/>
-                <a:cs typeface="Calibri"/>
-                <a:sym typeface="Calibri"/>
-              </a:rPr>
-              <a:t>"statistically significant</a:t>
-            </a:r>
-            <a:r>
-              <a:rPr lang="en-US" dirty="0">
-                <a:solidFill>
-                  <a:schemeClr val="dk1"/>
-                </a:solidFill>
-                <a:latin typeface="Calibri"/>
-                <a:ea typeface="Calibri"/>
-                <a:cs typeface="Calibri"/>
-                <a:sym typeface="Calibri"/>
-              </a:rPr>
-              <a:t>".</a:t>
-            </a:r>
-          </a:p>
-          <a:p>
-            <a:pPr marL="0" marR="0" lvl="0" indent="0" algn="l" rtl="0">
-              <a:spcBef>
-                <a:spcPts val="0"/>
-              </a:spcBef>
-              <a:spcAft>
-                <a:spcPts val="0"/>
-              </a:spcAft>
-              <a:buSzPts val="1100"/>
-              <a:buNone/>
-            </a:pPr>
-            <a:endParaRPr sz="800" dirty="0">
-              <a:solidFill>
-                <a:schemeClr val="dk1"/>
-              </a:solidFill>
-              <a:latin typeface="Calibri"/>
-              <a:ea typeface="Calibri"/>
-              <a:cs typeface="Calibri"/>
-              <a:sym typeface="Calibri"/>
-            </a:endParaRPr>
-          </a:p>
-          <a:p>
-            <a:pPr lvl="0">
-              <a:buSzPts val="1100"/>
-            </a:pPr>
-            <a:r>
-              <a:rPr lang="en-US" b="1" dirty="0">
-                <a:solidFill>
-                  <a:srgbClr val="0000FF"/>
-                </a:solidFill>
-                <a:latin typeface="Calibri"/>
-                <a:cs typeface="Calibri"/>
-              </a:rPr>
-              <a:t>Level of significance</a:t>
-            </a:r>
-            <a:r>
-              <a:rPr lang="en-US" dirty="0">
-                <a:solidFill>
-                  <a:schemeClr val="tx1"/>
-                </a:solidFill>
-                <a:latin typeface="Calibri"/>
-                <a:cs typeface="Calibri"/>
-              </a:rPr>
-              <a:t> (</a:t>
-            </a:r>
-            <a:r>
-              <a:rPr lang="en-US" b="1" dirty="0">
-                <a:solidFill>
-                  <a:srgbClr val="FF0000"/>
-                </a:solidFill>
-                <a:latin typeface="Calibri"/>
-                <a:cs typeface="Calibri"/>
-              </a:rPr>
-              <a:t>alpha</a:t>
-            </a:r>
-            <a:r>
-              <a:rPr lang="en-US" dirty="0">
-                <a:solidFill>
-                  <a:schemeClr val="tx1"/>
-                </a:solidFill>
-                <a:latin typeface="Calibri"/>
-                <a:cs typeface="Calibri"/>
-              </a:rPr>
-              <a:t> or </a:t>
-            </a:r>
-            <a:r>
-              <a:rPr lang="el-GR" b="1" dirty="0">
-                <a:solidFill>
-                  <a:srgbClr val="FF0000"/>
-                </a:solidFill>
-                <a:latin typeface="Calibri"/>
-                <a:cs typeface="Calibri"/>
-              </a:rPr>
-              <a:t>α</a:t>
-            </a:r>
-            <a:r>
-              <a:rPr lang="en-US" dirty="0">
-                <a:solidFill>
-                  <a:schemeClr val="tx1"/>
-                </a:solidFill>
-                <a:latin typeface="Calibri"/>
-                <a:cs typeface="Calibri"/>
-              </a:rPr>
-              <a:t>, typically 0.05) - probability that the event could have occurred by chance. </a:t>
-            </a:r>
-          </a:p>
-          <a:p>
-            <a:pPr lvl="0">
-              <a:buSzPts val="1100"/>
-            </a:pPr>
-            <a:endParaRPr sz="800" dirty="0">
-              <a:solidFill>
-                <a:schemeClr val="dk1"/>
-              </a:solidFill>
-              <a:latin typeface="Calibri"/>
-              <a:ea typeface="Calibri"/>
-              <a:cs typeface="Calibri"/>
-              <a:sym typeface="Calibri"/>
-            </a:endParaRPr>
-          </a:p>
-          <a:p>
-            <a:pPr marL="0" marR="0" lvl="0" indent="0" algn="l" rtl="0">
-              <a:spcBef>
-                <a:spcPts val="0"/>
-              </a:spcBef>
-              <a:spcAft>
-                <a:spcPts val="0"/>
-              </a:spcAft>
-              <a:buSzPts val="1100"/>
-              <a:buNone/>
-            </a:pPr>
-            <a:r>
-              <a:rPr lang="en-US" b="1" dirty="0">
-                <a:solidFill>
-                  <a:srgbClr val="0000FF"/>
-                </a:solidFill>
-                <a:latin typeface="Calibri"/>
-                <a:ea typeface="Calibri"/>
-                <a:cs typeface="Calibri"/>
-                <a:sym typeface="Calibri"/>
-              </a:rPr>
-              <a:t>Confidence Interval (CI)</a:t>
-            </a:r>
-            <a:r>
-              <a:rPr lang="en-US" dirty="0">
-                <a:solidFill>
-                  <a:schemeClr val="dk1"/>
-                </a:solidFill>
-                <a:latin typeface="Calibri"/>
-                <a:ea typeface="Calibri"/>
-                <a:cs typeface="Calibri"/>
-                <a:sym typeface="Calibri"/>
-              </a:rPr>
-              <a:t>. A 95% CI is the interval that you are 95% certain contains the true population value as it might be estimated from a much larger study.</a:t>
-            </a:r>
-          </a:p>
-          <a:p>
-            <a:pPr>
-              <a:buSzPts val="1100"/>
-            </a:pPr>
-            <a:r>
-              <a:rPr lang="en-US" dirty="0">
-                <a:solidFill>
-                  <a:schemeClr val="dk1"/>
-                </a:solidFill>
-                <a:latin typeface="Calibri"/>
-                <a:ea typeface="Calibri"/>
-                <a:cs typeface="Calibri"/>
-                <a:sym typeface="Calibri"/>
-              </a:rPr>
-              <a:t> </a:t>
-            </a:r>
-            <a:r>
-              <a:rPr lang="en-US" dirty="0"/>
-              <a:t>- </a:t>
-            </a:r>
-            <a:r>
-              <a:rPr lang="en-US" dirty="0">
-                <a:hlinkClick r:id="rId3"/>
-              </a:rPr>
-              <a:t>https://en.wikipedia.org/wiki/Confidence_interval</a:t>
-            </a:r>
-            <a:r>
-              <a:rPr lang="en-US" dirty="0"/>
-              <a:t> </a:t>
-            </a:r>
-          </a:p>
-          <a:p>
-            <a:pPr marL="0" marR="0" lvl="0" indent="0" algn="l" rtl="0">
-              <a:spcBef>
-                <a:spcPts val="0"/>
-              </a:spcBef>
-              <a:spcAft>
-                <a:spcPts val="0"/>
-              </a:spcAft>
-              <a:buSzPts val="1100"/>
-              <a:buNone/>
-            </a:pPr>
-            <a:endParaRPr sz="800" dirty="0">
-              <a:solidFill>
-                <a:schemeClr val="dk1"/>
-              </a:solidFill>
-              <a:latin typeface="Calibri"/>
-              <a:ea typeface="Calibri"/>
-              <a:cs typeface="Calibri"/>
-              <a:sym typeface="Calibri"/>
-            </a:endParaRPr>
-          </a:p>
-          <a:p>
-            <a:pPr marL="0" marR="0" lvl="0" indent="0" algn="l" rtl="0">
-              <a:spcBef>
-                <a:spcPts val="0"/>
-              </a:spcBef>
-              <a:spcAft>
-                <a:spcPts val="0"/>
-              </a:spcAft>
-              <a:buSzPts val="1100"/>
-              <a:buNone/>
-            </a:pPr>
-            <a:r>
-              <a:rPr lang="en-US" b="1" dirty="0">
-                <a:solidFill>
-                  <a:srgbClr val="0000FF"/>
-                </a:solidFill>
-                <a:latin typeface="Calibri"/>
-                <a:ea typeface="Calibri"/>
-                <a:cs typeface="Calibri"/>
-                <a:sym typeface="Calibri"/>
-              </a:rPr>
-              <a:t>z-score</a:t>
-            </a:r>
-            <a:r>
-              <a:rPr lang="en-US" dirty="0">
-                <a:solidFill>
-                  <a:schemeClr val="dk1"/>
-                </a:solidFill>
-                <a:latin typeface="Calibri"/>
-                <a:ea typeface="Calibri"/>
-                <a:cs typeface="Calibri"/>
-                <a:sym typeface="Calibri"/>
-              </a:rPr>
-              <a:t> is the distance from the mean measured in the number of standard deviations.</a:t>
-            </a:r>
-          </a:p>
-          <a:p>
-            <a:pPr marL="0" marR="0" lvl="0" indent="0" algn="l" rtl="0">
-              <a:spcBef>
-                <a:spcPts val="0"/>
-              </a:spcBef>
-              <a:spcAft>
-                <a:spcPts val="0"/>
-              </a:spcAft>
-              <a:buSzPts val="1100"/>
-              <a:buNone/>
-            </a:pPr>
-            <a:endParaRPr lang="en-US" sz="800" dirty="0">
-              <a:solidFill>
-                <a:schemeClr val="dk1"/>
-              </a:solidFill>
-              <a:latin typeface="Calibri"/>
-              <a:ea typeface="Calibri"/>
-              <a:cs typeface="Calibri"/>
-              <a:sym typeface="Calibri"/>
-            </a:endParaRPr>
-          </a:p>
-          <a:p>
-            <a:pPr marL="0" marR="0" lvl="0" indent="0" algn="l" rtl="0">
-              <a:spcBef>
-                <a:spcPts val="0"/>
-              </a:spcBef>
-              <a:spcAft>
-                <a:spcPts val="0"/>
-              </a:spcAft>
-              <a:buSzPts val="1100"/>
-              <a:buNone/>
-            </a:pPr>
-            <a:r>
-              <a:rPr lang="en-US" dirty="0">
-                <a:solidFill>
-                  <a:schemeClr val="dk1"/>
-                </a:solidFill>
-                <a:latin typeface="Calibri"/>
-                <a:ea typeface="Calibri"/>
-                <a:cs typeface="Calibri"/>
-                <a:sym typeface="Calibri"/>
-              </a:rPr>
-              <a:t>Margin of Error – XXXXXX</a:t>
-            </a:r>
-          </a:p>
-          <a:p>
-            <a:pPr marL="0" marR="0" lvl="0" indent="0" algn="l" rtl="0">
-              <a:spcBef>
-                <a:spcPts val="0"/>
-              </a:spcBef>
-              <a:spcAft>
-                <a:spcPts val="0"/>
-              </a:spcAft>
-              <a:buSzPts val="1100"/>
-              <a:buNone/>
-            </a:pPr>
-            <a:r>
-              <a:rPr lang="en-US" sz="1000" dirty="0">
-                <a:solidFill>
-                  <a:schemeClr val="dk1"/>
-                </a:solidFill>
-                <a:latin typeface="Calibri"/>
-                <a:ea typeface="Calibri"/>
-                <a:cs typeface="Calibri"/>
-                <a:sym typeface="Calibri"/>
-              </a:rPr>
-              <a:t> - </a:t>
-            </a:r>
-            <a:r>
-              <a:rPr lang="en-US" sz="1000" dirty="0">
-                <a:solidFill>
-                  <a:schemeClr val="dk1"/>
-                </a:solidFill>
-                <a:latin typeface="Calibri"/>
-                <a:ea typeface="Calibri"/>
-                <a:cs typeface="Calibri"/>
-                <a:sym typeface="Calibri"/>
-                <a:hlinkClick r:id="rId4"/>
-              </a:rPr>
-              <a:t>https://en.wikipedia.org/wiki/Margin_of_error</a:t>
-            </a:r>
-            <a:endParaRPr lang="en-US" sz="1000" dirty="0">
-              <a:solidFill>
-                <a:schemeClr val="dk1"/>
-              </a:solidFill>
-              <a:latin typeface="Calibri"/>
-              <a:ea typeface="Calibri"/>
-              <a:cs typeface="Calibri"/>
-              <a:sym typeface="Calibri"/>
-            </a:endParaRPr>
-          </a:p>
-          <a:p>
-            <a:pPr lvl="0">
-              <a:buSzPts val="1100"/>
-            </a:pPr>
-            <a:r>
-              <a:rPr lang="en-US" sz="1000" dirty="0">
-                <a:solidFill>
-                  <a:schemeClr val="dk1"/>
-                </a:solidFill>
-                <a:latin typeface="Calibri"/>
-                <a:ea typeface="Calibri"/>
-                <a:cs typeface="Calibri"/>
-                <a:sym typeface="Calibri"/>
-              </a:rPr>
-              <a:t> - </a:t>
-            </a:r>
-            <a:r>
-              <a:rPr lang="en-US" sz="1000" dirty="0">
-                <a:solidFill>
-                  <a:schemeClr val="dk1"/>
-                </a:solidFill>
-                <a:latin typeface="Calibri"/>
-                <a:ea typeface="Calibri"/>
-                <a:cs typeface="Calibri"/>
-                <a:sym typeface="Calibri"/>
-                <a:hlinkClick r:id="rId5"/>
-              </a:rPr>
-              <a:t>https://www.surveymonkey.com/mp/margin-of-error-calculator/</a:t>
-            </a:r>
-            <a:r>
-              <a:rPr lang="en-US" sz="1000" dirty="0">
-                <a:solidFill>
-                  <a:schemeClr val="dk1"/>
-                </a:solidFill>
-                <a:latin typeface="Calibri"/>
-                <a:ea typeface="Calibri"/>
-                <a:cs typeface="Calibri"/>
-                <a:sym typeface="Calibri"/>
-              </a:rPr>
-              <a:t> </a:t>
-            </a:r>
-          </a:p>
-          <a:p>
-            <a:pPr lvl="0">
-              <a:buSzPts val="1100"/>
-            </a:pPr>
-            <a:r>
-              <a:rPr lang="en-US" sz="1000" dirty="0">
-                <a:solidFill>
-                  <a:schemeClr val="dk1"/>
-                </a:solidFill>
-                <a:latin typeface="Calibri"/>
-                <a:ea typeface="Calibri"/>
-                <a:cs typeface="Calibri"/>
-                <a:sym typeface="Calibri"/>
-              </a:rPr>
-              <a:t> - </a:t>
-            </a:r>
-            <a:r>
-              <a:rPr lang="en-US" sz="1000" dirty="0">
-                <a:solidFill>
-                  <a:schemeClr val="dk1"/>
-                </a:solidFill>
-                <a:latin typeface="Calibri"/>
-                <a:ea typeface="Calibri"/>
-                <a:cs typeface="Calibri"/>
-                <a:sym typeface="Calibri"/>
-                <a:hlinkClick r:id="rId6"/>
-              </a:rPr>
-              <a:t>https://www.dummies.com/education/math/statistics/how-sample-size-affects-the-margin-of-error/</a:t>
-            </a:r>
-            <a:r>
-              <a:rPr lang="en-US" sz="1000" dirty="0">
-                <a:solidFill>
-                  <a:schemeClr val="dk1"/>
-                </a:solidFill>
-                <a:latin typeface="Calibri"/>
-                <a:ea typeface="Calibri"/>
-                <a:cs typeface="Calibri"/>
-                <a:sym typeface="Calibri"/>
-              </a:rPr>
-              <a:t> </a:t>
-            </a:r>
-          </a:p>
-          <a:p>
             <a:pPr lvl="0">
               <a:buSzPts val="1100"/>
             </a:pPr>
@@ -16128,7 +16626,7 @@
           <p:nvPr/>
         </p:nvPicPr>
         <p:blipFill rotWithShape="1">
-          <a:blip r:embed="rId7" cstate="email">
+          <a:blip r:embed="rId3" cstate="email">
             <a:alphaModFix/>
             <a:extLst>
               <a:ext uri="{28A0092B-C50C-407E-A947-70E740481C1C}">
@@ -16141,7 +16639,7 @@
         </p:blipFill>
         <p:spPr>
           <a:xfrm>
-            <a:off x="8113852" y="71800"/>
+            <a:off x="8085329" y="3040632"/>
             <a:ext cx="4011671" cy="1803299"/>
           </a:xfrm>
           <a:prstGeom prst="rect">
@@ -16153,16 +16651,358 @@
           </a:ln>
         </p:spPr>
       </p:pic>
+      <p:pic>
+        <p:nvPicPr>
+          <p:cNvPr id="6" name="Picture 4" descr="t-test">
+            <a:extLst>
+              <a:ext uri="{FF2B5EF4-FFF2-40B4-BE49-F238E27FC236}">
+                <a16:creationId xmlns:a16="http://schemas.microsoft.com/office/drawing/2014/main" id="{7E958396-6F7B-D340-AA10-24FB8F70B9D9}"/>
+              </a:ext>
+            </a:extLst>
+          </p:cNvPr>
+          <p:cNvPicPr>
+            <a:picLocks noChangeAspect="1" noChangeArrowheads="1"/>
+          </p:cNvPicPr>
+          <p:nvPr/>
+        </p:nvPicPr>
+        <p:blipFill>
+          <a:blip r:embed="rId4">
+            <a:extLst>
+              <a:ext uri="{28A0092B-C50C-407E-A947-70E740481C1C}">
+                <a14:useLocalDpi xmlns:a14="http://schemas.microsoft.com/office/drawing/2010/main"/>
+              </a:ext>
+            </a:extLst>
+          </a:blip>
+          <a:srcRect/>
+          <a:stretch>
+            <a:fillRect/>
+          </a:stretch>
+        </p:blipFill>
+        <p:spPr bwMode="auto">
+          <a:xfrm>
+            <a:off x="8027719" y="486121"/>
+            <a:ext cx="3906187" cy="1409700"/>
+          </a:xfrm>
+          <a:prstGeom prst="rect">
+            <a:avLst/>
+          </a:prstGeom>
+          <a:noFill/>
+          <a:extLst>
+            <a:ext uri="{909E8E84-426E-40DD-AFC4-6F175D3DCCD1}">
+              <a14:hiddenFill xmlns:a14="http://schemas.microsoft.com/office/drawing/2010/main">
+                <a:solidFill>
+                  <a:srgbClr val="FFFFFF"/>
+                </a:solidFill>
+              </a14:hiddenFill>
+            </a:ext>
+          </a:extLst>
+        </p:spPr>
+      </p:pic>
       <p:sp>
         <p:nvSpPr>
-          <p:cNvPr id="108" name="Google Shape;108;p15"/>
+          <p:cNvPr id="2" name="TextBox 1">
+            <a:extLst>
+              <a:ext uri="{FF2B5EF4-FFF2-40B4-BE49-F238E27FC236}">
+                <a16:creationId xmlns:a16="http://schemas.microsoft.com/office/drawing/2014/main" id="{70594850-71C2-C441-B6EC-51C01281A53B}"/>
+              </a:ext>
+            </a:extLst>
+          </p:cNvPr>
           <p:cNvSpPr txBox="1"/>
           <p:nvPr/>
         </p:nvSpPr>
         <p:spPr>
           <a:xfrm>
-            <a:off x="7999473" y="2458945"/>
-            <a:ext cx="4116702" cy="907523"/>
+            <a:off x="8763988" y="1998434"/>
+            <a:ext cx="1365662" cy="461665"/>
+          </a:xfrm>
+          <a:prstGeom prst="rect">
+            <a:avLst/>
+          </a:prstGeom>
+          <a:noFill/>
+        </p:spPr>
+        <p:txBody>
+          <a:bodyPr wrap="square" rtlCol="0">
+            <a:spAutoFit/>
+          </a:bodyPr>
+          <a:lstStyle/>
+          <a:p>
+            <a:pPr algn="ctr"/>
+            <a:r>
+              <a:rPr lang="en-US" sz="1200" dirty="0"/>
+              <a:t>reference value</a:t>
+            </a:r>
+          </a:p>
+          <a:p>
+            <a:pPr algn="ctr"/>
+            <a:r>
+              <a:rPr lang="en-US" sz="1200" dirty="0"/>
+              <a:t>(Null Hypothesis)</a:t>
+            </a:r>
+          </a:p>
+        </p:txBody>
+      </p:sp>
+      <p:sp>
+        <p:nvSpPr>
+          <p:cNvPr id="8" name="TextBox 7">
+            <a:extLst>
+              <a:ext uri="{FF2B5EF4-FFF2-40B4-BE49-F238E27FC236}">
+                <a16:creationId xmlns:a16="http://schemas.microsoft.com/office/drawing/2014/main" id="{28796D1A-93C2-EC49-99D3-79EDEEBF5566}"/>
+              </a:ext>
+            </a:extLst>
+          </p:cNvPr>
+          <p:cNvSpPr txBox="1"/>
+          <p:nvPr/>
+        </p:nvSpPr>
+        <p:spPr>
+          <a:xfrm>
+            <a:off x="10028312" y="2002733"/>
+            <a:ext cx="1068780" cy="461665"/>
+          </a:xfrm>
+          <a:prstGeom prst="rect">
+            <a:avLst/>
+          </a:prstGeom>
+          <a:noFill/>
+        </p:spPr>
+        <p:txBody>
+          <a:bodyPr wrap="square" rtlCol="0">
+            <a:spAutoFit/>
+          </a:bodyPr>
+          <a:lstStyle/>
+          <a:p>
+            <a:pPr algn="ctr"/>
+            <a:r>
+              <a:rPr lang="en-US" sz="1200" dirty="0"/>
+              <a:t>observed value</a:t>
+            </a:r>
+          </a:p>
+        </p:txBody>
+      </p:sp>
+      <p:sp>
+        <p:nvSpPr>
+          <p:cNvPr id="9" name="TextBox 8">
+            <a:extLst>
+              <a:ext uri="{FF2B5EF4-FFF2-40B4-BE49-F238E27FC236}">
+                <a16:creationId xmlns:a16="http://schemas.microsoft.com/office/drawing/2014/main" id="{5BDCC29F-9F5C-1440-873D-5D8FB15EF8EF}"/>
+              </a:ext>
+            </a:extLst>
+          </p:cNvPr>
+          <p:cNvSpPr txBox="1"/>
+          <p:nvPr/>
+        </p:nvSpPr>
+        <p:spPr>
+          <a:xfrm>
+            <a:off x="7871569" y="822622"/>
+            <a:ext cx="1068780" cy="461665"/>
+          </a:xfrm>
+          <a:prstGeom prst="rect">
+            <a:avLst/>
+          </a:prstGeom>
+          <a:noFill/>
+        </p:spPr>
+        <p:txBody>
+          <a:bodyPr wrap="square" rtlCol="0">
+            <a:spAutoFit/>
+          </a:bodyPr>
+          <a:lstStyle/>
+          <a:p>
+            <a:pPr algn="ctr"/>
+            <a:r>
+              <a:rPr lang="en-US" sz="1200" dirty="0"/>
+              <a:t>reference distribution</a:t>
+            </a:r>
+          </a:p>
+        </p:txBody>
+      </p:sp>
+      <p:sp>
+        <p:nvSpPr>
+          <p:cNvPr id="10" name="TextBox 9">
+            <a:extLst>
+              <a:ext uri="{FF2B5EF4-FFF2-40B4-BE49-F238E27FC236}">
+                <a16:creationId xmlns:a16="http://schemas.microsoft.com/office/drawing/2014/main" id="{06E408CC-8C53-F245-90B4-0270DB483613}"/>
+              </a:ext>
+            </a:extLst>
+          </p:cNvPr>
+          <p:cNvSpPr txBox="1"/>
+          <p:nvPr/>
+        </p:nvSpPr>
+        <p:spPr>
+          <a:xfrm>
+            <a:off x="11028220" y="822622"/>
+            <a:ext cx="1068780" cy="461665"/>
+          </a:xfrm>
+          <a:prstGeom prst="rect">
+            <a:avLst/>
+          </a:prstGeom>
+          <a:noFill/>
+        </p:spPr>
+        <p:txBody>
+          <a:bodyPr wrap="square" rtlCol="0">
+            <a:spAutoFit/>
+          </a:bodyPr>
+          <a:lstStyle/>
+          <a:p>
+            <a:pPr algn="ctr"/>
+            <a:r>
+              <a:rPr lang="en-US" sz="1200" dirty="0"/>
+              <a:t>observed distribution</a:t>
+            </a:r>
+          </a:p>
+        </p:txBody>
+      </p:sp>
+      <p:sp>
+        <p:nvSpPr>
+          <p:cNvPr id="3" name="TextBox 2">
+            <a:extLst>
+              <a:ext uri="{FF2B5EF4-FFF2-40B4-BE49-F238E27FC236}">
+                <a16:creationId xmlns:a16="http://schemas.microsoft.com/office/drawing/2014/main" id="{54CC6AAC-BE48-F24F-B50C-6FBC87FD3E60}"/>
+              </a:ext>
+            </a:extLst>
+          </p:cNvPr>
+          <p:cNvSpPr txBox="1"/>
+          <p:nvPr/>
+        </p:nvSpPr>
+        <p:spPr>
+          <a:xfrm>
+            <a:off x="8027719" y="4999512"/>
+            <a:ext cx="4069281" cy="1600438"/>
+          </a:xfrm>
+          <a:prstGeom prst="rect">
+            <a:avLst/>
+          </a:prstGeom>
+          <a:noFill/>
+        </p:spPr>
+        <p:txBody>
+          <a:bodyPr wrap="square" rtlCol="0">
+            <a:spAutoFit/>
+          </a:bodyPr>
+          <a:lstStyle/>
+          <a:p>
+            <a:pPr lvl="0">
+              <a:buSzPts val="1100"/>
+            </a:pPr>
+            <a:r>
+              <a:rPr lang="en-US" b="1" dirty="0">
+                <a:solidFill>
+                  <a:srgbClr val="0070C0"/>
+                </a:solidFill>
+                <a:latin typeface="Calibri"/>
+                <a:ea typeface="Calibri"/>
+                <a:cs typeface="Calibri"/>
+                <a:sym typeface="Calibri"/>
+              </a:rPr>
+              <a:t>P-Value:</a:t>
+            </a:r>
+          </a:p>
+          <a:p>
+            <a:pPr lvl="0">
+              <a:buSzPts val="1100"/>
+            </a:pPr>
+            <a:r>
+              <a:rPr lang="en-US" dirty="0">
+                <a:solidFill>
+                  <a:schemeClr val="dk1"/>
+                </a:solidFill>
+                <a:latin typeface="Calibri"/>
+                <a:ea typeface="Calibri"/>
+                <a:cs typeface="Calibri"/>
+                <a:sym typeface="Calibri"/>
+              </a:rPr>
+              <a:t>Given</a:t>
+            </a:r>
+          </a:p>
+          <a:p>
+            <a:pPr marL="285750" lvl="0" indent="-285750">
+              <a:buSzPts val="1100"/>
+              <a:buFont typeface="Arial" panose="020B0604020202020204" pitchFamily="34" charset="0"/>
+              <a:buChar char="•"/>
+            </a:pPr>
+            <a:r>
+              <a:rPr lang="en-US" dirty="0">
+                <a:solidFill>
+                  <a:schemeClr val="dk1"/>
+                </a:solidFill>
+                <a:latin typeface="Calibri"/>
+                <a:ea typeface="Calibri"/>
+                <a:cs typeface="Calibri"/>
+                <a:sym typeface="Calibri"/>
+              </a:rPr>
+              <a:t>null-hypothesis (value) </a:t>
+            </a:r>
+          </a:p>
+          <a:p>
+            <a:pPr marL="285750" lvl="0" indent="-285750">
+              <a:buSzPts val="1100"/>
+              <a:buFont typeface="Arial" panose="020B0604020202020204" pitchFamily="34" charset="0"/>
+              <a:buChar char="•"/>
+            </a:pPr>
+            <a:r>
+              <a:rPr lang="en-US" dirty="0">
+                <a:solidFill>
+                  <a:schemeClr val="dk1"/>
+                </a:solidFill>
+                <a:latin typeface="Calibri"/>
+                <a:ea typeface="Calibri"/>
+                <a:cs typeface="Calibri"/>
+                <a:sym typeface="Calibri"/>
+              </a:rPr>
+              <a:t>distribution</a:t>
+            </a:r>
+          </a:p>
+          <a:p>
+            <a:pPr marL="285750" lvl="0" indent="-285750">
+              <a:buSzPts val="1100"/>
+              <a:buFont typeface="Arial" panose="020B0604020202020204" pitchFamily="34" charset="0"/>
+              <a:buChar char="•"/>
+            </a:pPr>
+            <a:r>
+              <a:rPr lang="en-US" dirty="0">
+                <a:solidFill>
+                  <a:schemeClr val="dk1"/>
+                </a:solidFill>
+                <a:latin typeface="Calibri"/>
+                <a:ea typeface="Calibri"/>
+                <a:cs typeface="Calibri"/>
+                <a:sym typeface="Calibri"/>
+              </a:rPr>
+              <a:t>observed value</a:t>
+            </a:r>
+          </a:p>
+          <a:p>
+            <a:pPr lvl="0">
+              <a:buSzPts val="1100"/>
+            </a:pPr>
+            <a:r>
+              <a:rPr lang="en-US" dirty="0">
+                <a:solidFill>
+                  <a:schemeClr val="dk1"/>
+                </a:solidFill>
+                <a:latin typeface="Calibri"/>
+                <a:ea typeface="Calibri"/>
+                <a:cs typeface="Calibri"/>
+                <a:sym typeface="Calibri"/>
+              </a:rPr>
+              <a:t>Calculate the probability of getting the result "at least as extreme as observed". </a:t>
+            </a:r>
+            <a:endParaRPr lang="en-US" dirty="0"/>
+          </a:p>
+        </p:txBody>
+      </p:sp>
+      <p:sp>
+        <p:nvSpPr>
+          <p:cNvPr id="12" name="Google Shape;106;p15">
+            <a:extLst>
+              <a:ext uri="{FF2B5EF4-FFF2-40B4-BE49-F238E27FC236}">
+                <a16:creationId xmlns:a16="http://schemas.microsoft.com/office/drawing/2014/main" id="{2CE1448C-D3B8-B642-A081-FF386148205D}"/>
+              </a:ext>
+            </a:extLst>
+          </p:cNvPr>
+          <p:cNvSpPr txBox="1"/>
+          <p:nvPr/>
+        </p:nvSpPr>
+        <p:spPr>
+          <a:xfrm>
+            <a:off x="275109" y="754595"/>
+            <a:ext cx="6964298" cy="5845355"/>
           </a:xfrm>
           <a:prstGeom prst="rect">
             <a:avLst/>
@@ -16173,73 +17013,438 @@
           </a:ln>
         </p:spPr>
         <p:txBody>
-          <a:bodyPr spcFirstLastPara="1" wrap="square" lIns="91425" tIns="91425" rIns="91425" bIns="91425" anchor="t" anchorCtr="0">
+          <a:bodyPr spcFirstLastPara="1" wrap="square" lIns="91425" tIns="45700" rIns="91425" bIns="45700" anchor="t" anchorCtr="0">
             <a:noAutofit/>
           </a:bodyPr>
           <a:lstStyle/>
           <a:p>
             <a:pPr marL="0" marR="0" lvl="0" indent="0" algn="l" rtl="0">
-              <a:lnSpc>
-                <a:spcPct val="100000"/>
-              </a:lnSpc>
-              <a:spcBef>
-                <a:spcPts val="0"/>
-              </a:spcBef>
-              <a:spcAft>
-                <a:spcPts val="0"/>
-              </a:spcAft>
+              <a:spcBef>
+                <a:spcPts val="0"/>
+              </a:spcBef>
+              <a:spcAft>
+                <a:spcPts val="0"/>
+              </a:spcAft>
+              <a:buSzPts val="1100"/>
               <a:buNone/>
             </a:pPr>
             <a:r>
+              <a:rPr lang="en-US" dirty="0">
+                <a:solidFill>
+                  <a:schemeClr val="dk1"/>
+                </a:solidFill>
+                <a:latin typeface="Calibri"/>
+                <a:ea typeface="Calibri"/>
+                <a:cs typeface="Calibri"/>
+                <a:sym typeface="Calibri"/>
+              </a:rPr>
+              <a:t>A </a:t>
+            </a:r>
+            <a:r>
               <a:rPr lang="en-US" b="1" dirty="0">
                 <a:solidFill>
-                  <a:schemeClr val="dk1"/>
-                </a:solidFill>
-                <a:latin typeface="Calibri"/>
-                <a:ea typeface="Calibri"/>
-                <a:cs typeface="Calibri"/>
-                <a:sym typeface="Calibri"/>
-              </a:rPr>
-              <a:t>Two types of Errors:</a:t>
+                  <a:srgbClr val="0000FF"/>
+                </a:solidFill>
+                <a:latin typeface="Calibri"/>
+                <a:ea typeface="Calibri"/>
+                <a:cs typeface="Calibri"/>
+                <a:sym typeface="Calibri"/>
+              </a:rPr>
+              <a:t>p-value</a:t>
+            </a:r>
+            <a:r>
+              <a:rPr lang="en-US" dirty="0">
+                <a:solidFill>
+                  <a:schemeClr val="dk1"/>
+                </a:solidFill>
+                <a:latin typeface="Calibri"/>
+                <a:ea typeface="Calibri"/>
+                <a:cs typeface="Calibri"/>
+                <a:sym typeface="Calibri"/>
+              </a:rPr>
+              <a:t> (probability value) is a probability </a:t>
             </a:r>
           </a:p>
           <a:p>
             <a:pPr marL="0" marR="0" lvl="0" indent="0" algn="l" rtl="0">
-              <a:lnSpc>
-                <a:spcPct val="100000"/>
-              </a:lnSpc>
-              <a:spcBef>
-                <a:spcPts val="0"/>
-              </a:spcBef>
-              <a:spcAft>
-                <a:spcPts val="0"/>
-              </a:spcAft>
+              <a:spcBef>
+                <a:spcPts val="0"/>
+              </a:spcBef>
+              <a:spcAft>
+                <a:spcPts val="0"/>
+              </a:spcAft>
+              <a:buSzPts val="1100"/>
               <a:buNone/>
             </a:pPr>
             <a:r>
+              <a:rPr lang="en-US" dirty="0">
+                <a:solidFill>
+                  <a:schemeClr val="dk1"/>
+                </a:solidFill>
+                <a:latin typeface="Calibri"/>
+                <a:ea typeface="Calibri"/>
+                <a:cs typeface="Calibri"/>
+                <a:sym typeface="Calibri"/>
+              </a:rPr>
+              <a:t>of getting results at least as extreme as observed. </a:t>
+            </a:r>
+          </a:p>
+          <a:p>
+            <a:pPr marL="0" marR="0" lvl="0" indent="0" algn="l" rtl="0">
+              <a:spcBef>
+                <a:spcPts val="0"/>
+              </a:spcBef>
+              <a:spcAft>
+                <a:spcPts val="0"/>
+              </a:spcAft>
+              <a:buSzPts val="1100"/>
+              <a:buNone/>
+            </a:pPr>
+            <a:br>
+              <a:rPr lang="en-US" dirty="0">
+                <a:solidFill>
+                  <a:schemeClr val="dk1"/>
+                </a:solidFill>
+                <a:latin typeface="Calibri"/>
+                <a:ea typeface="Calibri"/>
+                <a:cs typeface="Calibri"/>
+                <a:sym typeface="Calibri"/>
+              </a:rPr>
+            </a:br>
+            <a:r>
+              <a:rPr lang="en-US" dirty="0">
+                <a:solidFill>
+                  <a:srgbClr val="00B050"/>
+                </a:solidFill>
+                <a:latin typeface="Calibri"/>
+                <a:ea typeface="Calibri"/>
+                <a:cs typeface="Calibri"/>
+                <a:sym typeface="Calibri"/>
+              </a:rPr>
+              <a:t>We are given:</a:t>
+            </a:r>
+          </a:p>
+          <a:p>
+            <a:pPr marL="0" marR="0" lvl="0" indent="0" algn="l" rtl="0">
+              <a:spcBef>
+                <a:spcPts val="0"/>
+              </a:spcBef>
+              <a:spcAft>
+                <a:spcPts val="0"/>
+              </a:spcAft>
+              <a:buSzPts val="1100"/>
+              <a:buNone/>
+            </a:pPr>
+            <a:r>
+              <a:rPr lang="en-US" dirty="0">
+                <a:solidFill>
+                  <a:srgbClr val="00B050"/>
+                </a:solidFill>
+                <a:latin typeface="Calibri"/>
+                <a:ea typeface="Calibri"/>
+                <a:cs typeface="Calibri"/>
+                <a:sym typeface="Calibri"/>
+              </a:rPr>
+              <a:t>        1. A null-hypothesis (</a:t>
+            </a:r>
+            <a:r>
               <a:rPr lang="en-US" b="1" dirty="0">
                 <a:solidFill>
-                  <a:srgbClr val="FF0000"/>
-                </a:solidFill>
-                <a:latin typeface="Calibri"/>
-                <a:ea typeface="Calibri"/>
-                <a:cs typeface="Calibri"/>
-                <a:sym typeface="Calibri"/>
-              </a:rPr>
-              <a:t>Type I error</a:t>
+                  <a:srgbClr val="00B050"/>
+                </a:solidFill>
+                <a:latin typeface="Calibri"/>
+                <a:ea typeface="Calibri"/>
+                <a:cs typeface="Calibri"/>
+                <a:sym typeface="Calibri"/>
+              </a:rPr>
+              <a:t>value</a:t>
             </a:r>
             <a:r>
               <a:rPr lang="en-US" dirty="0">
                 <a:solidFill>
-                  <a:schemeClr val="dk1"/>
-                </a:solidFill>
-                <a:latin typeface="Calibri"/>
-                <a:ea typeface="Calibri"/>
-                <a:cs typeface="Calibri"/>
-                <a:sym typeface="Calibri"/>
-              </a:rPr>
-              <a:t> - false rejection of the null hypothesis</a:t>
-            </a:r>
+                  <a:srgbClr val="00B050"/>
+                </a:solidFill>
+                <a:latin typeface="Calibri"/>
+                <a:ea typeface="Calibri"/>
+                <a:cs typeface="Calibri"/>
+                <a:sym typeface="Calibri"/>
+              </a:rPr>
+              <a:t>)</a:t>
+            </a:r>
+          </a:p>
+          <a:p>
+            <a:pPr lvl="0">
+              <a:buSzPts val="1100"/>
+            </a:pPr>
+            <a:r>
+              <a:rPr lang="en-US" dirty="0">
+                <a:solidFill>
+                  <a:srgbClr val="00B050"/>
+                </a:solidFill>
+                <a:latin typeface="Calibri"/>
+                <a:ea typeface="Calibri"/>
+                <a:cs typeface="Calibri"/>
+                <a:sym typeface="Calibri"/>
+              </a:rPr>
+              <a:t>        2. A distribution: explicit or theoretical (</a:t>
+            </a:r>
+            <a:r>
+              <a:rPr lang="en-US" b="1" u="sng" dirty="0">
+                <a:solidFill>
+                  <a:srgbClr val="00B050"/>
+                </a:solidFill>
+                <a:latin typeface="Calibri"/>
+                <a:ea typeface="Calibri"/>
+                <a:cs typeface="Calibri"/>
+                <a:sym typeface="Calibri"/>
+              </a:rPr>
+              <a:t>reference</a:t>
+            </a:r>
+            <a:r>
+              <a:rPr lang="en-US" dirty="0">
+                <a:solidFill>
+                  <a:srgbClr val="00B050"/>
+                </a:solidFill>
+                <a:latin typeface="Calibri"/>
+                <a:ea typeface="Calibri"/>
+                <a:cs typeface="Calibri"/>
+                <a:sym typeface="Calibri"/>
+              </a:rPr>
+              <a:t>), or sample distribution (</a:t>
+            </a:r>
+            <a:r>
+              <a:rPr lang="en-US" b="1" u="sng" dirty="0">
+                <a:solidFill>
+                  <a:srgbClr val="00B050"/>
+                </a:solidFill>
+                <a:latin typeface="Calibri"/>
+                <a:ea typeface="Calibri"/>
+                <a:cs typeface="Calibri"/>
+                <a:sym typeface="Calibri"/>
+              </a:rPr>
+              <a:t>observed</a:t>
+            </a:r>
+            <a:r>
+              <a:rPr lang="en-US" dirty="0">
+                <a:solidFill>
+                  <a:srgbClr val="00B050"/>
+                </a:solidFill>
+                <a:latin typeface="Calibri"/>
+                <a:ea typeface="Calibri"/>
+                <a:cs typeface="Calibri"/>
+                <a:sym typeface="Calibri"/>
+              </a:rPr>
+              <a:t>).</a:t>
+            </a:r>
+            <a:br>
+              <a:rPr lang="en-US" dirty="0">
+                <a:solidFill>
+                  <a:srgbClr val="00B050"/>
+                </a:solidFill>
+                <a:latin typeface="Calibri"/>
+                <a:ea typeface="Calibri"/>
+                <a:cs typeface="Calibri"/>
+                <a:sym typeface="Calibri"/>
+              </a:rPr>
+            </a:br>
+            <a:r>
+              <a:rPr lang="en-US" dirty="0">
+                <a:solidFill>
+                  <a:srgbClr val="00B050"/>
+                </a:solidFill>
+                <a:latin typeface="Calibri"/>
+                <a:ea typeface="Calibri"/>
+                <a:cs typeface="Calibri"/>
+                <a:sym typeface="Calibri"/>
+              </a:rPr>
+              <a:t>             Most common distributions - Gaussian, t-Student, Chi-squared, F-, etc.</a:t>
+            </a:r>
+          </a:p>
+          <a:p>
+            <a:pPr lvl="0">
+              <a:buSzPts val="1100"/>
+            </a:pPr>
+            <a:r>
+              <a:rPr lang="en-US" dirty="0">
+                <a:solidFill>
+                  <a:srgbClr val="00B050"/>
+                </a:solidFill>
+                <a:latin typeface="Calibri"/>
+                <a:ea typeface="Calibri"/>
+                <a:cs typeface="Calibri"/>
+                <a:sym typeface="Calibri"/>
+              </a:rPr>
+              <a:t>        3. Observed </a:t>
+            </a:r>
+            <a:r>
+              <a:rPr lang="en-US" b="1" dirty="0">
+                <a:solidFill>
+                  <a:srgbClr val="00B050"/>
+                </a:solidFill>
+                <a:latin typeface="Calibri"/>
+                <a:ea typeface="Calibri"/>
+                <a:cs typeface="Calibri"/>
+                <a:sym typeface="Calibri"/>
+              </a:rPr>
+              <a:t>value</a:t>
+            </a:r>
+          </a:p>
+          <a:p>
+            <a:pPr lvl="0">
+              <a:buSzPts val="1100"/>
+            </a:pPr>
+            <a:endParaRPr lang="en-US" dirty="0">
+              <a:solidFill>
+                <a:srgbClr val="00B050"/>
+              </a:solidFill>
+              <a:latin typeface="Calibri"/>
+              <a:ea typeface="Calibri"/>
+              <a:cs typeface="Calibri"/>
+              <a:sym typeface="Calibri"/>
+            </a:endParaRPr>
+          </a:p>
+          <a:p>
+            <a:pPr lvl="0">
+              <a:buSzPts val="1100"/>
+            </a:pPr>
+            <a:r>
+              <a:rPr lang="en-US" dirty="0">
+                <a:solidFill>
+                  <a:srgbClr val="00B050"/>
+                </a:solidFill>
+                <a:latin typeface="Calibri"/>
+                <a:ea typeface="Calibri"/>
+                <a:cs typeface="Calibri"/>
+                <a:sym typeface="Calibri"/>
+              </a:rPr>
+              <a:t>From that we calculate the probability of getting a result "at least as extreme as observed" ?</a:t>
+            </a:r>
+          </a:p>
+          <a:p>
+            <a:pPr marL="0" marR="0" lvl="0" indent="0" algn="l" rtl="0">
+              <a:spcBef>
+                <a:spcPts val="0"/>
+              </a:spcBef>
+              <a:spcAft>
+                <a:spcPts val="0"/>
+              </a:spcAft>
+              <a:buSzPts val="1100"/>
+              <a:buNone/>
+            </a:pPr>
+            <a:endParaRPr lang="en-US" sz="800" dirty="0">
+              <a:solidFill>
+                <a:schemeClr val="dk1"/>
+              </a:solidFill>
+              <a:latin typeface="Calibri"/>
+              <a:ea typeface="Calibri"/>
+              <a:cs typeface="Calibri"/>
+              <a:sym typeface="Calibri"/>
+            </a:endParaRPr>
+          </a:p>
+          <a:p>
+            <a:pPr marL="0" marR="0" lvl="0" indent="0" algn="l" rtl="0">
+              <a:spcBef>
+                <a:spcPts val="0"/>
+              </a:spcBef>
+              <a:spcAft>
+                <a:spcPts val="0"/>
+              </a:spcAft>
+              <a:buSzPts val="1100"/>
+              <a:buNone/>
+            </a:pPr>
+            <a:endParaRPr lang="en-US" dirty="0">
+              <a:solidFill>
+                <a:schemeClr val="dk1"/>
+              </a:solidFill>
+              <a:latin typeface="Calibri"/>
+              <a:ea typeface="Calibri"/>
+              <a:cs typeface="Calibri"/>
+              <a:sym typeface="Calibri"/>
+            </a:endParaRPr>
+          </a:p>
+          <a:p>
+            <a:pPr marL="0" marR="0" lvl="0" indent="0" algn="l" rtl="0">
+              <a:spcBef>
+                <a:spcPts val="0"/>
+              </a:spcBef>
+              <a:spcAft>
+                <a:spcPts val="0"/>
+              </a:spcAft>
+              <a:buSzPts val="1100"/>
+              <a:buNone/>
+            </a:pPr>
+            <a:r>
+              <a:rPr lang="en-US" dirty="0">
+                <a:solidFill>
+                  <a:schemeClr val="dk1"/>
+                </a:solidFill>
+                <a:latin typeface="Calibri"/>
+                <a:ea typeface="Calibri"/>
+                <a:cs typeface="Calibri"/>
+                <a:sym typeface="Calibri"/>
+              </a:rPr>
+              <a:t>If this probability is very small, this means </a:t>
+            </a:r>
+          </a:p>
+          <a:p>
+            <a:pPr marL="0" marR="0" lvl="0" indent="0" algn="l" rtl="0">
+              <a:spcBef>
+                <a:spcPts val="0"/>
+              </a:spcBef>
+              <a:spcAft>
+                <a:spcPts val="0"/>
+              </a:spcAft>
+              <a:buSzPts val="1100"/>
+              <a:buNone/>
+            </a:pPr>
+            <a:r>
+              <a:rPr lang="en-US" dirty="0">
+                <a:solidFill>
+                  <a:schemeClr val="dk1"/>
+                </a:solidFill>
+                <a:latin typeface="Calibri"/>
+                <a:ea typeface="Calibri"/>
+                <a:cs typeface="Calibri"/>
+                <a:sym typeface="Calibri"/>
+              </a:rPr>
+              <a:t>that the result is unlikely to be explained by the null hypothesis.</a:t>
+            </a:r>
+          </a:p>
+          <a:p>
+            <a:pPr marL="0" marR="0" lvl="0" indent="0" algn="l" rtl="0">
+              <a:spcBef>
+                <a:spcPts val="0"/>
+              </a:spcBef>
+              <a:spcAft>
+                <a:spcPts val="0"/>
+              </a:spcAft>
+              <a:buSzPts val="1100"/>
+              <a:buNone/>
+            </a:pPr>
+            <a:r>
+              <a:rPr lang="en-US" dirty="0">
+                <a:solidFill>
+                  <a:schemeClr val="dk1"/>
+                </a:solidFill>
+                <a:latin typeface="Calibri"/>
+                <a:ea typeface="Calibri"/>
+                <a:cs typeface="Calibri"/>
+                <a:sym typeface="Calibri"/>
+              </a:rPr>
+              <a:t>So we reject the null hypothesis.</a:t>
+            </a:r>
+          </a:p>
+          <a:p>
+            <a:pPr marL="0" marR="0" lvl="0" indent="0" algn="l" rtl="0">
+              <a:spcBef>
+                <a:spcPts val="0"/>
+              </a:spcBef>
+              <a:spcAft>
+                <a:spcPts val="0"/>
+              </a:spcAft>
+              <a:buSzPts val="1100"/>
+              <a:buNone/>
+            </a:pPr>
             <a:endParaRPr dirty="0">
               <a:solidFill>
                 <a:schemeClr val="dk1"/>
@@ -16252,17 +17457,228 @@
           </a:p>
           <a:p>
             <a:pPr marL="0" marR="0" lvl="0" indent="0" algn="l" rtl="0">
-              <a:lnSpc>
-                <a:spcPct val="100000"/>
-              </a:lnSpc>
-              <a:spcBef>
-                <a:spcPts val="0"/>
-              </a:spcBef>
-              <a:spcAft>
-                <a:spcPts val="0"/>
-              </a:spcAft>
+              <a:spcBef>
+                <a:spcPts val="0"/>
+              </a:spcBef>
+              <a:spcAft>
+                <a:spcPts val="0"/>
+              </a:spcAft>
+              <a:buSzPts val="1100"/>
               <a:buNone/>
             </a:pPr>
+            <a:endParaRPr sz="800" dirty="0">
+              <a:solidFill>
+                <a:schemeClr val="dk1"/>
+              </a:solidFill>
+              <a:latin typeface="Calibri"/>
+              <a:ea typeface="Calibri"/>
+              <a:cs typeface="Calibri"/>
+              <a:sym typeface="Calibri"/>
+            </a:endParaRPr>
+          </a:p>
+          <a:p>
+            <a:pPr lvl="0">
+              <a:buSzPts val="1100"/>
+            </a:pPr>
+            <a:r>
+              <a:rPr lang="en-US" sz="1200" b="1" dirty="0">
+                <a:solidFill>
+                  <a:srgbClr val="0070C0"/>
+                </a:solidFill>
+                <a:latin typeface="Courier New"/>
+                <a:ea typeface="Courier New"/>
+                <a:cs typeface="Courier New"/>
+                <a:sym typeface="Courier New"/>
+              </a:rPr>
+              <a:t>            P-value    probability of observed</a:t>
+            </a:r>
+            <a:endParaRPr sz="1200" b="1" dirty="0">
+              <a:solidFill>
+                <a:srgbClr val="0070C0"/>
+              </a:solidFill>
+              <a:latin typeface="Courier New"/>
+              <a:ea typeface="Courier New"/>
+              <a:cs typeface="Courier New"/>
+              <a:sym typeface="Courier New"/>
+            </a:endParaRPr>
+          </a:p>
+          <a:p>
+            <a:pPr lvl="0">
+              <a:buSzPts val="1100"/>
+            </a:pPr>
+            <a:r>
+              <a:rPr lang="en-US" sz="1200" b="1" dirty="0">
+                <a:solidFill>
+                  <a:srgbClr val="0070C0"/>
+                </a:solidFill>
+                <a:latin typeface="Courier New"/>
+                <a:ea typeface="Courier New"/>
+                <a:cs typeface="Courier New"/>
+                <a:sym typeface="Courier New"/>
+              </a:rPr>
+              <a:t>            -------------------------------</a:t>
+            </a:r>
+            <a:endParaRPr sz="1200" b="1" dirty="0">
+              <a:solidFill>
+                <a:srgbClr val="0070C0"/>
+              </a:solidFill>
+              <a:latin typeface="Courier New"/>
+              <a:ea typeface="Courier New"/>
+              <a:cs typeface="Courier New"/>
+              <a:sym typeface="Courier New"/>
+            </a:endParaRPr>
+          </a:p>
+          <a:p>
+            <a:pPr lvl="0">
+              <a:buSzPts val="1100"/>
+            </a:pPr>
+            <a:r>
+              <a:rPr lang="en-US" sz="1200" b="1" dirty="0">
+                <a:solidFill>
+                  <a:srgbClr val="0070C0"/>
+                </a:solidFill>
+                <a:latin typeface="Courier New"/>
+                <a:ea typeface="Courier New"/>
+                <a:cs typeface="Courier New"/>
+                <a:sym typeface="Courier New"/>
+              </a:rPr>
+              <a:t>            P &lt; 0.05         5%</a:t>
+            </a:r>
+            <a:endParaRPr sz="1200" b="1" dirty="0">
+              <a:solidFill>
+                <a:srgbClr val="0070C0"/>
+              </a:solidFill>
+              <a:latin typeface="Courier New"/>
+              <a:ea typeface="Courier New"/>
+              <a:cs typeface="Courier New"/>
+              <a:sym typeface="Courier New"/>
+            </a:endParaRPr>
+          </a:p>
+          <a:p>
+            <a:pPr lvl="0">
+              <a:buSzPts val="1100"/>
+            </a:pPr>
+            <a:r>
+              <a:rPr lang="en-US" sz="1200" b="1" dirty="0">
+                <a:solidFill>
+                  <a:srgbClr val="0070C0"/>
+                </a:solidFill>
+                <a:latin typeface="Courier New"/>
+                <a:ea typeface="Courier New"/>
+                <a:cs typeface="Courier New"/>
+                <a:sym typeface="Courier New"/>
+              </a:rPr>
+              <a:t>            P &lt; 0.01         1%</a:t>
+            </a:r>
+            <a:endParaRPr sz="1200" b="1" dirty="0">
+              <a:solidFill>
+                <a:srgbClr val="0070C0"/>
+              </a:solidFill>
+              <a:latin typeface="Courier New"/>
+              <a:ea typeface="Courier New"/>
+              <a:cs typeface="Courier New"/>
+              <a:sym typeface="Courier New"/>
+            </a:endParaRPr>
+          </a:p>
+          <a:p>
+            <a:pPr lvl="0">
+              <a:buSzPts val="1100"/>
+            </a:pPr>
+            <a:r>
+              <a:rPr lang="en-US" sz="1200" b="1" dirty="0">
+                <a:solidFill>
+                  <a:srgbClr val="0070C0"/>
+                </a:solidFill>
+                <a:latin typeface="Courier New"/>
+                <a:ea typeface="Courier New"/>
+                <a:cs typeface="Courier New"/>
+                <a:sym typeface="Courier New"/>
+              </a:rPr>
+              <a:t>            p &lt; 0.001        0.1%</a:t>
+            </a:r>
+            <a:endParaRPr sz="1200" b="1" dirty="0">
+              <a:solidFill>
+                <a:srgbClr val="0070C0"/>
+              </a:solidFill>
+              <a:latin typeface="Courier New"/>
+              <a:ea typeface="Courier New"/>
+              <a:cs typeface="Courier New"/>
+              <a:sym typeface="Courier New"/>
+            </a:endParaRPr>
+          </a:p>
+          <a:p>
+            <a:pPr lvl="0">
+              <a:buSzPts val="1100"/>
+            </a:pPr>
+            <a:r>
+              <a:rPr lang="en-US" sz="1200" b="1" dirty="0">
+                <a:solidFill>
+                  <a:srgbClr val="0070C0"/>
+                </a:solidFill>
+                <a:latin typeface="Courier New"/>
+                <a:ea typeface="Courier New"/>
+                <a:cs typeface="Courier New"/>
+                <a:sym typeface="Courier New"/>
+              </a:rPr>
+              <a:t>            -------------------------------</a:t>
+            </a:r>
+            <a:endParaRPr sz="1200" dirty="0">
+              <a:solidFill>
+                <a:schemeClr val="dk1"/>
+              </a:solidFill>
+              <a:latin typeface="Calibri"/>
+              <a:ea typeface="Calibri"/>
+              <a:cs typeface="Calibri"/>
+              <a:sym typeface="Calibri"/>
+            </a:endParaRPr>
+          </a:p>
+          <a:p>
+            <a:pPr lvl="0">
+              <a:buSzPts val="1100"/>
+            </a:pPr>
+            <a:endParaRPr lang="en-US" dirty="0">
+              <a:solidFill>
+                <a:schemeClr val="dk1"/>
+              </a:solidFill>
+              <a:latin typeface="Calibri"/>
+              <a:ea typeface="Calibri"/>
+              <a:cs typeface="Calibri"/>
+              <a:sym typeface="Calibri"/>
+            </a:endParaRPr>
+          </a:p>
+          <a:p>
+            <a:pPr lvl="0">
+              <a:buSzPts val="1100"/>
+            </a:pPr>
+            <a:r>
+              <a:rPr lang="en-US" dirty="0">
+                <a:solidFill>
+                  <a:schemeClr val="dk1"/>
+                </a:solidFill>
+                <a:latin typeface="Calibri"/>
+                <a:ea typeface="Calibri"/>
+                <a:cs typeface="Calibri"/>
+                <a:sym typeface="Calibri"/>
+              </a:rPr>
+              <a:t>A small p-value (typically ≤ 0.05) indicates strong </a:t>
+            </a:r>
+          </a:p>
+          <a:p>
+            <a:pPr lvl="0">
+              <a:buSzPts val="1100"/>
+            </a:pPr>
+            <a:r>
+              <a:rPr lang="en-US" dirty="0">
+                <a:solidFill>
+                  <a:schemeClr val="dk1"/>
+                </a:solidFill>
+                <a:latin typeface="Calibri"/>
+                <a:ea typeface="Calibri"/>
+                <a:cs typeface="Calibri"/>
+                <a:sym typeface="Calibri"/>
+              </a:rPr>
+              <a:t>evidence </a:t>
+            </a:r>
             <a:r>
               <a:rPr lang="en-US" b="1" dirty="0">
                 <a:solidFill>
@@ -16273,7 +17689,7 @@
                 <a:cs typeface="Calibri"/>
                 <a:sym typeface="Calibri"/>
               </a:rPr>
-              <a:t>Type II error</a:t>
+              <a:t>against</a:t>
             </a:r>
             <a:r>
               <a:rPr lang="en-US" dirty="0">
@@ -16285,8 +17701,92 @@
                 <a:cs typeface="Calibri"/>
                 <a:sym typeface="Calibri"/>
               </a:rPr>
-              <a:t> - false acceptance of the null hypothesis</a:t>
-            </a:r>
+              <a:t> the null hypothesis, </a:t>
+            </a:r>
+          </a:p>
+          <a:p>
+            <a:pPr lvl="0">
+              <a:buSzPts val="1100"/>
+            </a:pPr>
+            <a:r>
+              <a:rPr lang="en-US" dirty="0">
+                <a:solidFill>
+                  <a:schemeClr val="dk1"/>
+                </a:solidFill>
+                <a:latin typeface="Calibri"/>
+                <a:ea typeface="Calibri"/>
+                <a:cs typeface="Calibri"/>
+                <a:sym typeface="Calibri"/>
+              </a:rPr>
+              <a:t>so you reject the null hypothesis. </a:t>
+            </a:r>
+          </a:p>
+          <a:p>
+            <a:pPr lvl="0">
+              <a:buSzPts val="1100"/>
+            </a:pPr>
+            <a:r>
+              <a:rPr lang="en-US" dirty="0">
+                <a:solidFill>
+                  <a:schemeClr val="dk1"/>
+                </a:solidFill>
+                <a:latin typeface="Calibri"/>
+                <a:ea typeface="Calibri"/>
+                <a:cs typeface="Calibri"/>
+                <a:sym typeface="Calibri"/>
+              </a:rPr>
+              <a:t>People say that this evidence is "</a:t>
+            </a:r>
+            <a:r>
+              <a:rPr lang="en-US" b="1" dirty="0">
+                <a:solidFill>
+                  <a:srgbClr val="FF0000"/>
+                </a:solidFill>
+                <a:latin typeface="Calibri"/>
+                <a:ea typeface="Calibri"/>
+                <a:cs typeface="Calibri"/>
+                <a:sym typeface="Calibri"/>
+              </a:rPr>
+              <a:t>statistically significant</a:t>
+            </a:r>
+            <a:r>
+              <a:rPr lang="en-US" dirty="0">
+                <a:solidFill>
+                  <a:schemeClr val="dk1"/>
+                </a:solidFill>
+                <a:latin typeface="Calibri"/>
+                <a:ea typeface="Calibri"/>
+                <a:cs typeface="Calibri"/>
+                <a:sym typeface="Calibri"/>
+              </a:rPr>
+              <a:t>".</a:t>
+            </a:r>
+          </a:p>
+          <a:p>
+            <a:pPr marL="0" marR="0" lvl="0" indent="0" algn="l" rtl="0">
+              <a:spcBef>
+                <a:spcPts val="0"/>
+              </a:spcBef>
+              <a:spcAft>
+                <a:spcPts val="0"/>
+              </a:spcAft>
+              <a:buSzPts val="1100"/>
+              <a:buNone/>
+            </a:pPr>
+            <a:endParaRPr sz="800" dirty="0">
+              <a:solidFill>
+                <a:schemeClr val="dk1"/>
+              </a:solidFill>
+              <a:latin typeface="Calibri"/>
+              <a:ea typeface="Calibri"/>
+              <a:cs typeface="Calibri"/>
+              <a:sym typeface="Calibri"/>
+            </a:endParaRPr>
+          </a:p>
+          <a:p>
+            <a:pPr lvl="0">
+              <a:buSzPts val="1100"/>
+            </a:pPr>
             <a:endParaRPr dirty="0">
               <a:solidFill>
                 <a:schemeClr val="dk1"/>
@@ -16299,375 +17799,6 @@
           </a:p>
         </p:txBody>
       </p:sp>
-      <p:graphicFrame>
-        <p:nvGraphicFramePr>
-          <p:cNvPr id="109" name="Google Shape;109;p15"/>
-          <p:cNvGraphicFramePr/>
-          <p:nvPr>
-            <p:extLst>
-              <p:ext uri="{D42A27DB-BD31-4B8C-83A1-F6EECF244321}">
-                <p14:modId xmlns:p14="http://schemas.microsoft.com/office/powerpoint/2010/main" val="1216816036"/>
-              </p:ext>
-            </p:extLst>
-          </p:nvPr>
-        </p:nvGraphicFramePr>
-        <p:xfrm>
-          <a:off x="7999473" y="3366468"/>
-          <a:ext cx="4126050" cy="2382300"/>
-        </p:xfrm>
-        <a:graphic>
-          <a:graphicData uri="http://schemas.openxmlformats.org/drawingml/2006/table">
-            <a:tbl>
-              <a:tblPr>
-                <a:noFill/>
-                <a:tableStyleId>{B1618C5A-BF4F-44D7-ADB2-C5301EF81F8A}</a:tableStyleId>
-              </a:tblPr>
-              <a:tblGrid>
-                <a:gridCol w="1375350">
-                  <a:extLst>
-                    <a:ext uri="{9D8B030D-6E8A-4147-A177-3AD203B41FA5}">
-                      <a16:colId xmlns:a16="http://schemas.microsoft.com/office/drawing/2014/main" val="20000"/>
-                    </a:ext>
-                  </a:extLst>
-                </a:gridCol>
-                <a:gridCol w="1375350">
-                  <a:extLst>
-                    <a:ext uri="{9D8B030D-6E8A-4147-A177-3AD203B41FA5}">
-                      <a16:colId xmlns:a16="http://schemas.microsoft.com/office/drawing/2014/main" val="20001"/>
-                    </a:ext>
-                  </a:extLst>
-                </a:gridCol>
-                <a:gridCol w="1375350">
-                  <a:extLst>
-                    <a:ext uri="{9D8B030D-6E8A-4147-A177-3AD203B41FA5}">
-                      <a16:colId xmlns:a16="http://schemas.microsoft.com/office/drawing/2014/main" val="20002"/>
-                    </a:ext>
-                  </a:extLst>
-                </a:gridCol>
-              </a:tblGrid>
-              <a:tr h="794100">
-                <a:tc>
-                  <a:txBody>
-                    <a:bodyPr/>
-                    <a:lstStyle/>
-                    <a:p>
-                      <a:pPr marL="0" lvl="0" indent="0" algn="l" rtl="0">
-                        <a:spcBef>
-                          <a:spcPts val="0"/>
-                        </a:spcBef>
-                        <a:spcAft>
-                          <a:spcPts val="0"/>
-                        </a:spcAft>
-                        <a:buNone/>
-                      </a:pPr>
-                      <a:r>
-                        <a:rPr lang="en-US"/>
-                        <a:t>        \ Decision</a:t>
-                      </a:r>
-                      <a:endParaRPr/>
-                    </a:p>
-                    <a:p>
-                      <a:pPr marL="0" lvl="0" indent="0" algn="l" rtl="0">
-                        <a:spcBef>
-                          <a:spcPts val="0"/>
-                        </a:spcBef>
-                        <a:spcAft>
-                          <a:spcPts val="0"/>
-                        </a:spcAft>
-                        <a:buNone/>
-                      </a:pPr>
-                      <a:r>
-                        <a:rPr lang="en-US"/>
-                        <a:t>Truth \ </a:t>
-                      </a:r>
-                      <a:endParaRPr/>
-                    </a:p>
-                  </a:txBody>
-                  <a:tcPr marL="91425" marR="91425" marT="91425" marB="91425"/>
-                </a:tc>
-                <a:tc>
-                  <a:txBody>
-                    <a:bodyPr/>
-                    <a:lstStyle/>
-                    <a:p>
-                      <a:pPr marL="0" lvl="0" indent="0" algn="l" rtl="0">
-                        <a:spcBef>
-                          <a:spcPts val="0"/>
-                        </a:spcBef>
-                        <a:spcAft>
-                          <a:spcPts val="0"/>
-                        </a:spcAft>
-                        <a:buNone/>
-                      </a:pPr>
-                      <a:r>
-                        <a:rPr lang="en-US" dirty="0"/>
-                        <a:t>Decision to Accept H</a:t>
-                      </a:r>
-                      <a:r>
-                        <a:rPr lang="en-US" baseline="-25000" dirty="0"/>
-                        <a:t>0</a:t>
-                      </a:r>
-                      <a:endParaRPr dirty="0"/>
-                    </a:p>
-                  </a:txBody>
-                  <a:tcPr marL="91425" marR="91425" marT="91425" marB="91425"/>
-                </a:tc>
-                <a:tc>
-                  <a:txBody>
-                    <a:bodyPr/>
-                    <a:lstStyle/>
-                    <a:p>
-                      <a:pPr marL="0" lvl="0" indent="0" algn="l" rtl="0">
-                        <a:spcBef>
-                          <a:spcPts val="0"/>
-                        </a:spcBef>
-                        <a:spcAft>
-                          <a:spcPts val="0"/>
-                        </a:spcAft>
-                        <a:buClr>
-                          <a:schemeClr val="dk1"/>
-                        </a:buClr>
-                        <a:buSzPts val="1100"/>
-                        <a:buFont typeface="Arial"/>
-                        <a:buNone/>
-                      </a:pPr>
-                      <a:r>
-                        <a:rPr lang="en-US" dirty="0">
-                          <a:solidFill>
-                            <a:schemeClr val="dk1"/>
-                          </a:solidFill>
-                        </a:rPr>
-                        <a:t>Decision to Reject </a:t>
-                      </a:r>
-                      <a:r>
-                        <a:rPr lang="en-US" dirty="0"/>
-                        <a:t>H</a:t>
-                      </a:r>
-                      <a:r>
-                        <a:rPr lang="en-US" baseline="-25000" dirty="0"/>
-                        <a:t>0</a:t>
-                      </a:r>
-                      <a:endParaRPr dirty="0"/>
-                    </a:p>
-                  </a:txBody>
-                  <a:tcPr marL="91425" marR="91425" marT="91425" marB="91425"/>
-                </a:tc>
-                <a:extLst>
-                  <a:ext uri="{0D108BD9-81ED-4DB2-BD59-A6C34878D82A}">
-                    <a16:rowId xmlns:a16="http://schemas.microsoft.com/office/drawing/2014/main" val="10000"/>
-                  </a:ext>
-                </a:extLst>
-              </a:tr>
-              <a:tr h="794100">
-                <a:tc>
-                  <a:txBody>
-                    <a:bodyPr/>
-                    <a:lstStyle/>
-                    <a:p>
-                      <a:pPr marL="0" lvl="0" indent="0" algn="l" rtl="0">
-                        <a:spcBef>
-                          <a:spcPts val="0"/>
-                        </a:spcBef>
-                        <a:spcAft>
-                          <a:spcPts val="0"/>
-                        </a:spcAft>
-                        <a:buNone/>
-                      </a:pPr>
-                      <a:r>
-                        <a:rPr lang="en-US" dirty="0"/>
-                        <a:t>H</a:t>
-                      </a:r>
-                      <a:r>
-                        <a:rPr lang="en-US" baseline="-25000" dirty="0"/>
-                        <a:t>0</a:t>
-                      </a:r>
-                      <a:r>
-                        <a:rPr lang="en-US" dirty="0"/>
-                        <a:t> is True</a:t>
-                      </a:r>
-                      <a:endParaRPr dirty="0"/>
-                    </a:p>
-                  </a:txBody>
-                  <a:tcPr marL="91425" marR="91425" marT="91425" marB="91425"/>
-                </a:tc>
-                <a:tc>
-                  <a:txBody>
-                    <a:bodyPr/>
-                    <a:lstStyle/>
-                    <a:p>
-                      <a:pPr marL="0" lvl="0" indent="0" algn="l" rtl="0">
-                        <a:spcBef>
-                          <a:spcPts val="0"/>
-                        </a:spcBef>
-                        <a:spcAft>
-                          <a:spcPts val="0"/>
-                        </a:spcAft>
-                        <a:buNone/>
-                      </a:pPr>
-                      <a:r>
-                        <a:rPr lang="en-US"/>
-                        <a:t>Correct</a:t>
-                      </a:r>
-                      <a:br>
-                        <a:rPr lang="en-US"/>
-                      </a:br>
-                      <a:r>
-                        <a:rPr lang="en-US"/>
-                        <a:t>Decision</a:t>
-                      </a:r>
-                      <a:endParaRPr/>
-                    </a:p>
-                  </a:txBody>
-                  <a:tcPr marL="91425" marR="91425" marT="91425" marB="91425">
-                    <a:solidFill>
-                      <a:srgbClr val="C9DAF8"/>
-                    </a:solidFill>
-                  </a:tcPr>
-                </a:tc>
-                <a:tc>
-                  <a:txBody>
-                    <a:bodyPr/>
-                    <a:lstStyle/>
-                    <a:p>
-                      <a:pPr marL="0" lvl="0" indent="0" algn="l" rtl="0">
-                        <a:spcBef>
-                          <a:spcPts val="0"/>
-                        </a:spcBef>
-                        <a:spcAft>
-                          <a:spcPts val="0"/>
-                        </a:spcAft>
-                        <a:buNone/>
-                      </a:pPr>
-                      <a:r>
-                        <a:rPr lang="en-US" b="1" dirty="0">
-                          <a:solidFill>
-                            <a:srgbClr val="FF0000"/>
-                          </a:solidFill>
-                        </a:rPr>
-                        <a:t>type I error</a:t>
-                      </a:r>
-                      <a:endParaRPr b="1" dirty="0">
-                        <a:solidFill>
-                          <a:srgbClr val="FF0000"/>
-                        </a:solidFill>
-                      </a:endParaRPr>
-                    </a:p>
-                  </a:txBody>
-                  <a:tcPr marL="91425" marR="91425" marT="91425" marB="91425"/>
-                </a:tc>
-                <a:extLst>
-                  <a:ext uri="{0D108BD9-81ED-4DB2-BD59-A6C34878D82A}">
-                    <a16:rowId xmlns:a16="http://schemas.microsoft.com/office/drawing/2014/main" val="10001"/>
-                  </a:ext>
-                </a:extLst>
-              </a:tr>
-              <a:tr h="794100">
-                <a:tc>
-                  <a:txBody>
-                    <a:bodyPr/>
-                    <a:lstStyle/>
-                    <a:p>
-                      <a:pPr marL="0" lvl="0" indent="0" algn="l" rtl="0">
-                        <a:spcBef>
-                          <a:spcPts val="0"/>
-                        </a:spcBef>
-                        <a:spcAft>
-                          <a:spcPts val="0"/>
-                        </a:spcAft>
-                        <a:buNone/>
-                      </a:pPr>
-                      <a:r>
-                        <a:rPr lang="en-US" dirty="0"/>
-                        <a:t>H</a:t>
-                      </a:r>
-                      <a:r>
-                        <a:rPr lang="en-US" baseline="-25000" dirty="0"/>
-                        <a:t>0</a:t>
-                      </a:r>
-                      <a:r>
-                        <a:rPr lang="en-US" dirty="0"/>
-                        <a:t> is False</a:t>
-                      </a:r>
-                      <a:endParaRPr dirty="0"/>
-                    </a:p>
-                  </a:txBody>
-                  <a:tcPr marL="91425" marR="91425" marT="91425" marB="91425"/>
-                </a:tc>
-                <a:tc>
-                  <a:txBody>
-                    <a:bodyPr/>
-                    <a:lstStyle/>
-                    <a:p>
-                      <a:pPr marL="0" lvl="0" indent="0" algn="l" rtl="0">
-                        <a:spcBef>
-                          <a:spcPts val="0"/>
-                        </a:spcBef>
-                        <a:spcAft>
-                          <a:spcPts val="0"/>
-                        </a:spcAft>
-                        <a:buNone/>
-                      </a:pPr>
-                      <a:r>
-                        <a:rPr lang="en-US" b="1" dirty="0">
-                          <a:solidFill>
-                            <a:srgbClr val="FF0000"/>
-                          </a:solidFill>
-                        </a:rPr>
-                        <a:t>type II error</a:t>
-                      </a:r>
-                      <a:endParaRPr b="1" dirty="0">
-                        <a:solidFill>
-                          <a:srgbClr val="FF0000"/>
-                        </a:solidFill>
-                      </a:endParaRPr>
-                    </a:p>
-                  </a:txBody>
-                  <a:tcPr marL="91425" marR="91425" marT="91425" marB="91425"/>
-                </a:tc>
-                <a:tc>
-                  <a:txBody>
-                    <a:bodyPr/>
-                    <a:lstStyle/>
-                    <a:p>
-                      <a:pPr marL="0" lvl="0" indent="0" algn="l" rtl="0">
-                        <a:spcBef>
-                          <a:spcPts val="0"/>
-                        </a:spcBef>
-                        <a:spcAft>
-                          <a:spcPts val="0"/>
-                        </a:spcAft>
-                        <a:buNone/>
-                      </a:pPr>
-                      <a:r>
-                        <a:rPr lang="en-US" dirty="0"/>
-                        <a:t>Correct </a:t>
-                      </a:r>
-                      <a:br>
-                        <a:rPr lang="en-US" dirty="0"/>
-                      </a:br>
-                      <a:r>
-                        <a:rPr lang="en-US" dirty="0"/>
-                        <a:t>Decision</a:t>
-                      </a:r>
-                      <a:endParaRPr dirty="0"/>
-                    </a:p>
-                  </a:txBody>
-                  <a:tcPr marL="91425" marR="91425" marT="91425" marB="91425">
-                    <a:solidFill>
-                      <a:srgbClr val="C9DAF8"/>
-                    </a:solidFill>
-                  </a:tcPr>
-                </a:tc>
-                <a:extLst>
-                  <a:ext uri="{0D108BD9-81ED-4DB2-BD59-A6C34878D82A}">
-                    <a16:rowId xmlns:a16="http://schemas.microsoft.com/office/drawing/2014/main" val="10002"/>
-                  </a:ext>
-                </a:extLst>
-              </a:tr>
-            </a:tbl>
-          </a:graphicData>
-        </a:graphic>
-      </p:graphicFrame>
     </p:spTree>
   </p:cSld>
   <p:clrMapOvr>
@@ -16677,6 +17808,854 @@
 </file>
 
 <file path=ppt/slides/slide3.xml><?xml version="1.0" encoding="utf-8"?>
+<p:sld xmlns:a="http://schemas.openxmlformats.org/drawingml/2006/main" xmlns:r="http://schemas.openxmlformats.org/officeDocument/2006/relationships" xmlns:p="http://schemas.openxmlformats.org/presentationml/2006/main">
+  <p:cSld>
+    <p:spTree>
+      <p:nvGrpSpPr>
+        <p:cNvPr id="1" name="Shape 105"/>
+        <p:cNvGrpSpPr/>
+        <p:nvPr/>
+      </p:nvGrpSpPr>
+      <p:grpSpPr>
+        <a:xfrm>
+          <a:off x="0" y="0"/>
+          <a:ext cx="0" cy="0"/>
+          <a:chOff x="0" y="0"/>
+          <a:chExt cx="0" cy="0"/>
+        </a:xfrm>
+      </p:grpSpPr>
+      <p:sp>
+        <p:nvSpPr>
+          <p:cNvPr id="106" name="Google Shape;106;p15"/>
+          <p:cNvSpPr txBox="1"/>
+          <p:nvPr/>
+        </p:nvSpPr>
+        <p:spPr>
+          <a:xfrm>
+            <a:off x="202957" y="1394749"/>
+            <a:ext cx="6934114" cy="4068501"/>
+          </a:xfrm>
+          <a:prstGeom prst="rect">
+            <a:avLst/>
+          </a:prstGeom>
+          <a:noFill/>
+          <a:ln>
+            <a:noFill/>
+          </a:ln>
+        </p:spPr>
+        <p:txBody>
+          <a:bodyPr spcFirstLastPara="1" wrap="square" lIns="91425" tIns="45700" rIns="91425" bIns="45700" anchor="t" anchorCtr="0">
+            <a:noAutofit/>
+          </a:bodyPr>
+          <a:lstStyle/>
+          <a:p>
+            <a:pPr lvl="0">
+              <a:buSzPts val="1100"/>
+            </a:pPr>
+            <a:r>
+              <a:rPr lang="en-US" b="1" dirty="0">
+                <a:solidFill>
+                  <a:srgbClr val="0000FF"/>
+                </a:solidFill>
+                <a:latin typeface="Calibri"/>
+                <a:cs typeface="Calibri"/>
+              </a:rPr>
+              <a:t>Level of significance</a:t>
+            </a:r>
+            <a:r>
+              <a:rPr lang="en-US" dirty="0">
+                <a:solidFill>
+                  <a:schemeClr val="tx1"/>
+                </a:solidFill>
+                <a:latin typeface="Calibri"/>
+                <a:cs typeface="Calibri"/>
+              </a:rPr>
+              <a:t> (</a:t>
+            </a:r>
+            <a:r>
+              <a:rPr lang="en-US" b="1" dirty="0">
+                <a:solidFill>
+                  <a:srgbClr val="FF0000"/>
+                </a:solidFill>
+                <a:latin typeface="Calibri"/>
+                <a:cs typeface="Calibri"/>
+              </a:rPr>
+              <a:t>alpha</a:t>
+            </a:r>
+            <a:r>
+              <a:rPr lang="en-US" dirty="0">
+                <a:solidFill>
+                  <a:schemeClr val="tx1"/>
+                </a:solidFill>
+                <a:latin typeface="Calibri"/>
+                <a:cs typeface="Calibri"/>
+              </a:rPr>
+              <a:t> or </a:t>
+            </a:r>
+            <a:r>
+              <a:rPr lang="el-GR" b="1" dirty="0">
+                <a:solidFill>
+                  <a:srgbClr val="FF0000"/>
+                </a:solidFill>
+                <a:latin typeface="Calibri"/>
+                <a:cs typeface="Calibri"/>
+              </a:rPr>
+              <a:t>α</a:t>
+            </a:r>
+            <a:r>
+              <a:rPr lang="en-US" dirty="0">
+                <a:solidFill>
+                  <a:schemeClr val="tx1"/>
+                </a:solidFill>
+                <a:latin typeface="Calibri"/>
+                <a:cs typeface="Calibri"/>
+              </a:rPr>
+              <a:t>, typically 0.05) – </a:t>
+            </a:r>
+          </a:p>
+          <a:p>
+            <a:pPr lvl="0">
+              <a:buSzPts val="1100"/>
+            </a:pPr>
+            <a:r>
+              <a:rPr lang="en-US" dirty="0">
+                <a:solidFill>
+                  <a:schemeClr val="tx1"/>
+                </a:solidFill>
+                <a:latin typeface="Calibri"/>
+                <a:cs typeface="Calibri"/>
+              </a:rPr>
+              <a:t>probability that the event could have occurred by chance. </a:t>
+            </a:r>
+          </a:p>
+          <a:p>
+            <a:pPr lvl="0">
+              <a:buSzPts val="1100"/>
+            </a:pPr>
+            <a:endParaRPr dirty="0">
+              <a:solidFill>
+                <a:schemeClr val="dk1"/>
+              </a:solidFill>
+              <a:latin typeface="Calibri"/>
+              <a:ea typeface="Calibri"/>
+              <a:cs typeface="Calibri"/>
+              <a:sym typeface="Calibri"/>
+            </a:endParaRPr>
+          </a:p>
+          <a:p>
+            <a:pPr marL="0" marR="0" lvl="0" indent="0" algn="l" rtl="0">
+              <a:spcBef>
+                <a:spcPts val="0"/>
+              </a:spcBef>
+              <a:spcAft>
+                <a:spcPts val="0"/>
+              </a:spcAft>
+              <a:buSzPts val="1100"/>
+              <a:buNone/>
+            </a:pPr>
+            <a:r>
+              <a:rPr lang="en-US" b="1" dirty="0">
+                <a:solidFill>
+                  <a:srgbClr val="0000FF"/>
+                </a:solidFill>
+                <a:latin typeface="Calibri"/>
+                <a:ea typeface="Calibri"/>
+                <a:cs typeface="Calibri"/>
+                <a:sym typeface="Calibri"/>
+              </a:rPr>
+              <a:t>Confidence Interval (CI)</a:t>
+            </a:r>
+            <a:r>
+              <a:rPr lang="en-US" dirty="0">
+                <a:solidFill>
+                  <a:schemeClr val="dk1"/>
+                </a:solidFill>
+                <a:latin typeface="Calibri"/>
+                <a:ea typeface="Calibri"/>
+                <a:cs typeface="Calibri"/>
+                <a:sym typeface="Calibri"/>
+              </a:rPr>
+              <a:t>. A 95% CI is the interval that </a:t>
+            </a:r>
+          </a:p>
+          <a:p>
+            <a:pPr marL="0" marR="0" lvl="0" indent="0" algn="l" rtl="0">
+              <a:spcBef>
+                <a:spcPts val="0"/>
+              </a:spcBef>
+              <a:spcAft>
+                <a:spcPts val="0"/>
+              </a:spcAft>
+              <a:buSzPts val="1100"/>
+              <a:buNone/>
+            </a:pPr>
+            <a:r>
+              <a:rPr lang="en-US" dirty="0">
+                <a:solidFill>
+                  <a:schemeClr val="dk1"/>
+                </a:solidFill>
+                <a:latin typeface="Calibri"/>
+                <a:ea typeface="Calibri"/>
+                <a:cs typeface="Calibri"/>
+                <a:sym typeface="Calibri"/>
+              </a:rPr>
+              <a:t>you are 95% certain contains the true population value </a:t>
+            </a:r>
+          </a:p>
+          <a:p>
+            <a:pPr marL="0" marR="0" lvl="0" indent="0" algn="l" rtl="0">
+              <a:spcBef>
+                <a:spcPts val="0"/>
+              </a:spcBef>
+              <a:spcAft>
+                <a:spcPts val="0"/>
+              </a:spcAft>
+              <a:buSzPts val="1100"/>
+              <a:buNone/>
+            </a:pPr>
+            <a:r>
+              <a:rPr lang="en-US" dirty="0">
+                <a:solidFill>
+                  <a:schemeClr val="dk1"/>
+                </a:solidFill>
+                <a:latin typeface="Calibri"/>
+                <a:ea typeface="Calibri"/>
+                <a:cs typeface="Calibri"/>
+                <a:sym typeface="Calibri"/>
+              </a:rPr>
+              <a:t>as it might be estimated from a much larger study.</a:t>
+            </a:r>
+          </a:p>
+          <a:p>
+            <a:pPr>
+              <a:buSzPts val="1100"/>
+            </a:pPr>
+            <a:r>
+              <a:rPr lang="en-US" dirty="0">
+                <a:solidFill>
+                  <a:schemeClr val="dk1"/>
+                </a:solidFill>
+                <a:latin typeface="Calibri"/>
+                <a:ea typeface="Calibri"/>
+                <a:cs typeface="Calibri"/>
+                <a:sym typeface="Calibri"/>
+              </a:rPr>
+              <a:t> </a:t>
+            </a:r>
+            <a:r>
+              <a:rPr lang="en-US" dirty="0"/>
+              <a:t>- </a:t>
+            </a:r>
+            <a:r>
+              <a:rPr lang="en-US" dirty="0">
+                <a:hlinkClick r:id="rId3"/>
+              </a:rPr>
+              <a:t>https://en.wikipedia.org/wiki/Confidence_interval</a:t>
+            </a:r>
+            <a:r>
+              <a:rPr lang="en-US" dirty="0"/>
+              <a:t> </a:t>
+            </a:r>
+          </a:p>
+          <a:p>
+            <a:pPr marL="0" marR="0" lvl="0" indent="0" algn="l" rtl="0">
+              <a:spcBef>
+                <a:spcPts val="0"/>
+              </a:spcBef>
+              <a:spcAft>
+                <a:spcPts val="0"/>
+              </a:spcAft>
+              <a:buSzPts val="1100"/>
+              <a:buNone/>
+            </a:pPr>
+            <a:endParaRPr lang="en-US" dirty="0">
+              <a:solidFill>
+                <a:schemeClr val="dk1"/>
+              </a:solidFill>
+              <a:latin typeface="Calibri"/>
+              <a:ea typeface="Calibri"/>
+              <a:cs typeface="Calibri"/>
+              <a:sym typeface="Calibri"/>
+            </a:endParaRPr>
+          </a:p>
+          <a:p>
+            <a:pPr lvl="0">
+              <a:buSzPts val="1100"/>
+            </a:pPr>
+            <a:r>
+              <a:rPr lang="en-US" b="1" dirty="0">
+                <a:solidFill>
+                  <a:srgbClr val="0000FF"/>
+                </a:solidFill>
+                <a:latin typeface="Calibri"/>
+                <a:cs typeface="Calibri"/>
+                <a:sym typeface="Calibri"/>
+              </a:rPr>
+              <a:t>Critical Value</a:t>
+            </a:r>
+            <a:r>
+              <a:rPr lang="en-US" dirty="0">
+                <a:solidFill>
+                  <a:schemeClr val="dk1"/>
+                </a:solidFill>
+                <a:latin typeface="Calibri"/>
+                <a:cs typeface="Calibri"/>
+                <a:sym typeface="Calibri"/>
+              </a:rPr>
+              <a:t> - point on the distribution at which </a:t>
+            </a:r>
+          </a:p>
+          <a:p>
+            <a:pPr lvl="0">
+              <a:buSzPts val="1100"/>
+            </a:pPr>
+            <a:r>
+              <a:rPr lang="en-US" dirty="0">
+                <a:solidFill>
+                  <a:schemeClr val="dk1"/>
+                </a:solidFill>
+                <a:latin typeface="Calibri"/>
+                <a:cs typeface="Calibri"/>
+                <a:sym typeface="Calibri"/>
+              </a:rPr>
+              <a:t>we shift from "Fail to reject" to "Reject".</a:t>
+            </a:r>
+          </a:p>
+          <a:p>
+            <a:pPr marL="0" marR="0" lvl="0" indent="0" algn="l" rtl="0">
+              <a:spcBef>
+                <a:spcPts val="0"/>
+              </a:spcBef>
+              <a:spcAft>
+                <a:spcPts val="0"/>
+              </a:spcAft>
+              <a:buSzPts val="1100"/>
+              <a:buNone/>
+            </a:pPr>
+            <a:endParaRPr dirty="0">
+              <a:solidFill>
+                <a:schemeClr val="dk1"/>
+              </a:solidFill>
+              <a:latin typeface="Calibri"/>
+              <a:ea typeface="Calibri"/>
+              <a:cs typeface="Calibri"/>
+              <a:sym typeface="Calibri"/>
+            </a:endParaRPr>
+          </a:p>
+          <a:p>
+            <a:pPr marL="0" marR="0" lvl="0" indent="0" algn="l" rtl="0">
+              <a:spcBef>
+                <a:spcPts val="0"/>
+              </a:spcBef>
+              <a:spcAft>
+                <a:spcPts val="0"/>
+              </a:spcAft>
+              <a:buSzPts val="1100"/>
+              <a:buNone/>
+            </a:pPr>
+            <a:r>
+              <a:rPr lang="en-US" b="1" dirty="0">
+                <a:solidFill>
+                  <a:srgbClr val="0000FF"/>
+                </a:solidFill>
+                <a:latin typeface="Calibri"/>
+                <a:ea typeface="Calibri"/>
+                <a:cs typeface="Calibri"/>
+                <a:sym typeface="Calibri"/>
+              </a:rPr>
+              <a:t>z-score</a:t>
+            </a:r>
+            <a:r>
+              <a:rPr lang="en-US" dirty="0">
+                <a:solidFill>
+                  <a:schemeClr val="dk1"/>
+                </a:solidFill>
+                <a:latin typeface="Calibri"/>
+                <a:ea typeface="Calibri"/>
+                <a:cs typeface="Calibri"/>
+                <a:sym typeface="Calibri"/>
+              </a:rPr>
+              <a:t> is the distance from the mean </a:t>
+            </a:r>
+          </a:p>
+          <a:p>
+            <a:pPr marL="0" marR="0" lvl="0" indent="0" algn="l" rtl="0">
+              <a:spcBef>
+                <a:spcPts val="0"/>
+              </a:spcBef>
+              <a:spcAft>
+                <a:spcPts val="0"/>
+              </a:spcAft>
+              <a:buSzPts val="1100"/>
+              <a:buNone/>
+            </a:pPr>
+            <a:r>
+              <a:rPr lang="en-US" dirty="0">
+                <a:solidFill>
+                  <a:schemeClr val="dk1"/>
+                </a:solidFill>
+                <a:latin typeface="Calibri"/>
+                <a:ea typeface="Calibri"/>
+                <a:cs typeface="Calibri"/>
+                <a:sym typeface="Calibri"/>
+              </a:rPr>
+              <a:t>measured in the number of standard deviations.</a:t>
+            </a:r>
+          </a:p>
+          <a:p>
+            <a:pPr marL="0" marR="0" lvl="0" indent="0" algn="l" rtl="0">
+              <a:spcBef>
+                <a:spcPts val="0"/>
+              </a:spcBef>
+              <a:spcAft>
+                <a:spcPts val="0"/>
+              </a:spcAft>
+              <a:buSzPts val="1100"/>
+              <a:buNone/>
+            </a:pPr>
+            <a:endParaRPr lang="en-US" dirty="0">
+              <a:solidFill>
+                <a:schemeClr val="dk1"/>
+              </a:solidFill>
+              <a:latin typeface="Calibri"/>
+              <a:ea typeface="Calibri"/>
+              <a:cs typeface="Calibri"/>
+              <a:sym typeface="Calibri"/>
+            </a:endParaRPr>
+          </a:p>
+          <a:p>
+            <a:pPr lvl="0">
+              <a:buSzPts val="1100"/>
+            </a:pPr>
+            <a:r>
+              <a:rPr lang="en-US" b="1" dirty="0">
+                <a:solidFill>
+                  <a:srgbClr val="0000FF"/>
+                </a:solidFill>
+                <a:latin typeface="Calibri"/>
+                <a:cs typeface="Calibri"/>
+                <a:sym typeface="Calibri"/>
+              </a:rPr>
+              <a:t>Margin of Error </a:t>
+            </a:r>
+            <a:r>
+              <a:rPr lang="en-US" dirty="0">
+                <a:solidFill>
+                  <a:schemeClr val="dk1"/>
+                </a:solidFill>
+                <a:latin typeface="Calibri"/>
+                <a:ea typeface="Calibri"/>
+                <a:cs typeface="Calibri"/>
+                <a:sym typeface="Calibri"/>
+              </a:rPr>
+              <a:t>– amount of random sampling error in the results</a:t>
+            </a:r>
+          </a:p>
+          <a:p>
+            <a:pPr marL="0" marR="0" lvl="0" indent="0" algn="l" rtl="0">
+              <a:spcBef>
+                <a:spcPts val="0"/>
+              </a:spcBef>
+              <a:spcAft>
+                <a:spcPts val="0"/>
+              </a:spcAft>
+              <a:buSzPts val="1100"/>
+              <a:buNone/>
+            </a:pPr>
+            <a:r>
+              <a:rPr lang="en-US" sz="1200" dirty="0">
+                <a:solidFill>
+                  <a:schemeClr val="dk1"/>
+                </a:solidFill>
+                <a:latin typeface="Calibri"/>
+                <a:ea typeface="Calibri"/>
+                <a:cs typeface="Calibri"/>
+                <a:sym typeface="Calibri"/>
+              </a:rPr>
+              <a:t> - </a:t>
+            </a:r>
+            <a:r>
+              <a:rPr lang="en-US" sz="1200" dirty="0">
+                <a:solidFill>
+                  <a:schemeClr val="dk1"/>
+                </a:solidFill>
+                <a:latin typeface="Calibri"/>
+                <a:ea typeface="Calibri"/>
+                <a:cs typeface="Calibri"/>
+                <a:sym typeface="Calibri"/>
+                <a:hlinkClick r:id="rId4"/>
+              </a:rPr>
+              <a:t>https://en.wikipedia.org/wiki/Margin_of_error</a:t>
+            </a:r>
+            <a:endParaRPr lang="en-US" sz="1200" dirty="0">
+              <a:solidFill>
+                <a:schemeClr val="dk1"/>
+              </a:solidFill>
+              <a:latin typeface="Calibri"/>
+              <a:ea typeface="Calibri"/>
+              <a:cs typeface="Calibri"/>
+              <a:sym typeface="Calibri"/>
+            </a:endParaRPr>
+          </a:p>
+          <a:p>
+            <a:pPr lvl="0">
+              <a:buSzPts val="1100"/>
+            </a:pPr>
+            <a:r>
+              <a:rPr lang="en-US" sz="1200" dirty="0">
+                <a:solidFill>
+                  <a:schemeClr val="dk1"/>
+                </a:solidFill>
+                <a:latin typeface="Calibri"/>
+                <a:ea typeface="Calibri"/>
+                <a:cs typeface="Calibri"/>
+                <a:sym typeface="Calibri"/>
+              </a:rPr>
+              <a:t> - </a:t>
+            </a:r>
+            <a:r>
+              <a:rPr lang="en-US" sz="1200" dirty="0">
+                <a:solidFill>
+                  <a:schemeClr val="dk1"/>
+                </a:solidFill>
+                <a:latin typeface="Calibri"/>
+                <a:ea typeface="Calibri"/>
+                <a:cs typeface="Calibri"/>
+                <a:sym typeface="Calibri"/>
+                <a:hlinkClick r:id="rId5"/>
+              </a:rPr>
+              <a:t>https://www.surveymonkey.com/mp/margin-of-error-calculator/</a:t>
+            </a:r>
+            <a:r>
+              <a:rPr lang="en-US" sz="1200" dirty="0">
+                <a:solidFill>
+                  <a:schemeClr val="dk1"/>
+                </a:solidFill>
+                <a:latin typeface="Calibri"/>
+                <a:ea typeface="Calibri"/>
+                <a:cs typeface="Calibri"/>
+                <a:sym typeface="Calibri"/>
+              </a:rPr>
+              <a:t> </a:t>
+            </a:r>
+          </a:p>
+          <a:p>
+            <a:pPr lvl="0">
+              <a:buSzPts val="1100"/>
+            </a:pPr>
+            <a:r>
+              <a:rPr lang="en-US" sz="1200" dirty="0">
+                <a:solidFill>
+                  <a:schemeClr val="dk1"/>
+                </a:solidFill>
+                <a:latin typeface="Calibri"/>
+                <a:ea typeface="Calibri"/>
+                <a:cs typeface="Calibri"/>
+                <a:sym typeface="Calibri"/>
+              </a:rPr>
+              <a:t> - </a:t>
+            </a:r>
+            <a:r>
+              <a:rPr lang="en-US" sz="1200" dirty="0">
+                <a:solidFill>
+                  <a:schemeClr val="dk1"/>
+                </a:solidFill>
+                <a:latin typeface="Calibri"/>
+                <a:ea typeface="Calibri"/>
+                <a:cs typeface="Calibri"/>
+                <a:sym typeface="Calibri"/>
+                <a:hlinkClick r:id="rId6"/>
+              </a:rPr>
+              <a:t>https://www.dummies.com/education/math/statistics/how-sample-size-affects-the-margin-of-error/</a:t>
+            </a:r>
+            <a:r>
+              <a:rPr lang="en-US" sz="1200" dirty="0">
+                <a:solidFill>
+                  <a:schemeClr val="dk1"/>
+                </a:solidFill>
+                <a:latin typeface="Calibri"/>
+                <a:ea typeface="Calibri"/>
+                <a:cs typeface="Calibri"/>
+                <a:sym typeface="Calibri"/>
+              </a:rPr>
+              <a:t> </a:t>
+            </a:r>
+          </a:p>
+          <a:p>
+            <a:pPr lvl="0">
+              <a:buSzPts val="1100"/>
+            </a:pPr>
+            <a:endParaRPr dirty="0">
+              <a:solidFill>
+                <a:schemeClr val="dk1"/>
+              </a:solidFill>
+              <a:latin typeface="Calibri"/>
+              <a:ea typeface="Calibri"/>
+              <a:cs typeface="Calibri"/>
+              <a:sym typeface="Calibri"/>
+            </a:endParaRPr>
+          </a:p>
+        </p:txBody>
+      </p:sp>
+      <p:sp>
+        <p:nvSpPr>
+          <p:cNvPr id="11" name="Google Shape;106;p15">
+            <a:extLst>
+              <a:ext uri="{FF2B5EF4-FFF2-40B4-BE49-F238E27FC236}">
+                <a16:creationId xmlns:a16="http://schemas.microsoft.com/office/drawing/2014/main" id="{42C5FB0F-C4C7-4240-9D50-49391168D970}"/>
+              </a:ext>
+            </a:extLst>
+          </p:cNvPr>
+          <p:cNvSpPr txBox="1"/>
+          <p:nvPr/>
+        </p:nvSpPr>
+        <p:spPr>
+          <a:xfrm>
+            <a:off x="0" y="0"/>
+            <a:ext cx="5893043" cy="486121"/>
+          </a:xfrm>
+          <a:prstGeom prst="rect">
+            <a:avLst/>
+          </a:prstGeom>
+          <a:noFill/>
+          <a:ln>
+            <a:noFill/>
+          </a:ln>
+        </p:spPr>
+        <p:txBody>
+          <a:bodyPr spcFirstLastPara="1" wrap="square" lIns="91425" tIns="45700" rIns="91425" bIns="45700" anchor="t" anchorCtr="0">
+            <a:noAutofit/>
+          </a:bodyPr>
+          <a:lstStyle/>
+          <a:p>
+            <a:pPr marL="0" marR="0" lvl="0" indent="0" algn="l" rtl="0">
+              <a:spcBef>
+                <a:spcPts val="0"/>
+              </a:spcBef>
+              <a:spcAft>
+                <a:spcPts val="0"/>
+              </a:spcAft>
+              <a:buNone/>
+            </a:pPr>
+            <a:r>
+              <a:rPr lang="en-US" sz="2800" b="1" dirty="0">
+                <a:solidFill>
+                  <a:schemeClr val="dk1"/>
+                </a:solidFill>
+                <a:latin typeface="Calibri"/>
+                <a:ea typeface="Calibri"/>
+                <a:cs typeface="Calibri"/>
+                <a:sym typeface="Calibri"/>
+              </a:rPr>
+              <a:t>p-value &amp; null hypothesis - continued</a:t>
+            </a:r>
+            <a:endParaRPr sz="2800" b="1" dirty="0">
+              <a:solidFill>
+                <a:schemeClr val="dk1"/>
+              </a:solidFill>
+              <a:latin typeface="Calibri"/>
+              <a:ea typeface="Calibri"/>
+              <a:cs typeface="Calibri"/>
+              <a:sym typeface="Calibri"/>
+            </a:endParaRPr>
+          </a:p>
+          <a:p>
+            <a:pPr lvl="0">
+              <a:buSzPts val="1100"/>
+            </a:pPr>
+            <a:endParaRPr dirty="0">
+              <a:solidFill>
+                <a:schemeClr val="dk1"/>
+              </a:solidFill>
+              <a:latin typeface="Calibri"/>
+              <a:ea typeface="Calibri"/>
+              <a:cs typeface="Calibri"/>
+              <a:sym typeface="Calibri"/>
+            </a:endParaRPr>
+          </a:p>
+        </p:txBody>
+      </p:sp>
+      <p:pic>
+        <p:nvPicPr>
+          <p:cNvPr id="1028" name="Picture 4">
+            <a:extLst>
+              <a:ext uri="{FF2B5EF4-FFF2-40B4-BE49-F238E27FC236}">
+                <a16:creationId xmlns:a16="http://schemas.microsoft.com/office/drawing/2014/main" id="{B897F46F-4E04-0A40-B03C-D20DF5E3E1D2}"/>
+              </a:ext>
+            </a:extLst>
+          </p:cNvPr>
+          <p:cNvPicPr>
+            <a:picLocks noChangeAspect="1" noChangeArrowheads="1"/>
+          </p:cNvPicPr>
+          <p:nvPr/>
+        </p:nvPicPr>
+        <p:blipFill>
+          <a:blip r:embed="rId7" cstate="email">
+            <a:extLst>
+              <a:ext uri="{28A0092B-C50C-407E-A947-70E740481C1C}">
+                <a14:useLocalDpi xmlns:a14="http://schemas.microsoft.com/office/drawing/2010/main"/>
+              </a:ext>
+            </a:extLst>
+          </a:blip>
+          <a:srcRect/>
+          <a:stretch>
+            <a:fillRect/>
+          </a:stretch>
+        </p:blipFill>
+        <p:spPr bwMode="auto">
+          <a:xfrm>
+            <a:off x="7311589" y="1572879"/>
+            <a:ext cx="4880411" cy="3486009"/>
+          </a:xfrm>
+          <a:prstGeom prst="rect">
+            <a:avLst/>
+          </a:prstGeom>
+          <a:noFill/>
+          <a:extLst>
+            <a:ext uri="{909E8E84-426E-40DD-AFC4-6F175D3DCCD1}">
+              <a14:hiddenFill xmlns:a14="http://schemas.microsoft.com/office/drawing/2010/main">
+                <a:solidFill>
+                  <a:srgbClr val="FFFFFF"/>
+                </a:solidFill>
+              </a14:hiddenFill>
+            </a:ext>
+          </a:extLst>
+        </p:spPr>
+      </p:pic>
+      <p:sp>
+        <p:nvSpPr>
+          <p:cNvPr id="4" name="TextBox 3">
+            <a:extLst>
+              <a:ext uri="{FF2B5EF4-FFF2-40B4-BE49-F238E27FC236}">
+                <a16:creationId xmlns:a16="http://schemas.microsoft.com/office/drawing/2014/main" id="{A9134AC6-C3A4-CC44-90D3-E9F229529F13}"/>
+              </a:ext>
+            </a:extLst>
+          </p:cNvPr>
+          <p:cNvSpPr txBox="1"/>
+          <p:nvPr/>
+        </p:nvSpPr>
+        <p:spPr>
+          <a:xfrm>
+            <a:off x="9294592" y="4990310"/>
+            <a:ext cx="985653" cy="461665"/>
+          </a:xfrm>
+          <a:prstGeom prst="rect">
+            <a:avLst/>
+          </a:prstGeom>
+          <a:noFill/>
+        </p:spPr>
+        <p:txBody>
+          <a:bodyPr wrap="square" rtlCol="0">
+            <a:spAutoFit/>
+          </a:bodyPr>
+          <a:lstStyle/>
+          <a:p>
+            <a:pPr algn="ctr"/>
+            <a:r>
+              <a:rPr lang="en-US" sz="1200" dirty="0">
+                <a:solidFill>
+                  <a:srgbClr val="0070C0"/>
+                </a:solidFill>
+              </a:rPr>
+              <a:t>Confidence Interval</a:t>
+            </a:r>
+          </a:p>
+        </p:txBody>
+      </p:sp>
+      <p:sp>
+        <p:nvSpPr>
+          <p:cNvPr id="15" name="TextBox 14">
+            <a:extLst>
+              <a:ext uri="{FF2B5EF4-FFF2-40B4-BE49-F238E27FC236}">
+                <a16:creationId xmlns:a16="http://schemas.microsoft.com/office/drawing/2014/main" id="{918A6FD3-4C88-3242-83A2-D7AEFF1E9705}"/>
+              </a:ext>
+            </a:extLst>
+          </p:cNvPr>
+          <p:cNvSpPr txBox="1"/>
+          <p:nvPr/>
+        </p:nvSpPr>
+        <p:spPr>
+          <a:xfrm>
+            <a:off x="10903614" y="4990309"/>
+            <a:ext cx="665016" cy="461665"/>
+          </a:xfrm>
+          <a:prstGeom prst="rect">
+            <a:avLst/>
+          </a:prstGeom>
+          <a:noFill/>
+        </p:spPr>
+        <p:txBody>
+          <a:bodyPr wrap="square" rtlCol="0">
+            <a:spAutoFit/>
+          </a:bodyPr>
+          <a:lstStyle/>
+          <a:p>
+            <a:pPr algn="ctr"/>
+            <a:r>
+              <a:rPr lang="en-US" sz="1200" dirty="0">
+                <a:solidFill>
+                  <a:srgbClr val="0070C0"/>
+                </a:solidFill>
+              </a:rPr>
+              <a:t>Critical Region</a:t>
+            </a:r>
+          </a:p>
+        </p:txBody>
+      </p:sp>
+      <p:sp>
+        <p:nvSpPr>
+          <p:cNvPr id="16" name="TextBox 15">
+            <a:extLst>
+              <a:ext uri="{FF2B5EF4-FFF2-40B4-BE49-F238E27FC236}">
+                <a16:creationId xmlns:a16="http://schemas.microsoft.com/office/drawing/2014/main" id="{4AD1A45B-315F-6045-AC9A-784CD060989C}"/>
+              </a:ext>
+            </a:extLst>
+          </p:cNvPr>
+          <p:cNvSpPr txBox="1"/>
+          <p:nvPr/>
+        </p:nvSpPr>
+        <p:spPr>
+          <a:xfrm>
+            <a:off x="8061800" y="4990309"/>
+            <a:ext cx="665016" cy="461665"/>
+          </a:xfrm>
+          <a:prstGeom prst="rect">
+            <a:avLst/>
+          </a:prstGeom>
+          <a:noFill/>
+        </p:spPr>
+        <p:txBody>
+          <a:bodyPr wrap="square" rtlCol="0">
+            <a:spAutoFit/>
+          </a:bodyPr>
+          <a:lstStyle/>
+          <a:p>
+            <a:pPr algn="ctr"/>
+            <a:r>
+              <a:rPr lang="en-US" sz="1200" dirty="0">
+                <a:solidFill>
+                  <a:srgbClr val="0070C0"/>
+                </a:solidFill>
+              </a:rPr>
+              <a:t>Critical Region</a:t>
+            </a:r>
+          </a:p>
+        </p:txBody>
+      </p:sp>
+    </p:spTree>
+    <p:extLst>
+      <p:ext uri="{BB962C8B-B14F-4D97-AF65-F5344CB8AC3E}">
+        <p14:creationId xmlns:p14="http://schemas.microsoft.com/office/powerpoint/2010/main" val="1243422980"/>
+      </p:ext>
+    </p:extLst>
+  </p:cSld>
+  <p:clrMapOvr>
+    <a:masterClrMapping/>
+  </p:clrMapOvr>
+</p:sld>
+</file>
+
+<file path=ppt/slides/slide4.xml><?xml version="1.0" encoding="utf-8"?>
 <p:sld xmlns:a="http://schemas.openxmlformats.org/drawingml/2006/main" xmlns:r="http://schemas.openxmlformats.org/officeDocument/2006/relationships" xmlns:p="http://schemas.openxmlformats.org/presentationml/2006/main">
   <p:cSld>
     <p:spTree>
@@ -18268,7 +20247,7 @@
 </p:sld>
 </file>
 
-<file path=ppt/slides/slide4.xml><?xml version="1.0" encoding="utf-8"?>
+<file path=ppt/slides/slide5.xml><?xml version="1.0" encoding="utf-8"?>
 <p:sld xmlns:a="http://schemas.openxmlformats.org/drawingml/2006/main" xmlns:r="http://schemas.openxmlformats.org/officeDocument/2006/relationships" xmlns:p="http://schemas.openxmlformats.org/presentationml/2006/main">
   <p:cSld>
     <p:spTree>
@@ -19205,7 +21184,7 @@
 </p:sld>
 </file>
 
-<file path=ppt/slides/slide5.xml><?xml version="1.0" encoding="utf-8"?>
+<file path=ppt/slides/slide6.xml><?xml version="1.0" encoding="utf-8"?>
 <p:sld xmlns:a="http://schemas.openxmlformats.org/drawingml/2006/main" xmlns:r="http://schemas.openxmlformats.org/officeDocument/2006/relationships" xmlns:p="http://schemas.openxmlformats.org/presentationml/2006/main">
   <p:cSld>
     <p:spTree>
@@ -20882,7 +22861,7 @@
 </p:sld>
 </file>
 
-<file path=ppt/slides/slide6.xml><?xml version="1.0" encoding="utf-8"?>
+<file path=ppt/slides/slide7.xml><?xml version="1.0" encoding="utf-8"?>
 <p:sld xmlns:a="http://schemas.openxmlformats.org/drawingml/2006/main" xmlns:r="http://schemas.openxmlformats.org/officeDocument/2006/relationships" xmlns:p="http://schemas.openxmlformats.org/presentationml/2006/main">
   <p:cSld>
     <p:spTree>
@@ -21619,7 +23598,7 @@
 </p:sld>
 </file>
 
-<file path=ppt/slides/slide7.xml><?xml version="1.0" encoding="utf-8"?>
+<file path=ppt/slides/slide8.xml><?xml version="1.0" encoding="utf-8"?>
 <p:sld xmlns:a="http://schemas.openxmlformats.org/drawingml/2006/main" xmlns:r="http://schemas.openxmlformats.org/officeDocument/2006/relationships" xmlns:p="http://schemas.openxmlformats.org/presentationml/2006/main">
   <p:cSld>
     <p:spTree>
@@ -22567,7 +24546,7 @@
 </p:sld>
 </file>
 
-<file path=ppt/slides/slide8.xml><?xml version="1.0" encoding="utf-8"?>
+<file path=ppt/slides/slide9.xml><?xml version="1.0" encoding="utf-8"?>
 <p:sld xmlns:a="http://schemas.openxmlformats.org/drawingml/2006/main" xmlns:r="http://schemas.openxmlformats.org/officeDocument/2006/relationships" xmlns:p="http://schemas.openxmlformats.org/presentationml/2006/main">
   <p:cSld>
     <p:spTree>
@@ -23732,877 +25711,6 @@
     <p:extLst>
       <p:ext uri="{BB962C8B-B14F-4D97-AF65-F5344CB8AC3E}">
         <p14:creationId xmlns:p14="http://schemas.microsoft.com/office/powerpoint/2010/main" val="3379995339"/>
-      </p:ext>
-    </p:extLst>
-  </p:cSld>
-  <p:clrMapOvr>
-    <a:masterClrMapping/>
-  </p:clrMapOvr>
-</p:sld>
-</file>
-
-<file path=ppt/slides/slide9.xml><?xml version="1.0" encoding="utf-8"?>
-<p:sld xmlns:a="http://schemas.openxmlformats.org/drawingml/2006/main" xmlns:r="http://schemas.openxmlformats.org/officeDocument/2006/relationships" xmlns:p="http://schemas.openxmlformats.org/presentationml/2006/main">
-  <p:cSld>
-    <p:spTree>
-      <p:nvGrpSpPr>
-        <p:cNvPr id="1" name="Shape 113"/>
-        <p:cNvGrpSpPr/>
-        <p:nvPr/>
-      </p:nvGrpSpPr>
-      <p:grpSpPr>
-        <a:xfrm>
-          <a:off x="0" y="0"/>
-          <a:ext cx="0" cy="0"/>
-          <a:chOff x="0" y="0"/>
-          <a:chExt cx="0" cy="0"/>
-        </a:xfrm>
-      </p:grpSpPr>
-      <p:sp>
-        <p:nvSpPr>
-          <p:cNvPr id="114" name="Google Shape;114;p16"/>
-          <p:cNvSpPr txBox="1"/>
-          <p:nvPr/>
-        </p:nvSpPr>
-        <p:spPr>
-          <a:xfrm>
-            <a:off x="383974" y="551503"/>
-            <a:ext cx="4877100" cy="3147000"/>
-          </a:xfrm>
-          <a:prstGeom prst="rect">
-            <a:avLst/>
-          </a:prstGeom>
-          <a:noFill/>
-          <a:ln>
-            <a:noFill/>
-          </a:ln>
-        </p:spPr>
-        <p:txBody>
-          <a:bodyPr spcFirstLastPara="1" wrap="square" lIns="91425" tIns="91425" rIns="91425" bIns="91425" anchor="t" anchorCtr="0">
-            <a:noAutofit/>
-          </a:bodyPr>
-          <a:lstStyle/>
-          <a:p>
-            <a:pPr marL="0" lvl="0" indent="0" algn="l" rtl="0">
-              <a:spcBef>
-                <a:spcPts val="0"/>
-              </a:spcBef>
-              <a:spcAft>
-                <a:spcPts val="0"/>
-              </a:spcAft>
-              <a:buNone/>
-            </a:pPr>
-            <a:r>
-              <a:rPr lang="en-US" dirty="0">
-                <a:latin typeface="Calibri"/>
-                <a:ea typeface="Calibri"/>
-                <a:cs typeface="Calibri"/>
-                <a:sym typeface="Calibri"/>
-              </a:rPr>
-              <a:t>Problem1:</a:t>
-            </a:r>
-            <a:endParaRPr dirty="0">
-              <a:latin typeface="Calibri"/>
-              <a:ea typeface="Calibri"/>
-              <a:cs typeface="Calibri"/>
-              <a:sym typeface="Calibri"/>
-            </a:endParaRPr>
-          </a:p>
-          <a:p>
-            <a:pPr marL="0" lvl="0" indent="0" algn="l" rtl="0">
-              <a:spcBef>
-                <a:spcPts val="0"/>
-              </a:spcBef>
-              <a:spcAft>
-                <a:spcPts val="0"/>
-              </a:spcAft>
-              <a:buNone/>
-            </a:pPr>
-            <a:endParaRPr dirty="0">
-              <a:latin typeface="Calibri"/>
-              <a:ea typeface="Calibri"/>
-              <a:cs typeface="Calibri"/>
-              <a:sym typeface="Calibri"/>
-            </a:endParaRPr>
-          </a:p>
-          <a:p>
-            <a:pPr marL="0" lvl="0" indent="0" algn="l" rtl="0">
-              <a:spcBef>
-                <a:spcPts val="0"/>
-              </a:spcBef>
-              <a:spcAft>
-                <a:spcPts val="0"/>
-              </a:spcAft>
-              <a:buNone/>
-            </a:pPr>
-            <a:r>
-              <a:rPr lang="en-US" dirty="0">
-                <a:latin typeface="Calibri"/>
-                <a:ea typeface="Calibri"/>
-                <a:cs typeface="Calibri"/>
-                <a:sym typeface="Calibri"/>
-              </a:rPr>
-              <a:t>Given: women's heights are normally distributed with the mean 65″ and standard deviation of 3.5″</a:t>
-            </a:r>
-            <a:endParaRPr dirty="0">
-              <a:latin typeface="Calibri"/>
-              <a:ea typeface="Calibri"/>
-              <a:cs typeface="Calibri"/>
-              <a:sym typeface="Calibri"/>
-            </a:endParaRPr>
-          </a:p>
-          <a:p>
-            <a:pPr marL="0" lvl="0" indent="0" algn="l" rtl="0">
-              <a:spcBef>
-                <a:spcPts val="0"/>
-              </a:spcBef>
-              <a:spcAft>
-                <a:spcPts val="0"/>
-              </a:spcAft>
-              <a:buNone/>
-            </a:pPr>
-            <a:r>
-              <a:rPr lang="en-US" dirty="0">
-                <a:latin typeface="Calibri"/>
-                <a:ea typeface="Calibri"/>
-                <a:cs typeface="Calibri"/>
-                <a:sym typeface="Calibri"/>
-              </a:rPr>
-              <a:t>Question: What is the probability of finding a random sample of 50 women with a mean height of 70″.</a:t>
-            </a:r>
-            <a:endParaRPr dirty="0">
-              <a:latin typeface="Calibri"/>
-              <a:ea typeface="Calibri"/>
-              <a:cs typeface="Calibri"/>
-              <a:sym typeface="Calibri"/>
-            </a:endParaRPr>
-          </a:p>
-          <a:p>
-            <a:pPr marL="0" lvl="0" indent="0" algn="l" rtl="0">
-              <a:spcBef>
-                <a:spcPts val="0"/>
-              </a:spcBef>
-              <a:spcAft>
-                <a:spcPts val="0"/>
-              </a:spcAft>
-              <a:buNone/>
-            </a:pPr>
-            <a:endParaRPr dirty="0">
-              <a:latin typeface="Calibri"/>
-              <a:ea typeface="Calibri"/>
-              <a:cs typeface="Calibri"/>
-              <a:sym typeface="Calibri"/>
-            </a:endParaRPr>
-          </a:p>
-          <a:p>
-            <a:pPr marL="0" lvl="0" indent="0" algn="l" rtl="0">
-              <a:spcBef>
-                <a:spcPts val="0"/>
-              </a:spcBef>
-              <a:spcAft>
-                <a:spcPts val="0"/>
-              </a:spcAft>
-              <a:buNone/>
-            </a:pPr>
-            <a:r>
-              <a:rPr lang="en-US" dirty="0">
-                <a:latin typeface="Calibri"/>
-                <a:ea typeface="Calibri"/>
-                <a:cs typeface="Calibri"/>
-                <a:sym typeface="Calibri"/>
-              </a:rPr>
-              <a:t>To answer, let's estimate the </a:t>
-            </a:r>
-            <a:r>
-              <a:rPr lang="en-US" b="1" dirty="0">
-                <a:solidFill>
-                  <a:srgbClr val="0000FF"/>
-                </a:solidFill>
-                <a:latin typeface="Calibri"/>
-                <a:ea typeface="Calibri"/>
-                <a:cs typeface="Calibri"/>
-                <a:sym typeface="Calibri"/>
-              </a:rPr>
-              <a:t>z-score</a:t>
-            </a:r>
-            <a:r>
-              <a:rPr lang="en-US" dirty="0">
-                <a:latin typeface="Calibri"/>
-                <a:ea typeface="Calibri"/>
-                <a:cs typeface="Calibri"/>
-                <a:sym typeface="Calibri"/>
-              </a:rPr>
-              <a:t>:</a:t>
-            </a:r>
-            <a:endParaRPr dirty="0">
-              <a:latin typeface="Calibri"/>
-              <a:ea typeface="Calibri"/>
-              <a:cs typeface="Calibri"/>
-              <a:sym typeface="Calibri"/>
-            </a:endParaRPr>
-          </a:p>
-          <a:p>
-            <a:pPr marL="0" lvl="0" indent="0" algn="l" rtl="0">
-              <a:spcBef>
-                <a:spcPts val="0"/>
-              </a:spcBef>
-              <a:spcAft>
-                <a:spcPts val="0"/>
-              </a:spcAft>
-              <a:buClr>
-                <a:schemeClr val="dk1"/>
-              </a:buClr>
-              <a:buSzPts val="1100"/>
-              <a:buFont typeface="Arial"/>
-              <a:buNone/>
-            </a:pPr>
-            <a:r>
-              <a:rPr lang="en-US" dirty="0">
-                <a:latin typeface="Calibri"/>
-                <a:ea typeface="Calibri"/>
-                <a:cs typeface="Calibri"/>
-                <a:sym typeface="Calibri"/>
-              </a:rPr>
-              <a:t>z = (x – </a:t>
-            </a:r>
-            <a:r>
-              <a:rPr lang="en-US" dirty="0" err="1">
-                <a:latin typeface="Calibri"/>
-                <a:ea typeface="Calibri"/>
-                <a:cs typeface="Calibri"/>
-                <a:sym typeface="Calibri"/>
-              </a:rPr>
-              <a:t>μ</a:t>
-            </a:r>
-            <a:r>
-              <a:rPr lang="en-US" dirty="0">
-                <a:latin typeface="Calibri"/>
-                <a:ea typeface="Calibri"/>
-                <a:cs typeface="Calibri"/>
-                <a:sym typeface="Calibri"/>
-              </a:rPr>
-              <a:t>) / (</a:t>
-            </a:r>
-            <a:r>
-              <a:rPr lang="en-US" dirty="0" err="1">
-                <a:latin typeface="Calibri"/>
-                <a:ea typeface="Calibri"/>
-                <a:cs typeface="Calibri"/>
-                <a:sym typeface="Calibri"/>
-              </a:rPr>
-              <a:t>σ</a:t>
-            </a:r>
-            <a:r>
-              <a:rPr lang="en-US" dirty="0">
-                <a:latin typeface="Calibri"/>
-                <a:ea typeface="Calibri"/>
-                <a:cs typeface="Calibri"/>
-                <a:sym typeface="Calibri"/>
-              </a:rPr>
-              <a:t> / √n) = (70 – 65) / (3.5/√50) = 5 / 0.495 = 10.1</a:t>
-            </a:r>
-            <a:endParaRPr dirty="0">
-              <a:latin typeface="Calibri"/>
-              <a:ea typeface="Calibri"/>
-              <a:cs typeface="Calibri"/>
-              <a:sym typeface="Calibri"/>
-            </a:endParaRPr>
-          </a:p>
-          <a:p>
-            <a:pPr marL="0" lvl="0" indent="0" algn="l" rtl="0">
-              <a:spcBef>
-                <a:spcPts val="0"/>
-              </a:spcBef>
-              <a:spcAft>
-                <a:spcPts val="0"/>
-              </a:spcAft>
-              <a:buNone/>
-            </a:pPr>
-            <a:endParaRPr dirty="0">
-              <a:latin typeface="Calibri"/>
-              <a:ea typeface="Calibri"/>
-              <a:cs typeface="Calibri"/>
-              <a:sym typeface="Calibri"/>
-            </a:endParaRPr>
-          </a:p>
-          <a:p>
-            <a:pPr marL="0" lvl="0" indent="0" algn="l" rtl="0">
-              <a:spcBef>
-                <a:spcPts val="0"/>
-              </a:spcBef>
-              <a:spcAft>
-                <a:spcPts val="0"/>
-              </a:spcAft>
-              <a:buNone/>
-            </a:pPr>
-            <a:r>
-              <a:rPr lang="en-US" dirty="0">
-                <a:latin typeface="Calibri"/>
-                <a:ea typeface="Calibri"/>
-                <a:cs typeface="Calibri"/>
-                <a:sym typeface="Calibri"/>
-              </a:rPr>
-              <a:t>We know that 99% of values fall within 3</a:t>
-            </a:r>
-            <a:r>
-              <a:rPr lang="en-US" dirty="0">
-                <a:solidFill>
-                  <a:schemeClr val="dk1"/>
-                </a:solidFill>
-                <a:latin typeface="Calibri"/>
-                <a:ea typeface="Calibri"/>
-                <a:cs typeface="Calibri"/>
-                <a:sym typeface="Calibri"/>
-              </a:rPr>
-              <a:t>σ</a:t>
-            </a:r>
-            <a:r>
-              <a:rPr lang="en-US" dirty="0">
-                <a:latin typeface="Calibri"/>
-                <a:ea typeface="Calibri"/>
-                <a:cs typeface="Calibri"/>
-                <a:sym typeface="Calibri"/>
-              </a:rPr>
-              <a:t> (68,  95,  99.7 rule).</a:t>
-            </a:r>
-            <a:endParaRPr dirty="0">
-              <a:latin typeface="Calibri"/>
-              <a:ea typeface="Calibri"/>
-              <a:cs typeface="Calibri"/>
-              <a:sym typeface="Calibri"/>
-            </a:endParaRPr>
-          </a:p>
-          <a:p>
-            <a:pPr marL="0" lvl="0" indent="0" algn="l" rtl="0">
-              <a:spcBef>
-                <a:spcPts val="0"/>
-              </a:spcBef>
-              <a:spcAft>
-                <a:spcPts val="0"/>
-              </a:spcAft>
-              <a:buNone/>
-            </a:pPr>
-            <a:r>
-              <a:rPr lang="en-US" dirty="0">
-                <a:latin typeface="Calibri"/>
-                <a:ea typeface="Calibri"/>
-                <a:cs typeface="Calibri"/>
-                <a:sym typeface="Calibri"/>
-              </a:rPr>
-              <a:t>We have z-score = 10, which is much more than 3.</a:t>
-            </a:r>
-            <a:endParaRPr dirty="0">
-              <a:latin typeface="Calibri"/>
-              <a:ea typeface="Calibri"/>
-              <a:cs typeface="Calibri"/>
-              <a:sym typeface="Calibri"/>
-            </a:endParaRPr>
-          </a:p>
-          <a:p>
-            <a:pPr marL="0" lvl="0" indent="0" algn="l" rtl="0">
-              <a:spcBef>
-                <a:spcPts val="0"/>
-              </a:spcBef>
-              <a:spcAft>
-                <a:spcPts val="0"/>
-              </a:spcAft>
-              <a:buNone/>
-            </a:pPr>
-            <a:r>
-              <a:rPr lang="en-US" dirty="0">
-                <a:latin typeface="Calibri"/>
-                <a:ea typeface="Calibri"/>
-                <a:cs typeface="Calibri"/>
-                <a:sym typeface="Calibri"/>
-              </a:rPr>
-              <a:t>So the probability </a:t>
-            </a:r>
-            <a:r>
-              <a:rPr lang="en-US" dirty="0">
-                <a:solidFill>
-                  <a:schemeClr val="dk1"/>
-                </a:solidFill>
-                <a:latin typeface="Calibri"/>
-                <a:ea typeface="Calibri"/>
-                <a:cs typeface="Calibri"/>
-                <a:sym typeface="Calibri"/>
-              </a:rPr>
-              <a:t>that any sample of 50 women will have a mean height of 70″ will be much-much less than 1%.</a:t>
-            </a:r>
-            <a:endParaRPr dirty="0">
-              <a:latin typeface="Calibri"/>
-              <a:ea typeface="Calibri"/>
-              <a:cs typeface="Calibri"/>
-              <a:sym typeface="Calibri"/>
-            </a:endParaRPr>
-          </a:p>
-        </p:txBody>
-      </p:sp>
-      <p:sp>
-        <p:nvSpPr>
-          <p:cNvPr id="115" name="Google Shape;115;p16"/>
-          <p:cNvSpPr txBox="1"/>
-          <p:nvPr/>
-        </p:nvSpPr>
-        <p:spPr>
-          <a:xfrm>
-            <a:off x="6067250" y="551503"/>
-            <a:ext cx="5707800" cy="5944200"/>
-          </a:xfrm>
-          <a:prstGeom prst="rect">
-            <a:avLst/>
-          </a:prstGeom>
-          <a:noFill/>
-          <a:ln>
-            <a:noFill/>
-          </a:ln>
-        </p:spPr>
-        <p:txBody>
-          <a:bodyPr spcFirstLastPara="1" wrap="square" lIns="91425" tIns="91425" rIns="91425" bIns="91425" anchor="t" anchorCtr="0">
-            <a:noAutofit/>
-          </a:bodyPr>
-          <a:lstStyle/>
-          <a:p>
-            <a:pPr marL="0" lvl="0" indent="0" algn="l" rtl="0">
-              <a:spcBef>
-                <a:spcPts val="0"/>
-              </a:spcBef>
-              <a:spcAft>
-                <a:spcPts val="0"/>
-              </a:spcAft>
-              <a:buNone/>
-            </a:pPr>
-            <a:r>
-              <a:rPr lang="en-US">
-                <a:latin typeface="Calibri"/>
-                <a:ea typeface="Calibri"/>
-                <a:cs typeface="Calibri"/>
-                <a:sym typeface="Calibri"/>
-              </a:rPr>
-              <a:t>Problem 2:</a:t>
-            </a:r>
-            <a:endParaRPr>
-              <a:latin typeface="Calibri"/>
-              <a:ea typeface="Calibri"/>
-              <a:cs typeface="Calibri"/>
-              <a:sym typeface="Calibri"/>
-            </a:endParaRPr>
-          </a:p>
-          <a:p>
-            <a:pPr marL="0" lvl="0" indent="0" algn="l" rtl="0">
-              <a:spcBef>
-                <a:spcPts val="0"/>
-              </a:spcBef>
-              <a:spcAft>
-                <a:spcPts val="0"/>
-              </a:spcAft>
-              <a:buNone/>
-            </a:pPr>
-            <a:endParaRPr>
-              <a:latin typeface="Calibri"/>
-              <a:ea typeface="Calibri"/>
-              <a:cs typeface="Calibri"/>
-              <a:sym typeface="Calibri"/>
-            </a:endParaRPr>
-          </a:p>
-          <a:p>
-            <a:pPr marL="0" lvl="0" indent="0" algn="l" rtl="0">
-              <a:spcBef>
-                <a:spcPts val="0"/>
-              </a:spcBef>
-              <a:spcAft>
-                <a:spcPts val="0"/>
-              </a:spcAft>
-              <a:buNone/>
-            </a:pPr>
-            <a:r>
-              <a:rPr lang="en-US">
-                <a:latin typeface="Calibri"/>
-                <a:ea typeface="Calibri"/>
-                <a:cs typeface="Calibri"/>
-                <a:sym typeface="Calibri"/>
-              </a:rPr>
-              <a:t>Suppose you are testing a claim that the percentage of all women with varicose veins is 25%, and your sample of 100 women had 20% with varicose veins. </a:t>
-            </a:r>
-            <a:endParaRPr>
-              <a:latin typeface="Calibri"/>
-              <a:ea typeface="Calibri"/>
-              <a:cs typeface="Calibri"/>
-              <a:sym typeface="Calibri"/>
-            </a:endParaRPr>
-          </a:p>
-          <a:p>
-            <a:pPr marL="0" lvl="0" indent="0" algn="l" rtl="0">
-              <a:spcBef>
-                <a:spcPts val="0"/>
-              </a:spcBef>
-              <a:spcAft>
-                <a:spcPts val="0"/>
-              </a:spcAft>
-              <a:buNone/>
-            </a:pPr>
-            <a:r>
-              <a:rPr lang="en-US">
-                <a:latin typeface="Calibri"/>
-                <a:ea typeface="Calibri"/>
-                <a:cs typeface="Calibri"/>
-                <a:sym typeface="Calibri"/>
-              </a:rPr>
-              <a:t>Then the sample proportion p=0.20. </a:t>
-            </a:r>
-            <a:endParaRPr>
-              <a:latin typeface="Calibri"/>
-              <a:ea typeface="Calibri"/>
-              <a:cs typeface="Calibri"/>
-              <a:sym typeface="Calibri"/>
-            </a:endParaRPr>
-          </a:p>
-          <a:p>
-            <a:pPr marL="0" lvl="0" indent="0" algn="l" rtl="0">
-              <a:spcBef>
-                <a:spcPts val="0"/>
-              </a:spcBef>
-              <a:spcAft>
-                <a:spcPts val="0"/>
-              </a:spcAft>
-              <a:buNone/>
-            </a:pPr>
-            <a:r>
-              <a:rPr lang="en-US">
-                <a:latin typeface="Calibri"/>
-                <a:ea typeface="Calibri"/>
-                <a:cs typeface="Calibri"/>
-                <a:sym typeface="Calibri"/>
-              </a:rPr>
-              <a:t>The standard error for your sample percentage is the square root of p(1-p)/n which equals 0.04 or 4%. </a:t>
-            </a:r>
-            <a:endParaRPr>
-              <a:latin typeface="Calibri"/>
-              <a:ea typeface="Calibri"/>
-              <a:cs typeface="Calibri"/>
-              <a:sym typeface="Calibri"/>
-            </a:endParaRPr>
-          </a:p>
-          <a:p>
-            <a:pPr marL="0" lvl="0" indent="0" algn="l" rtl="0">
-              <a:spcBef>
-                <a:spcPts val="0"/>
-              </a:spcBef>
-              <a:spcAft>
-                <a:spcPts val="0"/>
-              </a:spcAft>
-              <a:buNone/>
-            </a:pPr>
-            <a:endParaRPr>
-              <a:latin typeface="Calibri"/>
-              <a:ea typeface="Calibri"/>
-              <a:cs typeface="Calibri"/>
-              <a:sym typeface="Calibri"/>
-            </a:endParaRPr>
-          </a:p>
-          <a:p>
-            <a:pPr marL="0" lvl="0" indent="0" algn="l" rtl="0">
-              <a:spcBef>
-                <a:spcPts val="0"/>
-              </a:spcBef>
-              <a:spcAft>
-                <a:spcPts val="0"/>
-              </a:spcAft>
-              <a:buNone/>
-            </a:pPr>
-            <a:r>
-              <a:rPr lang="en-US">
-                <a:latin typeface="Calibri"/>
-                <a:ea typeface="Calibri"/>
-                <a:cs typeface="Calibri"/>
-                <a:sym typeface="Calibri"/>
-              </a:rPr>
-              <a:t>You find the test statistic by taking the proportion in the sample with varicose veins, 0.20, subtracting the claimed proportion of all women with varicose veins, 0.25, and then dividing the result by the standard error, 0.04. </a:t>
-            </a:r>
-            <a:endParaRPr>
-              <a:latin typeface="Calibri"/>
-              <a:ea typeface="Calibri"/>
-              <a:cs typeface="Calibri"/>
-              <a:sym typeface="Calibri"/>
-            </a:endParaRPr>
-          </a:p>
-          <a:p>
-            <a:pPr marL="0" lvl="0" indent="0" algn="l" rtl="0">
-              <a:spcBef>
-                <a:spcPts val="0"/>
-              </a:spcBef>
-              <a:spcAft>
-                <a:spcPts val="0"/>
-              </a:spcAft>
-              <a:buNone/>
-            </a:pPr>
-            <a:endParaRPr>
-              <a:latin typeface="Calibri"/>
-              <a:ea typeface="Calibri"/>
-              <a:cs typeface="Calibri"/>
-              <a:sym typeface="Calibri"/>
-            </a:endParaRPr>
-          </a:p>
-          <a:p>
-            <a:pPr marL="0" lvl="0" indent="0" algn="l" rtl="0">
-              <a:spcBef>
-                <a:spcPts val="0"/>
-              </a:spcBef>
-              <a:spcAft>
-                <a:spcPts val="0"/>
-              </a:spcAft>
-              <a:buNone/>
-            </a:pPr>
-            <a:r>
-              <a:rPr lang="en-US">
-                <a:latin typeface="Calibri"/>
-                <a:ea typeface="Calibri"/>
-                <a:cs typeface="Calibri"/>
-                <a:sym typeface="Calibri"/>
-              </a:rPr>
-              <a:t>These calculations give you a test statistic (standard score) of –0.05 divided by 0.04 = –1.25. </a:t>
-            </a:r>
-            <a:endParaRPr>
-              <a:latin typeface="Calibri"/>
-              <a:ea typeface="Calibri"/>
-              <a:cs typeface="Calibri"/>
-              <a:sym typeface="Calibri"/>
-            </a:endParaRPr>
-          </a:p>
-          <a:p>
-            <a:pPr marL="0" lvl="0" indent="0" algn="l" rtl="0">
-              <a:spcBef>
-                <a:spcPts val="0"/>
-              </a:spcBef>
-              <a:spcAft>
-                <a:spcPts val="0"/>
-              </a:spcAft>
-              <a:buNone/>
-            </a:pPr>
-            <a:endParaRPr>
-              <a:latin typeface="Calibri"/>
-              <a:ea typeface="Calibri"/>
-              <a:cs typeface="Calibri"/>
-              <a:sym typeface="Calibri"/>
-            </a:endParaRPr>
-          </a:p>
-          <a:p>
-            <a:pPr marL="0" lvl="0" indent="0" algn="l" rtl="0">
-              <a:spcBef>
-                <a:spcPts val="0"/>
-              </a:spcBef>
-              <a:spcAft>
-                <a:spcPts val="0"/>
-              </a:spcAft>
-              <a:buClr>
-                <a:schemeClr val="dk1"/>
-              </a:buClr>
-              <a:buSzPts val="1100"/>
-              <a:buFont typeface="Arial"/>
-              <a:buNone/>
-            </a:pPr>
-            <a:r>
-              <a:rPr lang="en-US">
-                <a:latin typeface="Calibri"/>
-                <a:ea typeface="Calibri"/>
-                <a:cs typeface="Calibri"/>
-                <a:sym typeface="Calibri"/>
-              </a:rPr>
-              <a:t>This tells you that your sample results and the population claim in H0 are 1.25 standard errors apart; in particular, your sample results are 1.25 standard errors below the claim.</a:t>
-            </a:r>
-            <a:endParaRPr>
-              <a:latin typeface="Calibri"/>
-              <a:ea typeface="Calibri"/>
-              <a:cs typeface="Calibri"/>
-              <a:sym typeface="Calibri"/>
-            </a:endParaRPr>
-          </a:p>
-          <a:p>
-            <a:pPr marL="0" lvl="0" indent="0" algn="l" rtl="0">
-              <a:spcBef>
-                <a:spcPts val="0"/>
-              </a:spcBef>
-              <a:spcAft>
-                <a:spcPts val="0"/>
-              </a:spcAft>
-              <a:buClr>
-                <a:schemeClr val="dk1"/>
-              </a:buClr>
-              <a:buSzPts val="1100"/>
-              <a:buFont typeface="Arial"/>
-              <a:buNone/>
-            </a:pPr>
-            <a:endParaRPr>
-              <a:latin typeface="Calibri"/>
-              <a:ea typeface="Calibri"/>
-              <a:cs typeface="Calibri"/>
-              <a:sym typeface="Calibri"/>
-            </a:endParaRPr>
-          </a:p>
-          <a:p>
-            <a:pPr marL="0" lvl="0" indent="0" algn="l" rtl="0">
-              <a:spcBef>
-                <a:spcPts val="0"/>
-              </a:spcBef>
-              <a:spcAft>
-                <a:spcPts val="0"/>
-              </a:spcAft>
-              <a:buNone/>
-            </a:pPr>
-            <a:r>
-              <a:rPr lang="en-US">
-                <a:latin typeface="Calibri"/>
-                <a:ea typeface="Calibri"/>
-                <a:cs typeface="Calibri"/>
-                <a:sym typeface="Calibri"/>
-              </a:rPr>
-              <a:t>When testing H0: p = 0.25 versus Ha: p &lt; 0.25, you find that the p-value of -1.25 by finding the probability that Z is less than -1.25. When you look this number up on the </a:t>
-            </a:r>
-            <a:r>
-              <a:rPr lang="en-US" b="1">
-                <a:solidFill>
-                  <a:srgbClr val="0000FF"/>
-                </a:solidFill>
-                <a:latin typeface="Calibri"/>
-                <a:ea typeface="Calibri"/>
-                <a:cs typeface="Calibri"/>
-                <a:sym typeface="Calibri"/>
-              </a:rPr>
-              <a:t>Z-table</a:t>
-            </a:r>
-            <a:r>
-              <a:rPr lang="en-US">
-                <a:latin typeface="Calibri"/>
-                <a:ea typeface="Calibri"/>
-                <a:cs typeface="Calibri"/>
-                <a:sym typeface="Calibri"/>
-              </a:rPr>
-              <a:t>, you find a probability of 0.1056 of Z being less than this value.</a:t>
-            </a:r>
-            <a:endParaRPr>
-              <a:latin typeface="Calibri"/>
-              <a:ea typeface="Calibri"/>
-              <a:cs typeface="Calibri"/>
-              <a:sym typeface="Calibri"/>
-            </a:endParaRPr>
-          </a:p>
-          <a:p>
-            <a:pPr marL="0" lvl="0" indent="0" algn="l" rtl="0">
-              <a:spcBef>
-                <a:spcPts val="0"/>
-              </a:spcBef>
-              <a:spcAft>
-                <a:spcPts val="0"/>
-              </a:spcAft>
-              <a:buNone/>
-            </a:pPr>
-            <a:endParaRPr>
-              <a:latin typeface="Calibri"/>
-              <a:ea typeface="Calibri"/>
-              <a:cs typeface="Calibri"/>
-              <a:sym typeface="Calibri"/>
-            </a:endParaRPr>
-          </a:p>
-          <a:p>
-            <a:pPr marL="0" lvl="0" indent="0" algn="l" rtl="0">
-              <a:spcBef>
-                <a:spcPts val="0"/>
-              </a:spcBef>
-              <a:spcAft>
-                <a:spcPts val="0"/>
-              </a:spcAft>
-              <a:buNone/>
-            </a:pPr>
-            <a:r>
-              <a:rPr lang="en-US">
-                <a:latin typeface="Calibri"/>
-                <a:ea typeface="Calibri"/>
-                <a:cs typeface="Calibri"/>
-                <a:sym typeface="Calibri"/>
-              </a:rPr>
-              <a:t>Note: A </a:t>
-            </a:r>
-            <a:r>
-              <a:rPr lang="en-US" b="1">
-                <a:solidFill>
-                  <a:srgbClr val="0000FF"/>
-                </a:solidFill>
-                <a:latin typeface="Calibri"/>
-                <a:ea typeface="Calibri"/>
-                <a:cs typeface="Calibri"/>
-                <a:sym typeface="Calibri"/>
-              </a:rPr>
-              <a:t>Z-table</a:t>
-            </a:r>
-            <a:r>
-              <a:rPr lang="en-US">
-                <a:latin typeface="Calibri"/>
-                <a:ea typeface="Calibri"/>
-                <a:cs typeface="Calibri"/>
-                <a:sym typeface="Calibri"/>
-              </a:rPr>
-              <a:t> is simply a table of values of the </a:t>
-            </a:r>
-            <a:r>
-              <a:rPr lang="en-US">
-                <a:solidFill>
-                  <a:schemeClr val="dk1"/>
-                </a:solidFill>
-                <a:latin typeface="Calibri"/>
-                <a:ea typeface="Calibri"/>
-                <a:cs typeface="Calibri"/>
-                <a:sym typeface="Calibri"/>
-              </a:rPr>
-              <a:t>cumulative distribution function of the normal distribution.</a:t>
-            </a:r>
-            <a:endParaRPr>
-              <a:latin typeface="Calibri"/>
-              <a:ea typeface="Calibri"/>
-              <a:cs typeface="Calibri"/>
-              <a:sym typeface="Calibri"/>
-            </a:endParaRPr>
-          </a:p>
-        </p:txBody>
-      </p:sp>
-      <p:sp>
-        <p:nvSpPr>
-          <p:cNvPr id="2" name="TextBox 1">
-            <a:extLst>
-              <a:ext uri="{FF2B5EF4-FFF2-40B4-BE49-F238E27FC236}">
-                <a16:creationId xmlns:a16="http://schemas.microsoft.com/office/drawing/2014/main" id="{7D2AE4FC-9024-9547-829E-724CC7A63A22}"/>
-              </a:ext>
-            </a:extLst>
-          </p:cNvPr>
-          <p:cNvSpPr txBox="1"/>
-          <p:nvPr/>
-        </p:nvSpPr>
-        <p:spPr>
-          <a:xfrm>
-            <a:off x="92765" y="106017"/>
-            <a:ext cx="5416784" cy="400110"/>
-          </a:xfrm>
-          <a:prstGeom prst="rect">
-            <a:avLst/>
-          </a:prstGeom>
-          <a:noFill/>
-        </p:spPr>
-        <p:txBody>
-          <a:bodyPr wrap="square" rtlCol="0">
-            <a:spAutoFit/>
-          </a:bodyPr>
-          <a:lstStyle/>
-          <a:p>
-            <a:r>
-              <a:rPr lang="en-US" sz="2000" b="1" dirty="0"/>
-              <a:t>More Hypothesis Testing Examples</a:t>
-            </a:r>
-          </a:p>
-        </p:txBody>
-      </p:sp>
-    </p:spTree>
-    <p:extLst>
-      <p:ext uri="{BB962C8B-B14F-4D97-AF65-F5344CB8AC3E}">
-        <p14:creationId xmlns:p14="http://schemas.microsoft.com/office/powerpoint/2010/main" val="3916857598"/>
       </p:ext>
     </p:extLst>
   </p:cSld>

--- a/statistics_05_hypothesis_testing_p_val.pptx
+++ b/statistics_05_hypothesis_testing_p_val.pptx
@@ -5,7 +5,7 @@
     <p:sldMasterId id="2147483659" r:id="rId1"/>
   </p:sldMasterIdLst>
   <p:notesMasterIdLst>
-    <p:notesMasterId r:id="rId13"/>
+    <p:notesMasterId r:id="rId17"/>
   </p:notesMasterIdLst>
   <p:sldIdLst>
     <p:sldId id="316" r:id="rId2"/>
@@ -19,6 +19,10 @@
     <p:sldId id="321" r:id="rId10"/>
     <p:sldId id="313" r:id="rId11"/>
     <p:sldId id="294" r:id="rId12"/>
+    <p:sldId id="346" r:id="rId13"/>
+    <p:sldId id="256" r:id="rId14"/>
+    <p:sldId id="352" r:id="rId15"/>
+    <p:sldId id="353" r:id="rId16"/>
   </p:sldIdLst>
   <p:sldSz cx="12192000" cy="6858000"/>
   <p:notesSz cx="6858000" cy="9144000"/>
@@ -16530,6 +16534,2733 @@
 </p:sld>
 </file>
 
+<file path=ppt/slides/slide12.xml><?xml version="1.0" encoding="utf-8"?>
+<p:sld xmlns:a="http://schemas.openxmlformats.org/drawingml/2006/main" xmlns:r="http://schemas.openxmlformats.org/officeDocument/2006/relationships" xmlns:p="http://schemas.openxmlformats.org/presentationml/2006/main">
+  <p:cSld>
+    <p:spTree>
+      <p:nvGrpSpPr>
+        <p:cNvPr id="1" name=""/>
+        <p:cNvGrpSpPr/>
+        <p:nvPr/>
+      </p:nvGrpSpPr>
+      <p:grpSpPr>
+        <a:xfrm>
+          <a:off x="0" y="0"/>
+          <a:ext cx="0" cy="0"/>
+          <a:chOff x="0" y="0"/>
+          <a:chExt cx="0" cy="0"/>
+        </a:xfrm>
+      </p:grpSpPr>
+      <p:sp>
+        <p:nvSpPr>
+          <p:cNvPr id="2" name="TextBox 1">
+            <a:extLst>
+              <a:ext uri="{FF2B5EF4-FFF2-40B4-BE49-F238E27FC236}">
+                <a16:creationId xmlns:a16="http://schemas.microsoft.com/office/drawing/2014/main" id="{3870D264-F06E-B444-91D8-0D5DA897ED83}"/>
+              </a:ext>
+            </a:extLst>
+          </p:cNvPr>
+          <p:cNvSpPr txBox="1"/>
+          <p:nvPr/>
+        </p:nvSpPr>
+        <p:spPr>
+          <a:xfrm>
+            <a:off x="133815" y="122663"/>
+            <a:ext cx="11255674" cy="461665"/>
+          </a:xfrm>
+          <a:prstGeom prst="rect">
+            <a:avLst/>
+          </a:prstGeom>
+          <a:noFill/>
+        </p:spPr>
+        <p:txBody>
+          <a:bodyPr wrap="square" rtlCol="0">
+            <a:spAutoFit/>
+          </a:bodyPr>
+          <a:lstStyle/>
+          <a:p>
+            <a:r>
+              <a:rPr lang="en-US" sz="2400" b="1" dirty="0"/>
+              <a:t>Medical Test Paradox – Predictive Power of Positive or Negative Test Result</a:t>
+            </a:r>
+          </a:p>
+        </p:txBody>
+      </p:sp>
+      <p:sp>
+        <p:nvSpPr>
+          <p:cNvPr id="3" name="TextBox 2">
+            <a:extLst>
+              <a:ext uri="{FF2B5EF4-FFF2-40B4-BE49-F238E27FC236}">
+                <a16:creationId xmlns:a16="http://schemas.microsoft.com/office/drawing/2014/main" id="{8E05CF1F-B716-9C47-9B0F-5C157DE1741D}"/>
+              </a:ext>
+            </a:extLst>
+          </p:cNvPr>
+          <p:cNvSpPr txBox="1"/>
+          <p:nvPr/>
+        </p:nvSpPr>
+        <p:spPr>
+          <a:xfrm>
+            <a:off x="133816" y="645883"/>
+            <a:ext cx="4337824" cy="307777"/>
+          </a:xfrm>
+          <a:prstGeom prst="rect">
+            <a:avLst/>
+          </a:prstGeom>
+          <a:noFill/>
+        </p:spPr>
+        <p:txBody>
+          <a:bodyPr wrap="square" rtlCol="0">
+            <a:spAutoFit/>
+          </a:bodyPr>
+          <a:lstStyle/>
+          <a:p>
+            <a:r>
+              <a:rPr lang="en-US" sz="1400" dirty="0"/>
+              <a:t>from </a:t>
+            </a:r>
+            <a:r>
+              <a:rPr lang="en-US" sz="1400" dirty="0">
+                <a:hlinkClick r:id="rId2"/>
+              </a:rPr>
+              <a:t>https://www.youtube.com/watch?v=lG4VkPoG3ko</a:t>
+            </a:r>
+            <a:r>
+              <a:rPr lang="en-US" sz="1400" dirty="0"/>
+              <a:t> </a:t>
+            </a:r>
+          </a:p>
+        </p:txBody>
+      </p:sp>
+      <p:sp>
+        <p:nvSpPr>
+          <p:cNvPr id="4" name="TextBox 3">
+            <a:extLst>
+              <a:ext uri="{FF2B5EF4-FFF2-40B4-BE49-F238E27FC236}">
+                <a16:creationId xmlns:a16="http://schemas.microsoft.com/office/drawing/2014/main" id="{6A015FA5-9F2A-E743-BA81-54B9A767ADD5}"/>
+              </a:ext>
+            </a:extLst>
+          </p:cNvPr>
+          <p:cNvSpPr txBox="1"/>
+          <p:nvPr/>
+        </p:nvSpPr>
+        <p:spPr>
+          <a:xfrm>
+            <a:off x="133815" y="1169103"/>
+            <a:ext cx="8055980" cy="4401205"/>
+          </a:xfrm>
+          <a:prstGeom prst="rect">
+            <a:avLst/>
+          </a:prstGeom>
+          <a:noFill/>
+        </p:spPr>
+        <p:txBody>
+          <a:bodyPr wrap="square" rtlCol="0">
+            <a:spAutoFit/>
+          </a:bodyPr>
+          <a:lstStyle/>
+          <a:p>
+            <a:r>
+              <a:rPr lang="en-US" dirty="0"/>
+              <a:t>We have 1,000 people.</a:t>
+            </a:r>
+          </a:p>
+          <a:p>
+            <a:r>
+              <a:rPr lang="en-US" dirty="0"/>
+              <a:t>1% of them have a disease:</a:t>
+            </a:r>
+          </a:p>
+          <a:p>
+            <a:r>
+              <a:rPr lang="en-US" b="1" dirty="0">
+                <a:solidFill>
+                  <a:srgbClr val="0070C0"/>
+                </a:solidFill>
+                <a:latin typeface="Menlo" panose="020B0609030804020204" pitchFamily="49" charset="0"/>
+                <a:ea typeface="Menlo" panose="020B0609030804020204" pitchFamily="49" charset="0"/>
+                <a:cs typeface="Menlo" panose="020B0609030804020204" pitchFamily="49" charset="0"/>
+              </a:rPr>
+              <a:t>    </a:t>
+            </a:r>
+            <a:r>
+              <a:rPr lang="en-US" b="1" dirty="0" err="1">
+                <a:solidFill>
+                  <a:srgbClr val="0070C0"/>
+                </a:solidFill>
+                <a:latin typeface="Menlo" panose="020B0609030804020204" pitchFamily="49" charset="0"/>
+                <a:ea typeface="Menlo" panose="020B0609030804020204" pitchFamily="49" charset="0"/>
+                <a:cs typeface="Menlo" panose="020B0609030804020204" pitchFamily="49" charset="0"/>
+              </a:rPr>
+              <a:t>N_sick</a:t>
+            </a:r>
+            <a:r>
+              <a:rPr lang="en-US" b="1" dirty="0">
+                <a:solidFill>
+                  <a:srgbClr val="0070C0"/>
+                </a:solidFill>
+                <a:latin typeface="Menlo" panose="020B0609030804020204" pitchFamily="49" charset="0"/>
+                <a:ea typeface="Menlo" panose="020B0609030804020204" pitchFamily="49" charset="0"/>
+                <a:cs typeface="Menlo" panose="020B0609030804020204" pitchFamily="49" charset="0"/>
+              </a:rPr>
+              <a:t>    = 10</a:t>
+            </a:r>
+          </a:p>
+          <a:p>
+            <a:r>
+              <a:rPr lang="en-US" b="1" dirty="0">
+                <a:solidFill>
+                  <a:srgbClr val="0070C0"/>
+                </a:solidFill>
+                <a:latin typeface="Menlo" panose="020B0609030804020204" pitchFamily="49" charset="0"/>
+                <a:ea typeface="Menlo" panose="020B0609030804020204" pitchFamily="49" charset="0"/>
+                <a:cs typeface="Menlo" panose="020B0609030804020204" pitchFamily="49" charset="0"/>
+              </a:rPr>
+              <a:t>    </a:t>
+            </a:r>
+            <a:r>
+              <a:rPr lang="en-US" b="1" dirty="0" err="1">
+                <a:solidFill>
+                  <a:srgbClr val="0070C0"/>
+                </a:solidFill>
+                <a:latin typeface="Menlo" panose="020B0609030804020204" pitchFamily="49" charset="0"/>
+                <a:ea typeface="Menlo" panose="020B0609030804020204" pitchFamily="49" charset="0"/>
+                <a:cs typeface="Menlo" panose="020B0609030804020204" pitchFamily="49" charset="0"/>
+              </a:rPr>
+              <a:t>N_healthy</a:t>
+            </a:r>
+            <a:r>
+              <a:rPr lang="en-US" b="1" dirty="0">
+                <a:solidFill>
+                  <a:srgbClr val="0070C0"/>
+                </a:solidFill>
+                <a:latin typeface="Menlo" panose="020B0609030804020204" pitchFamily="49" charset="0"/>
+                <a:ea typeface="Menlo" panose="020B0609030804020204" pitchFamily="49" charset="0"/>
+                <a:cs typeface="Menlo" panose="020B0609030804020204" pitchFamily="49" charset="0"/>
+              </a:rPr>
+              <a:t> = 990</a:t>
+            </a:r>
+          </a:p>
+          <a:p>
+            <a:endParaRPr lang="en-US" dirty="0"/>
+          </a:p>
+          <a:p>
+            <a:r>
+              <a:rPr lang="en-US" dirty="0"/>
+              <a:t>We use a test with </a:t>
+            </a:r>
+            <a:r>
+              <a:rPr lang="en-US" b="1" dirty="0">
+                <a:solidFill>
+                  <a:srgbClr val="FF0000"/>
+                </a:solidFill>
+              </a:rPr>
+              <a:t>sensitivity</a:t>
+            </a:r>
+            <a:r>
+              <a:rPr lang="en-US" dirty="0"/>
+              <a:t> </a:t>
+            </a:r>
+            <a:r>
+              <a:rPr lang="en-US" b="1" dirty="0">
+                <a:solidFill>
+                  <a:srgbClr val="0070C0"/>
+                </a:solidFill>
+              </a:rPr>
+              <a:t>SE</a:t>
+            </a:r>
+            <a:r>
+              <a:rPr lang="en-US" dirty="0"/>
+              <a:t> = 90% and </a:t>
+            </a:r>
+            <a:r>
+              <a:rPr lang="en-US" b="1" dirty="0">
+                <a:solidFill>
+                  <a:srgbClr val="FF0000"/>
+                </a:solidFill>
+              </a:rPr>
+              <a:t>specificity</a:t>
+            </a:r>
+            <a:r>
+              <a:rPr lang="en-US" dirty="0"/>
+              <a:t> </a:t>
+            </a:r>
+            <a:r>
+              <a:rPr lang="en-US" b="1" dirty="0">
+                <a:solidFill>
+                  <a:srgbClr val="0070C0"/>
+                </a:solidFill>
+              </a:rPr>
+              <a:t>SP</a:t>
+            </a:r>
+            <a:r>
+              <a:rPr lang="en-US" dirty="0"/>
+              <a:t> = 91%.</a:t>
+            </a:r>
+          </a:p>
+          <a:p>
+            <a:endParaRPr lang="en-US" dirty="0"/>
+          </a:p>
+          <a:p>
+            <a:r>
+              <a:rPr lang="en-US" b="1" dirty="0">
+                <a:solidFill>
+                  <a:srgbClr val="FF0000"/>
+                </a:solidFill>
+              </a:rPr>
+              <a:t>This means that test shows results as following:</a:t>
+            </a:r>
+          </a:p>
+          <a:p>
+            <a:endParaRPr lang="en-US" dirty="0"/>
+          </a:p>
+          <a:p>
+            <a:r>
+              <a:rPr lang="en-US" b="1" dirty="0">
+                <a:solidFill>
+                  <a:srgbClr val="0070C0"/>
+                </a:solidFill>
+                <a:latin typeface="Menlo" panose="020B0609030804020204" pitchFamily="49" charset="0"/>
+                <a:ea typeface="Menlo" panose="020B0609030804020204" pitchFamily="49" charset="0"/>
+                <a:cs typeface="Menlo" panose="020B0609030804020204" pitchFamily="49" charset="0"/>
+              </a:rPr>
+              <a:t>TP = True Positive   =   </a:t>
+            </a:r>
+            <a:r>
+              <a:rPr lang="en-US" b="1" dirty="0" err="1">
+                <a:solidFill>
+                  <a:srgbClr val="0070C0"/>
+                </a:solidFill>
+                <a:latin typeface="Menlo" panose="020B0609030804020204" pitchFamily="49" charset="0"/>
+                <a:ea typeface="Menlo" panose="020B0609030804020204" pitchFamily="49" charset="0"/>
+                <a:cs typeface="Menlo" panose="020B0609030804020204" pitchFamily="49" charset="0"/>
+              </a:rPr>
+              <a:t>N_sick</a:t>
+            </a:r>
+            <a:r>
+              <a:rPr lang="en-US" b="1" dirty="0">
+                <a:solidFill>
+                  <a:srgbClr val="0070C0"/>
+                </a:solidFill>
+                <a:latin typeface="Menlo" panose="020B0609030804020204" pitchFamily="49" charset="0"/>
+                <a:ea typeface="Menlo" panose="020B0609030804020204" pitchFamily="49" charset="0"/>
+                <a:cs typeface="Menlo" panose="020B0609030804020204" pitchFamily="49" charset="0"/>
+              </a:rPr>
+              <a:t>    * SE/100   =     9 out of  10</a:t>
+            </a:r>
+          </a:p>
+          <a:p>
+            <a:r>
+              <a:rPr lang="en-US" b="1" dirty="0">
+                <a:solidFill>
+                  <a:srgbClr val="0070C0"/>
+                </a:solidFill>
+                <a:latin typeface="Menlo" panose="020B0609030804020204" pitchFamily="49" charset="0"/>
+                <a:ea typeface="Menlo" panose="020B0609030804020204" pitchFamily="49" charset="0"/>
+                <a:cs typeface="Menlo" panose="020B0609030804020204" pitchFamily="49" charset="0"/>
+              </a:rPr>
+              <a:t>TN = True Negative   =   </a:t>
+            </a:r>
+            <a:r>
+              <a:rPr lang="en-US" b="1" dirty="0" err="1">
+                <a:solidFill>
+                  <a:srgbClr val="0070C0"/>
+                </a:solidFill>
+                <a:latin typeface="Menlo" panose="020B0609030804020204" pitchFamily="49" charset="0"/>
+                <a:ea typeface="Menlo" panose="020B0609030804020204" pitchFamily="49" charset="0"/>
+                <a:cs typeface="Menlo" panose="020B0609030804020204" pitchFamily="49" charset="0"/>
+              </a:rPr>
+              <a:t>N_healthy</a:t>
+            </a:r>
+            <a:r>
+              <a:rPr lang="en-US" b="1" dirty="0">
+                <a:solidFill>
+                  <a:srgbClr val="0070C0"/>
+                </a:solidFill>
+                <a:latin typeface="Menlo" panose="020B0609030804020204" pitchFamily="49" charset="0"/>
+                <a:ea typeface="Menlo" panose="020B0609030804020204" pitchFamily="49" charset="0"/>
+                <a:cs typeface="Menlo" panose="020B0609030804020204" pitchFamily="49" charset="0"/>
+              </a:rPr>
+              <a:t> * SP/100   =   901 out of 990</a:t>
+            </a:r>
+          </a:p>
+          <a:p>
+            <a:endParaRPr lang="en-US" b="1" dirty="0">
+              <a:solidFill>
+                <a:srgbClr val="0070C0"/>
+              </a:solidFill>
+              <a:latin typeface="Menlo" panose="020B0609030804020204" pitchFamily="49" charset="0"/>
+              <a:ea typeface="Menlo" panose="020B0609030804020204" pitchFamily="49" charset="0"/>
+              <a:cs typeface="Menlo" panose="020B0609030804020204" pitchFamily="49" charset="0"/>
+            </a:endParaRPr>
+          </a:p>
+          <a:p>
+            <a:r>
+              <a:rPr lang="en-US" b="1" dirty="0">
+                <a:solidFill>
+                  <a:srgbClr val="0070C0"/>
+                </a:solidFill>
+                <a:latin typeface="Menlo" panose="020B0609030804020204" pitchFamily="49" charset="0"/>
+                <a:ea typeface="Menlo" panose="020B0609030804020204" pitchFamily="49" charset="0"/>
+                <a:cs typeface="Menlo" panose="020B0609030804020204" pitchFamily="49" charset="0"/>
+              </a:rPr>
+              <a:t>FN = False Negative  =   1 out of  10</a:t>
+            </a:r>
+          </a:p>
+          <a:p>
+            <a:r>
+              <a:rPr lang="en-US" b="1" dirty="0">
+                <a:solidFill>
+                  <a:srgbClr val="0070C0"/>
+                </a:solidFill>
+                <a:latin typeface="Menlo" panose="020B0609030804020204" pitchFamily="49" charset="0"/>
+                <a:ea typeface="Menlo" panose="020B0609030804020204" pitchFamily="49" charset="0"/>
+                <a:cs typeface="Menlo" panose="020B0609030804020204" pitchFamily="49" charset="0"/>
+              </a:rPr>
+              <a:t>FP = False Positive  =  89 out of 990</a:t>
+            </a:r>
+          </a:p>
+          <a:p>
+            <a:endParaRPr lang="en-US" dirty="0"/>
+          </a:p>
+          <a:p>
+            <a:r>
+              <a:rPr lang="en-US" b="1" dirty="0">
+                <a:solidFill>
+                  <a:srgbClr val="FF0000"/>
+                </a:solidFill>
+              </a:rPr>
+              <a:t>What is the predictive power of this test?</a:t>
+            </a:r>
+          </a:p>
+          <a:p>
+            <a:endParaRPr lang="en-US" dirty="0"/>
+          </a:p>
+          <a:p>
+            <a:r>
+              <a:rPr lang="en-US" b="1" dirty="0">
+                <a:solidFill>
+                  <a:srgbClr val="00B050"/>
+                </a:solidFill>
+                <a:latin typeface="Menlo" panose="020B0609030804020204" pitchFamily="49" charset="0"/>
+                <a:ea typeface="Menlo" panose="020B0609030804020204" pitchFamily="49" charset="0"/>
+                <a:cs typeface="Menlo" panose="020B0609030804020204" pitchFamily="49" charset="0"/>
+              </a:rPr>
+              <a:t>Positive result :  TP/(TP+FP)  =    9/(9+89)   =  </a:t>
+            </a:r>
+            <a:r>
+              <a:rPr lang="en-US" b="1" dirty="0">
+                <a:solidFill>
+                  <a:srgbClr val="FF0000"/>
+                </a:solidFill>
+                <a:latin typeface="Menlo" panose="020B0609030804020204" pitchFamily="49" charset="0"/>
+                <a:ea typeface="Menlo" panose="020B0609030804020204" pitchFamily="49" charset="0"/>
+                <a:cs typeface="Menlo" panose="020B0609030804020204" pitchFamily="49" charset="0"/>
+              </a:rPr>
+              <a:t>0.092  (1 in 11 chance)</a:t>
+            </a:r>
+          </a:p>
+          <a:p>
+            <a:endParaRPr lang="en-US" b="1" dirty="0">
+              <a:solidFill>
+                <a:srgbClr val="00B050"/>
+              </a:solidFill>
+              <a:latin typeface="Menlo" panose="020B0609030804020204" pitchFamily="49" charset="0"/>
+              <a:ea typeface="Menlo" panose="020B0609030804020204" pitchFamily="49" charset="0"/>
+              <a:cs typeface="Menlo" panose="020B0609030804020204" pitchFamily="49" charset="0"/>
+            </a:endParaRPr>
+          </a:p>
+          <a:p>
+            <a:r>
+              <a:rPr lang="en-US" b="1" dirty="0">
+                <a:solidFill>
+                  <a:srgbClr val="00B050"/>
+                </a:solidFill>
+                <a:latin typeface="Menlo" panose="020B0609030804020204" pitchFamily="49" charset="0"/>
+                <a:ea typeface="Menlo" panose="020B0609030804020204" pitchFamily="49" charset="0"/>
+                <a:cs typeface="Menlo" panose="020B0609030804020204" pitchFamily="49" charset="0"/>
+              </a:rPr>
+              <a:t>Negative result :  TN/(TN+FN)  =  901/(901+1)  =  </a:t>
+            </a:r>
+            <a:r>
+              <a:rPr lang="en-US" b="1" dirty="0">
+                <a:solidFill>
+                  <a:srgbClr val="FF0000"/>
+                </a:solidFill>
+                <a:latin typeface="Menlo" panose="020B0609030804020204" pitchFamily="49" charset="0"/>
+                <a:ea typeface="Menlo" panose="020B0609030804020204" pitchFamily="49" charset="0"/>
+                <a:cs typeface="Menlo" panose="020B0609030804020204" pitchFamily="49" charset="0"/>
+              </a:rPr>
+              <a:t>0.999  (very good)</a:t>
+            </a:r>
+          </a:p>
+        </p:txBody>
+      </p:sp>
+      <p:sp>
+        <p:nvSpPr>
+          <p:cNvPr id="5" name="TextBox 4">
+            <a:extLst>
+              <a:ext uri="{FF2B5EF4-FFF2-40B4-BE49-F238E27FC236}">
+                <a16:creationId xmlns:a16="http://schemas.microsoft.com/office/drawing/2014/main" id="{9C669B34-BADA-E044-8795-BDA48F99CCA7}"/>
+              </a:ext>
+            </a:extLst>
+          </p:cNvPr>
+          <p:cNvSpPr txBox="1"/>
+          <p:nvPr/>
+        </p:nvSpPr>
+        <p:spPr>
+          <a:xfrm>
+            <a:off x="4776616" y="6243258"/>
+            <a:ext cx="7245751" cy="461665"/>
+          </a:xfrm>
+          <a:prstGeom prst="rect">
+            <a:avLst/>
+          </a:prstGeom>
+          <a:noFill/>
+          <a:ln w="25400">
+            <a:solidFill>
+              <a:schemeClr val="accent1"/>
+            </a:solidFill>
+          </a:ln>
+        </p:spPr>
+        <p:txBody>
+          <a:bodyPr wrap="square" rtlCol="0">
+            <a:spAutoFit/>
+          </a:bodyPr>
+          <a:lstStyle/>
+          <a:p>
+            <a:r>
+              <a:rPr lang="en-US" sz="1200" b="1" dirty="0">
+                <a:solidFill>
+                  <a:srgbClr val="FF0000"/>
+                </a:solidFill>
+                <a:latin typeface="Consolas" panose="020B0609020204030204" pitchFamily="49" charset="0"/>
+                <a:cs typeface="Consolas" panose="020B0609020204030204" pitchFamily="49" charset="0"/>
+              </a:rPr>
+              <a:t>Sensitivity</a:t>
+            </a:r>
+            <a:r>
+              <a:rPr lang="en-US" sz="1200" b="1" dirty="0">
+                <a:latin typeface="Consolas" panose="020B0609020204030204" pitchFamily="49" charset="0"/>
+                <a:cs typeface="Consolas" panose="020B0609020204030204" pitchFamily="49" charset="0"/>
+              </a:rPr>
+              <a:t> = </a:t>
+            </a:r>
+            <a:r>
+              <a:rPr lang="en-US" sz="1200" b="1" dirty="0">
+                <a:solidFill>
+                  <a:srgbClr val="FF0000"/>
+                </a:solidFill>
+                <a:latin typeface="Consolas" panose="020B0609020204030204" pitchFamily="49" charset="0"/>
+                <a:cs typeface="Consolas" panose="020B0609020204030204" pitchFamily="49" charset="0"/>
+              </a:rPr>
+              <a:t>Recall</a:t>
+            </a:r>
+            <a:r>
+              <a:rPr lang="en-US" sz="1200" b="1" dirty="0">
+                <a:latin typeface="Consolas" panose="020B0609020204030204" pitchFamily="49" charset="0"/>
+                <a:cs typeface="Consolas" panose="020B0609020204030204" pitchFamily="49" charset="0"/>
+              </a:rPr>
+              <a:t> = True Positive Rate (TPR) : TPR = (TP / P) = TP / (TP + FN)</a:t>
+            </a:r>
+          </a:p>
+          <a:p>
+            <a:r>
+              <a:rPr lang="en-US" sz="1200" b="1" dirty="0">
+                <a:solidFill>
+                  <a:srgbClr val="FF0000"/>
+                </a:solidFill>
+                <a:latin typeface="Consolas" panose="020B0609020204030204" pitchFamily="49" charset="0"/>
+                <a:cs typeface="Consolas" panose="020B0609020204030204" pitchFamily="49" charset="0"/>
+              </a:rPr>
+              <a:t>Specificity</a:t>
+            </a:r>
+            <a:r>
+              <a:rPr lang="en-US" sz="1200" b="1" dirty="0">
+                <a:latin typeface="Consolas" panose="020B0609020204030204" pitchFamily="49" charset="0"/>
+                <a:cs typeface="Consolas" panose="020B0609020204030204" pitchFamily="49" charset="0"/>
+              </a:rPr>
+              <a:t> (SPC)    = True Negative Rate (TNR) : SPC = (TN / N) = TN / (FP + TN)</a:t>
+            </a:r>
+          </a:p>
+        </p:txBody>
+      </p:sp>
+      <p:graphicFrame>
+        <p:nvGraphicFramePr>
+          <p:cNvPr id="8" name="Table 7">
+            <a:extLst>
+              <a:ext uri="{FF2B5EF4-FFF2-40B4-BE49-F238E27FC236}">
+                <a16:creationId xmlns:a16="http://schemas.microsoft.com/office/drawing/2014/main" id="{0E2BE668-AAE7-CF4C-B35D-D4643C145E5F}"/>
+              </a:ext>
+            </a:extLst>
+          </p:cNvPr>
+          <p:cNvGraphicFramePr>
+            <a:graphicFrameLocks noGrp="1"/>
+          </p:cNvGraphicFramePr>
+          <p:nvPr/>
+        </p:nvGraphicFramePr>
+        <p:xfrm>
+          <a:off x="8668060" y="3350234"/>
+          <a:ext cx="3229335" cy="1182027"/>
+        </p:xfrm>
+        <a:graphic>
+          <a:graphicData uri="http://schemas.openxmlformats.org/drawingml/2006/table">
+            <a:tbl>
+              <a:tblPr>
+                <a:tableStyleId>{5C22544A-7EE6-4342-B048-85BDC9FD1C3A}</a:tableStyleId>
+              </a:tblPr>
+              <a:tblGrid>
+                <a:gridCol w="1076445">
+                  <a:extLst>
+                    <a:ext uri="{9D8B030D-6E8A-4147-A177-3AD203B41FA5}">
+                      <a16:colId xmlns:a16="http://schemas.microsoft.com/office/drawing/2014/main" val="2903718036"/>
+                    </a:ext>
+                  </a:extLst>
+                </a:gridCol>
+                <a:gridCol w="1076445">
+                  <a:extLst>
+                    <a:ext uri="{9D8B030D-6E8A-4147-A177-3AD203B41FA5}">
+                      <a16:colId xmlns:a16="http://schemas.microsoft.com/office/drawing/2014/main" val="663645295"/>
+                    </a:ext>
+                  </a:extLst>
+                </a:gridCol>
+                <a:gridCol w="1076445">
+                  <a:extLst>
+                    <a:ext uri="{9D8B030D-6E8A-4147-A177-3AD203B41FA5}">
+                      <a16:colId xmlns:a16="http://schemas.microsoft.com/office/drawing/2014/main" val="3368044933"/>
+                    </a:ext>
+                  </a:extLst>
+                </a:gridCol>
+              </a:tblGrid>
+              <a:tr h="394009">
+                <a:tc>
+                  <a:txBody>
+                    <a:bodyPr/>
+                    <a:lstStyle/>
+                    <a:p>
+                      <a:endParaRPr lang="en-US" dirty="0"/>
+                    </a:p>
+                  </a:txBody>
+                  <a:tcPr/>
+                </a:tc>
+                <a:tc>
+                  <a:txBody>
+                    <a:bodyPr/>
+                    <a:lstStyle/>
+                    <a:p>
+                      <a:pPr algn="ctr"/>
+                      <a:r>
+                        <a:rPr lang="en-US" dirty="0"/>
+                        <a:t>Positive</a:t>
+                      </a:r>
+                    </a:p>
+                  </a:txBody>
+                  <a:tcPr/>
+                </a:tc>
+                <a:tc>
+                  <a:txBody>
+                    <a:bodyPr/>
+                    <a:lstStyle/>
+                    <a:p>
+                      <a:pPr algn="ctr"/>
+                      <a:r>
+                        <a:rPr lang="en-US" dirty="0"/>
+                        <a:t>Negative</a:t>
+                      </a:r>
+                    </a:p>
+                  </a:txBody>
+                  <a:tcPr/>
+                </a:tc>
+                <a:extLst>
+                  <a:ext uri="{0D108BD9-81ED-4DB2-BD59-A6C34878D82A}">
+                    <a16:rowId xmlns:a16="http://schemas.microsoft.com/office/drawing/2014/main" val="3644456898"/>
+                  </a:ext>
+                </a:extLst>
+              </a:tr>
+              <a:tr h="394009">
+                <a:tc>
+                  <a:txBody>
+                    <a:bodyPr/>
+                    <a:lstStyle/>
+                    <a:p>
+                      <a:r>
+                        <a:rPr lang="en-US" dirty="0"/>
+                        <a:t>Disease</a:t>
+                      </a:r>
+                    </a:p>
+                  </a:txBody>
+                  <a:tcPr/>
+                </a:tc>
+                <a:tc>
+                  <a:txBody>
+                    <a:bodyPr/>
+                    <a:lstStyle/>
+                    <a:p>
+                      <a:pPr algn="ctr"/>
+                      <a:r>
+                        <a:rPr lang="en-US" dirty="0"/>
+                        <a:t>9</a:t>
+                      </a:r>
+                    </a:p>
+                  </a:txBody>
+                  <a:tcPr/>
+                </a:tc>
+                <a:tc>
+                  <a:txBody>
+                    <a:bodyPr/>
+                    <a:lstStyle/>
+                    <a:p>
+                      <a:pPr algn="ctr"/>
+                      <a:r>
+                        <a:rPr lang="en-US" dirty="0"/>
+                        <a:t>1</a:t>
+                      </a:r>
+                    </a:p>
+                  </a:txBody>
+                  <a:tcPr/>
+                </a:tc>
+                <a:extLst>
+                  <a:ext uri="{0D108BD9-81ED-4DB2-BD59-A6C34878D82A}">
+                    <a16:rowId xmlns:a16="http://schemas.microsoft.com/office/drawing/2014/main" val="4270934848"/>
+                  </a:ext>
+                </a:extLst>
+              </a:tr>
+              <a:tr h="394009">
+                <a:tc>
+                  <a:txBody>
+                    <a:bodyPr/>
+                    <a:lstStyle/>
+                    <a:p>
+                      <a:r>
+                        <a:rPr lang="en-US" dirty="0"/>
+                        <a:t>Healthy</a:t>
+                      </a:r>
+                    </a:p>
+                  </a:txBody>
+                  <a:tcPr/>
+                </a:tc>
+                <a:tc>
+                  <a:txBody>
+                    <a:bodyPr/>
+                    <a:lstStyle/>
+                    <a:p>
+                      <a:pPr algn="ctr"/>
+                      <a:r>
+                        <a:rPr lang="en-US" dirty="0"/>
+                        <a:t>89</a:t>
+                      </a:r>
+                    </a:p>
+                  </a:txBody>
+                  <a:tcPr/>
+                </a:tc>
+                <a:tc>
+                  <a:txBody>
+                    <a:bodyPr/>
+                    <a:lstStyle/>
+                    <a:p>
+                      <a:pPr algn="ctr"/>
+                      <a:r>
+                        <a:rPr lang="en-US" dirty="0"/>
+                        <a:t>901</a:t>
+                      </a:r>
+                    </a:p>
+                  </a:txBody>
+                  <a:tcPr/>
+                </a:tc>
+                <a:extLst>
+                  <a:ext uri="{0D108BD9-81ED-4DB2-BD59-A6C34878D82A}">
+                    <a16:rowId xmlns:a16="http://schemas.microsoft.com/office/drawing/2014/main" val="2909777930"/>
+                  </a:ext>
+                </a:extLst>
+              </a:tr>
+            </a:tbl>
+          </a:graphicData>
+        </a:graphic>
+      </p:graphicFrame>
+      <p:sp>
+        <p:nvSpPr>
+          <p:cNvPr id="9" name="Rectangle 8">
+            <a:extLst>
+              <a:ext uri="{FF2B5EF4-FFF2-40B4-BE49-F238E27FC236}">
+                <a16:creationId xmlns:a16="http://schemas.microsoft.com/office/drawing/2014/main" id="{067FD01A-6B8B-174A-9029-F60FFA6CE6D5}"/>
+              </a:ext>
+            </a:extLst>
+          </p:cNvPr>
+          <p:cNvSpPr/>
+          <p:nvPr/>
+        </p:nvSpPr>
+        <p:spPr>
+          <a:xfrm>
+            <a:off x="6129345" y="1076314"/>
+            <a:ext cx="5109240" cy="1063616"/>
+          </a:xfrm>
+          <a:prstGeom prst="rect">
+            <a:avLst/>
+          </a:prstGeom>
+          <a:pattFill prst="pct5">
+            <a:fgClr>
+              <a:schemeClr val="accent1"/>
+            </a:fgClr>
+            <a:bgClr>
+              <a:schemeClr val="bg1"/>
+            </a:bgClr>
+          </a:pattFill>
+          <a:ln w="63500"/>
+        </p:spPr>
+        <p:style>
+          <a:lnRef idx="2">
+            <a:schemeClr val="accent1">
+              <a:shade val="50000"/>
+            </a:schemeClr>
+          </a:lnRef>
+          <a:fillRef idx="1">
+            <a:schemeClr val="accent1"/>
+          </a:fillRef>
+          <a:effectRef idx="0">
+            <a:schemeClr val="accent1"/>
+          </a:effectRef>
+          <a:fontRef idx="minor">
+            <a:schemeClr val="lt1"/>
+          </a:fontRef>
+        </p:style>
+        <p:txBody>
+          <a:bodyPr rtlCol="0" anchor="ctr"/>
+          <a:lstStyle/>
+          <a:p>
+            <a:pPr algn="ctr"/>
+            <a:endParaRPr lang="en-US"/>
+          </a:p>
+        </p:txBody>
+      </p:sp>
+      <p:sp>
+        <p:nvSpPr>
+          <p:cNvPr id="10" name="Rectangle 9">
+            <a:extLst>
+              <a:ext uri="{FF2B5EF4-FFF2-40B4-BE49-F238E27FC236}">
+                <a16:creationId xmlns:a16="http://schemas.microsoft.com/office/drawing/2014/main" id="{27254BEF-E130-5741-B601-65E13C55C2FA}"/>
+              </a:ext>
+            </a:extLst>
+          </p:cNvPr>
+          <p:cNvSpPr/>
+          <p:nvPr/>
+        </p:nvSpPr>
+        <p:spPr>
+          <a:xfrm>
+            <a:off x="11238073" y="1073450"/>
+            <a:ext cx="222573" cy="1063616"/>
+          </a:xfrm>
+          <a:prstGeom prst="rect">
+            <a:avLst/>
+          </a:prstGeom>
+          <a:pattFill prst="pct5">
+            <a:fgClr>
+              <a:schemeClr val="accent1"/>
+            </a:fgClr>
+            <a:bgClr>
+              <a:schemeClr val="bg1"/>
+            </a:bgClr>
+          </a:pattFill>
+          <a:ln w="63500"/>
+        </p:spPr>
+        <p:style>
+          <a:lnRef idx="2">
+            <a:schemeClr val="accent1">
+              <a:shade val="50000"/>
+            </a:schemeClr>
+          </a:lnRef>
+          <a:fillRef idx="1">
+            <a:schemeClr val="accent1"/>
+          </a:fillRef>
+          <a:effectRef idx="0">
+            <a:schemeClr val="accent1"/>
+          </a:effectRef>
+          <a:fontRef idx="minor">
+            <a:schemeClr val="lt1"/>
+          </a:fontRef>
+        </p:style>
+        <p:txBody>
+          <a:bodyPr rtlCol="0" anchor="ctr"/>
+          <a:lstStyle/>
+          <a:p>
+            <a:pPr algn="ctr"/>
+            <a:endParaRPr lang="en-US"/>
+          </a:p>
+        </p:txBody>
+      </p:sp>
+      <p:sp>
+        <p:nvSpPr>
+          <p:cNvPr id="12" name="TextBox 11">
+            <a:extLst>
+              <a:ext uri="{FF2B5EF4-FFF2-40B4-BE49-F238E27FC236}">
+                <a16:creationId xmlns:a16="http://schemas.microsoft.com/office/drawing/2014/main" id="{F2A71D02-8BFE-4A41-B954-158FD105FE96}"/>
+              </a:ext>
+            </a:extLst>
+          </p:cNvPr>
+          <p:cNvSpPr txBox="1"/>
+          <p:nvPr/>
+        </p:nvSpPr>
+        <p:spPr>
+          <a:xfrm>
+            <a:off x="11195715" y="655038"/>
+            <a:ext cx="593873" cy="369332"/>
+          </a:xfrm>
+          <a:prstGeom prst="rect">
+            <a:avLst/>
+          </a:prstGeom>
+          <a:noFill/>
+        </p:spPr>
+        <p:txBody>
+          <a:bodyPr wrap="square" rtlCol="0">
+            <a:spAutoFit/>
+          </a:bodyPr>
+          <a:lstStyle>
+            <a:defPPr>
+              <a:defRPr lang="en-US"/>
+            </a:defPPr>
+          </a:lstStyle>
+          <a:p>
+            <a:r>
+              <a:rPr lang="en-US" b="1" dirty="0">
+                <a:solidFill>
+                  <a:srgbClr val="0070C0"/>
+                </a:solidFill>
+              </a:rPr>
+              <a:t>Sick</a:t>
+            </a:r>
+          </a:p>
+        </p:txBody>
+      </p:sp>
+      <p:sp>
+        <p:nvSpPr>
+          <p:cNvPr id="14" name="Rounded Rectangle 13">
+            <a:extLst>
+              <a:ext uri="{FF2B5EF4-FFF2-40B4-BE49-F238E27FC236}">
+                <a16:creationId xmlns:a16="http://schemas.microsoft.com/office/drawing/2014/main" id="{106A2EBB-F705-314C-87D1-0393210B3F4F}"/>
+              </a:ext>
+            </a:extLst>
+          </p:cNvPr>
+          <p:cNvSpPr/>
+          <p:nvPr/>
+        </p:nvSpPr>
+        <p:spPr>
+          <a:xfrm>
+            <a:off x="6129345" y="1085507"/>
+            <a:ext cx="5073319" cy="177493"/>
+          </a:xfrm>
+          <a:prstGeom prst="roundRect">
+            <a:avLst/>
+          </a:prstGeom>
+          <a:solidFill>
+            <a:srgbClr val="FF0000">
+              <a:alpha val="46000"/>
+            </a:srgbClr>
+          </a:solidFill>
+        </p:spPr>
+        <p:style>
+          <a:lnRef idx="2">
+            <a:schemeClr val="accent1">
+              <a:shade val="50000"/>
+            </a:schemeClr>
+          </a:lnRef>
+          <a:fillRef idx="1">
+            <a:schemeClr val="accent1"/>
+          </a:fillRef>
+          <a:effectRef idx="0">
+            <a:schemeClr val="accent1"/>
+          </a:effectRef>
+          <a:fontRef idx="minor">
+            <a:schemeClr val="lt1"/>
+          </a:fontRef>
+        </p:style>
+        <p:txBody>
+          <a:bodyPr rtlCol="0" anchor="ctr"/>
+          <a:lstStyle/>
+          <a:p>
+            <a:pPr algn="ctr"/>
+            <a:endParaRPr lang="en-US"/>
+          </a:p>
+        </p:txBody>
+      </p:sp>
+      <p:sp>
+        <p:nvSpPr>
+          <p:cNvPr id="15" name="TextBox 14">
+            <a:extLst>
+              <a:ext uri="{FF2B5EF4-FFF2-40B4-BE49-F238E27FC236}">
+                <a16:creationId xmlns:a16="http://schemas.microsoft.com/office/drawing/2014/main" id="{BBA1D9E6-1ABE-9F4C-9EAC-6BECEECCCDF3}"/>
+              </a:ext>
+            </a:extLst>
+          </p:cNvPr>
+          <p:cNvSpPr txBox="1"/>
+          <p:nvPr/>
+        </p:nvSpPr>
+        <p:spPr>
+          <a:xfrm>
+            <a:off x="8235008" y="655039"/>
+            <a:ext cx="1194747" cy="369332"/>
+          </a:xfrm>
+          <a:prstGeom prst="rect">
+            <a:avLst/>
+          </a:prstGeom>
+          <a:noFill/>
+        </p:spPr>
+        <p:txBody>
+          <a:bodyPr wrap="square" rtlCol="0">
+            <a:spAutoFit/>
+          </a:bodyPr>
+          <a:lstStyle/>
+          <a:p>
+            <a:r>
+              <a:rPr lang="en-US" b="1" dirty="0">
+                <a:solidFill>
+                  <a:srgbClr val="0070C0"/>
+                </a:solidFill>
+              </a:rPr>
+              <a:t>Healthy</a:t>
+            </a:r>
+          </a:p>
+        </p:txBody>
+      </p:sp>
+      <p:sp>
+        <p:nvSpPr>
+          <p:cNvPr id="16" name="Rounded Rectangle 15">
+            <a:extLst>
+              <a:ext uri="{FF2B5EF4-FFF2-40B4-BE49-F238E27FC236}">
+                <a16:creationId xmlns:a16="http://schemas.microsoft.com/office/drawing/2014/main" id="{1FA1E96E-6827-1A4E-BEEB-FFB347B61E19}"/>
+              </a:ext>
+            </a:extLst>
+          </p:cNvPr>
+          <p:cNvSpPr/>
+          <p:nvPr/>
+        </p:nvSpPr>
+        <p:spPr>
+          <a:xfrm>
+            <a:off x="11251131" y="1297290"/>
+            <a:ext cx="186655" cy="836912"/>
+          </a:xfrm>
+          <a:prstGeom prst="roundRect">
+            <a:avLst/>
+          </a:prstGeom>
+          <a:solidFill>
+            <a:srgbClr val="FF0000">
+              <a:alpha val="46000"/>
+            </a:srgbClr>
+          </a:solidFill>
+        </p:spPr>
+        <p:style>
+          <a:lnRef idx="2">
+            <a:schemeClr val="accent1">
+              <a:shade val="50000"/>
+            </a:schemeClr>
+          </a:lnRef>
+          <a:fillRef idx="1">
+            <a:schemeClr val="accent1"/>
+          </a:fillRef>
+          <a:effectRef idx="0">
+            <a:schemeClr val="accent1"/>
+          </a:effectRef>
+          <a:fontRef idx="minor">
+            <a:schemeClr val="lt1"/>
+          </a:fontRef>
+        </p:style>
+        <p:txBody>
+          <a:bodyPr rtlCol="0" anchor="ctr"/>
+          <a:lstStyle/>
+          <a:p>
+            <a:pPr algn="ctr"/>
+            <a:endParaRPr lang="en-US"/>
+          </a:p>
+        </p:txBody>
+      </p:sp>
+      <p:sp>
+        <p:nvSpPr>
+          <p:cNvPr id="6" name="TextBox 5">
+            <a:extLst>
+              <a:ext uri="{FF2B5EF4-FFF2-40B4-BE49-F238E27FC236}">
+                <a16:creationId xmlns:a16="http://schemas.microsoft.com/office/drawing/2014/main" id="{C608A617-BD56-9C45-ADD8-90254C5BAFAD}"/>
+              </a:ext>
+            </a:extLst>
+          </p:cNvPr>
+          <p:cNvSpPr txBox="1"/>
+          <p:nvPr/>
+        </p:nvSpPr>
+        <p:spPr>
+          <a:xfrm>
+            <a:off x="9745360" y="2458862"/>
+            <a:ext cx="1238614" cy="369332"/>
+          </a:xfrm>
+          <a:prstGeom prst="rect">
+            <a:avLst/>
+          </a:prstGeom>
+          <a:noFill/>
+        </p:spPr>
+        <p:txBody>
+          <a:bodyPr wrap="square" rtlCol="0">
+            <a:spAutoFit/>
+          </a:bodyPr>
+          <a:lstStyle/>
+          <a:p>
+            <a:r>
+              <a:rPr lang="en-US" dirty="0"/>
+              <a:t>Specificity</a:t>
+            </a:r>
+          </a:p>
+        </p:txBody>
+      </p:sp>
+      <p:sp>
+        <p:nvSpPr>
+          <p:cNvPr id="17" name="TextBox 16">
+            <a:extLst>
+              <a:ext uri="{FF2B5EF4-FFF2-40B4-BE49-F238E27FC236}">
+                <a16:creationId xmlns:a16="http://schemas.microsoft.com/office/drawing/2014/main" id="{8CB0923E-ECC7-6245-8FE1-7A508801AE7C}"/>
+              </a:ext>
+            </a:extLst>
+          </p:cNvPr>
+          <p:cNvSpPr txBox="1"/>
+          <p:nvPr/>
+        </p:nvSpPr>
+        <p:spPr>
+          <a:xfrm>
+            <a:off x="10942961" y="2463330"/>
+            <a:ext cx="1238614" cy="369332"/>
+          </a:xfrm>
+          <a:prstGeom prst="rect">
+            <a:avLst/>
+          </a:prstGeom>
+          <a:noFill/>
+        </p:spPr>
+        <p:txBody>
+          <a:bodyPr wrap="square" rtlCol="0">
+            <a:spAutoFit/>
+          </a:bodyPr>
+          <a:lstStyle/>
+          <a:p>
+            <a:r>
+              <a:rPr lang="en-US" dirty="0"/>
+              <a:t>Sensitivity</a:t>
+            </a:r>
+          </a:p>
+        </p:txBody>
+      </p:sp>
+      <p:sp>
+        <p:nvSpPr>
+          <p:cNvPr id="19" name="Right Arrow 18">
+            <a:extLst>
+              <a:ext uri="{FF2B5EF4-FFF2-40B4-BE49-F238E27FC236}">
+                <a16:creationId xmlns:a16="http://schemas.microsoft.com/office/drawing/2014/main" id="{7955806D-7BAE-F44E-8A12-F4135B89FC48}"/>
+              </a:ext>
+            </a:extLst>
+          </p:cNvPr>
+          <p:cNvSpPr/>
+          <p:nvPr/>
+        </p:nvSpPr>
+        <p:spPr>
+          <a:xfrm rot="15301605">
+            <a:off x="11075422" y="2092501"/>
+            <a:ext cx="695931" cy="136977"/>
+          </a:xfrm>
+          <a:prstGeom prst="rightArrow">
+            <a:avLst/>
+          </a:prstGeom>
+          <a:solidFill>
+            <a:srgbClr val="00B050">
+              <a:alpha val="50000"/>
+            </a:srgbClr>
+          </a:solidFill>
+        </p:spPr>
+        <p:style>
+          <a:lnRef idx="2">
+            <a:schemeClr val="accent1">
+              <a:shade val="50000"/>
+            </a:schemeClr>
+          </a:lnRef>
+          <a:fillRef idx="1">
+            <a:schemeClr val="accent1"/>
+          </a:fillRef>
+          <a:effectRef idx="0">
+            <a:schemeClr val="accent1"/>
+          </a:effectRef>
+          <a:fontRef idx="minor">
+            <a:schemeClr val="lt1"/>
+          </a:fontRef>
+        </p:style>
+        <p:txBody>
+          <a:bodyPr rtlCol="0" anchor="ctr"/>
+          <a:lstStyle/>
+          <a:p>
+            <a:pPr algn="ctr"/>
+            <a:endParaRPr lang="en-US"/>
+          </a:p>
+        </p:txBody>
+      </p:sp>
+      <p:sp>
+        <p:nvSpPr>
+          <p:cNvPr id="20" name="Right Arrow 19">
+            <a:extLst>
+              <a:ext uri="{FF2B5EF4-FFF2-40B4-BE49-F238E27FC236}">
+                <a16:creationId xmlns:a16="http://schemas.microsoft.com/office/drawing/2014/main" id="{549106EC-632A-4E42-B319-03BF1C29FE7B}"/>
+              </a:ext>
+            </a:extLst>
+          </p:cNvPr>
+          <p:cNvSpPr/>
+          <p:nvPr/>
+        </p:nvSpPr>
+        <p:spPr>
+          <a:xfrm rot="15301605">
+            <a:off x="9927658" y="2102021"/>
+            <a:ext cx="695931" cy="136977"/>
+          </a:xfrm>
+          <a:prstGeom prst="rightArrow">
+            <a:avLst/>
+          </a:prstGeom>
+          <a:solidFill>
+            <a:srgbClr val="00B050">
+              <a:alpha val="50000"/>
+            </a:srgbClr>
+          </a:solidFill>
+        </p:spPr>
+        <p:style>
+          <a:lnRef idx="2">
+            <a:schemeClr val="accent1">
+              <a:shade val="50000"/>
+            </a:schemeClr>
+          </a:lnRef>
+          <a:fillRef idx="1">
+            <a:schemeClr val="accent1"/>
+          </a:fillRef>
+          <a:effectRef idx="0">
+            <a:schemeClr val="accent1"/>
+          </a:effectRef>
+          <a:fontRef idx="minor">
+            <a:schemeClr val="lt1"/>
+          </a:fontRef>
+        </p:style>
+        <p:txBody>
+          <a:bodyPr rtlCol="0" anchor="ctr"/>
+          <a:lstStyle/>
+          <a:p>
+            <a:pPr algn="ctr"/>
+            <a:endParaRPr lang="en-US"/>
+          </a:p>
+        </p:txBody>
+      </p:sp>
+      <p:sp>
+        <p:nvSpPr>
+          <p:cNvPr id="21" name="TextBox 20">
+            <a:extLst>
+              <a:ext uri="{FF2B5EF4-FFF2-40B4-BE49-F238E27FC236}">
+                <a16:creationId xmlns:a16="http://schemas.microsoft.com/office/drawing/2014/main" id="{0676F5FE-F7F8-6C42-92E2-D6CECF40AA59}"/>
+              </a:ext>
+            </a:extLst>
+          </p:cNvPr>
+          <p:cNvSpPr txBox="1"/>
+          <p:nvPr/>
+        </p:nvSpPr>
+        <p:spPr>
+          <a:xfrm>
+            <a:off x="6129345" y="1226316"/>
+            <a:ext cx="2223750" cy="923330"/>
+          </a:xfrm>
+          <a:prstGeom prst="rect">
+            <a:avLst/>
+          </a:prstGeom>
+          <a:noFill/>
+        </p:spPr>
+        <p:txBody>
+          <a:bodyPr wrap="none" rtlCol="0">
+            <a:spAutoFit/>
+          </a:bodyPr>
+          <a:lstStyle/>
+          <a:p>
+            <a:r>
+              <a:rPr lang="en-US" dirty="0"/>
+              <a:t>Test Results:</a:t>
+            </a:r>
+          </a:p>
+          <a:p>
+            <a:r>
+              <a:rPr lang="en-US" dirty="0"/>
+              <a:t>        Red = Positive</a:t>
+            </a:r>
+          </a:p>
+          <a:p>
+            <a:r>
+              <a:rPr lang="en-US" dirty="0"/>
+              <a:t>        White = Negative</a:t>
+            </a:r>
+          </a:p>
+        </p:txBody>
+      </p:sp>
+    </p:spTree>
+    <p:extLst>
+      <p:ext uri="{BB962C8B-B14F-4D97-AF65-F5344CB8AC3E}">
+        <p14:creationId xmlns:p14="http://schemas.microsoft.com/office/powerpoint/2010/main" val="2196185501"/>
+      </p:ext>
+    </p:extLst>
+  </p:cSld>
+  <p:clrMapOvr>
+    <a:masterClrMapping/>
+  </p:clrMapOvr>
+</p:sld>
+</file>
+
+<file path=ppt/slides/slide13.xml><?xml version="1.0" encoding="utf-8"?>
+<p:sld xmlns:a="http://schemas.openxmlformats.org/drawingml/2006/main" xmlns:r="http://schemas.openxmlformats.org/officeDocument/2006/relationships" xmlns:p="http://schemas.openxmlformats.org/presentationml/2006/main">
+  <p:cSld>
+    <p:spTree>
+      <p:nvGrpSpPr>
+        <p:cNvPr id="1" name=""/>
+        <p:cNvGrpSpPr/>
+        <p:nvPr/>
+      </p:nvGrpSpPr>
+      <p:grpSpPr>
+        <a:xfrm>
+          <a:off x="0" y="0"/>
+          <a:ext cx="0" cy="0"/>
+          <a:chOff x="0" y="0"/>
+          <a:chExt cx="0" cy="0"/>
+        </a:xfrm>
+      </p:grpSpPr>
+      <p:sp>
+        <p:nvSpPr>
+          <p:cNvPr id="4" name="Rectangle 3">
+            <a:extLst>
+              <a:ext uri="{FF2B5EF4-FFF2-40B4-BE49-F238E27FC236}">
+                <a16:creationId xmlns:a16="http://schemas.microsoft.com/office/drawing/2014/main" id="{9613AF28-158F-874A-80C9-B3721DC64360}"/>
+              </a:ext>
+            </a:extLst>
+          </p:cNvPr>
+          <p:cNvSpPr/>
+          <p:nvPr/>
+        </p:nvSpPr>
+        <p:spPr>
+          <a:xfrm>
+            <a:off x="150988" y="3594550"/>
+            <a:ext cx="6020789" cy="3059017"/>
+          </a:xfrm>
+          <a:prstGeom prst="rect">
+            <a:avLst/>
+          </a:prstGeom>
+          <a:noFill/>
+          <a:ln w="63500"/>
+        </p:spPr>
+        <p:style>
+          <a:lnRef idx="2">
+            <a:schemeClr val="accent1">
+              <a:shade val="50000"/>
+            </a:schemeClr>
+          </a:lnRef>
+          <a:fillRef idx="1">
+            <a:schemeClr val="accent1"/>
+          </a:fillRef>
+          <a:effectRef idx="0">
+            <a:schemeClr val="accent1"/>
+          </a:effectRef>
+          <a:fontRef idx="minor">
+            <a:schemeClr val="lt1"/>
+          </a:fontRef>
+        </p:style>
+        <p:txBody>
+          <a:bodyPr rtlCol="0" anchor="ctr"/>
+          <a:lstStyle/>
+          <a:p>
+            <a:pPr algn="ctr"/>
+            <a:endParaRPr lang="en-US" dirty="0"/>
+          </a:p>
+        </p:txBody>
+      </p:sp>
+      <p:sp>
+        <p:nvSpPr>
+          <p:cNvPr id="5" name="Rectangle 4">
+            <a:extLst>
+              <a:ext uri="{FF2B5EF4-FFF2-40B4-BE49-F238E27FC236}">
+                <a16:creationId xmlns:a16="http://schemas.microsoft.com/office/drawing/2014/main" id="{92764486-E703-DE4F-A0AF-94B80A05EA77}"/>
+              </a:ext>
+            </a:extLst>
+          </p:cNvPr>
+          <p:cNvSpPr/>
+          <p:nvPr/>
+        </p:nvSpPr>
+        <p:spPr>
+          <a:xfrm>
+            <a:off x="6171777" y="3594550"/>
+            <a:ext cx="1027087" cy="3059017"/>
+          </a:xfrm>
+          <a:prstGeom prst="rect">
+            <a:avLst/>
+          </a:prstGeom>
+          <a:noFill/>
+          <a:ln w="63500"/>
+        </p:spPr>
+        <p:style>
+          <a:lnRef idx="2">
+            <a:schemeClr val="accent1">
+              <a:shade val="50000"/>
+            </a:schemeClr>
+          </a:lnRef>
+          <a:fillRef idx="1">
+            <a:schemeClr val="accent1"/>
+          </a:fillRef>
+          <a:effectRef idx="0">
+            <a:schemeClr val="accent1"/>
+          </a:effectRef>
+          <a:fontRef idx="minor">
+            <a:schemeClr val="lt1"/>
+          </a:fontRef>
+        </p:style>
+        <p:txBody>
+          <a:bodyPr rtlCol="0" anchor="ctr"/>
+          <a:lstStyle/>
+          <a:p>
+            <a:pPr algn="ctr"/>
+            <a:endParaRPr lang="en-US" dirty="0"/>
+          </a:p>
+        </p:txBody>
+      </p:sp>
+      <p:sp>
+        <p:nvSpPr>
+          <p:cNvPr id="6" name="Rectangle 5">
+            <a:extLst>
+              <a:ext uri="{FF2B5EF4-FFF2-40B4-BE49-F238E27FC236}">
+                <a16:creationId xmlns:a16="http://schemas.microsoft.com/office/drawing/2014/main" id="{5AEF3E3B-D40A-8E40-A82A-F9EBF21FFAF7}"/>
+              </a:ext>
+            </a:extLst>
+          </p:cNvPr>
+          <p:cNvSpPr/>
+          <p:nvPr/>
+        </p:nvSpPr>
+        <p:spPr>
+          <a:xfrm>
+            <a:off x="5505890" y="4048581"/>
+            <a:ext cx="1692974" cy="2585108"/>
+          </a:xfrm>
+          <a:prstGeom prst="rect">
+            <a:avLst/>
+          </a:prstGeom>
+          <a:solidFill>
+            <a:schemeClr val="accent5">
+              <a:lumMod val="40000"/>
+              <a:lumOff val="60000"/>
+              <a:alpha val="39000"/>
+            </a:schemeClr>
+          </a:solidFill>
+        </p:spPr>
+        <p:style>
+          <a:lnRef idx="2">
+            <a:schemeClr val="accent1">
+              <a:shade val="50000"/>
+            </a:schemeClr>
+          </a:lnRef>
+          <a:fillRef idx="1">
+            <a:schemeClr val="accent1"/>
+          </a:fillRef>
+          <a:effectRef idx="0">
+            <a:schemeClr val="accent1"/>
+          </a:effectRef>
+          <a:fontRef idx="minor">
+            <a:schemeClr val="lt1"/>
+          </a:fontRef>
+        </p:style>
+        <p:txBody>
+          <a:bodyPr rtlCol="0" anchor="ctr"/>
+          <a:lstStyle/>
+          <a:p>
+            <a:pPr algn="ctr"/>
+            <a:endParaRPr lang="en-US" dirty="0"/>
+          </a:p>
+        </p:txBody>
+      </p:sp>
+      <p:sp>
+        <p:nvSpPr>
+          <p:cNvPr id="7" name="TextBox 6">
+            <a:extLst>
+              <a:ext uri="{FF2B5EF4-FFF2-40B4-BE49-F238E27FC236}">
+                <a16:creationId xmlns:a16="http://schemas.microsoft.com/office/drawing/2014/main" id="{6B74670B-9E8A-0B4B-9B60-F33269846B51}"/>
+              </a:ext>
+            </a:extLst>
+          </p:cNvPr>
+          <p:cNvSpPr txBox="1"/>
+          <p:nvPr/>
+        </p:nvSpPr>
+        <p:spPr>
+          <a:xfrm>
+            <a:off x="6339726" y="4933452"/>
+            <a:ext cx="682573" cy="646331"/>
+          </a:xfrm>
+          <a:prstGeom prst="rect">
+            <a:avLst/>
+          </a:prstGeom>
+          <a:noFill/>
+        </p:spPr>
+        <p:txBody>
+          <a:bodyPr wrap="square" rtlCol="0">
+            <a:spAutoFit/>
+          </a:bodyPr>
+          <a:lstStyle/>
+          <a:p>
+            <a:pPr algn="ctr"/>
+            <a:r>
+              <a:rPr lang="en-US" b="1" dirty="0">
+                <a:solidFill>
+                  <a:srgbClr val="0070C0"/>
+                </a:solidFill>
+              </a:rPr>
+              <a:t>TP</a:t>
+            </a:r>
+          </a:p>
+          <a:p>
+            <a:pPr algn="ctr"/>
+            <a:r>
+              <a:rPr lang="en-US" b="1" dirty="0">
+                <a:solidFill>
+                  <a:srgbClr val="0070C0"/>
+                </a:solidFill>
+              </a:rPr>
+              <a:t>495</a:t>
+            </a:r>
+          </a:p>
+        </p:txBody>
+      </p:sp>
+      <p:sp>
+        <p:nvSpPr>
+          <p:cNvPr id="8" name="TextBox 7">
+            <a:extLst>
+              <a:ext uri="{FF2B5EF4-FFF2-40B4-BE49-F238E27FC236}">
+                <a16:creationId xmlns:a16="http://schemas.microsoft.com/office/drawing/2014/main" id="{1F57D23C-1B7E-9340-9CC9-2E518FED35CF}"/>
+              </a:ext>
+            </a:extLst>
+          </p:cNvPr>
+          <p:cNvSpPr txBox="1"/>
+          <p:nvPr/>
+        </p:nvSpPr>
+        <p:spPr>
+          <a:xfrm>
+            <a:off x="6339726" y="3645655"/>
+            <a:ext cx="682573" cy="369332"/>
+          </a:xfrm>
+          <a:prstGeom prst="rect">
+            <a:avLst/>
+          </a:prstGeom>
+          <a:noFill/>
+        </p:spPr>
+        <p:txBody>
+          <a:bodyPr wrap="square" rtlCol="0">
+            <a:spAutoFit/>
+          </a:bodyPr>
+          <a:lstStyle/>
+          <a:p>
+            <a:r>
+              <a:rPr lang="en-US" b="1" dirty="0">
+                <a:solidFill>
+                  <a:srgbClr val="0070C0"/>
+                </a:solidFill>
+              </a:rPr>
+              <a:t>FN=5</a:t>
+            </a:r>
+          </a:p>
+        </p:txBody>
+      </p:sp>
+      <p:sp>
+        <p:nvSpPr>
+          <p:cNvPr id="9" name="TextBox 8">
+            <a:extLst>
+              <a:ext uri="{FF2B5EF4-FFF2-40B4-BE49-F238E27FC236}">
+                <a16:creationId xmlns:a16="http://schemas.microsoft.com/office/drawing/2014/main" id="{DC6B00C2-624C-E54A-8F82-45AE7E8B68EB}"/>
+              </a:ext>
+            </a:extLst>
+          </p:cNvPr>
+          <p:cNvSpPr txBox="1"/>
+          <p:nvPr/>
+        </p:nvSpPr>
+        <p:spPr>
+          <a:xfrm>
+            <a:off x="5505890" y="4933452"/>
+            <a:ext cx="654433" cy="646331"/>
+          </a:xfrm>
+          <a:prstGeom prst="rect">
+            <a:avLst/>
+          </a:prstGeom>
+          <a:noFill/>
+        </p:spPr>
+        <p:txBody>
+          <a:bodyPr wrap="square" rtlCol="0">
+            <a:spAutoFit/>
+          </a:bodyPr>
+          <a:lstStyle/>
+          <a:p>
+            <a:pPr algn="ctr"/>
+            <a:r>
+              <a:rPr lang="en-US" b="1" dirty="0">
+                <a:solidFill>
+                  <a:srgbClr val="0070C0"/>
+                </a:solidFill>
+              </a:rPr>
+              <a:t>FP</a:t>
+            </a:r>
+          </a:p>
+          <a:p>
+            <a:pPr algn="ctr"/>
+            <a:r>
+              <a:rPr lang="en-US" b="1" dirty="0">
+                <a:solidFill>
+                  <a:srgbClr val="0070C0"/>
+                </a:solidFill>
+              </a:rPr>
+              <a:t>190</a:t>
+            </a:r>
+          </a:p>
+        </p:txBody>
+      </p:sp>
+      <p:sp>
+        <p:nvSpPr>
+          <p:cNvPr id="10" name="TextBox 9">
+            <a:extLst>
+              <a:ext uri="{FF2B5EF4-FFF2-40B4-BE49-F238E27FC236}">
+                <a16:creationId xmlns:a16="http://schemas.microsoft.com/office/drawing/2014/main" id="{AE36C196-A585-CC42-9604-0BFE015CBF48}"/>
+              </a:ext>
+            </a:extLst>
+          </p:cNvPr>
+          <p:cNvSpPr txBox="1"/>
+          <p:nvPr/>
+        </p:nvSpPr>
+        <p:spPr>
+          <a:xfrm>
+            <a:off x="113762" y="672510"/>
+            <a:ext cx="6703363" cy="2031325"/>
+          </a:xfrm>
+          <a:prstGeom prst="rect">
+            <a:avLst/>
+          </a:prstGeom>
+          <a:noFill/>
+        </p:spPr>
+        <p:txBody>
+          <a:bodyPr wrap="square" rtlCol="0">
+            <a:spAutoFit/>
+          </a:bodyPr>
+          <a:lstStyle/>
+          <a:p>
+            <a:r>
+              <a:rPr lang="en-US" dirty="0"/>
+              <a:t>We have a drug test with the following characteristics:</a:t>
+            </a:r>
+          </a:p>
+          <a:p>
+            <a:r>
+              <a:rPr lang="en-US" dirty="0"/>
+              <a:t>           false positives = 2%</a:t>
+            </a:r>
+          </a:p>
+          <a:p>
+            <a:r>
+              <a:rPr lang="en-US" dirty="0"/>
+              <a:t>           false negatives = 1%</a:t>
+            </a:r>
+          </a:p>
+          <a:p>
+            <a:r>
+              <a:rPr lang="en-US" dirty="0"/>
+              <a:t>5% of population are drug positive.</a:t>
+            </a:r>
+          </a:p>
+          <a:p>
+            <a:endParaRPr lang="en-US" dirty="0"/>
+          </a:p>
+          <a:p>
+            <a:r>
+              <a:rPr lang="en-US" dirty="0"/>
+              <a:t>If a person's test result is positive, what is the probability that this person is indeed drug positive?</a:t>
+            </a:r>
+          </a:p>
+        </p:txBody>
+      </p:sp>
+      <p:sp>
+        <p:nvSpPr>
+          <p:cNvPr id="12" name="TextBox 11">
+            <a:extLst>
+              <a:ext uri="{FF2B5EF4-FFF2-40B4-BE49-F238E27FC236}">
+                <a16:creationId xmlns:a16="http://schemas.microsoft.com/office/drawing/2014/main" id="{6B1C1EEC-E74C-B142-840B-42970BD8DED0}"/>
+              </a:ext>
+            </a:extLst>
+          </p:cNvPr>
+          <p:cNvSpPr txBox="1"/>
+          <p:nvPr/>
+        </p:nvSpPr>
+        <p:spPr>
+          <a:xfrm>
+            <a:off x="3720208" y="2826698"/>
+            <a:ext cx="2325759" cy="369332"/>
+          </a:xfrm>
+          <a:prstGeom prst="rect">
+            <a:avLst/>
+          </a:prstGeom>
+          <a:noFill/>
+        </p:spPr>
+        <p:txBody>
+          <a:bodyPr wrap="square" rtlCol="0">
+            <a:spAutoFit/>
+          </a:bodyPr>
+          <a:lstStyle/>
+          <a:p>
+            <a:r>
+              <a:rPr lang="en-US" b="1" dirty="0">
+                <a:solidFill>
+                  <a:srgbClr val="00B050"/>
+                </a:solidFill>
+              </a:rPr>
+              <a:t>10,000 people total</a:t>
+            </a:r>
+          </a:p>
+        </p:txBody>
+      </p:sp>
+      <p:sp>
+        <p:nvSpPr>
+          <p:cNvPr id="13" name="TextBox 12">
+            <a:extLst>
+              <a:ext uri="{FF2B5EF4-FFF2-40B4-BE49-F238E27FC236}">
+                <a16:creationId xmlns:a16="http://schemas.microsoft.com/office/drawing/2014/main" id="{19F54DC0-7904-4C4A-9A51-E770522D50CC}"/>
+              </a:ext>
+            </a:extLst>
+          </p:cNvPr>
+          <p:cNvSpPr txBox="1"/>
+          <p:nvPr/>
+        </p:nvSpPr>
+        <p:spPr>
+          <a:xfrm>
+            <a:off x="1520201" y="2882420"/>
+            <a:ext cx="1719425" cy="646331"/>
+          </a:xfrm>
+          <a:prstGeom prst="rect">
+            <a:avLst/>
+          </a:prstGeom>
+          <a:noFill/>
+        </p:spPr>
+        <p:txBody>
+          <a:bodyPr wrap="square" rtlCol="0">
+            <a:spAutoFit/>
+          </a:bodyPr>
+          <a:lstStyle/>
+          <a:p>
+            <a:pPr algn="ctr"/>
+            <a:r>
+              <a:rPr lang="en-US" b="1" dirty="0">
+                <a:solidFill>
+                  <a:srgbClr val="00B050"/>
+                </a:solidFill>
+              </a:rPr>
+              <a:t>95%</a:t>
+            </a:r>
+          </a:p>
+          <a:p>
+            <a:pPr algn="ctr"/>
+            <a:r>
+              <a:rPr lang="en-US" b="1" dirty="0">
+                <a:solidFill>
+                  <a:srgbClr val="00B050"/>
+                </a:solidFill>
+              </a:rPr>
+              <a:t>9,500 negative</a:t>
+            </a:r>
+          </a:p>
+        </p:txBody>
+      </p:sp>
+      <p:sp>
+        <p:nvSpPr>
+          <p:cNvPr id="14" name="TextBox 13">
+            <a:extLst>
+              <a:ext uri="{FF2B5EF4-FFF2-40B4-BE49-F238E27FC236}">
+                <a16:creationId xmlns:a16="http://schemas.microsoft.com/office/drawing/2014/main" id="{C21A50F1-5D51-3F4D-8F64-416F7FBD9E7E}"/>
+              </a:ext>
+            </a:extLst>
+          </p:cNvPr>
+          <p:cNvSpPr txBox="1"/>
+          <p:nvPr/>
+        </p:nvSpPr>
+        <p:spPr>
+          <a:xfrm>
+            <a:off x="5995211" y="2872864"/>
+            <a:ext cx="1371602" cy="646331"/>
+          </a:xfrm>
+          <a:prstGeom prst="rect">
+            <a:avLst/>
+          </a:prstGeom>
+          <a:noFill/>
+        </p:spPr>
+        <p:txBody>
+          <a:bodyPr wrap="square" rtlCol="0">
+            <a:spAutoFit/>
+          </a:bodyPr>
+          <a:lstStyle/>
+          <a:p>
+            <a:pPr algn="ctr"/>
+            <a:r>
+              <a:rPr lang="en-US" b="1" dirty="0">
+                <a:solidFill>
+                  <a:srgbClr val="00B050"/>
+                </a:solidFill>
+              </a:rPr>
+              <a:t>5%</a:t>
+            </a:r>
+          </a:p>
+          <a:p>
+            <a:pPr algn="ctr"/>
+            <a:r>
+              <a:rPr lang="en-US" b="1" dirty="0">
+                <a:solidFill>
+                  <a:srgbClr val="00B050"/>
+                </a:solidFill>
+              </a:rPr>
+              <a:t>500 positive</a:t>
+            </a:r>
+          </a:p>
+        </p:txBody>
+      </p:sp>
+      <p:sp>
+        <p:nvSpPr>
+          <p:cNvPr id="15" name="TextBox 14">
+            <a:extLst>
+              <a:ext uri="{FF2B5EF4-FFF2-40B4-BE49-F238E27FC236}">
+                <a16:creationId xmlns:a16="http://schemas.microsoft.com/office/drawing/2014/main" id="{5FB01364-0BA9-9949-8E1C-CC6D790D896A}"/>
+              </a:ext>
+            </a:extLst>
+          </p:cNvPr>
+          <p:cNvSpPr txBox="1"/>
+          <p:nvPr/>
+        </p:nvSpPr>
+        <p:spPr>
+          <a:xfrm>
+            <a:off x="8254691" y="751168"/>
+            <a:ext cx="2995035" cy="523220"/>
+          </a:xfrm>
+          <a:prstGeom prst="rect">
+            <a:avLst/>
+          </a:prstGeom>
+          <a:noFill/>
+        </p:spPr>
+        <p:txBody>
+          <a:bodyPr wrap="square" rtlCol="0">
+            <a:spAutoFit/>
+          </a:bodyPr>
+          <a:lstStyle/>
+          <a:p>
+            <a:r>
+              <a:rPr lang="en-US" dirty="0"/>
+              <a:t>FPR = 2% = </a:t>
+            </a:r>
+            <a:r>
+              <a:rPr lang="en-US" dirty="0">
+                <a:latin typeface="Consolas" panose="020B0609020204030204" pitchFamily="49" charset="0"/>
+                <a:cs typeface="Consolas" panose="020B0609020204030204" pitchFamily="49" charset="0"/>
+              </a:rPr>
+              <a:t>FP/N</a:t>
+            </a:r>
+          </a:p>
+          <a:p>
+            <a:r>
+              <a:rPr lang="en-US" dirty="0"/>
+              <a:t>FP = 2% of 9,500 = 190 </a:t>
+            </a:r>
+          </a:p>
+        </p:txBody>
+      </p:sp>
+      <p:sp>
+        <p:nvSpPr>
+          <p:cNvPr id="16" name="TextBox 15">
+            <a:extLst>
+              <a:ext uri="{FF2B5EF4-FFF2-40B4-BE49-F238E27FC236}">
+                <a16:creationId xmlns:a16="http://schemas.microsoft.com/office/drawing/2014/main" id="{980B50C7-3911-3F4F-AA46-65C283787DA7}"/>
+              </a:ext>
+            </a:extLst>
+          </p:cNvPr>
+          <p:cNvSpPr txBox="1"/>
+          <p:nvPr/>
+        </p:nvSpPr>
+        <p:spPr>
+          <a:xfrm>
+            <a:off x="8254691" y="1672605"/>
+            <a:ext cx="3041373" cy="523220"/>
+          </a:xfrm>
+          <a:prstGeom prst="rect">
+            <a:avLst/>
+          </a:prstGeom>
+          <a:noFill/>
+        </p:spPr>
+        <p:txBody>
+          <a:bodyPr wrap="square" rtlCol="0">
+            <a:spAutoFit/>
+          </a:bodyPr>
+          <a:lstStyle/>
+          <a:p>
+            <a:r>
+              <a:rPr lang="en-US" dirty="0"/>
+              <a:t>FNR = 1% = FN/P</a:t>
+            </a:r>
+          </a:p>
+          <a:p>
+            <a:r>
+              <a:rPr lang="en-US" dirty="0"/>
+              <a:t>FN = 1% of 500 = 5</a:t>
+            </a:r>
+          </a:p>
+        </p:txBody>
+      </p:sp>
+      <p:sp>
+        <p:nvSpPr>
+          <p:cNvPr id="17" name="TextBox 16">
+            <a:extLst>
+              <a:ext uri="{FF2B5EF4-FFF2-40B4-BE49-F238E27FC236}">
+                <a16:creationId xmlns:a16="http://schemas.microsoft.com/office/drawing/2014/main" id="{B84A3915-332E-C241-BD48-8886C250762A}"/>
+              </a:ext>
+            </a:extLst>
+          </p:cNvPr>
+          <p:cNvSpPr txBox="1"/>
+          <p:nvPr/>
+        </p:nvSpPr>
+        <p:spPr>
+          <a:xfrm>
+            <a:off x="8254691" y="2559565"/>
+            <a:ext cx="2047462" cy="307777"/>
+          </a:xfrm>
+          <a:prstGeom prst="rect">
+            <a:avLst/>
+          </a:prstGeom>
+          <a:noFill/>
+        </p:spPr>
+        <p:txBody>
+          <a:bodyPr wrap="square" rtlCol="0">
+            <a:spAutoFit/>
+          </a:bodyPr>
+          <a:lstStyle/>
+          <a:p>
+            <a:r>
+              <a:rPr lang="en-US" dirty="0"/>
+              <a:t>TP = 500-5=495</a:t>
+            </a:r>
+          </a:p>
+        </p:txBody>
+      </p:sp>
+      <p:sp>
+        <p:nvSpPr>
+          <p:cNvPr id="18" name="TextBox 17">
+            <a:extLst>
+              <a:ext uri="{FF2B5EF4-FFF2-40B4-BE49-F238E27FC236}">
+                <a16:creationId xmlns:a16="http://schemas.microsoft.com/office/drawing/2014/main" id="{093DAE60-9E58-FD49-878D-8C197C180CDA}"/>
+              </a:ext>
+            </a:extLst>
+          </p:cNvPr>
+          <p:cNvSpPr txBox="1"/>
+          <p:nvPr/>
+        </p:nvSpPr>
+        <p:spPr>
+          <a:xfrm>
+            <a:off x="8254691" y="2928897"/>
+            <a:ext cx="2842592" cy="307777"/>
+          </a:xfrm>
+          <a:prstGeom prst="rect">
+            <a:avLst/>
+          </a:prstGeom>
+          <a:noFill/>
+        </p:spPr>
+        <p:txBody>
+          <a:bodyPr wrap="square" rtlCol="0">
+            <a:spAutoFit/>
+          </a:bodyPr>
+          <a:lstStyle/>
+          <a:p>
+            <a:r>
+              <a:rPr lang="en-US" dirty="0"/>
+              <a:t>TN = 9,500-190 = 9310</a:t>
+            </a:r>
+          </a:p>
+        </p:txBody>
+      </p:sp>
+      <p:sp>
+        <p:nvSpPr>
+          <p:cNvPr id="19" name="TextBox 18">
+            <a:extLst>
+              <a:ext uri="{FF2B5EF4-FFF2-40B4-BE49-F238E27FC236}">
+                <a16:creationId xmlns:a16="http://schemas.microsoft.com/office/drawing/2014/main" id="{F0EDE16F-DA75-354A-9895-9AD2F69671BB}"/>
+              </a:ext>
+            </a:extLst>
+          </p:cNvPr>
+          <p:cNvSpPr txBox="1"/>
+          <p:nvPr/>
+        </p:nvSpPr>
+        <p:spPr>
+          <a:xfrm>
+            <a:off x="150987" y="3707337"/>
+            <a:ext cx="1207260" cy="369332"/>
+          </a:xfrm>
+          <a:prstGeom prst="rect">
+            <a:avLst/>
+          </a:prstGeom>
+          <a:noFill/>
+        </p:spPr>
+        <p:txBody>
+          <a:bodyPr wrap="square" rtlCol="0">
+            <a:spAutoFit/>
+          </a:bodyPr>
+          <a:lstStyle/>
+          <a:p>
+            <a:r>
+              <a:rPr lang="en-US" b="1" dirty="0">
+                <a:solidFill>
+                  <a:srgbClr val="0070C0"/>
+                </a:solidFill>
+              </a:rPr>
+              <a:t>TN = 9310</a:t>
+            </a:r>
+          </a:p>
+        </p:txBody>
+      </p:sp>
+      <p:sp>
+        <p:nvSpPr>
+          <p:cNvPr id="20" name="TextBox 19">
+            <a:extLst>
+              <a:ext uri="{FF2B5EF4-FFF2-40B4-BE49-F238E27FC236}">
+                <a16:creationId xmlns:a16="http://schemas.microsoft.com/office/drawing/2014/main" id="{F8D9657B-BE11-0347-B8B6-8AADCF22ED1B}"/>
+              </a:ext>
+            </a:extLst>
+          </p:cNvPr>
+          <p:cNvSpPr txBox="1"/>
+          <p:nvPr/>
+        </p:nvSpPr>
+        <p:spPr>
+          <a:xfrm>
+            <a:off x="8255428" y="3836096"/>
+            <a:ext cx="3936572" cy="1600438"/>
+          </a:xfrm>
+          <a:prstGeom prst="rect">
+            <a:avLst/>
+          </a:prstGeom>
+          <a:noFill/>
+        </p:spPr>
+        <p:txBody>
+          <a:bodyPr wrap="square" rtlCol="0">
+            <a:spAutoFit/>
+          </a:bodyPr>
+          <a:lstStyle/>
+          <a:p>
+            <a:r>
+              <a:rPr lang="en-US" dirty="0"/>
+              <a:t>If the person tests positive, </a:t>
+            </a:r>
+          </a:p>
+          <a:p>
+            <a:r>
+              <a:rPr lang="en-US" dirty="0"/>
+              <a:t>he is either TP or FP</a:t>
+            </a:r>
+          </a:p>
+          <a:p>
+            <a:endParaRPr lang="en-US" dirty="0"/>
+          </a:p>
+          <a:p>
+            <a:r>
+              <a:rPr lang="en-US" dirty="0"/>
+              <a:t>Probability of being positive given the results of the test:</a:t>
+            </a:r>
+          </a:p>
+          <a:p>
+            <a:endParaRPr lang="en-US" dirty="0"/>
+          </a:p>
+          <a:p>
+            <a:r>
+              <a:rPr lang="en-US" dirty="0"/>
+              <a:t>TP/(TP+FP) = 495/(495+190) = 0.72</a:t>
+            </a:r>
+          </a:p>
+        </p:txBody>
+      </p:sp>
+      <p:sp>
+        <p:nvSpPr>
+          <p:cNvPr id="2" name="TextBox 1">
+            <a:extLst>
+              <a:ext uri="{FF2B5EF4-FFF2-40B4-BE49-F238E27FC236}">
+                <a16:creationId xmlns:a16="http://schemas.microsoft.com/office/drawing/2014/main" id="{DF9ABAE0-A26C-5F44-8C55-794CA181EBFA}"/>
+              </a:ext>
+            </a:extLst>
+          </p:cNvPr>
+          <p:cNvSpPr txBox="1"/>
+          <p:nvPr/>
+        </p:nvSpPr>
+        <p:spPr>
+          <a:xfrm>
+            <a:off x="138287" y="136590"/>
+            <a:ext cx="3314457" cy="461665"/>
+          </a:xfrm>
+          <a:prstGeom prst="rect">
+            <a:avLst/>
+          </a:prstGeom>
+          <a:noFill/>
+        </p:spPr>
+        <p:txBody>
+          <a:bodyPr wrap="square" rtlCol="0">
+            <a:spAutoFit/>
+          </a:bodyPr>
+          <a:lstStyle/>
+          <a:p>
+            <a:r>
+              <a:rPr lang="en-US" sz="2400" b="1" dirty="0"/>
+              <a:t>Example – Drug Test</a:t>
+            </a:r>
+          </a:p>
+        </p:txBody>
+      </p:sp>
+      <p:sp>
+        <p:nvSpPr>
+          <p:cNvPr id="21" name="TextBox 20">
+            <a:extLst>
+              <a:ext uri="{FF2B5EF4-FFF2-40B4-BE49-F238E27FC236}">
+                <a16:creationId xmlns:a16="http://schemas.microsoft.com/office/drawing/2014/main" id="{7D5FB003-39A3-4F47-8B35-82CBDB400810}"/>
+              </a:ext>
+            </a:extLst>
+          </p:cNvPr>
+          <p:cNvSpPr txBox="1"/>
+          <p:nvPr/>
+        </p:nvSpPr>
+        <p:spPr>
+          <a:xfrm>
+            <a:off x="8254691" y="97203"/>
+            <a:ext cx="3314457" cy="461665"/>
+          </a:xfrm>
+          <a:prstGeom prst="rect">
+            <a:avLst/>
+          </a:prstGeom>
+          <a:noFill/>
+        </p:spPr>
+        <p:txBody>
+          <a:bodyPr wrap="square" rtlCol="0">
+            <a:spAutoFit/>
+          </a:bodyPr>
+          <a:lstStyle/>
+          <a:p>
+            <a:r>
+              <a:rPr lang="en-US" sz="2400" b="1" dirty="0"/>
+              <a:t>Solution:</a:t>
+            </a:r>
+          </a:p>
+        </p:txBody>
+      </p:sp>
+    </p:spTree>
+    <p:extLst>
+      <p:ext uri="{BB962C8B-B14F-4D97-AF65-F5344CB8AC3E}">
+        <p14:creationId xmlns:p14="http://schemas.microsoft.com/office/powerpoint/2010/main" val="2067706377"/>
+      </p:ext>
+    </p:extLst>
+  </p:cSld>
+  <p:clrMapOvr>
+    <a:masterClrMapping/>
+  </p:clrMapOvr>
+</p:sld>
+</file>
+
+<file path=ppt/slides/slide14.xml><?xml version="1.0" encoding="utf-8"?>
+<p:sld xmlns:a="http://schemas.openxmlformats.org/drawingml/2006/main" xmlns:r="http://schemas.openxmlformats.org/officeDocument/2006/relationships" xmlns:p="http://schemas.openxmlformats.org/presentationml/2006/main">
+  <p:cSld>
+    <p:spTree>
+      <p:nvGrpSpPr>
+        <p:cNvPr id="1" name=""/>
+        <p:cNvGrpSpPr/>
+        <p:nvPr/>
+      </p:nvGrpSpPr>
+      <p:grpSpPr>
+        <a:xfrm>
+          <a:off x="0" y="0"/>
+          <a:ext cx="0" cy="0"/>
+          <a:chOff x="0" y="0"/>
+          <a:chExt cx="0" cy="0"/>
+        </a:xfrm>
+      </p:grpSpPr>
+      <p:sp>
+        <p:nvSpPr>
+          <p:cNvPr id="3" name="TextBox 2">
+            <a:extLst>
+              <a:ext uri="{FF2B5EF4-FFF2-40B4-BE49-F238E27FC236}">
+                <a16:creationId xmlns:a16="http://schemas.microsoft.com/office/drawing/2014/main" id="{C331A9BC-3B71-D94B-913F-5D13C7F8ADF1}"/>
+              </a:ext>
+            </a:extLst>
+          </p:cNvPr>
+          <p:cNvSpPr txBox="1"/>
+          <p:nvPr/>
+        </p:nvSpPr>
+        <p:spPr>
+          <a:xfrm>
+            <a:off x="222501" y="154074"/>
+            <a:ext cx="2970150" cy="461665"/>
+          </a:xfrm>
+          <a:prstGeom prst="rect">
+            <a:avLst/>
+          </a:prstGeom>
+          <a:noFill/>
+        </p:spPr>
+        <p:txBody>
+          <a:bodyPr wrap="square" rtlCol="0">
+            <a:spAutoFit/>
+          </a:bodyPr>
+          <a:lstStyle/>
+          <a:p>
+            <a:r>
+              <a:rPr lang="en-US" sz="2400" b="1" dirty="0"/>
+              <a:t>Medical Tests</a:t>
+            </a:r>
+          </a:p>
+        </p:txBody>
+      </p:sp>
+      <p:sp>
+        <p:nvSpPr>
+          <p:cNvPr id="4" name="TextBox 3">
+            <a:extLst>
+              <a:ext uri="{FF2B5EF4-FFF2-40B4-BE49-F238E27FC236}">
+                <a16:creationId xmlns:a16="http://schemas.microsoft.com/office/drawing/2014/main" id="{EE8F2B30-236A-B049-BB9B-38E73740DE4C}"/>
+              </a:ext>
+            </a:extLst>
+          </p:cNvPr>
+          <p:cNvSpPr txBox="1"/>
+          <p:nvPr/>
+        </p:nvSpPr>
+        <p:spPr>
+          <a:xfrm>
+            <a:off x="222501" y="914400"/>
+            <a:ext cx="4039533" cy="954107"/>
+          </a:xfrm>
+          <a:prstGeom prst="rect">
+            <a:avLst/>
+          </a:prstGeom>
+          <a:noFill/>
+        </p:spPr>
+        <p:txBody>
+          <a:bodyPr wrap="square" rtlCol="0">
+            <a:spAutoFit/>
+          </a:bodyPr>
+          <a:lstStyle/>
+          <a:p>
+            <a:r>
+              <a:rPr lang="en-US" dirty="0"/>
+              <a:t>Merck Manuals:</a:t>
+            </a:r>
+          </a:p>
+          <a:p>
+            <a:r>
+              <a:rPr lang="en-US" sz="1000" dirty="0">
+                <a:hlinkClick r:id="rId2"/>
+              </a:rPr>
+              <a:t>https://www.merckmanuals.com/professional/special-subjects/clinical-decision-making/understanding-medical-tests-and-test-results</a:t>
+            </a:r>
+            <a:endParaRPr lang="en-US" sz="1000" dirty="0"/>
+          </a:p>
+          <a:p>
+            <a:endParaRPr lang="en-US" dirty="0"/>
+          </a:p>
+        </p:txBody>
+      </p:sp>
+      <p:pic>
+        <p:nvPicPr>
+          <p:cNvPr id="5" name="Picture 4">
+            <a:extLst>
+              <a:ext uri="{FF2B5EF4-FFF2-40B4-BE49-F238E27FC236}">
+                <a16:creationId xmlns:a16="http://schemas.microsoft.com/office/drawing/2014/main" id="{BFC12F5C-307B-B641-A137-8EFD1F15A6C9}"/>
+              </a:ext>
+            </a:extLst>
+          </p:cNvPr>
+          <p:cNvPicPr>
+            <a:picLocks noChangeAspect="1"/>
+          </p:cNvPicPr>
+          <p:nvPr/>
+        </p:nvPicPr>
+        <p:blipFill>
+          <a:blip r:embed="rId3" cstate="email">
+            <a:extLst>
+              <a:ext uri="{28A0092B-C50C-407E-A947-70E740481C1C}">
+                <a14:useLocalDpi xmlns:a14="http://schemas.microsoft.com/office/drawing/2010/main"/>
+              </a:ext>
+            </a:extLst>
+          </a:blip>
+          <a:stretch>
+            <a:fillRect/>
+          </a:stretch>
+        </p:blipFill>
+        <p:spPr>
+          <a:xfrm>
+            <a:off x="5705998" y="2058013"/>
+            <a:ext cx="6335770" cy="2646991"/>
+          </a:xfrm>
+          <a:prstGeom prst="rect">
+            <a:avLst/>
+          </a:prstGeom>
+        </p:spPr>
+      </p:pic>
+      <p:pic>
+        <p:nvPicPr>
+          <p:cNvPr id="6" name="Picture 5">
+            <a:extLst>
+              <a:ext uri="{FF2B5EF4-FFF2-40B4-BE49-F238E27FC236}">
+                <a16:creationId xmlns:a16="http://schemas.microsoft.com/office/drawing/2014/main" id="{31285B1A-8D6C-D649-9463-5B30D36B16D2}"/>
+              </a:ext>
+            </a:extLst>
+          </p:cNvPr>
+          <p:cNvPicPr>
+            <a:picLocks noChangeAspect="1"/>
+          </p:cNvPicPr>
+          <p:nvPr/>
+        </p:nvPicPr>
+        <p:blipFill>
+          <a:blip r:embed="rId4" cstate="email">
+            <a:extLst>
+              <a:ext uri="{28A0092B-C50C-407E-A947-70E740481C1C}">
+                <a14:useLocalDpi xmlns:a14="http://schemas.microsoft.com/office/drawing/2010/main"/>
+              </a:ext>
+            </a:extLst>
+          </a:blip>
+          <a:stretch>
+            <a:fillRect/>
+          </a:stretch>
+        </p:blipFill>
+        <p:spPr>
+          <a:xfrm>
+            <a:off x="61417" y="2824079"/>
+            <a:ext cx="4775195" cy="3879847"/>
+          </a:xfrm>
+          <a:prstGeom prst="rect">
+            <a:avLst/>
+          </a:prstGeom>
+        </p:spPr>
+      </p:pic>
+      <p:sp>
+        <p:nvSpPr>
+          <p:cNvPr id="7" name="TextBox 6">
+            <a:extLst>
+              <a:ext uri="{FF2B5EF4-FFF2-40B4-BE49-F238E27FC236}">
+                <a16:creationId xmlns:a16="http://schemas.microsoft.com/office/drawing/2014/main" id="{1408861C-1B62-5443-869D-88254F4698CC}"/>
+              </a:ext>
+            </a:extLst>
+          </p:cNvPr>
+          <p:cNvSpPr txBox="1"/>
+          <p:nvPr/>
+        </p:nvSpPr>
+        <p:spPr>
+          <a:xfrm>
+            <a:off x="939557" y="2300859"/>
+            <a:ext cx="3322477" cy="461665"/>
+          </a:xfrm>
+          <a:prstGeom prst="rect">
+            <a:avLst/>
+          </a:prstGeom>
+          <a:noFill/>
+        </p:spPr>
+        <p:txBody>
+          <a:bodyPr wrap="square" rtlCol="0">
+            <a:spAutoFit/>
+          </a:bodyPr>
+          <a:lstStyle/>
+          <a:p>
+            <a:r>
+              <a:rPr lang="en-US" sz="2400" b="1" dirty="0"/>
+              <a:t>Typical ROC Curves</a:t>
+            </a:r>
+          </a:p>
+        </p:txBody>
+      </p:sp>
+      <p:sp>
+        <p:nvSpPr>
+          <p:cNvPr id="2" name="Left-Right Arrow 1">
+            <a:extLst>
+              <a:ext uri="{FF2B5EF4-FFF2-40B4-BE49-F238E27FC236}">
+                <a16:creationId xmlns:a16="http://schemas.microsoft.com/office/drawing/2014/main" id="{F15F1F48-93F5-A34E-9C6D-C43D7921711E}"/>
+              </a:ext>
+            </a:extLst>
+          </p:cNvPr>
+          <p:cNvSpPr/>
+          <p:nvPr/>
+        </p:nvSpPr>
+        <p:spPr>
+          <a:xfrm>
+            <a:off x="7946965" y="1580959"/>
+            <a:ext cx="2161309" cy="287548"/>
+          </a:xfrm>
+          <a:prstGeom prst="leftRightArrow">
+            <a:avLst/>
+          </a:prstGeom>
+        </p:spPr>
+        <p:style>
+          <a:lnRef idx="2">
+            <a:schemeClr val="accent1">
+              <a:shade val="50000"/>
+            </a:schemeClr>
+          </a:lnRef>
+          <a:fillRef idx="1">
+            <a:schemeClr val="accent1"/>
+          </a:fillRef>
+          <a:effectRef idx="0">
+            <a:schemeClr val="accent1"/>
+          </a:effectRef>
+          <a:fontRef idx="minor">
+            <a:schemeClr val="lt1"/>
+          </a:fontRef>
+        </p:style>
+        <p:txBody>
+          <a:bodyPr rtlCol="0" anchor="ctr"/>
+          <a:lstStyle/>
+          <a:p>
+            <a:pPr algn="ctr"/>
+            <a:endParaRPr lang="en-US"/>
+          </a:p>
+        </p:txBody>
+      </p:sp>
+      <p:sp>
+        <p:nvSpPr>
+          <p:cNvPr id="8" name="TextBox 7">
+            <a:extLst>
+              <a:ext uri="{FF2B5EF4-FFF2-40B4-BE49-F238E27FC236}">
+                <a16:creationId xmlns:a16="http://schemas.microsoft.com/office/drawing/2014/main" id="{60AA1542-157F-AA43-84CD-198F345C2A0A}"/>
+              </a:ext>
+            </a:extLst>
+          </p:cNvPr>
+          <p:cNvSpPr txBox="1"/>
+          <p:nvPr/>
+        </p:nvSpPr>
+        <p:spPr>
+          <a:xfrm>
+            <a:off x="6653647" y="1499175"/>
+            <a:ext cx="1010686" cy="369332"/>
+          </a:xfrm>
+          <a:prstGeom prst="rect">
+            <a:avLst/>
+          </a:prstGeom>
+          <a:noFill/>
+        </p:spPr>
+        <p:txBody>
+          <a:bodyPr wrap="square" rtlCol="0">
+            <a:spAutoFit/>
+          </a:bodyPr>
+          <a:lstStyle/>
+          <a:p>
+            <a:r>
+              <a:rPr lang="en-US" dirty="0"/>
+              <a:t>Healthy</a:t>
+            </a:r>
+          </a:p>
+        </p:txBody>
+      </p:sp>
+      <p:sp>
+        <p:nvSpPr>
+          <p:cNvPr id="9" name="TextBox 8">
+            <a:extLst>
+              <a:ext uri="{FF2B5EF4-FFF2-40B4-BE49-F238E27FC236}">
+                <a16:creationId xmlns:a16="http://schemas.microsoft.com/office/drawing/2014/main" id="{4CC30B24-668A-A748-9017-3924631985FC}"/>
+              </a:ext>
+            </a:extLst>
+          </p:cNvPr>
+          <p:cNvSpPr txBox="1"/>
+          <p:nvPr/>
+        </p:nvSpPr>
+        <p:spPr>
+          <a:xfrm>
+            <a:off x="10390906" y="1528883"/>
+            <a:ext cx="1010686" cy="369332"/>
+          </a:xfrm>
+          <a:prstGeom prst="rect">
+            <a:avLst/>
+          </a:prstGeom>
+          <a:noFill/>
+        </p:spPr>
+        <p:txBody>
+          <a:bodyPr wrap="square" rtlCol="0">
+            <a:spAutoFit/>
+          </a:bodyPr>
+          <a:lstStyle/>
+          <a:p>
+            <a:r>
+              <a:rPr lang="en-US" dirty="0"/>
+              <a:t>Sick</a:t>
+            </a:r>
+          </a:p>
+        </p:txBody>
+      </p:sp>
+    </p:spTree>
+    <p:extLst>
+      <p:ext uri="{BB962C8B-B14F-4D97-AF65-F5344CB8AC3E}">
+        <p14:creationId xmlns:p14="http://schemas.microsoft.com/office/powerpoint/2010/main" val="4208035462"/>
+      </p:ext>
+    </p:extLst>
+  </p:cSld>
+  <p:clrMapOvr>
+    <a:masterClrMapping/>
+  </p:clrMapOvr>
+</p:sld>
+</file>
+
+<file path=ppt/slides/slide15.xml><?xml version="1.0" encoding="utf-8"?>
+<p:sld xmlns:a="http://schemas.openxmlformats.org/drawingml/2006/main" xmlns:r="http://schemas.openxmlformats.org/officeDocument/2006/relationships" xmlns:p="http://schemas.openxmlformats.org/presentationml/2006/main">
+  <p:cSld>
+    <p:spTree>
+      <p:nvGrpSpPr>
+        <p:cNvPr id="1" name=""/>
+        <p:cNvGrpSpPr/>
+        <p:nvPr/>
+      </p:nvGrpSpPr>
+      <p:grpSpPr>
+        <a:xfrm>
+          <a:off x="0" y="0"/>
+          <a:ext cx="0" cy="0"/>
+          <a:chOff x="0" y="0"/>
+          <a:chExt cx="0" cy="0"/>
+        </a:xfrm>
+      </p:grpSpPr>
+      <p:sp>
+        <p:nvSpPr>
+          <p:cNvPr id="2" name="TextBox 1">
+            <a:extLst>
+              <a:ext uri="{FF2B5EF4-FFF2-40B4-BE49-F238E27FC236}">
+                <a16:creationId xmlns:a16="http://schemas.microsoft.com/office/drawing/2014/main" id="{B9F1485C-4EBE-ED4D-AF8C-B994DC0C980B}"/>
+              </a:ext>
+            </a:extLst>
+          </p:cNvPr>
+          <p:cNvSpPr txBox="1"/>
+          <p:nvPr/>
+        </p:nvSpPr>
+        <p:spPr>
+          <a:xfrm>
+            <a:off x="177800" y="355601"/>
+            <a:ext cx="3784600" cy="461665"/>
+          </a:xfrm>
+          <a:prstGeom prst="rect">
+            <a:avLst/>
+          </a:prstGeom>
+          <a:noFill/>
+        </p:spPr>
+        <p:txBody>
+          <a:bodyPr wrap="square" rtlCol="0">
+            <a:spAutoFit/>
+          </a:bodyPr>
+          <a:lstStyle/>
+          <a:p>
+            <a:r>
+              <a:rPr lang="en-US" sz="2400" b="1" dirty="0"/>
+              <a:t>Regression to the Mean</a:t>
+            </a:r>
+          </a:p>
+        </p:txBody>
+      </p:sp>
+      <p:sp>
+        <p:nvSpPr>
+          <p:cNvPr id="3" name="TextBox 2">
+            <a:extLst>
+              <a:ext uri="{FF2B5EF4-FFF2-40B4-BE49-F238E27FC236}">
+                <a16:creationId xmlns:a16="http://schemas.microsoft.com/office/drawing/2014/main" id="{5EBDC6EA-376C-5A40-930D-A264AC0C350B}"/>
+              </a:ext>
+            </a:extLst>
+          </p:cNvPr>
+          <p:cNvSpPr txBox="1"/>
+          <p:nvPr/>
+        </p:nvSpPr>
+        <p:spPr>
+          <a:xfrm>
+            <a:off x="177800" y="1658372"/>
+            <a:ext cx="5600700" cy="2677656"/>
+          </a:xfrm>
+          <a:prstGeom prst="rect">
+            <a:avLst/>
+          </a:prstGeom>
+          <a:noFill/>
+        </p:spPr>
+        <p:txBody>
+          <a:bodyPr wrap="square" rtlCol="0">
+            <a:spAutoFit/>
+          </a:bodyPr>
+          <a:lstStyle/>
+          <a:p>
+            <a:r>
+              <a:rPr lang="en-US" dirty="0">
+                <a:solidFill>
+                  <a:srgbClr val="0070C0"/>
+                </a:solidFill>
+              </a:rPr>
+              <a:t>Suppose you give a test with 100 Yes/No questions</a:t>
+            </a:r>
+          </a:p>
+          <a:p>
+            <a:r>
+              <a:rPr lang="en-US" dirty="0">
+                <a:solidFill>
+                  <a:srgbClr val="0070C0"/>
+                </a:solidFill>
+              </a:rPr>
+              <a:t>to 100 monkeys who can't read and answer questions randomly.</a:t>
+            </a:r>
+          </a:p>
+          <a:p>
+            <a:endParaRPr lang="en-US" dirty="0">
+              <a:solidFill>
+                <a:srgbClr val="0070C0"/>
+              </a:solidFill>
+            </a:endParaRPr>
+          </a:p>
+          <a:p>
+            <a:r>
+              <a:rPr lang="en-US" dirty="0">
+                <a:solidFill>
+                  <a:srgbClr val="0070C0"/>
+                </a:solidFill>
+              </a:rPr>
+              <a:t>The results of the tests will be random, with the most common score of 50 (out of 100), and the histogram will be bell shaped (CLT).</a:t>
+            </a:r>
+          </a:p>
+          <a:p>
+            <a:endParaRPr lang="en-US" dirty="0">
+              <a:solidFill>
+                <a:srgbClr val="0070C0"/>
+              </a:solidFill>
+            </a:endParaRPr>
+          </a:p>
+          <a:p>
+            <a:r>
+              <a:rPr lang="en-US" dirty="0">
+                <a:solidFill>
+                  <a:srgbClr val="0070C0"/>
+                </a:solidFill>
+              </a:rPr>
+              <a:t>Suppose we then select he 10 monkeys with the lowest scores</a:t>
+            </a:r>
+          </a:p>
+          <a:p>
+            <a:r>
+              <a:rPr lang="en-US" dirty="0">
+                <a:solidFill>
+                  <a:srgbClr val="0070C0"/>
+                </a:solidFill>
+              </a:rPr>
+              <a:t>and re-test them again. We should see again the average at ~50.</a:t>
+            </a:r>
+          </a:p>
+          <a:p>
+            <a:endParaRPr lang="en-US" dirty="0">
+              <a:solidFill>
+                <a:srgbClr val="0070C0"/>
+              </a:solidFill>
+            </a:endParaRPr>
+          </a:p>
+          <a:p>
+            <a:r>
+              <a:rPr lang="en-US" dirty="0">
+                <a:solidFill>
+                  <a:srgbClr val="0070C0"/>
+                </a:solidFill>
+              </a:rPr>
+              <a:t>So it looks like the monkey have improve their scores?</a:t>
+            </a:r>
+          </a:p>
+          <a:p>
+            <a:endParaRPr lang="en-US" dirty="0">
+              <a:solidFill>
+                <a:srgbClr val="0070C0"/>
+              </a:solidFill>
+            </a:endParaRPr>
+          </a:p>
+          <a:p>
+            <a:r>
+              <a:rPr lang="en-US" dirty="0">
+                <a:solidFill>
+                  <a:srgbClr val="0070C0"/>
+                </a:solidFill>
+              </a:rPr>
+              <a:t>But we know that they didn't learn anything and didn't act differently.</a:t>
+            </a:r>
+          </a:p>
+        </p:txBody>
+      </p:sp>
+      <p:sp>
+        <p:nvSpPr>
+          <p:cNvPr id="4" name="TextBox 3">
+            <a:extLst>
+              <a:ext uri="{FF2B5EF4-FFF2-40B4-BE49-F238E27FC236}">
+                <a16:creationId xmlns:a16="http://schemas.microsoft.com/office/drawing/2014/main" id="{294A09BC-BD17-E74B-A546-FC0DD16ED698}"/>
+              </a:ext>
+            </a:extLst>
+          </p:cNvPr>
+          <p:cNvSpPr txBox="1"/>
+          <p:nvPr/>
+        </p:nvSpPr>
+        <p:spPr>
+          <a:xfrm>
+            <a:off x="177800" y="996483"/>
+            <a:ext cx="5600700" cy="307777"/>
+          </a:xfrm>
+          <a:prstGeom prst="rect">
+            <a:avLst/>
+          </a:prstGeom>
+          <a:noFill/>
+        </p:spPr>
+        <p:txBody>
+          <a:bodyPr wrap="square" rtlCol="0">
+            <a:spAutoFit/>
+          </a:bodyPr>
+          <a:lstStyle/>
+          <a:p>
+            <a:r>
+              <a:rPr lang="en-US" dirty="0"/>
+              <a:t>You should be aware of this effect when designing experiments.</a:t>
+            </a:r>
+          </a:p>
+        </p:txBody>
+      </p:sp>
+      <p:pic>
+        <p:nvPicPr>
+          <p:cNvPr id="1026" name="Picture 2" descr="Regression to the Mean | Research Methods Knowledge Base">
+            <a:extLst>
+              <a:ext uri="{FF2B5EF4-FFF2-40B4-BE49-F238E27FC236}">
+                <a16:creationId xmlns:a16="http://schemas.microsoft.com/office/drawing/2014/main" id="{70C5C09C-BEAC-E249-99FE-80BE2C03D9FA}"/>
+              </a:ext>
+            </a:extLst>
+          </p:cNvPr>
+          <p:cNvPicPr>
+            <a:picLocks noChangeAspect="1" noChangeArrowheads="1"/>
+          </p:cNvPicPr>
+          <p:nvPr/>
+        </p:nvPicPr>
+        <p:blipFill>
+          <a:blip r:embed="rId2" cstate="email">
+            <a:extLst>
+              <a:ext uri="{28A0092B-C50C-407E-A947-70E740481C1C}">
+                <a14:useLocalDpi xmlns:a14="http://schemas.microsoft.com/office/drawing/2010/main"/>
+              </a:ext>
+            </a:extLst>
+          </a:blip>
+          <a:srcRect/>
+          <a:stretch>
+            <a:fillRect/>
+          </a:stretch>
+        </p:blipFill>
+        <p:spPr bwMode="auto">
+          <a:xfrm>
+            <a:off x="7717558" y="817266"/>
+            <a:ext cx="2632942" cy="3829050"/>
+          </a:xfrm>
+          <a:prstGeom prst="rect">
+            <a:avLst/>
+          </a:prstGeom>
+          <a:noFill/>
+          <a:extLst>
+            <a:ext uri="{909E8E84-426E-40DD-AFC4-6F175D3DCCD1}">
+              <a14:hiddenFill xmlns:a14="http://schemas.microsoft.com/office/drawing/2010/main">
+                <a:solidFill>
+                  <a:srgbClr val="FFFFFF"/>
+                </a:solidFill>
+              </a14:hiddenFill>
+            </a:ext>
+          </a:extLst>
+        </p:spPr>
+      </p:pic>
+    </p:spTree>
+    <p:extLst>
+      <p:ext uri="{BB962C8B-B14F-4D97-AF65-F5344CB8AC3E}">
+        <p14:creationId xmlns:p14="http://schemas.microsoft.com/office/powerpoint/2010/main" val="1555215665"/>
+      </p:ext>
+    </p:extLst>
+  </p:cSld>
+  <p:clrMapOvr>
+    <a:masterClrMapping/>
+  </p:clrMapOvr>
+</p:sld>
+</file>
+
 <file path=ppt/slides/slide2.xml><?xml version="1.0" encoding="utf-8"?>
 <p:sld xmlns:a="http://schemas.openxmlformats.org/drawingml/2006/main" xmlns:r="http://schemas.openxmlformats.org/officeDocument/2006/relationships" xmlns:p="http://schemas.openxmlformats.org/presentationml/2006/main">
   <p:cSld>
